--- a/presentations/jmi-2026/output/jmi-2026.pptx
+++ b/presentations/jmi-2026/output/jmi-2026.pptx
@@ -3145,7 +3145,7 @@
                 </a:solidFill>
                 <a:latin typeface="Arial"/>
               </a:rPr>
-              <a:t>Photovoltaic material screening from database to device-scale simulation</a:t>
+              <a:t>High-throughput DFT and small-sample ML for chalcogenide PV absorber discovery, with device-scale validation</a:t>
             </a:r>
           </a:p>
         </p:txBody>
@@ -3180,7 +3180,7 @@
                 </a:solidFill>
                 <a:latin typeface="Arial"/>
               </a:rPr>
-              <a:t>Xuan-Yan Chen et al.</a:t>
+              <a:t>Xuanyan Chen et al.</a:t>
             </a:r>
           </a:p>
         </p:txBody>
@@ -3215,7 +3215,7 @@
                 </a:solidFill>
                 <a:latin typeface="Arial"/>
               </a:rPr>
-              <a:t>HKUST(GZ) — JMI 2026</a:t>
+              <a:t>HKUST(GZ) — 3rd JMI conference 2026</a:t>
             </a:r>
           </a:p>
         </p:txBody>
@@ -3381,7 +3381,7 @@
                 </a:solidFill>
                 <a:latin typeface="Arial"/>
               </a:rPr>
-              <a:t>HSE06 is too costly at DB scale</a:t>
+              <a:t>Why a surrogate at all</a:t>
             </a:r>
           </a:p>
         </p:txBody>
@@ -3416,7 +3416,7 @@
                 </a:solidFill>
                 <a:latin typeface="Arial"/>
               </a:rPr>
-              <a:t>Wall-time per structure</a:t>
+              <a:t>HSE06 + DFPT four-stage workflow per material</a:t>
             </a:r>
           </a:p>
         </p:txBody>
@@ -3451,7 +3451,7 @@
                 </a:solidFill>
                 <a:latin typeface="Arial"/>
               </a:rPr>
-              <a:t>•  PBE: minutes</a:t>
+              <a:t>•  Stage 1 PBE relax · Stage 2 SCF · Stage 3 DFPT dielectric · Stage 4 HSE06 band</a:t>
             </a:r>
           </a:p>
           <a:p>
@@ -3463,7 +3463,7 @@
                 </a:solidFill>
                 <a:latin typeface="Arial"/>
               </a:rPr>
-              <a:t>•  HSE06: hours-to-days</a:t>
+              <a:t>•  DFPT + HSE06 cost dominates: hours-to-days per structure on tight HPC budgets</a:t>
             </a:r>
           </a:p>
           <a:p>
@@ -3475,11 +3475,17 @@
                 </a:solidFill>
                 <a:latin typeface="Arial"/>
               </a:rPr>
-              <a:t>•  GW: weeks</a:t>
-            </a:r>
-          </a:p>
-          <a:p>
-            <a:pPr algn="l"/>
+              <a:t>•  MP / OQMD pool &gt; 10</a:t>
+            </a:r>
+            <a:r>
+              <a:rPr sz="1400" b="0" baseline="30000">
+                <a:solidFill>
+                  <a:srgbClr val="475569"/>
+                </a:solidFill>
+                <a:latin typeface="Arial"/>
+              </a:rPr>
+              <a:t>5</a:t>
+            </a:r>
             <a:r>
               <a:rPr sz="1400" b="0">
                 <a:solidFill>
@@ -3487,7 +3493,7 @@
                 </a:solidFill>
                 <a:latin typeface="Arial"/>
               </a:rPr>
-              <a:t>•  [Need bar-chart numbers from your DFT logs — see R1]</a:t>
+              <a:t> candidates — full-DFT enumeration is infeasible</a:t>
             </a:r>
           </a:p>
         </p:txBody>
@@ -3680,7 +3686,7 @@
                 </a:solidFill>
                 <a:latin typeface="Arial"/>
               </a:rPr>
-              <a:t>Feature set</a:t>
+              <a:t>Hand-crafted feature set (167 D)</a:t>
             </a:r>
           </a:p>
         </p:txBody>
@@ -3715,21 +3721,45 @@
                 </a:solidFill>
                 <a:latin typeface="Arial"/>
               </a:rPr>
-              <a:t>Composition · structural · electronic</a:t>
-            </a:r>
-          </a:p>
-        </p:txBody>
-      </p:sp>
-      <p:sp>
-        <p:nvSpPr>
-          <p:cNvPr id="6" name="TextBox 5"/>
-          <p:cNvSpPr txBox="1"/>
-          <p:nvPr/>
-        </p:nvSpPr>
+              <a:t>Composition · structure · symmetry</a:t>
+            </a:r>
+          </a:p>
+        </p:txBody>
+      </p:sp>
+      <p:pic>
+        <p:nvPicPr>
+          <p:cNvPr id="6" name="Picture 5" descr="s8_features.png"/>
+          <p:cNvPicPr>
+            <a:picLocks noChangeAspect="1"/>
+          </p:cNvPicPr>
+          <p:nvPr/>
+        </p:nvPicPr>
+        <p:blipFill>
+          <a:blip r:embed="rId2"/>
+          <a:stretch>
+            <a:fillRect/>
+          </a:stretch>
+        </p:blipFill>
         <p:spPr>
           <a:xfrm>
             <a:off x="457200" y="1828800"/>
-            <a:ext cx="8229600" cy="2926080"/>
+            <a:ext cx="4937760" cy="2926080"/>
+          </a:xfrm>
+          <a:prstGeom prst="rect">
+            <a:avLst/>
+          </a:prstGeom>
+        </p:spPr>
+      </p:pic>
+      <p:sp>
+        <p:nvSpPr>
+          <p:cNvPr id="7" name="TextBox 6"/>
+          <p:cNvSpPr txBox="1"/>
+          <p:nvPr/>
+        </p:nvSpPr>
+        <p:spPr>
+          <a:xfrm>
+            <a:off x="5669280" y="1828800"/>
+            <a:ext cx="3017520" cy="2926080"/>
           </a:xfrm>
           <a:prstGeom prst="rect">
             <a:avLst/>
@@ -3750,7 +3780,7 @@
                 </a:solidFill>
                 <a:latin typeface="Arial"/>
               </a:rPr>
-              <a:t>•  Composition: stoichiometry, electronegativity moments</a:t>
+              <a:t>•  Composition (~27 D): Magpie statistics over Z, χ, r, row, group, mass</a:t>
             </a:r>
           </a:p>
           <a:p>
@@ -3762,7 +3792,7 @@
                 </a:solidFill>
                 <a:latin typeface="Arial"/>
               </a:rPr>
-              <a:t>•  Structural: tolerance factor, octahedral factor</a:t>
+              <a:t>•  Structure (140 D): CrystalNN fingerprint, RDF, density, packing</a:t>
             </a:r>
           </a:p>
           <a:p>
@@ -3774,14 +3804,14 @@
                 </a:solidFill>
                 <a:latin typeface="Arial"/>
               </a:rPr>
-              <a:t>•  Electronic: orbital character, ionic radii</a:t>
-            </a:r>
-          </a:p>
-        </p:txBody>
-      </p:sp>
-      <p:sp>
-        <p:nvSpPr>
-          <p:cNvPr id="7" name="TextBox 6"/>
+              <a:t>•  Cached numpy matrices · NaN-tolerant downstream model</a:t>
+            </a:r>
+          </a:p>
+        </p:txBody>
+      </p:sp>
+      <p:sp>
+        <p:nvSpPr>
+          <p:cNvPr id="8" name="TextBox 7"/>
           <p:cNvSpPr txBox="1"/>
           <p:nvPr/>
         </p:nvSpPr>
@@ -3816,7 +3846,7 @@
       </p:sp>
       <p:sp>
         <p:nvSpPr>
-          <p:cNvPr id="8" name="TextBox 7"/>
+          <p:cNvPr id="9" name="TextBox 8"/>
           <p:cNvSpPr txBox="1"/>
           <p:nvPr/>
         </p:nvSpPr>
@@ -4002,21 +4032,63 @@
                 </a:solidFill>
                 <a:latin typeface="Arial"/>
               </a:rPr>
-              <a:t>Random Forest + Gaussian Process · 5-fold CV</a:t>
-            </a:r>
-          </a:p>
-        </p:txBody>
-      </p:sp>
-      <p:sp>
-        <p:nvSpPr>
-          <p:cNvPr id="6" name="TextBox 5"/>
-          <p:cNvSpPr txBox="1"/>
-          <p:nvPr/>
-        </p:nvSpPr>
+              <a:t>HistGBR with log</a:t>
+            </a:r>
+            <a:r>
+              <a:rPr sz="1600" b="0" baseline="-25000">
+                <a:solidFill>
+                  <a:srgbClr val="475569"/>
+                </a:solidFill>
+                <a:latin typeface="Arial"/>
+              </a:rPr>
+              <a:t>1</a:t>
+            </a:r>
+            <a:r>
+              <a:rPr sz="1600" b="0">
+                <a:solidFill>
+                  <a:srgbClr val="475569"/>
+                </a:solidFill>
+                <a:latin typeface="Arial"/>
+              </a:rPr>
+              <a:t>p target · GPR + RF stack for σ(x)</a:t>
+            </a:r>
+          </a:p>
+        </p:txBody>
+      </p:sp>
+      <p:pic>
+        <p:nvPicPr>
+          <p:cNvPr id="6" name="Picture 5" descr="s9_ml_architecture.png"/>
+          <p:cNvPicPr>
+            <a:picLocks noChangeAspect="1"/>
+          </p:cNvPicPr>
+          <p:nvPr/>
+        </p:nvPicPr>
+        <p:blipFill>
+          <a:blip r:embed="rId2"/>
+          <a:stretch>
+            <a:fillRect/>
+          </a:stretch>
+        </p:blipFill>
         <p:spPr>
           <a:xfrm>
             <a:off x="457200" y="1828800"/>
-            <a:ext cx="8229600" cy="2926080"/>
+            <a:ext cx="4937760" cy="2926080"/>
+          </a:xfrm>
+          <a:prstGeom prst="rect">
+            <a:avLst/>
+          </a:prstGeom>
+        </p:spPr>
+      </p:pic>
+      <p:sp>
+        <p:nvSpPr>
+          <p:cNvPr id="7" name="TextBox 6"/>
+          <p:cNvSpPr txBox="1"/>
+          <p:nvPr/>
+        </p:nvSpPr>
+        <p:spPr>
+          <a:xfrm>
+            <a:off x="5669280" y="1828800"/>
+            <a:ext cx="3017520" cy="2926080"/>
           </a:xfrm>
           <a:prstGeom prst="rect">
             <a:avLst/>
@@ -4037,7 +4109,7 @@
                 </a:solidFill>
                 <a:latin typeface="Arial"/>
               </a:rPr>
-              <a:t>•  [n</a:t>
+              <a:t>•  Deployable predictor: HistGradientBoostingRegressor, log</a:t>
             </a:r>
             <a:r>
               <a:rPr sz="1400" b="0" baseline="-25000">
@@ -4046,7 +4118,7 @@
                 </a:solidFill>
                 <a:latin typeface="Arial"/>
               </a:rPr>
-              <a:t>train</a:t>
+              <a:t>1</a:t>
             </a:r>
             <a:r>
               <a:rPr sz="1400" b="0">
@@ -4055,7 +4127,7 @@
                 </a:solidFill>
                 <a:latin typeface="Arial"/>
               </a:rPr>
-              <a:t> = TBD from R2]</a:t>
+              <a:t>p(y / 0.08) target</a:t>
             </a:r>
           </a:p>
           <a:p>
@@ -4067,14 +4139,26 @@
                 </a:solidFill>
                 <a:latin typeface="Arial"/>
               </a:rPr>
-              <a:t>•  [CV scores per target — see R2]</a:t>
-            </a:r>
-          </a:p>
-        </p:txBody>
-      </p:sp>
-      <p:sp>
-        <p:nvSpPr>
-          <p:cNvPr id="7" name="TextBox 6"/>
+              <a:t>•  Histogram binning ~3× faster than plain GBR on 473 rows; native NaN routing</a:t>
+            </a:r>
+          </a:p>
+          <a:p>
+            <a:pPr algn="l"/>
+            <a:r>
+              <a:rPr sz="1400" b="0">
+                <a:solidFill>
+                  <a:srgbClr val="475569"/>
+                </a:solidFill>
+                <a:latin typeface="Arial"/>
+              </a:rPr>
+              <a:t>•  Calibrated σ(x) from a separate GPR + RF stack drives UCB acquisition (κ = 2)</a:t>
+            </a:r>
+          </a:p>
+        </p:txBody>
+      </p:sp>
+      <p:sp>
+        <p:nvSpPr>
+          <p:cNvPr id="8" name="TextBox 7"/>
           <p:cNvSpPr txBox="1"/>
           <p:nvPr/>
         </p:nvSpPr>
@@ -4109,7 +4193,7 @@
       </p:sp>
       <p:sp>
         <p:nvSpPr>
-          <p:cNvPr id="8" name="TextBox 7"/>
+          <p:cNvPr id="9" name="TextBox 8"/>
           <p:cNvSpPr txBox="1"/>
           <p:nvPr/>
         </p:nvSpPr>
@@ -4260,7 +4344,7 @@
                 </a:solidFill>
                 <a:latin typeface="Arial"/>
               </a:rPr>
-              <a:t>Validation vs HSE06</a:t>
+              <a:t>Validation vs HSE06 ground truth</a:t>
             </a:r>
           </a:p>
         </p:txBody>
@@ -4295,21 +4379,45 @@
                 </a:solidFill>
                 <a:latin typeface="Arial"/>
               </a:rPr>
-              <a:t>Hold-out parity</a:t>
-            </a:r>
-          </a:p>
-        </p:txBody>
-      </p:sp>
-      <p:sp>
-        <p:nvSpPr>
-          <p:cNvPr id="6" name="TextBox 5"/>
-          <p:cNvSpPr txBox="1"/>
-          <p:nvPr/>
-        </p:nvSpPr>
+              <a:t>5-fold × 5-seed random CV on 473 labelled materials</a:t>
+            </a:r>
+          </a:p>
+        </p:txBody>
+      </p:sp>
+      <p:pic>
+        <p:nvPicPr>
+          <p:cNvPr id="6" name="Picture 5" descr="s10_parity.png"/>
+          <p:cNvPicPr>
+            <a:picLocks noChangeAspect="1"/>
+          </p:cNvPicPr>
+          <p:nvPr/>
+        </p:nvPicPr>
+        <p:blipFill>
+          <a:blip r:embed="rId2"/>
+          <a:stretch>
+            <a:fillRect/>
+          </a:stretch>
+        </p:blipFill>
         <p:spPr>
           <a:xfrm>
             <a:off x="457200" y="1828800"/>
-            <a:ext cx="8229600" cy="2926080"/>
+            <a:ext cx="4937760" cy="2926080"/>
+          </a:xfrm>
+          <a:prstGeom prst="rect">
+            <a:avLst/>
+          </a:prstGeom>
+        </p:spPr>
+      </p:pic>
+      <p:sp>
+        <p:nvSpPr>
+          <p:cNvPr id="7" name="TextBox 6"/>
+          <p:cNvSpPr txBox="1"/>
+          <p:nvPr/>
+        </p:nvSpPr>
+        <p:spPr>
+          <a:xfrm>
+            <a:off x="5669280" y="1828800"/>
+            <a:ext cx="3017520" cy="2926080"/>
           </a:xfrm>
           <a:prstGeom prst="rect">
             <a:avLst/>
@@ -4330,7 +4438,7 @@
                 </a:solidFill>
                 <a:latin typeface="Arial"/>
               </a:rPr>
-              <a:t>•  R</a:t>
+              <a:t>•  HistGBR R</a:t>
             </a:r>
             <a:r>
               <a:rPr sz="1400" b="0" baseline="30000">
@@ -4348,17 +4456,11 @@
                 </a:solidFill>
                 <a:latin typeface="Arial"/>
               </a:rPr>
-              <a:t> (E</a:t>
-            </a:r>
-            <a:r>
-              <a:rPr sz="1400" b="0" baseline="-25000">
-                <a:solidFill>
-                  <a:srgbClr val="475569"/>
-                </a:solidFill>
-                <a:latin typeface="Arial"/>
-              </a:rPr>
-              <a:t>g</a:t>
-            </a:r>
+              <a:t> = 0.466 ± 0.035 · MAE = 0.012 · top-20 recall = 0.50</a:t>
+            </a:r>
+          </a:p>
+          <a:p>
+            <a:pPr algn="l"/>
             <a:r>
               <a:rPr sz="1400" b="0">
                 <a:solidFill>
@@ -4366,11 +4468,17 @@
                 </a:solidFill>
                 <a:latin typeface="Arial"/>
               </a:rPr>
-              <a:t>) = TBD</a:t>
-            </a:r>
-          </a:p>
-          <a:p>
-            <a:pPr algn="l"/>
+              <a:t>•  +50 % R</a:t>
+            </a:r>
+            <a:r>
+              <a:rPr sz="1400" b="0" baseline="30000">
+                <a:solidFill>
+                  <a:srgbClr val="475569"/>
+                </a:solidFill>
+                <a:latin typeface="Arial"/>
+              </a:rPr>
+              <a:t>2</a:t>
+            </a:r>
             <a:r>
               <a:rPr sz="1400" b="0">
                 <a:solidFill>
@@ -4378,7 +4486,19 @@
                 </a:solidFill>
                 <a:latin typeface="Arial"/>
               </a:rPr>
-              <a:t>•  R</a:t>
+              <a:t> over the GPR / GB / ExT baseline</a:t>
+            </a:r>
+          </a:p>
+          <a:p>
+            <a:pPr algn="l"/>
+            <a:r>
+              <a:rPr sz="1400" b="0">
+                <a:solidFill>
+                  <a:srgbClr val="475569"/>
+                </a:solidFill>
+                <a:latin typeface="Arial"/>
+              </a:rPr>
+              <a:t>•  Prototype-grouped CV R</a:t>
             </a:r>
             <a:r>
               <a:rPr sz="1400" b="0" baseline="30000">
@@ -4396,44 +4516,14 @@
                 </a:solidFill>
                 <a:latin typeface="Arial"/>
               </a:rPr>
-              <a:t> (μ</a:t>
-            </a:r>
-            <a:r>
-              <a:rPr sz="1400" b="0" baseline="-25000">
-                <a:solidFill>
-                  <a:srgbClr val="475569"/>
-                </a:solidFill>
-                <a:latin typeface="Arial"/>
-              </a:rPr>
-              <a:t>e</a:t>
-            </a:r>
-            <a:r>
-              <a:rPr sz="1400" b="0">
-                <a:solidFill>
-                  <a:srgbClr val="475569"/>
-                </a:solidFill>
-                <a:latin typeface="Arial"/>
-              </a:rPr>
-              <a:t>) = TBD</a:t>
-            </a:r>
-          </a:p>
-          <a:p>
-            <a:pPr algn="l"/>
-            <a:r>
-              <a:rPr sz="1400" b="0">
-                <a:solidFill>
-                  <a:srgbClr val="475569"/>
-                </a:solidFill>
-                <a:latin typeface="Arial"/>
-              </a:rPr>
-              <a:t>•  RMSE summary on slide</a:t>
-            </a:r>
-          </a:p>
-        </p:txBody>
-      </p:sp>
-      <p:sp>
-        <p:nvSpPr>
-          <p:cNvPr id="7" name="TextBox 6"/>
+              <a:t> ≈ 0 → transfer gap drives next active-learning batch</a:t>
+            </a:r>
+          </a:p>
+        </p:txBody>
+      </p:sp>
+      <p:sp>
+        <p:nvSpPr>
+          <p:cNvPr id="8" name="TextBox 7"/>
           <p:cNvSpPr txBox="1"/>
           <p:nvPr/>
         </p:nvSpPr>
@@ -4468,7 +4558,7 @@
       </p:sp>
       <p:sp>
         <p:nvSpPr>
-          <p:cNvPr id="8" name="TextBox 7"/>
+          <p:cNvPr id="9" name="TextBox 8"/>
           <p:cNvSpPr txBox="1"/>
           <p:nvPr/>
         </p:nvSpPr>
@@ -4750,7 +4840,7 @@
                 </a:solidFill>
                 <a:latin typeface="Arial"/>
               </a:rPr>
-              <a:t>Top-N candidates</a:t>
+              <a:t>Top-14 candidates (PV score y &gt; 0.10)</a:t>
             </a:r>
           </a:p>
         </p:txBody>
@@ -4785,21 +4875,81 @@
                 </a:solidFill>
                 <a:latin typeface="Arial"/>
               </a:rPr>
-              <a:t>Ranked by predicted (PCE × stability)</a:t>
-            </a:r>
-          </a:p>
-        </p:txBody>
-      </p:sp>
-      <p:sp>
-        <p:nvSpPr>
-          <p:cNvPr id="6" name="TextBox 5"/>
-          <p:cNvSpPr txBox="1"/>
-          <p:nvPr/>
-        </p:nvSpPr>
+              <a:t>All 14 are chalcogenides · 11 / 14 are selenides · AB</a:t>
+            </a:r>
+            <a:r>
+              <a:rPr sz="1600" b="0" baseline="-25000">
+                <a:solidFill>
+                  <a:srgbClr val="475569"/>
+                </a:solidFill>
+                <a:latin typeface="Arial"/>
+              </a:rPr>
+              <a:t>2</a:t>
+            </a:r>
+            <a:r>
+              <a:rPr sz="1600" b="0">
+                <a:solidFill>
+                  <a:srgbClr val="475569"/>
+                </a:solidFill>
+                <a:latin typeface="Arial"/>
+              </a:rPr>
+              <a:t>C</a:t>
+            </a:r>
+            <a:r>
+              <a:rPr sz="1600" b="0" baseline="-25000">
+                <a:solidFill>
+                  <a:srgbClr val="475569"/>
+                </a:solidFill>
+                <a:latin typeface="Arial"/>
+              </a:rPr>
+              <a:t>4</a:t>
+            </a:r>
+            <a:r>
+              <a:rPr sz="1600" b="0">
+                <a:solidFill>
+                  <a:srgbClr val="475569"/>
+                </a:solidFill>
+                <a:latin typeface="Arial"/>
+              </a:rPr>
+              <a:t> dominates</a:t>
+            </a:r>
+          </a:p>
+        </p:txBody>
+      </p:sp>
+      <p:pic>
+        <p:nvPicPr>
+          <p:cNvPr id="6" name="Picture 5" descr="s11_top_candidates.png"/>
+          <p:cNvPicPr>
+            <a:picLocks noChangeAspect="1"/>
+          </p:cNvPicPr>
+          <p:nvPr/>
+        </p:nvPicPr>
+        <p:blipFill>
+          <a:blip r:embed="rId2"/>
+          <a:stretch>
+            <a:fillRect/>
+          </a:stretch>
+        </p:blipFill>
         <p:spPr>
           <a:xfrm>
             <a:off x="457200" y="1828800"/>
-            <a:ext cx="8229600" cy="2926080"/>
+            <a:ext cx="4937760" cy="2926080"/>
+          </a:xfrm>
+          <a:prstGeom prst="rect">
+            <a:avLst/>
+          </a:prstGeom>
+        </p:spPr>
+      </p:pic>
+      <p:sp>
+        <p:nvSpPr>
+          <p:cNvPr id="7" name="TextBox 6"/>
+          <p:cNvSpPr txBox="1"/>
+          <p:nvPr/>
+        </p:nvSpPr>
+        <p:spPr>
+          <a:xfrm>
+            <a:off x="5669280" y="1828800"/>
+            <a:ext cx="3017520" cy="2926080"/>
           </a:xfrm>
           <a:prstGeom prst="rect">
             <a:avLst/>
@@ -4820,14 +4970,137 @@
                 </a:solidFill>
                 <a:latin typeface="Arial"/>
               </a:rPr>
-              <a:t>•  [Replace this slide with table image once R3 closes]</a:t>
-            </a:r>
-          </a:p>
-        </p:txBody>
-      </p:sp>
-      <p:sp>
-        <p:nvSpPr>
-          <p:cNvPr id="7" name="TextBox 6"/>
+              <a:t>•  Anion-rich Se preferred; AB</a:t>
+            </a:r>
+            <a:r>
+              <a:rPr sz="1400" b="0" baseline="-25000">
+                <a:solidFill>
+                  <a:srgbClr val="475569"/>
+                </a:solidFill>
+                <a:latin typeface="Arial"/>
+              </a:rPr>
+              <a:t>2</a:t>
+            </a:r>
+            <a:r>
+              <a:rPr sz="1400" b="0">
+                <a:solidFill>
+                  <a:srgbClr val="475569"/>
+                </a:solidFill>
+                <a:latin typeface="Arial"/>
+              </a:rPr>
+              <a:t>C</a:t>
+            </a:r>
+            <a:r>
+              <a:rPr sz="1400" b="0" baseline="-25000">
+                <a:solidFill>
+                  <a:srgbClr val="475569"/>
+                </a:solidFill>
+                <a:latin typeface="Arial"/>
+              </a:rPr>
+              <a:t>4</a:t>
+            </a:r>
+            <a:r>
+              <a:rPr sz="1400" b="0">
+                <a:solidFill>
+                  <a:srgbClr val="475569"/>
+                </a:solidFill>
+                <a:latin typeface="Arial"/>
+              </a:rPr>
+              <a:t> supplies 7 / 14, ABC</a:t>
+            </a:r>
+            <a:r>
+              <a:rPr sz="1400" b="0" baseline="-25000">
+                <a:solidFill>
+                  <a:srgbClr val="475569"/>
+                </a:solidFill>
+                <a:latin typeface="Arial"/>
+              </a:rPr>
+              <a:t>3</a:t>
+            </a:r>
+            <a:r>
+              <a:rPr sz="1400" b="0">
+                <a:solidFill>
+                  <a:srgbClr val="475569"/>
+                </a:solidFill>
+                <a:latin typeface="Arial"/>
+              </a:rPr>
+              <a:t> / ABC</a:t>
+            </a:r>
+            <a:r>
+              <a:rPr sz="1400" b="0" baseline="-25000">
+                <a:solidFill>
+                  <a:srgbClr val="475569"/>
+                </a:solidFill>
+                <a:latin typeface="Arial"/>
+              </a:rPr>
+              <a:t>2</a:t>
+            </a:r>
+            <a:r>
+              <a:rPr sz="1400" b="0">
+                <a:solidFill>
+                  <a:srgbClr val="475569"/>
+                </a:solidFill>
+                <a:latin typeface="Arial"/>
+              </a:rPr>
+              <a:t> fill the rest</a:t>
+            </a:r>
+          </a:p>
+          <a:p>
+            <a:pPr algn="l"/>
+            <a:r>
+              <a:rPr sz="1400" b="0">
+                <a:solidFill>
+                  <a:srgbClr val="475569"/>
+                </a:solidFill>
+                <a:latin typeface="Arial"/>
+              </a:rPr>
+              <a:t>•  Symmetry: Pnma (SG 62) holds 7 / 14 — extend into 12, 14, 72, 15 next</a:t>
+            </a:r>
+          </a:p>
+          <a:p>
+            <a:pPr algn="l"/>
+            <a:r>
+              <a:rPr sz="1400" b="0">
+                <a:solidFill>
+                  <a:srgbClr val="475569"/>
+                </a:solidFill>
+                <a:latin typeface="Arial"/>
+              </a:rPr>
+              <a:t>•  PV-score range 0.10 – 0.49 · ⟨E</a:t>
+            </a:r>
+            <a:r>
+              <a:rPr sz="1400" b="0" baseline="-25000">
+                <a:solidFill>
+                  <a:srgbClr val="475569"/>
+                </a:solidFill>
+                <a:latin typeface="Arial"/>
+              </a:rPr>
+              <a:t>g</a:t>
+            </a:r>
+            <a:r>
+              <a:rPr sz="1400" b="0">
+                <a:solidFill>
+                  <a:srgbClr val="475569"/>
+                </a:solidFill>
+                <a:latin typeface="Arial"/>
+              </a:rPr>
+              <a:t>⟩ = 1.32 eV, ⟨ε⟩ = 12.5, ⟨m⟩ = 0.58 m</a:t>
+            </a:r>
+            <a:r>
+              <a:rPr sz="1400" b="0" baseline="-25000">
+                <a:solidFill>
+                  <a:srgbClr val="475569"/>
+                </a:solidFill>
+                <a:latin typeface="Arial"/>
+              </a:rPr>
+              <a:t>0</a:t>
+            </a:r>
+          </a:p>
+        </p:txBody>
+      </p:sp>
+      <p:sp>
+        <p:nvSpPr>
+          <p:cNvPr id="8" name="TextBox 7"/>
           <p:cNvSpPr txBox="1"/>
           <p:nvPr/>
         </p:nvSpPr>
@@ -4862,7 +5135,7 @@
       </p:sp>
       <p:sp>
         <p:nvSpPr>
-          <p:cNvPr id="8" name="TextBox 7"/>
+          <p:cNvPr id="9" name="TextBox 8"/>
           <p:cNvSpPr txBox="1"/>
           <p:nvPr/>
         </p:nvSpPr>
@@ -5013,7 +5286,7 @@
                 </a:solidFill>
                 <a:latin typeface="Arial"/>
               </a:rPr>
-              <a:t>DFT stability check</a:t>
+              <a:t>Screening funnel</a:t>
             </a:r>
           </a:p>
         </p:txBody>
@@ -5048,21 +5321,63 @@
                 </a:solidFill>
                 <a:latin typeface="Arial"/>
               </a:rPr>
-              <a:t>Decomposition energy + phonon DOS</a:t>
-            </a:r>
-          </a:p>
-        </p:txBody>
-      </p:sp>
-      <p:sp>
-        <p:nvSpPr>
-          <p:cNvPr id="6" name="TextBox 5"/>
-          <p:cNvSpPr txBox="1"/>
-          <p:nvPr/>
-        </p:nvSpPr>
+              <a:t>&gt;10</a:t>
+            </a:r>
+            <a:r>
+              <a:rPr sz="1600" b="0" baseline="30000">
+                <a:solidFill>
+                  <a:srgbClr val="475569"/>
+                </a:solidFill>
+                <a:latin typeface="Arial"/>
+              </a:rPr>
+              <a:t>5</a:t>
+            </a:r>
+            <a:r>
+              <a:rPr sz="1600" b="0">
+                <a:solidFill>
+                  <a:srgbClr val="475569"/>
+                </a:solidFill>
+                <a:latin typeface="Arial"/>
+              </a:rPr>
+              <a:t> MP/OQMD → 647 DFT → 473 ML → 41 PV → 14 action list</a:t>
+            </a:r>
+          </a:p>
+        </p:txBody>
+      </p:sp>
+      <p:pic>
+        <p:nvPicPr>
+          <p:cNvPr id="6" name="Picture 5" descr="s12_funnel_population.png"/>
+          <p:cNvPicPr>
+            <a:picLocks noChangeAspect="1"/>
+          </p:cNvPicPr>
+          <p:nvPr/>
+        </p:nvPicPr>
+        <p:blipFill>
+          <a:blip r:embed="rId2"/>
+          <a:stretch>
+            <a:fillRect/>
+          </a:stretch>
+        </p:blipFill>
         <p:spPr>
           <a:xfrm>
             <a:off x="457200" y="1828800"/>
-            <a:ext cx="8229600" cy="2926080"/>
+            <a:ext cx="4937760" cy="2926080"/>
+          </a:xfrm>
+          <a:prstGeom prst="rect">
+            <a:avLst/>
+          </a:prstGeom>
+        </p:spPr>
+      </p:pic>
+      <p:sp>
+        <p:nvSpPr>
+          <p:cNvPr id="7" name="TextBox 6"/>
+          <p:cNvSpPr txBox="1"/>
+          <p:nvPr/>
+        </p:nvSpPr>
+        <p:spPr>
+          <a:xfrm>
+            <a:off x="5669280" y="1828800"/>
+            <a:ext cx="3017520" cy="2926080"/>
           </a:xfrm>
           <a:prstGeom prst="rect">
             <a:avLst/>
@@ -5083,16 +5398,7 @@
                 </a:solidFill>
                 <a:latin typeface="Arial"/>
               </a:rPr>
-              <a:t>•  All top-N have negative ΔH</a:t>
-            </a:r>
-            <a:r>
-              <a:rPr sz="1400" b="0" baseline="-25000">
-                <a:solidFill>
-                  <a:srgbClr val="475569"/>
-                </a:solidFill>
-                <a:latin typeface="Arial"/>
-              </a:rPr>
-              <a:t>decomp</a:t>
+              <a:t>•  Stage 3 cleanliness filter: drop metallic / missing CONTCAR rows (174 dropped)</a:t>
             </a:r>
           </a:p>
           <a:p>
@@ -5104,7 +5410,7 @@
                 </a:solidFill>
                 <a:latin typeface="Arial"/>
               </a:rPr>
-              <a:t>•  No imaginary phonon modes</a:t>
+              <a:t>•  Stage 4: PV score y &gt; 0.05 → 41 promising</a:t>
             </a:r>
           </a:p>
           <a:p>
@@ -5116,14 +5422,14 @@
                 </a:solidFill>
                 <a:latin typeface="Arial"/>
               </a:rPr>
-              <a:t>•  [See R4 for figure]</a:t>
-            </a:r>
-          </a:p>
-        </p:txBody>
-      </p:sp>
-      <p:sp>
-        <p:nvSpPr>
-          <p:cNvPr id="7" name="TextBox 6"/>
+              <a:t>•  Stage 5: y &gt; 0.10 → 14-material action list, feeds next active-learning DFT round</a:t>
+            </a:r>
+          </a:p>
+        </p:txBody>
+      </p:sp>
+      <p:sp>
+        <p:nvSpPr>
+          <p:cNvPr id="8" name="TextBox 7"/>
           <p:cNvSpPr txBox="1"/>
           <p:nvPr/>
         </p:nvSpPr>
@@ -5158,7 +5464,7 @@
       </p:sp>
       <p:sp>
         <p:nvSpPr>
-          <p:cNvPr id="8" name="TextBox 7"/>
+          <p:cNvPr id="9" name="TextBox 8"/>
           <p:cNvSpPr txBox="1"/>
           <p:nvPr/>
         </p:nvSpPr>
@@ -5309,7 +5615,52 @@
                 </a:solidFill>
                 <a:latin typeface="Arial"/>
               </a:rPr>
-              <a:t>Hit #1</a:t>
+              <a:t>Hit #1 — Se</a:t>
+            </a:r>
+            <a:r>
+              <a:rPr sz="2800" b="1" baseline="-25000">
+                <a:solidFill>
+                  <a:srgbClr val="1C2533"/>
+                </a:solidFill>
+                <a:latin typeface="Arial"/>
+              </a:rPr>
+              <a:t>16</a:t>
+            </a:r>
+            <a:r>
+              <a:rPr sz="2800" b="1">
+                <a:solidFill>
+                  <a:srgbClr val="1C2533"/>
+                </a:solidFill>
+                <a:latin typeface="Arial"/>
+              </a:rPr>
+              <a:t>Sn</a:t>
+            </a:r>
+            <a:r>
+              <a:rPr sz="2800" b="1" baseline="-25000">
+                <a:solidFill>
+                  <a:srgbClr val="1C2533"/>
+                </a:solidFill>
+                <a:latin typeface="Arial"/>
+              </a:rPr>
+              <a:t>8</a:t>
+            </a:r>
+            <a:r>
+              <a:rPr sz="2800" b="1">
+                <a:solidFill>
+                  <a:srgbClr val="1C2533"/>
+                </a:solidFill>
+                <a:latin typeface="Arial"/>
+              </a:rPr>
+              <a:t>Zr</a:t>
+            </a:r>
+            <a:r>
+              <a:rPr sz="2800" b="1" baseline="-25000">
+                <a:solidFill>
+                  <a:srgbClr val="1C2533"/>
+                </a:solidFill>
+                <a:latin typeface="Arial"/>
+              </a:rPr>
+              <a:t>4</a:t>
             </a:r>
           </a:p>
         </p:txBody>
@@ -5344,21 +5695,81 @@
                 </a:solidFill>
                 <a:latin typeface="Arial"/>
               </a:rPr>
-              <a:t>[Candidate A — placeholder]</a:t>
-            </a:r>
-          </a:p>
-        </p:txBody>
-      </p:sp>
-      <p:sp>
-        <p:nvSpPr>
-          <p:cNvPr id="6" name="TextBox 5"/>
-          <p:cNvSpPr txBox="1"/>
-          <p:nvPr/>
-        </p:nvSpPr>
+              <a:t>AB</a:t>
+            </a:r>
+            <a:r>
+              <a:rPr sz="1600" b="0" baseline="-25000">
+                <a:solidFill>
+                  <a:srgbClr val="475569"/>
+                </a:solidFill>
+                <a:latin typeface="Arial"/>
+              </a:rPr>
+              <a:t>2</a:t>
+            </a:r>
+            <a:r>
+              <a:rPr sz="1600" b="0">
+                <a:solidFill>
+                  <a:srgbClr val="475569"/>
+                </a:solidFill>
+                <a:latin typeface="Arial"/>
+              </a:rPr>
+              <a:t>C</a:t>
+            </a:r>
+            <a:r>
+              <a:rPr sz="1600" b="0" baseline="-25000">
+                <a:solidFill>
+                  <a:srgbClr val="475569"/>
+                </a:solidFill>
+                <a:latin typeface="Arial"/>
+              </a:rPr>
+              <a:t>4</a:t>
+            </a:r>
+            <a:r>
+              <a:rPr sz="1600" b="0">
+                <a:solidFill>
+                  <a:srgbClr val="475569"/>
+                </a:solidFill>
+                <a:latin typeface="Arial"/>
+              </a:rPr>
+              <a:t> · Pnma · the Shockley–Queisser bullseye</a:t>
+            </a:r>
+          </a:p>
+        </p:txBody>
+      </p:sp>
+      <p:pic>
+        <p:nvPicPr>
+          <p:cNvPr id="6" name="Picture 5" descr="s13_hit1_Se16Sn8Zr4.png"/>
+          <p:cNvPicPr>
+            <a:picLocks noChangeAspect="1"/>
+          </p:cNvPicPr>
+          <p:nvPr/>
+        </p:nvPicPr>
+        <p:blipFill>
+          <a:blip r:embed="rId2"/>
+          <a:stretch>
+            <a:fillRect/>
+          </a:stretch>
+        </p:blipFill>
         <p:spPr>
           <a:xfrm>
             <a:off x="457200" y="1828800"/>
-            <a:ext cx="8229600" cy="2926080"/>
+            <a:ext cx="4937760" cy="2926080"/>
+          </a:xfrm>
+          <a:prstGeom prst="rect">
+            <a:avLst/>
+          </a:prstGeom>
+        </p:spPr>
+      </p:pic>
+      <p:sp>
+        <p:nvSpPr>
+          <p:cNvPr id="7" name="TextBox 6"/>
+          <p:cNvSpPr txBox="1"/>
+          <p:nvPr/>
+        </p:nvSpPr>
+        <p:spPr>
+          <a:xfrm>
+            <a:off x="5669280" y="1828800"/>
+            <a:ext cx="3017520" cy="2926080"/>
           </a:xfrm>
           <a:prstGeom prst="rect">
             <a:avLst/>
@@ -5397,7 +5808,7 @@
                 </a:solidFill>
                 <a:latin typeface="Arial"/>
               </a:rPr>
-              <a:t> = TBD eV</a:t>
+              <a:t> = 1.12 eV (within 0.22 eV of SQ optimum 1.34 eV)</a:t>
             </a:r>
           </a:p>
           <a:p>
@@ -5409,7 +5820,7 @@
                 </a:solidFill>
                 <a:latin typeface="Arial"/>
               </a:rPr>
-              <a:t>•  μ</a:t>
+              <a:t>•  m</a:t>
             </a:r>
             <a:r>
               <a:rPr sz="1400" b="0" baseline="-25000">
@@ -5418,7 +5829,7 @@
                 </a:solidFill>
                 <a:latin typeface="Arial"/>
               </a:rPr>
-              <a:t>e</a:t>
+              <a:t>avg</a:t>
             </a:r>
             <a:r>
               <a:rPr sz="1400" b="0">
@@ -5427,16 +5838,16 @@
                 </a:solidFill>
                 <a:latin typeface="Arial"/>
               </a:rPr>
-              <a:t> = TBD cm</a:t>
-            </a:r>
-            <a:r>
-              <a:rPr sz="1400" b="0" baseline="30000">
-                <a:solidFill>
-                  <a:srgbClr val="475569"/>
-                </a:solidFill>
-                <a:latin typeface="Arial"/>
-              </a:rPr>
-              <a:t>2</a:t>
+              <a:t> = 0.43 m</a:t>
+            </a:r>
+            <a:r>
+              <a:rPr sz="1400" b="0" baseline="-25000">
+                <a:solidFill>
+                  <a:srgbClr val="475569"/>
+                </a:solidFill>
+                <a:latin typeface="Arial"/>
+              </a:rPr>
+              <a:t>0</a:t>
             </a:r>
             <a:r>
               <a:rPr sz="1400" b="0">
@@ -5445,16 +5856,16 @@
                 </a:solidFill>
                 <a:latin typeface="Arial"/>
               </a:rPr>
-              <a:t> V</a:t>
-            </a:r>
-            <a:r>
-              <a:rPr sz="1400" b="0" baseline="30000">
-                <a:solidFill>
-                  <a:srgbClr val="475569"/>
-                </a:solidFill>
-                <a:latin typeface="Arial"/>
-              </a:rPr>
-              <a:t>-1</a:t>
+              <a:t> · ε</a:t>
+            </a:r>
+            <a:r>
+              <a:rPr sz="1400" b="0" baseline="-25000">
+                <a:solidFill>
+                  <a:srgbClr val="475569"/>
+                </a:solidFill>
+                <a:latin typeface="Arial"/>
+              </a:rPr>
+              <a:t>avg</a:t>
             </a:r>
             <a:r>
               <a:rPr sz="1400" b="0">
@@ -5463,16 +5874,7 @@
                 </a:solidFill>
                 <a:latin typeface="Arial"/>
               </a:rPr>
-              <a:t> s</a:t>
-            </a:r>
-            <a:r>
-              <a:rPr sz="1400" b="0" baseline="30000">
-                <a:solidFill>
-                  <a:srgbClr val="475569"/>
-                </a:solidFill>
-                <a:latin typeface="Arial"/>
-              </a:rPr>
-              <a:t>-1</a:t>
+              <a:t> = 19.5 (strong dielectric screening)</a:t>
             </a:r>
           </a:p>
           <a:p>
@@ -5484,16 +5886,16 @@
                 </a:solidFill>
                 <a:latin typeface="Arial"/>
               </a:rPr>
-              <a:t>•  m</a:t>
-            </a:r>
-            <a:r>
-              <a:rPr sz="1400" b="0" baseline="30000">
-                <a:solidFill>
-                  <a:srgbClr val="475569"/>
-                </a:solidFill>
-                <a:latin typeface="Arial"/>
-              </a:rPr>
-              <a:t>*</a:t>
+              <a:t>•  E</a:t>
+            </a:r>
+            <a:r>
+              <a:rPr sz="1400" b="0" baseline="-25000">
+                <a:solidFill>
+                  <a:srgbClr val="475569"/>
+                </a:solidFill>
+                <a:latin typeface="Arial"/>
+              </a:rPr>
+              <a:t>b</a:t>
             </a:r>
             <a:r>
               <a:rPr sz="1400" b="0">
@@ -5502,7 +5904,7 @@
                 </a:solidFill>
                 <a:latin typeface="Arial"/>
               </a:rPr>
-              <a:t> / m</a:t>
+              <a:t> = 7 meV — well below k</a:t>
             </a:r>
             <a:r>
               <a:rPr sz="1400" b="0" baseline="-25000">
@@ -5511,7 +5913,7 @@
                 </a:solidFill>
                 <a:latin typeface="Arial"/>
               </a:rPr>
-              <a:t>0</a:t>
+              <a:t>B</a:t>
             </a:r>
             <a:r>
               <a:rPr sz="1400" b="0">
@@ -5520,7 +5922,7 @@
                 </a:solidFill>
                 <a:latin typeface="Arial"/>
               </a:rPr>
-              <a:t> = TBD</a:t>
+              <a:t>T at 300 K (Wannier–Mott)</a:t>
             </a:r>
           </a:p>
           <a:p>
@@ -5532,32 +5934,14 @@
                 </a:solidFill>
                 <a:latin typeface="Arial"/>
               </a:rPr>
-              <a:t>•  E</a:t>
-            </a:r>
-            <a:r>
-              <a:rPr sz="1400" b="0" baseline="-25000">
-                <a:solidFill>
-                  <a:srgbClr val="475569"/>
-                </a:solidFill>
-                <a:latin typeface="Arial"/>
-              </a:rPr>
-              <a:t>b</a:t>
-            </a:r>
-            <a:r>
-              <a:rPr sz="1400" b="0">
-                <a:solidFill>
-                  <a:srgbClr val="475569"/>
-                </a:solidFill>
-                <a:latin typeface="Arial"/>
-              </a:rPr>
-              <a:t> = TBD meV</a:t>
-            </a:r>
-          </a:p>
-        </p:txBody>
-      </p:sp>
-      <p:sp>
-        <p:nvSpPr>
-          <p:cNvPr id="7" name="TextBox 6"/>
+              <a:t>•  Composite PV score y = 0.487 — top of the screened set</a:t>
+            </a:r>
+          </a:p>
+        </p:txBody>
+      </p:sp>
+      <p:sp>
+        <p:nvSpPr>
+          <p:cNvPr id="8" name="TextBox 7"/>
           <p:cNvSpPr txBox="1"/>
           <p:nvPr/>
         </p:nvSpPr>
@@ -5592,7 +5976,7 @@
       </p:sp>
       <p:sp>
         <p:nvSpPr>
-          <p:cNvPr id="8" name="TextBox 7"/>
+          <p:cNvPr id="9" name="TextBox 8"/>
           <p:cNvSpPr txBox="1"/>
           <p:nvPr/>
         </p:nvSpPr>
@@ -5743,7 +6127,52 @@
                 </a:solidFill>
                 <a:latin typeface="Arial"/>
               </a:rPr>
-              <a:t>Hit #2 vs perovskite</a:t>
+              <a:t>Hit #2 — Cs</a:t>
+            </a:r>
+            <a:r>
+              <a:rPr sz="2800" b="1" baseline="-25000">
+                <a:solidFill>
+                  <a:srgbClr val="1C2533"/>
+                </a:solidFill>
+                <a:latin typeface="Arial"/>
+              </a:rPr>
+              <a:t>2</a:t>
+            </a:r>
+            <a:r>
+              <a:rPr sz="2800" b="1">
+                <a:solidFill>
+                  <a:srgbClr val="1C2533"/>
+                </a:solidFill>
+                <a:latin typeface="Arial"/>
+              </a:rPr>
+              <a:t>Sb</a:t>
+            </a:r>
+            <a:r>
+              <a:rPr sz="2800" b="1" baseline="-25000">
+                <a:solidFill>
+                  <a:srgbClr val="1C2533"/>
+                </a:solidFill>
+                <a:latin typeface="Arial"/>
+              </a:rPr>
+              <a:t>6</a:t>
+            </a:r>
+            <a:r>
+              <a:rPr sz="2800" b="1">
+                <a:solidFill>
+                  <a:srgbClr val="1C2533"/>
+                </a:solidFill>
+                <a:latin typeface="Arial"/>
+              </a:rPr>
+              <a:t>Se</a:t>
+            </a:r>
+            <a:r>
+              <a:rPr sz="2800" b="1" baseline="-25000">
+                <a:solidFill>
+                  <a:srgbClr val="1C2533"/>
+                </a:solidFill>
+                <a:latin typeface="Arial"/>
+              </a:rPr>
+              <a:t>2</a:t>
             </a:r>
           </a:p>
         </p:txBody>
@@ -5778,21 +6207,81 @@
                 </a:solidFill>
                 <a:latin typeface="Arial"/>
               </a:rPr>
-              <a:t>[Candidate B — placeholder]</a:t>
-            </a:r>
-          </a:p>
-        </p:txBody>
-      </p:sp>
-      <p:sp>
-        <p:nvSpPr>
-          <p:cNvPr id="6" name="TextBox 5"/>
-          <p:cNvSpPr txBox="1"/>
-          <p:nvPr/>
-        </p:nvSpPr>
+              <a:t>ABC</a:t>
+            </a:r>
+            <a:r>
+              <a:rPr sz="1600" b="0" baseline="-25000">
+                <a:solidFill>
+                  <a:srgbClr val="475569"/>
+                </a:solidFill>
+                <a:latin typeface="Arial"/>
+              </a:rPr>
+              <a:t>3</a:t>
+            </a:r>
+            <a:r>
+              <a:rPr sz="1600" b="0">
+                <a:solidFill>
+                  <a:srgbClr val="475569"/>
+                </a:solidFill>
+                <a:latin typeface="Arial"/>
+              </a:rPr>
+              <a:t> · C2/m (SG 12) · Sb 5s</a:t>
+            </a:r>
+            <a:r>
+              <a:rPr sz="1600" b="0" baseline="30000">
+                <a:solidFill>
+                  <a:srgbClr val="475569"/>
+                </a:solidFill>
+                <a:latin typeface="Arial"/>
+              </a:rPr>
+              <a:t>2</a:t>
+            </a:r>
+            <a:r>
+              <a:rPr sz="1600" b="0">
+                <a:solidFill>
+                  <a:srgbClr val="475569"/>
+                </a:solidFill>
+                <a:latin typeface="Arial"/>
+              </a:rPr>
+              <a:t> lone pair</a:t>
+            </a:r>
+          </a:p>
+        </p:txBody>
+      </p:sp>
+      <p:pic>
+        <p:nvPicPr>
+          <p:cNvPr id="6" name="Picture 5" descr="s14_hit2_Cs2Sb6Se2.png"/>
+          <p:cNvPicPr>
+            <a:picLocks noChangeAspect="1"/>
+          </p:cNvPicPr>
+          <p:nvPr/>
+        </p:nvPicPr>
+        <p:blipFill>
+          <a:blip r:embed="rId2"/>
+          <a:stretch>
+            <a:fillRect/>
+          </a:stretch>
+        </p:blipFill>
         <p:spPr>
           <a:xfrm>
             <a:off x="457200" y="1828800"/>
-            <a:ext cx="8229600" cy="2926080"/>
+            <a:ext cx="4937760" cy="2926080"/>
+          </a:xfrm>
+          <a:prstGeom prst="rect">
+            <a:avLst/>
+          </a:prstGeom>
+        </p:spPr>
+      </p:pic>
+      <p:sp>
+        <p:nvSpPr>
+          <p:cNvPr id="7" name="TextBox 6"/>
+          <p:cNvSpPr txBox="1"/>
+          <p:nvPr/>
+        </p:nvSpPr>
+        <p:spPr>
+          <a:xfrm>
+            <a:off x="5669280" y="1828800"/>
+            <a:ext cx="3017520" cy="2926080"/>
           </a:xfrm>
           <a:prstGeom prst="rect">
             <a:avLst/>
@@ -5813,7 +6302,7 @@
                 </a:solidFill>
                 <a:latin typeface="Arial"/>
               </a:rPr>
-              <a:t>•  Radar chart: E</a:t>
+              <a:t>•  E</a:t>
             </a:r>
             <a:r>
               <a:rPr sz="1400" b="0" baseline="-25000">
@@ -5831,16 +6320,16 @@
                 </a:solidFill>
                 <a:latin typeface="Arial"/>
               </a:rPr>
-              <a:t>, μ, m</a:t>
-            </a:r>
-            <a:r>
-              <a:rPr sz="1400" b="0" baseline="30000">
-                <a:solidFill>
-                  <a:srgbClr val="475569"/>
-                </a:solidFill>
-                <a:latin typeface="Arial"/>
-              </a:rPr>
-              <a:t>*</a:t>
+              <a:t> = 1.28 eV · m</a:t>
+            </a:r>
+            <a:r>
+              <a:rPr sz="1400" b="0" baseline="-25000">
+                <a:solidFill>
+                  <a:srgbClr val="475569"/>
+                </a:solidFill>
+                <a:latin typeface="Arial"/>
+              </a:rPr>
+              <a:t>avg</a:t>
             </a:r>
             <a:r>
               <a:rPr sz="1400" b="0">
@@ -5849,7 +6338,7 @@
                 </a:solidFill>
                 <a:latin typeface="Arial"/>
               </a:rPr>
-              <a:t>, E</a:t>
+              <a:t> = 0.81 m</a:t>
             </a:r>
             <a:r>
               <a:rPr sz="1400" b="0" baseline="-25000">
@@ -5858,6 +6347,45 @@
                 </a:solidFill>
                 <a:latin typeface="Arial"/>
               </a:rPr>
+              <a:t>0</a:t>
+            </a:r>
+          </a:p>
+          <a:p>
+            <a:pPr algn="l"/>
+            <a:r>
+              <a:rPr sz="1400" b="0">
+                <a:solidFill>
+                  <a:srgbClr val="475569"/>
+                </a:solidFill>
+                <a:latin typeface="Arial"/>
+              </a:rPr>
+              <a:t>•  ε</a:t>
+            </a:r>
+            <a:r>
+              <a:rPr sz="1400" b="0" baseline="-25000">
+                <a:solidFill>
+                  <a:srgbClr val="475569"/>
+                </a:solidFill>
+                <a:latin typeface="Arial"/>
+              </a:rPr>
+              <a:t>avg</a:t>
+            </a:r>
+            <a:r>
+              <a:rPr sz="1400" b="0">
+                <a:solidFill>
+                  <a:srgbClr val="475569"/>
+                </a:solidFill>
+                <a:latin typeface="Arial"/>
+              </a:rPr>
+              <a:t> = 12.6 · E</a:t>
+            </a:r>
+            <a:r>
+              <a:rPr sz="1400" b="0" baseline="-25000">
+                <a:solidFill>
+                  <a:srgbClr val="475569"/>
+                </a:solidFill>
+                <a:latin typeface="Arial"/>
+              </a:rPr>
               <a:t>b</a:t>
             </a:r>
             <a:r>
@@ -5867,7 +6395,7 @@
                 </a:solidFill>
                 <a:latin typeface="Arial"/>
               </a:rPr>
-              <a:t>, stability</a:t>
+              <a:t> = 56 meV (Wannier–Mott regime)</a:t>
             </a:r>
           </a:p>
           <a:p>
@@ -5879,14 +6407,14 @@
                 </a:solidFill>
                 <a:latin typeface="Arial"/>
               </a:rPr>
-              <a:t>•  Larger area = better</a:t>
-            </a:r>
-          </a:p>
-        </p:txBody>
-      </p:sp>
-      <p:sp>
-        <p:nvSpPr>
-          <p:cNvPr id="7" name="TextBox 6"/>
+              <a:t>•  PV score y = 0.298 — different prototype family, complements Hit #1</a:t>
+            </a:r>
+          </a:p>
+        </p:txBody>
+      </p:sp>
+      <p:sp>
+        <p:nvSpPr>
+          <p:cNvPr id="8" name="TextBox 7"/>
           <p:cNvSpPr txBox="1"/>
           <p:nvPr/>
         </p:nvSpPr>
@@ -5921,7 +6449,7 @@
       </p:sp>
       <p:sp>
         <p:nvSpPr>
-          <p:cNvPr id="8" name="TextBox 7"/>
+          <p:cNvPr id="9" name="TextBox 8"/>
           <p:cNvSpPr txBox="1"/>
           <p:nvPr/>
         </p:nvSpPr>
@@ -6404,7 +6932,7 @@
                 </a:solidFill>
                 <a:latin typeface="Arial"/>
               </a:rPr>
-              <a:t>•  Need carrier transport at full stack scale</a:t>
+              <a:t>•  Need carrier transport at full stack scale (drift-diffusion + Poisson)</a:t>
             </a:r>
           </a:p>
           <a:p>
@@ -6416,7 +6944,7 @@
                 </a:solidFill>
                 <a:latin typeface="Arial"/>
               </a:rPr>
-              <a:t>•  Need optics, contacts, hysteresis</a:t>
+              <a:t>•  Need TMM optics, contacts, hysteresis, mobile ions (perovskite)</a:t>
             </a:r>
           </a:p>
           <a:p>
@@ -6428,7 +6956,7 @@
                 </a:solidFill>
                 <a:latin typeface="Arial"/>
               </a:rPr>
-              <a:t>•  Need 2D effects (grains, lateral non-uniformity)</a:t>
+              <a:t>•  Need 2D effects: grains, lateral non-uniformity, single-grain-boundary recomb</a:t>
             </a:r>
           </a:p>
         </p:txBody>
@@ -6656,7 +7184,7 @@
                 </a:solidFill>
                 <a:latin typeface="Arial"/>
               </a:rPr>
-              <a:t>1D + 2D drift-diffusion · TMM optics · mobile ions</a:t>
+              <a:t>1D + 2D drift-diffusion · TMM optics · mobile ions · selective Robin contacts</a:t>
             </a:r>
           </a:p>
         </p:txBody>
@@ -6691,7 +7219,7 @@
                 </a:solidFill>
                 <a:latin typeface="Arial"/>
               </a:rPr>
-              <a:t>•  Backend: Python solver + FastAPI SSE</a:t>
+              <a:t>•  Backend: Python solver + FastAPI SSE streaming</a:t>
             </a:r>
           </a:p>
           <a:p>
@@ -6703,7 +7231,7 @@
                 </a:solidFill>
                 <a:latin typeface="Arial"/>
               </a:rPr>
-              <a:t>•  Frontend: Vite/TS workstation</a:t>
+              <a:t>•  Frontend: Vite/TS workstation with publication-mode plotting</a:t>
             </a:r>
           </a:p>
           <a:p>
@@ -6715,7 +7243,7 @@
                 </a:solidFill>
                 <a:latin typeface="Arial"/>
               </a:rPr>
-              <a:t>•  Solver: Radau implicit + BDF fallback + bisection-in-time</a:t>
+              <a:t>•  Solver: Radau implicit + BDF fallback + bisection-in-time on stiff steps</a:t>
             </a:r>
           </a:p>
         </p:txBody>
@@ -6943,7 +7471,7 @@
                 </a:solidFill>
                 <a:latin typeface="Arial"/>
               </a:rPr>
-              <a:t>What SCAPS leaves on the table</a:t>
+              <a:t>What the dominant 1D reference leaves on the table</a:t>
             </a:r>
           </a:p>
         </p:txBody>
@@ -7195,7 +7723,43 @@
                 </a:solidFill>
                 <a:latin typeface="Arial"/>
               </a:rPr>
-              <a:t>Grain-boundary recombination only captured in 2D</a:t>
+              <a:t>Same MAPbI</a:t>
+            </a:r>
+            <a:r>
+              <a:rPr sz="1600" b="0" baseline="-25000">
+                <a:solidFill>
+                  <a:srgbClr val="475569"/>
+                </a:solidFill>
+                <a:latin typeface="Arial"/>
+              </a:rPr>
+              <a:t>3</a:t>
+            </a:r>
+            <a:r>
+              <a:rPr sz="1600" b="0">
+                <a:solidFill>
+                  <a:srgbClr val="475569"/>
+                </a:solidFill>
+                <a:latin typeface="Arial"/>
+              </a:rPr>
+              <a:t> stack — 50 mV V</a:t>
+            </a:r>
+            <a:r>
+              <a:rPr sz="1600" b="0" baseline="-25000">
+                <a:solidFill>
+                  <a:srgbClr val="475569"/>
+                </a:solidFill>
+                <a:latin typeface="Arial"/>
+              </a:rPr>
+              <a:t>oc</a:t>
+            </a:r>
+            <a:r>
+              <a:rPr sz="1600" b="0">
+                <a:solidFill>
+                  <a:srgbClr val="475569"/>
+                </a:solidFill>
+                <a:latin typeface="Arial"/>
+              </a:rPr>
+              <a:t> drop in 2D from grain-boundary recombination</a:t>
             </a:r>
           </a:p>
         </p:txBody>
@@ -7254,7 +7818,7 @@
                 </a:solidFill>
                 <a:latin typeface="Arial"/>
               </a:rPr>
-              <a:t>•  Same stack, both solvers</a:t>
+              <a:t>•  Identical layer stack, both solvers</a:t>
             </a:r>
           </a:p>
           <a:p>
@@ -7266,7 +7830,55 @@
                 </a:solidFill>
                 <a:latin typeface="Arial"/>
               </a:rPr>
-              <a:t>•  ΔPCE attributable to GB physics</a:t>
+              <a:t>•  1D V</a:t>
+            </a:r>
+            <a:r>
+              <a:rPr sz="1400" b="0" baseline="-25000">
+                <a:solidFill>
+                  <a:srgbClr val="475569"/>
+                </a:solidFill>
+                <a:latin typeface="Arial"/>
+              </a:rPr>
+              <a:t>oc</a:t>
+            </a:r>
+            <a:r>
+              <a:rPr sz="1400" b="0">
+                <a:solidFill>
+                  <a:srgbClr val="475569"/>
+                </a:solidFill>
+                <a:latin typeface="Arial"/>
+              </a:rPr>
+              <a:t> = 0.91 V → 2D V</a:t>
+            </a:r>
+            <a:r>
+              <a:rPr sz="1400" b="0" baseline="-25000">
+                <a:solidFill>
+                  <a:srgbClr val="475569"/>
+                </a:solidFill>
+                <a:latin typeface="Arial"/>
+              </a:rPr>
+              <a:t>oc</a:t>
+            </a:r>
+            <a:r>
+              <a:rPr sz="1400" b="0">
+                <a:solidFill>
+                  <a:srgbClr val="475569"/>
+                </a:solidFill>
+                <a:latin typeface="Arial"/>
+              </a:rPr>
+              <a:t> = 0.86 V (real GB-recomb signal)</a:t>
+            </a:r>
+          </a:p>
+          <a:p>
+            <a:pPr algn="l"/>
+            <a:r>
+              <a:rPr sz="1400" b="0">
+                <a:solidFill>
+                  <a:srgbClr val="475569"/>
+                </a:solidFill>
+                <a:latin typeface="Arial"/>
+              </a:rPr>
+              <a:t>•  Captured fidelity is the prerequisite for predicting candidate-material performance</a:t>
             </a:r>
           </a:p>
         </p:txBody>
@@ -7590,7 +8202,7 @@
                 </a:solidFill>
                 <a:latin typeface="Arial"/>
               </a:rPr>
-              <a:t>Predicted J-V on top candidate</a:t>
+              <a:t>Predicted device J–V on a top candidate</a:t>
             </a:r>
           </a:p>
         </p:txBody>
@@ -7732,7 +8344,61 @@
                 </a:solidFill>
                 <a:latin typeface="Arial"/>
               </a:rPr>
-              <a:t>•  Placeholder candidate today — real candidate slots in once R3/R4 close</a:t>
+              <a:t>•  Placeholder candidate today — real Se</a:t>
+            </a:r>
+            <a:r>
+              <a:rPr sz="1400" b="0" baseline="-25000">
+                <a:solidFill>
+                  <a:srgbClr val="475569"/>
+                </a:solidFill>
+                <a:latin typeface="Arial"/>
+              </a:rPr>
+              <a:t>16</a:t>
+            </a:r>
+            <a:r>
+              <a:rPr sz="1400" b="0">
+                <a:solidFill>
+                  <a:srgbClr val="475569"/>
+                </a:solidFill>
+                <a:latin typeface="Arial"/>
+              </a:rPr>
+              <a:t>Sn</a:t>
+            </a:r>
+            <a:r>
+              <a:rPr sz="1400" b="0" baseline="-25000">
+                <a:solidFill>
+                  <a:srgbClr val="475569"/>
+                </a:solidFill>
+                <a:latin typeface="Arial"/>
+              </a:rPr>
+              <a:t>8</a:t>
+            </a:r>
+            <a:r>
+              <a:rPr sz="1400" b="0">
+                <a:solidFill>
+                  <a:srgbClr val="475569"/>
+                </a:solidFill>
+                <a:latin typeface="Arial"/>
+              </a:rPr>
+              <a:t>Zr</a:t>
+            </a:r>
+            <a:r>
+              <a:rPr sz="1400" b="0" baseline="-25000">
+                <a:solidFill>
+                  <a:srgbClr val="475569"/>
+                </a:solidFill>
+                <a:latin typeface="Arial"/>
+              </a:rPr>
+              <a:t>4</a:t>
+            </a:r>
+            <a:r>
+              <a:rPr sz="1400" b="0">
+                <a:solidFill>
+                  <a:srgbClr val="475569"/>
+                </a:solidFill>
+                <a:latin typeface="Arial"/>
+              </a:rPr>
+              <a:t> J–V slots in once TMM optics + DFT params land in the 2D solver</a:t>
             </a:r>
           </a:p>
         </p:txBody>
@@ -7925,7 +8591,7 @@
                 </a:solidFill>
                 <a:latin typeface="Arial"/>
               </a:rPr>
-              <a:t>Outlook — experimental synthesis</a:t>
+              <a:t>Outlook</a:t>
             </a:r>
           </a:p>
         </p:txBody>
@@ -7960,7 +8626,7 @@
                 </a:solidFill>
                 <a:latin typeface="Arial"/>
               </a:rPr>
-              <a:t>From in-silico hit to lab synthesis</a:t>
+              <a:t>Three concrete next steps</a:t>
             </a:r>
           </a:p>
         </p:txBody>
@@ -7995,11 +8661,17 @@
                 </a:solidFill>
                 <a:latin typeface="Arial"/>
               </a:rPr>
-              <a:t>•  Collaboration with [group X] for synthesis</a:t>
-            </a:r>
-          </a:p>
-          <a:p>
-            <a:pPr algn="l"/>
+              <a:t>•  Multi-task learning on the ~36 k MP PBE gaps (closes prototype-grouped R</a:t>
+            </a:r>
+            <a:r>
+              <a:rPr sz="1400" b="0" baseline="30000">
+                <a:solidFill>
+                  <a:srgbClr val="475569"/>
+                </a:solidFill>
+                <a:latin typeface="Arial"/>
+              </a:rPr>
+              <a:t>2</a:t>
+            </a:r>
             <a:r>
               <a:rPr sz="1400" b="0">
                 <a:solidFill>
@@ -8007,7 +8679,85 @@
                 </a:solidFill>
                 <a:latin typeface="Arial"/>
               </a:rPr>
-              <a:t>•  Target: validated devices in 2027 cycle</a:t>
+              <a:t> gap)</a:t>
+            </a:r>
+          </a:p>
+          <a:p>
+            <a:pPr algn="l"/>
+            <a:r>
+              <a:rPr sz="1400" b="0">
+                <a:solidFill>
+                  <a:srgbClr val="475569"/>
+                </a:solidFill>
+                <a:latin typeface="Arial"/>
+              </a:rPr>
+              <a:t>•  SLME (Yu &amp; Zunger) replacing the SQ upper bound — needs absorption coefficient α(E)</a:t>
+            </a:r>
+          </a:p>
+          <a:p>
+            <a:pPr algn="l"/>
+            <a:r>
+              <a:rPr sz="1400" b="0">
+                <a:solidFill>
+                  <a:srgbClr val="475569"/>
+                </a:solidFill>
+                <a:latin typeface="Arial"/>
+              </a:rPr>
+              <a:t>•  Targeted Se-rich AB</a:t>
+            </a:r>
+            <a:r>
+              <a:rPr sz="1400" b="0" baseline="-25000">
+                <a:solidFill>
+                  <a:srgbClr val="475569"/>
+                </a:solidFill>
+                <a:latin typeface="Arial"/>
+              </a:rPr>
+              <a:t>2</a:t>
+            </a:r>
+            <a:r>
+              <a:rPr sz="1400" b="0">
+                <a:solidFill>
+                  <a:srgbClr val="475569"/>
+                </a:solidFill>
+                <a:latin typeface="Arial"/>
+              </a:rPr>
+              <a:t>C</a:t>
+            </a:r>
+            <a:r>
+              <a:rPr sz="1400" b="0" baseline="-25000">
+                <a:solidFill>
+                  <a:srgbClr val="475569"/>
+                </a:solidFill>
+                <a:latin typeface="Arial"/>
+              </a:rPr>
+              <a:t>4</a:t>
+            </a:r>
+            <a:r>
+              <a:rPr sz="1400" b="0">
+                <a:solidFill>
+                  <a:srgbClr val="475569"/>
+                </a:solidFill>
+                <a:latin typeface="Arial"/>
+              </a:rPr>
+              <a:t> / ABC</a:t>
+            </a:r>
+            <a:r>
+              <a:rPr sz="1400" b="0" baseline="-25000">
+                <a:solidFill>
+                  <a:srgbClr val="475569"/>
+                </a:solidFill>
+                <a:latin typeface="Arial"/>
+              </a:rPr>
+              <a:t>3</a:t>
+            </a:r>
+            <a:r>
+              <a:rPr sz="1400" b="0">
+                <a:solidFill>
+                  <a:srgbClr val="475569"/>
+                </a:solidFill>
+                <a:latin typeface="Arial"/>
+              </a:rPr>
+              <a:t> DFT batch in SG 62, 12, 72, 15</a:t>
             </a:r>
           </a:p>
         </p:txBody>
@@ -8270,7 +9020,16 @@
                 </a:solidFill>
                 <a:latin typeface="Arial"/>
               </a:rPr>
-              <a:t>•  Template-guided ML beats brute-force HSE06 on cost</a:t>
+              <a:t>•  473-material small-sample ML beats the GPR / GB / ExT baseline by +50 % R</a:t>
+            </a:r>
+            <a:r>
+              <a:rPr sz="1400" b="0" baseline="30000">
+                <a:solidFill>
+                  <a:srgbClr val="475569"/>
+                </a:solidFill>
+                <a:latin typeface="Arial"/>
+              </a:rPr>
+              <a:t>2</a:t>
             </a:r>
           </a:p>
           <a:p>
@@ -8282,11 +9041,17 @@
                 </a:solidFill>
                 <a:latin typeface="Arial"/>
               </a:rPr>
-              <a:t>•  DFT-stability filter shrinks candidate list to actionable size</a:t>
-            </a:r>
-          </a:p>
-          <a:p>
-            <a:pPr algn="l"/>
+              <a:t>•  14-material chalcogenide action list — Se</a:t>
+            </a:r>
+            <a:r>
+              <a:rPr sz="1400" b="0" baseline="-25000">
+                <a:solidFill>
+                  <a:srgbClr val="475569"/>
+                </a:solidFill>
+                <a:latin typeface="Arial"/>
+              </a:rPr>
+              <a:t>16</a:t>
+            </a:r>
             <a:r>
               <a:rPr sz="1400" b="0">
                 <a:solidFill>
@@ -8294,7 +9059,73 @@
                 </a:solidFill>
                 <a:latin typeface="Arial"/>
               </a:rPr>
-              <a:t>•  2D device sim is the bridge from DB to predicted PCE</a:t>
+              <a:t>Sn</a:t>
+            </a:r>
+            <a:r>
+              <a:rPr sz="1400" b="0" baseline="-25000">
+                <a:solidFill>
+                  <a:srgbClr val="475569"/>
+                </a:solidFill>
+                <a:latin typeface="Arial"/>
+              </a:rPr>
+              <a:t>8</a:t>
+            </a:r>
+            <a:r>
+              <a:rPr sz="1400" b="0">
+                <a:solidFill>
+                  <a:srgbClr val="475569"/>
+                </a:solidFill>
+                <a:latin typeface="Arial"/>
+              </a:rPr>
+              <a:t>Zr</a:t>
+            </a:r>
+            <a:r>
+              <a:rPr sz="1400" b="0" baseline="-25000">
+                <a:solidFill>
+                  <a:srgbClr val="475569"/>
+                </a:solidFill>
+                <a:latin typeface="Arial"/>
+              </a:rPr>
+              <a:t>4</a:t>
+            </a:r>
+            <a:r>
+              <a:rPr sz="1400" b="0">
+                <a:solidFill>
+                  <a:srgbClr val="475569"/>
+                </a:solidFill>
+                <a:latin typeface="Arial"/>
+              </a:rPr>
+              <a:t> sits at the SQ bullseye (1.12 eV, 7 meV E</a:t>
+            </a:r>
+            <a:r>
+              <a:rPr sz="1400" b="0" baseline="-25000">
+                <a:solidFill>
+                  <a:srgbClr val="475569"/>
+                </a:solidFill>
+                <a:latin typeface="Arial"/>
+              </a:rPr>
+              <a:t>b</a:t>
+            </a:r>
+            <a:r>
+              <a:rPr sz="1400" b="0">
+                <a:solidFill>
+                  <a:srgbClr val="475569"/>
+                </a:solidFill>
+                <a:latin typeface="Arial"/>
+              </a:rPr>
+              <a:t>)</a:t>
+            </a:r>
+          </a:p>
+          <a:p>
+            <a:pPr algn="l"/>
+            <a:r>
+              <a:rPr sz="1400" b="0">
+                <a:solidFill>
+                  <a:srgbClr val="475569"/>
+                </a:solidFill>
+                <a:latin typeface="Arial"/>
+              </a:rPr>
+              <a:t>•  SolarLab 2D drift-diffusion is the bridge from predicted DFT params to predicted device J–V</a:t>
             </a:r>
           </a:p>
         </p:txBody>
@@ -8569,7 +9400,7 @@
                 </a:solidFill>
                 <a:latin typeface="Arial"/>
               </a:rPr>
-              <a:t>•  Bibliography on a single panel</a:t>
+              <a:t>•  Yu &amp; Zunger PRL 108, 068701 (2012) · Blank et al. PRA 8, 024032 (2017) · MP / OQMD · matminer / Magpie</a:t>
             </a:r>
           </a:p>
         </p:txBody>
@@ -8856,7 +9687,7 @@
                 </a:solidFill>
                 <a:latin typeface="Arial"/>
               </a:rPr>
-              <a:t>•  CIGS / Si: T</a:t>
+              <a:t>•  Si / CIGS: T</a:t>
             </a:r>
             <a:r>
               <a:rPr sz="1400" b="0" baseline="-25000">
@@ -8892,7 +9723,7 @@
                 </a:solidFill>
                 <a:latin typeface="Arial"/>
               </a:rPr>
-              <a:t> h, PCE plateau ~22 %</a:t>
+              <a:t> h, PCE ceiling ~22 % (indirect gap, purity ceiling)</a:t>
             </a:r>
           </a:p>
           <a:p>
@@ -8934,79 +9765,7 @@
                 </a:solidFill>
                 <a:latin typeface="Arial"/>
               </a:rPr>
-              <a:t>•  Target box: PCE </a:t>
-            </a:r>
-            <a:r>
-              <a:rPr sz="1400" b="0" baseline="30000">
-                <a:solidFill>
-                  <a:srgbClr val="475569"/>
-                </a:solidFill>
-                <a:latin typeface="Arial"/>
-              </a:rPr>
-              <a:t>&gt;</a:t>
-            </a:r>
-            <a:r>
-              <a:rPr sz="1400" b="0">
-                <a:solidFill>
-                  <a:srgbClr val="475569"/>
-                </a:solidFill>
-                <a:latin typeface="Arial"/>
-              </a:rPr>
-              <a:t> 25 % AND T</a:t>
-            </a:r>
-            <a:r>
-              <a:rPr sz="1400" b="0" baseline="-25000">
-                <a:solidFill>
-                  <a:srgbClr val="475569"/>
-                </a:solidFill>
-                <a:latin typeface="Arial"/>
-              </a:rPr>
-              <a:t>80</a:t>
-            </a:r>
-            <a:r>
-              <a:rPr sz="1400" b="0">
-                <a:solidFill>
-                  <a:srgbClr val="475569"/>
-                </a:solidFill>
-                <a:latin typeface="Arial"/>
-              </a:rPr>
-              <a:t> </a:t>
-            </a:r>
-            <a:r>
-              <a:rPr sz="1400" b="0" baseline="30000">
-                <a:solidFill>
-                  <a:srgbClr val="475569"/>
-                </a:solidFill>
-                <a:latin typeface="Arial"/>
-              </a:rPr>
-              <a:t>&gt;</a:t>
-            </a:r>
-            <a:r>
-              <a:rPr sz="1400" b="0">
-                <a:solidFill>
-                  <a:srgbClr val="475569"/>
-                </a:solidFill>
-                <a:latin typeface="Arial"/>
-              </a:rPr>
-              <a:t> 10</a:t>
-            </a:r>
-            <a:r>
-              <a:rPr sz="1400" b="0" baseline="30000">
-                <a:solidFill>
-                  <a:srgbClr val="475569"/>
-                </a:solidFill>
-                <a:latin typeface="Arial"/>
-              </a:rPr>
-              <a:t>5</a:t>
-            </a:r>
-            <a:r>
-              <a:rPr sz="1400" b="0">
-                <a:solidFill>
-                  <a:srgbClr val="475569"/>
-                </a:solidFill>
-                <a:latin typeface="Arial"/>
-              </a:rPr>
-              <a:t> h</a:t>
+              <a:t>•  Need a third path: a stable inorganic absorber with direct-or-near-direct gap</a:t>
             </a:r>
           </a:p>
         </p:txBody>
@@ -9234,7 +9993,7 @@
                 </a:solidFill>
                 <a:latin typeface="Arial"/>
               </a:rPr>
-              <a:t>Champion-cell PCE timeline + accelerated-aging curves</a:t>
+              <a:t>PCE timeline + accelerated-aging gap</a:t>
             </a:r>
           </a:p>
         </p:txBody>
@@ -9269,7 +10028,7 @@
                 </a:solidFill>
                 <a:latin typeface="Arial"/>
               </a:rPr>
-              <a:t>•  Perovskite caught up to CIGS in &lt;10 years</a:t>
+              <a:t>•  Perovskite caught up to Si in &lt;10 years</a:t>
             </a:r>
           </a:p>
           <a:p>
@@ -9299,7 +10058,7 @@
                 </a:solidFill>
                 <a:latin typeface="Arial"/>
               </a:rPr>
-              <a:t> 100x</a:t>
+              <a:t> 100×</a:t>
             </a:r>
           </a:p>
           <a:p>
@@ -9311,7 +10070,7 @@
                 </a:solidFill>
                 <a:latin typeface="Arial"/>
               </a:rPr>
-              <a:t>•  Commercial deployment needs both</a:t>
+              <a:t>•  Commercial deployment needs both — motivates new absorber chemistries</a:t>
             </a:r>
           </a:p>
         </p:txBody>
@@ -9539,7 +10298,7 @@
                 </a:solidFill>
                 <a:latin typeface="Arial"/>
               </a:rPr>
-              <a:t>Six-step funnel</a:t>
+              <a:t>Six-step funnel: problem → screen → candidates → device → outlook</a:t>
             </a:r>
           </a:p>
         </p:txBody>
@@ -9887,7 +10646,7 @@
                 </a:solidFill>
                 <a:latin typeface="Arial"/>
               </a:rPr>
-              <a:t>Template-guided screening</a:t>
+              <a:t>Chalcogenide templates as the structural prior</a:t>
             </a:r>
           </a:p>
         </p:txBody>
@@ -9922,7 +10681,7 @@
                 </a:solidFill>
                 <a:latin typeface="Arial"/>
               </a:rPr>
-              <a:t>Perovskite ABX</a:t>
+              <a:t>AB</a:t>
             </a:r>
             <a:r>
               <a:rPr sz="1600" b="0" baseline="-25000">
@@ -9931,6 +10690,42 @@
                 </a:solidFill>
                 <a:latin typeface="Arial"/>
               </a:rPr>
+              <a:t>2</a:t>
+            </a:r>
+            <a:r>
+              <a:rPr sz="1600" b="0">
+                <a:solidFill>
+                  <a:srgbClr val="475569"/>
+                </a:solidFill>
+                <a:latin typeface="Arial"/>
+              </a:rPr>
+              <a:t>C</a:t>
+            </a:r>
+            <a:r>
+              <a:rPr sz="1600" b="0" baseline="-25000">
+                <a:solidFill>
+                  <a:srgbClr val="475569"/>
+                </a:solidFill>
+                <a:latin typeface="Arial"/>
+              </a:rPr>
+              <a:t>4</a:t>
+            </a:r>
+            <a:r>
+              <a:rPr sz="1600" b="0">
+                <a:solidFill>
+                  <a:srgbClr val="475569"/>
+                </a:solidFill>
+                <a:latin typeface="Arial"/>
+              </a:rPr>
+              <a:t> and ABC</a:t>
+            </a:r>
+            <a:r>
+              <a:rPr sz="1600" b="0" baseline="-25000">
+                <a:solidFill>
+                  <a:srgbClr val="475569"/>
+                </a:solidFill>
+                <a:latin typeface="Arial"/>
+              </a:rPr>
               <a:t>3</a:t>
             </a:r>
             <a:r>
@@ -9940,7 +10735,7 @@
                 </a:solidFill>
                 <a:latin typeface="Arial"/>
               </a:rPr>
-              <a:t> and chalcogenide skeletons</a:t>
+              <a:t> skeletons; heavy-p-block cations on chalcogen anions</a:t>
             </a:r>
           </a:p>
         </p:txBody>
@@ -9975,7 +10770,7 @@
                 </a:solidFill>
                 <a:latin typeface="Arial"/>
               </a:rPr>
-              <a:t>•  Two structural priors as filters</a:t>
+              <a:t>•  Anion: S, Se, Te. Selenides dominate the productive subspace.</a:t>
             </a:r>
           </a:p>
           <a:p>
@@ -9987,11 +10782,17 @@
                 </a:solidFill>
                 <a:latin typeface="Arial"/>
               </a:rPr>
-              <a:t>•  Constrains DB scan to physically plausible candidates</a:t>
-            </a:r>
-          </a:p>
-          <a:p>
-            <a:pPr algn="l"/>
+              <a:t>•  Cation: Sb, Sn, Bi (6s</a:t>
+            </a:r>
+            <a:r>
+              <a:rPr sz="1400" b="0" baseline="30000">
+                <a:solidFill>
+                  <a:srgbClr val="475569"/>
+                </a:solidFill>
+                <a:latin typeface="Arial"/>
+              </a:rPr>
+              <a:t>2</a:t>
+            </a:r>
             <a:r>
               <a:rPr sz="1400" b="0">
                 <a:solidFill>
@@ -9999,7 +10800,37 @@
                 </a:solidFill>
                 <a:latin typeface="Arial"/>
               </a:rPr>
-              <a:t>•  Enables small-sample ML</a:t>
+              <a:t> / 5s</a:t>
+            </a:r>
+            <a:r>
+              <a:rPr sz="1400" b="0" baseline="30000">
+                <a:solidFill>
+                  <a:srgbClr val="475569"/>
+                </a:solidFill>
+                <a:latin typeface="Arial"/>
+              </a:rPr>
+              <a:t>2</a:t>
+            </a:r>
+            <a:r>
+              <a:rPr sz="1400" b="0">
+                <a:solidFill>
+                  <a:srgbClr val="475569"/>
+                </a:solidFill>
+                <a:latin typeface="Arial"/>
+              </a:rPr>
+              <a:t> lone pair) + Cs / Ca / Sr / K spectator</a:t>
+            </a:r>
+          </a:p>
+          <a:p>
+            <a:pPr algn="l"/>
+            <a:r>
+              <a:rPr sz="1400" b="0">
+                <a:solidFill>
+                  <a:srgbClr val="475569"/>
+                </a:solidFill>
+                <a:latin typeface="Arial"/>
+              </a:rPr>
+              <a:t>•  Constrains DB scan to physically plausible, synthesisable candidates</a:t>
             </a:r>
           </a:p>
         </p:txBody>
@@ -10227,7 +11058,7 @@
                 </a:solidFill>
                 <a:latin typeface="Arial"/>
               </a:rPr>
-              <a:t>DB to lab</a:t>
+              <a:t>MP / OQMD → ML surrogate → DFT validation → device sim → expt</a:t>
             </a:r>
           </a:p>
         </p:txBody>

--- a/presentations/jmi-2026/output/jmi-2026.pptx
+++ b/presentations/jmi-2026/output/jmi-2026.pptx
@@ -3416,7 +3416,7 @@
                 </a:solidFill>
                 <a:latin typeface="Arial"/>
               </a:rPr>
-              <a:t>HSE06 + DFPT four-stage workflow per material</a:t>
+              <a:t>HSE06 + DFPT four-stage VASP workflow per material</a:t>
             </a:r>
           </a:p>
         </p:txBody>
@@ -3451,31 +3451,31 @@
                 </a:solidFill>
                 <a:latin typeface="Arial"/>
               </a:rPr>
-              <a:t>•  Stage 1 PBE relax · Stage 2 SCF · Stage 3 DFPT dielectric · Stage 4 HSE06 band</a:t>
-            </a:r>
-          </a:p>
-          <a:p>
-            <a:pPr algn="l"/>
-            <a:r>
-              <a:rPr sz="1400" b="0">
-                <a:solidFill>
-                  <a:srgbClr val="475569"/>
-                </a:solidFill>
-                <a:latin typeface="Arial"/>
-              </a:rPr>
-              <a:t>•  DFPT + HSE06 cost dominates: hours-to-days per structure on tight HPC budgets</a:t>
-            </a:r>
-          </a:p>
-          <a:p>
-            <a:pPr algn="l"/>
-            <a:r>
-              <a:rPr sz="1400" b="0">
-                <a:solidFill>
-                  <a:srgbClr val="475569"/>
-                </a:solidFill>
-                <a:latin typeface="Arial"/>
-              </a:rPr>
-              <a:t>•  MP / OQMD pool &gt; 10</a:t>
+              <a:t>•  Stage 1 PBE relax → Stage 2 SCF → Stage 3 DFPT dielectric → Stage 4 HSE06 band</a:t>
+            </a:r>
+          </a:p>
+          <a:p>
+            <a:pPr algn="l"/>
+            <a:r>
+              <a:rPr sz="1400" b="0">
+                <a:solidFill>
+                  <a:srgbClr val="475569"/>
+                </a:solidFill>
+                <a:latin typeface="Arial"/>
+              </a:rPr>
+              <a:t>•  DFPT + HSE06 dominate cost: hours-to-days per structure on ~64-core HPC</a:t>
+            </a:r>
+          </a:p>
+          <a:p>
+            <a:pPr algn="l"/>
+            <a:r>
+              <a:rPr sz="1400" b="0">
+                <a:solidFill>
+                  <a:srgbClr val="475569"/>
+                </a:solidFill>
+                <a:latin typeface="Arial"/>
+              </a:rPr>
+              <a:t>•  Pool MP + OQMD </a:t>
             </a:r>
             <a:r>
               <a:rPr sz="1400" b="0" baseline="30000">
@@ -3484,6 +3484,24 @@
                 </a:solidFill>
                 <a:latin typeface="Arial"/>
               </a:rPr>
+              <a:t>&gt;</a:t>
+            </a:r>
+            <a:r>
+              <a:rPr sz="1400" b="0">
+                <a:solidFill>
+                  <a:srgbClr val="475569"/>
+                </a:solidFill>
+                <a:latin typeface="Arial"/>
+              </a:rPr>
+              <a:t> 10</a:t>
+            </a:r>
+            <a:r>
+              <a:rPr sz="1400" b="0" baseline="30000">
+                <a:solidFill>
+                  <a:srgbClr val="475569"/>
+                </a:solidFill>
+                <a:latin typeface="Arial"/>
+              </a:rPr>
               <a:t>5</a:t>
             </a:r>
             <a:r>
@@ -3494,6 +3512,42 @@
                 <a:latin typeface="Arial"/>
               </a:rPr>
               <a:t> candidates — full-DFT enumeration is infeasible</a:t>
+            </a:r>
+          </a:p>
+          <a:p>
+            <a:pPr algn="l"/>
+            <a:r>
+              <a:rPr sz="1400" b="0">
+                <a:solidFill>
+                  <a:srgbClr val="475569"/>
+                </a:solidFill>
+                <a:latin typeface="Arial"/>
+              </a:rPr>
+              <a:t>•  Strategy: train a surrogate on a curated 473-material subset, extrapolate by ML</a:t>
+            </a:r>
+          </a:p>
+          <a:p>
+            <a:pPr algn="l"/>
+            <a:r>
+              <a:rPr sz="1400" b="0">
+                <a:solidFill>
+                  <a:srgbClr val="475569"/>
+                </a:solidFill>
+                <a:latin typeface="Arial"/>
+              </a:rPr>
+              <a:t>•  Acquire next DFT batch from the model's high-mean / high-σ tail (active learning)</a:t>
+            </a:r>
+          </a:p>
+          <a:p>
+            <a:pPr algn="l"/>
+            <a:r>
+              <a:rPr sz="1400" b="0">
+                <a:solidFill>
+                  <a:srgbClr val="475569"/>
+                </a:solidFill>
+                <a:latin typeface="Arial"/>
+              </a:rPr>
+              <a:t>•  Closes the loop: surrogate → ranked candidates → fresh DFT labels → re-fit</a:t>
             </a:r>
           </a:p>
         </p:txBody>
@@ -3721,7 +3775,7 @@
                 </a:solidFill>
                 <a:latin typeface="Arial"/>
               </a:rPr>
-              <a:t>Composition · structure · symmetry</a:t>
+              <a:t>Composition · structure · symmetry — Magpie + matminer</a:t>
             </a:r>
           </a:p>
         </p:txBody>
@@ -3742,8 +3796,8 @@
         </p:blipFill>
         <p:spPr>
           <a:xfrm>
-            <a:off x="457200" y="1828800"/>
-            <a:ext cx="4937760" cy="2926080"/>
+            <a:off x="1013591" y="1828800"/>
+            <a:ext cx="3824976" cy="2926080"/>
           </a:xfrm>
           <a:prstGeom prst="rect">
             <a:avLst/>
@@ -3780,31 +3834,85 @@
                 </a:solidFill>
                 <a:latin typeface="Arial"/>
               </a:rPr>
-              <a:t>•  Composition (~27 D): Magpie statistics over Z, χ, r, row, group, mass</a:t>
-            </a:r>
-          </a:p>
-          <a:p>
-            <a:pPr algn="l"/>
-            <a:r>
-              <a:rPr sz="1400" b="0">
-                <a:solidFill>
-                  <a:srgbClr val="475569"/>
-                </a:solidFill>
-                <a:latin typeface="Arial"/>
-              </a:rPr>
-              <a:t>•  Structure (140 D): CrystalNN fingerprint, RDF, density, packing</a:t>
-            </a:r>
-          </a:p>
-          <a:p>
-            <a:pPr algn="l"/>
-            <a:r>
-              <a:rPr sz="1400" b="0">
-                <a:solidFill>
-                  <a:srgbClr val="475569"/>
-                </a:solidFill>
-                <a:latin typeface="Arial"/>
-              </a:rPr>
-              <a:t>•  Cached numpy matrices · NaN-tolerant downstream model</a:t>
+              <a:t>•  Composition (~27 D): Magpie statistics over Z, χ, atomic radius, row, group, mass</a:t>
+            </a:r>
+          </a:p>
+          <a:p>
+            <a:pPr algn="l"/>
+            <a:r>
+              <a:rPr sz="1400" b="0">
+                <a:solidFill>
+                  <a:srgbClr val="475569"/>
+                </a:solidFill>
+                <a:latin typeface="Arial"/>
+              </a:rPr>
+              <a:t>•  Structure (140 D): CrystalNN site-fingerprint (122) · radial distribution function · density · packing</a:t>
+            </a:r>
+          </a:p>
+          <a:p>
+            <a:pPr algn="l"/>
+            <a:r>
+              <a:rPr sz="1400" b="0">
+                <a:solidFill>
+                  <a:srgbClr val="475569"/>
+                </a:solidFill>
+                <a:latin typeface="Arial"/>
+              </a:rPr>
+              <a:t>•  All featurisers tolerate NaN — routed to the appropriate side of every HistGBR split</a:t>
+            </a:r>
+          </a:p>
+          <a:p>
+            <a:pPr algn="l"/>
+            <a:r>
+              <a:rPr sz="1400" b="0">
+                <a:solidFill>
+                  <a:srgbClr val="475569"/>
+                </a:solidFill>
+                <a:latin typeface="Arial"/>
+              </a:rPr>
+              <a:t>•  Cached numpy matrices on disk → re-fits run in seconds, not minutes</a:t>
+            </a:r>
+          </a:p>
+          <a:p>
+            <a:pPr algn="l"/>
+            <a:r>
+              <a:rPr sz="1400" b="0">
+                <a:solidFill>
+                  <a:srgbClr val="475569"/>
+                </a:solidFill>
+                <a:latin typeface="Arial"/>
+              </a:rPr>
+              <a:t>•  Ablation extras (per-element fraction, prototype + space-group + chalcogen one-hot): worse</a:t>
+            </a:r>
+          </a:p>
+          <a:p>
+            <a:pPr algn="l"/>
+            <a:r>
+              <a:rPr sz="1400" b="0">
+                <a:solidFill>
+                  <a:srgbClr val="475569"/>
+                </a:solidFill>
+                <a:latin typeface="Arial"/>
+              </a:rPr>
+              <a:t>•  Frozen MEGNet embeddings give R</a:t>
+            </a:r>
+            <a:r>
+              <a:rPr sz="1400" b="0" baseline="30000">
+                <a:solidFill>
+                  <a:srgbClr val="475569"/>
+                </a:solidFill>
+                <a:latin typeface="Arial"/>
+              </a:rPr>
+              <a:t>2</a:t>
+            </a:r>
+            <a:r>
+              <a:rPr sz="1400" b="0">
+                <a:solidFill>
+                  <a:srgbClr val="475569"/>
+                </a:solidFill>
+                <a:latin typeface="Arial"/>
+              </a:rPr>
+              <a:t> = 0.366 — below hand-features baseline</a:t>
             </a:r>
           </a:p>
         </p:txBody>
@@ -3997,7 +4105,7 @@
                 </a:solidFill>
                 <a:latin typeface="Arial"/>
               </a:rPr>
-              <a:t>Small-sample model</a:t>
+              <a:t>Small-sample ML model</a:t>
             </a:r>
           </a:p>
         </p:txBody>
@@ -4071,8 +4179,8 @@
         </p:blipFill>
         <p:spPr>
           <a:xfrm>
-            <a:off x="457200" y="1828800"/>
-            <a:ext cx="4937760" cy="2926080"/>
+            <a:off x="975360" y="1828800"/>
+            <a:ext cx="3901440" cy="2926080"/>
           </a:xfrm>
           <a:prstGeom prst="rect">
             <a:avLst/>
@@ -4109,7 +4217,7 @@
                 </a:solidFill>
                 <a:latin typeface="Arial"/>
               </a:rPr>
-              <a:t>•  Deployable predictor: HistGradientBoostingRegressor, log</a:t>
+              <a:t>•  Deployable: HistGradientBoostingRegressor, log</a:t>
             </a:r>
             <a:r>
               <a:rPr sz="1400" b="0" baseline="-25000">
@@ -4151,7 +4259,115 @@
                 </a:solidFill>
                 <a:latin typeface="Arial"/>
               </a:rPr>
-              <a:t>•  Calibrated σ(x) from a separate GPR + RF stack drives UCB acquisition (κ = 2)</a:t>
+              <a:t>•  PV figure of merit y = f</a:t>
+            </a:r>
+            <a:r>
+              <a:rPr sz="1400" b="0" baseline="-25000">
+                <a:solidFill>
+                  <a:srgbClr val="475569"/>
+                </a:solidFill>
+                <a:latin typeface="Arial"/>
+              </a:rPr>
+              <a:t>gap</a:t>
+            </a:r>
+            <a:r>
+              <a:rPr sz="1400" b="0">
+                <a:solidFill>
+                  <a:srgbClr val="475569"/>
+                </a:solidFill>
+                <a:latin typeface="Arial"/>
+              </a:rPr>
+              <a:t>(E</a:t>
+            </a:r>
+            <a:r>
+              <a:rPr sz="1400" b="0" baseline="-25000">
+                <a:solidFill>
+                  <a:srgbClr val="475569"/>
+                </a:solidFill>
+                <a:latin typeface="Arial"/>
+              </a:rPr>
+              <a:t>g</a:t>
+            </a:r>
+            <a:r>
+              <a:rPr sz="1400" b="0">
+                <a:solidFill>
+                  <a:srgbClr val="475569"/>
+                </a:solidFill>
+                <a:latin typeface="Arial"/>
+              </a:rPr>
+              <a:t>) · 1 / (1 + m</a:t>
+            </a:r>
+            <a:r>
+              <a:rPr sz="1400" b="0" baseline="-25000">
+                <a:solidFill>
+                  <a:srgbClr val="475569"/>
+                </a:solidFill>
+                <a:latin typeface="Arial"/>
+              </a:rPr>
+              <a:t>avg</a:t>
+            </a:r>
+            <a:r>
+              <a:rPr sz="1400" b="0">
+                <a:solidFill>
+                  <a:srgbClr val="475569"/>
+                </a:solidFill>
+                <a:latin typeface="Arial"/>
+              </a:rPr>
+              <a:t>) · tanh(ε / 10) · 1 / (1 + E</a:t>
+            </a:r>
+            <a:r>
+              <a:rPr sz="1400" b="0" baseline="-25000">
+                <a:solidFill>
+                  <a:srgbClr val="475569"/>
+                </a:solidFill>
+                <a:latin typeface="Arial"/>
+              </a:rPr>
+              <a:t>b</a:t>
+            </a:r>
+            <a:r>
+              <a:rPr sz="1400" b="0">
+                <a:solidFill>
+                  <a:srgbClr val="475569"/>
+                </a:solidFill>
+                <a:latin typeface="Arial"/>
+              </a:rPr>
+              <a:t> / 0.1)</a:t>
+            </a:r>
+          </a:p>
+          <a:p>
+            <a:pPr algn="l"/>
+            <a:r>
+              <a:rPr sz="1400" b="0">
+                <a:solidFill>
+                  <a:srgbClr val="475569"/>
+                </a:solidFill>
+                <a:latin typeface="Arial"/>
+              </a:rPr>
+              <a:t>•  Each factor is a piece of device physics: SQ window · light carriers · screening · Wannier–Mott</a:t>
+            </a:r>
+          </a:p>
+          <a:p>
+            <a:pPr algn="l"/>
+            <a:r>
+              <a:rPr sz="1400" b="0">
+                <a:solidFill>
+                  <a:srgbClr val="475569"/>
+                </a:solidFill>
+                <a:latin typeface="Arial"/>
+              </a:rPr>
+              <a:t>•  Calibrated σ(x) from a separate GPR + RF stack: anisotropic Matérn-5/2 + WhiteKernel</a:t>
+            </a:r>
+          </a:p>
+          <a:p>
+            <a:pPr algn="l"/>
+            <a:r>
+              <a:rPr sz="1400" b="0">
+                <a:solidFill>
+                  <a:srgbClr val="475569"/>
+                </a:solidFill>
+                <a:latin typeface="Arial"/>
+              </a:rPr>
+              <a:t>•  UCB acquisition α = μ + 2σ ranks the next active-learning DFT batch</a:t>
             </a:r>
           </a:p>
         </p:txBody>
@@ -4400,8 +4616,8 @@
         </p:blipFill>
         <p:spPr>
           <a:xfrm>
-            <a:off x="457200" y="1828800"/>
-            <a:ext cx="4937760" cy="2926080"/>
+            <a:off x="457200" y="2491889"/>
+            <a:ext cx="4937760" cy="1599901"/>
           </a:xfrm>
           <a:prstGeom prst="rect">
             <a:avLst/>
@@ -4486,7 +4702,49 @@
                 </a:solidFill>
                 <a:latin typeface="Arial"/>
               </a:rPr>
-              <a:t> over the GPR / GB / ExT baseline</a:t>
+              <a:t> over the GPR / GB / ExT baseline (was 0.31)</a:t>
+            </a:r>
+          </a:p>
+          <a:p>
+            <a:pPr algn="l"/>
+            <a:r>
+              <a:rPr sz="1400" b="0">
+                <a:solidFill>
+                  <a:srgbClr val="475569"/>
+                </a:solidFill>
+                <a:latin typeface="Arial"/>
+              </a:rPr>
+              <a:t>•  Ablation: GBR 0.399 · ExtraTrees 0.234 · MEGNet fine-tune 0.307</a:t>
+            </a:r>
+          </a:p>
+          <a:p>
+            <a:pPr algn="l"/>
+            <a:r>
+              <a:rPr sz="1400" b="0">
+                <a:solidFill>
+                  <a:srgbClr val="475569"/>
+                </a:solidFill>
+                <a:latin typeface="Arial"/>
+              </a:rPr>
+              <a:t>•  Repeated OOF averaging tightens to global R</a:t>
+            </a:r>
+            <a:r>
+              <a:rPr sz="1400" b="0" baseline="30000">
+                <a:solidFill>
+                  <a:srgbClr val="475569"/>
+                </a:solidFill>
+                <a:latin typeface="Arial"/>
+              </a:rPr>
+              <a:t>2</a:t>
+            </a:r>
+            <a:r>
+              <a:rPr sz="1400" b="0">
+                <a:solidFill>
+                  <a:srgbClr val="475569"/>
+                </a:solidFill>
+                <a:latin typeface="Arial"/>
+              </a:rPr>
+              <a:t> = 0.492, top-20 recall 0.50</a:t>
             </a:r>
           </a:p>
           <a:p>
@@ -4516,7 +4774,37 @@
                 </a:solidFill>
                 <a:latin typeface="Arial"/>
               </a:rPr>
-              <a:t> ≈ 0 → transfer gap drives next active-learning batch</a:t>
+              <a:t> ≈ 0 — model does not extrapolate to unseen prototype</a:t>
+            </a:r>
+          </a:p>
+          <a:p>
+            <a:pPr algn="l"/>
+            <a:r>
+              <a:rPr sz="1400" b="0">
+                <a:solidFill>
+                  <a:srgbClr val="475569"/>
+                </a:solidFill>
+                <a:latin typeface="Arial"/>
+              </a:rPr>
+              <a:t>•  Chalcogen-grouped CV R</a:t>
+            </a:r>
+            <a:r>
+              <a:rPr sz="1400" b="0" baseline="30000">
+                <a:solidFill>
+                  <a:srgbClr val="475569"/>
+                </a:solidFill>
+                <a:latin typeface="Arial"/>
+              </a:rPr>
+              <a:t>2</a:t>
+            </a:r>
+            <a:r>
+              <a:rPr sz="1400" b="0">
+                <a:solidFill>
+                  <a:srgbClr val="475569"/>
+                </a:solidFill>
+                <a:latin typeface="Arial"/>
+              </a:rPr>
+              <a:t> ≈ 0.15 — Se hold-out is the hardest</a:t>
             </a:r>
           </a:p>
         </p:txBody>
@@ -4875,7 +5163,7 @@
                 </a:solidFill>
                 <a:latin typeface="Arial"/>
               </a:rPr>
-              <a:t>All 14 are chalcogenides · 11 / 14 are selenides · AB</a:t>
+              <a:t>All chalcogenides · 11 / 14 selenides · AB</a:t>
             </a:r>
             <a:r>
               <a:rPr sz="1600" b="0" baseline="-25000">
@@ -4932,8 +5220,8 @@
         </p:blipFill>
         <p:spPr>
           <a:xfrm>
-            <a:off x="457200" y="1828800"/>
-            <a:ext cx="4937760" cy="2926080"/>
+            <a:off x="592870" y="1828800"/>
+            <a:ext cx="4666418" cy="2926080"/>
           </a:xfrm>
           <a:prstGeom prst="rect">
             <a:avLst/>
@@ -4970,7 +5258,19 @@
                 </a:solidFill>
                 <a:latin typeface="Arial"/>
               </a:rPr>
-              <a:t>•  Anion-rich Se preferred; AB</a:t>
+              <a:t>•  Anion-rich Se preferred · 11 / 14 are selenides, top-6 all Se</a:t>
+            </a:r>
+          </a:p>
+          <a:p>
+            <a:pPr algn="l"/>
+            <a:r>
+              <a:rPr sz="1400" b="0">
+                <a:solidFill>
+                  <a:srgbClr val="475569"/>
+                </a:solidFill>
+                <a:latin typeface="Arial"/>
+              </a:rPr>
+              <a:t>•  AB</a:t>
             </a:r>
             <a:r>
               <a:rPr sz="1400" b="0" baseline="-25000">
@@ -5006,7 +5306,7 @@
                 </a:solidFill>
                 <a:latin typeface="Arial"/>
               </a:rPr>
-              <a:t> supplies 7 / 14, ABC</a:t>
+              <a:t> supplies 7 / 14 · ABC</a:t>
             </a:r>
             <a:r>
               <a:rPr sz="1400" b="0" baseline="-25000">
@@ -5054,19 +5354,31 @@
                 </a:solidFill>
                 <a:latin typeface="Arial"/>
               </a:rPr>
-              <a:t>•  Symmetry: Pnma (SG 62) holds 7 / 14 — extend into 12, 14, 72, 15 next</a:t>
-            </a:r>
-          </a:p>
-          <a:p>
-            <a:pPr algn="l"/>
-            <a:r>
-              <a:rPr sz="1400" b="0">
-                <a:solidFill>
-                  <a:srgbClr val="475569"/>
-                </a:solidFill>
-                <a:latin typeface="Arial"/>
-              </a:rPr>
-              <a:t>•  PV-score range 0.10 – 0.49 · ⟨E</a:t>
+              <a:t>•  Pnma (SG 62) holds 7 / 14 — extend into 12, 14, 72, 15 next</a:t>
+            </a:r>
+          </a:p>
+          <a:p>
+            <a:pPr algn="l"/>
+            <a:r>
+              <a:rPr sz="1400" b="0">
+                <a:solidFill>
+                  <a:srgbClr val="475569"/>
+                </a:solidFill>
+                <a:latin typeface="Arial"/>
+              </a:rPr>
+              <a:t>•  PV-score range 0.10 – 0.49 across the 14</a:t>
+            </a:r>
+          </a:p>
+          <a:p>
+            <a:pPr algn="l"/>
+            <a:r>
+              <a:rPr sz="1400" b="0">
+                <a:solidFill>
+                  <a:srgbClr val="475569"/>
+                </a:solidFill>
+                <a:latin typeface="Arial"/>
+              </a:rPr>
+              <a:t>•  ⟨E</a:t>
             </a:r>
             <a:r>
               <a:rPr sz="1400" b="0" baseline="-25000">
@@ -5084,7 +5396,7 @@
                 </a:solidFill>
                 <a:latin typeface="Arial"/>
               </a:rPr>
-              <a:t>⟩ = 1.32 eV, ⟨ε⟩ = 12.5, ⟨m⟩ = 0.58 m</a:t>
+              <a:t>⟩ = 1.32 eV · ⟨ε⟩ = 12.5 · ⟨m</a:t>
             </a:r>
             <a:r>
               <a:rPr sz="1400" b="0" baseline="-25000">
@@ -5093,7 +5405,64 @@
                 </a:solidFill>
                 <a:latin typeface="Arial"/>
               </a:rPr>
+              <a:t>avg</a:t>
+            </a:r>
+            <a:r>
+              <a:rPr sz="1400" b="0">
+                <a:solidFill>
+                  <a:srgbClr val="475569"/>
+                </a:solidFill>
+                <a:latin typeface="Arial"/>
+              </a:rPr>
+              <a:t>⟩ = 0.58 m</a:t>
+            </a:r>
+            <a:r>
+              <a:rPr sz="1400" b="0" baseline="-25000">
+                <a:solidFill>
+                  <a:srgbClr val="475569"/>
+                </a:solidFill>
+                <a:latin typeface="Arial"/>
+              </a:rPr>
               <a:t>0</a:t>
+            </a:r>
+          </a:p>
+          <a:p>
+            <a:pPr algn="l"/>
+            <a:r>
+              <a:rPr sz="1400" b="0">
+                <a:solidFill>
+                  <a:srgbClr val="475569"/>
+                </a:solidFill>
+                <a:latin typeface="Arial"/>
+              </a:rPr>
+              <a:t>•  24 % direct-gap; remaining 76 % retained for combined low-m</a:t>
+            </a:r>
+            <a:r>
+              <a:rPr sz="1400" b="0" baseline="30000">
+                <a:solidFill>
+                  <a:srgbClr val="475569"/>
+                </a:solidFill>
+                <a:latin typeface="Arial"/>
+              </a:rPr>
+              <a:t>*</a:t>
+            </a:r>
+            <a:r>
+              <a:rPr sz="1400" b="0">
+                <a:solidFill>
+                  <a:srgbClr val="475569"/>
+                </a:solidFill>
+                <a:latin typeface="Arial"/>
+              </a:rPr>
+              <a:t> / high-ε / low-E</a:t>
+            </a:r>
+            <a:r>
+              <a:rPr sz="1400" b="0" baseline="-25000">
+                <a:solidFill>
+                  <a:srgbClr val="475569"/>
+                </a:solidFill>
+                <a:latin typeface="Arial"/>
+              </a:rPr>
+              <a:t>b</a:t>
             </a:r>
           </a:p>
         </p:txBody>
@@ -5360,8 +5729,8 @@
         </p:blipFill>
         <p:spPr>
           <a:xfrm>
-            <a:off x="457200" y="1828800"/>
-            <a:ext cx="4937760" cy="2926080"/>
+            <a:off x="457200" y="2807841"/>
+            <a:ext cx="4937760" cy="967996"/>
           </a:xfrm>
           <a:prstGeom prst="rect">
             <a:avLst/>
@@ -5398,31 +5767,121 @@
                 </a:solidFill>
                 <a:latin typeface="Arial"/>
               </a:rPr>
-              <a:t>•  Stage 3 cleanliness filter: drop metallic / missing CONTCAR rows (174 dropped)</a:t>
-            </a:r>
-          </a:p>
-          <a:p>
-            <a:pPr algn="l"/>
-            <a:r>
-              <a:rPr sz="1400" b="0">
-                <a:solidFill>
-                  <a:srgbClr val="475569"/>
-                </a:solidFill>
-                <a:latin typeface="Arial"/>
-              </a:rPr>
-              <a:t>•  Stage 4: PV score y &gt; 0.05 → 41 promising</a:t>
-            </a:r>
-          </a:p>
-          <a:p>
-            <a:pPr algn="l"/>
-            <a:r>
-              <a:rPr sz="1400" b="0">
-                <a:solidFill>
-                  <a:srgbClr val="475569"/>
-                </a:solidFill>
-                <a:latin typeface="Arial"/>
-              </a:rPr>
-              <a:t>•  Stage 5: y &gt; 0.10 → 14-material action list, feeds next active-learning DFT round</a:t>
+              <a:t>•  Stage 1: &gt; 10</a:t>
+            </a:r>
+            <a:r>
+              <a:rPr sz="1400" b="0" baseline="30000">
+                <a:solidFill>
+                  <a:srgbClr val="475569"/>
+                </a:solidFill>
+                <a:latin typeface="Arial"/>
+              </a:rPr>
+              <a:t>5</a:t>
+            </a:r>
+            <a:r>
+              <a:rPr sz="1400" b="0">
+                <a:solidFill>
+                  <a:srgbClr val="475569"/>
+                </a:solidFill>
+                <a:latin typeface="Arial"/>
+              </a:rPr>
+              <a:t> MP + OQMD entries</a:t>
+            </a:r>
+          </a:p>
+          <a:p>
+            <a:pPr algn="l"/>
+            <a:r>
+              <a:rPr sz="1400" b="0">
+                <a:solidFill>
+                  <a:srgbClr val="475569"/>
+                </a:solidFill>
+                <a:latin typeface="Arial"/>
+              </a:rPr>
+              <a:t>•  Stage 2: 647 with full HSE band + DFPT dielectric completed</a:t>
+            </a:r>
+          </a:p>
+          <a:p>
+            <a:pPr algn="l"/>
+            <a:r>
+              <a:rPr sz="1400" b="0">
+                <a:solidFill>
+                  <a:srgbClr val="475569"/>
+                </a:solidFill>
+                <a:latin typeface="Arial"/>
+              </a:rPr>
+              <a:t>•  Stage 3: 473 ML-ready (drop metallic / missing CONTCAR — 174 dropped)</a:t>
+            </a:r>
+          </a:p>
+          <a:p>
+            <a:pPr algn="l"/>
+            <a:r>
+              <a:rPr sz="1400" b="0">
+                <a:solidFill>
+                  <a:srgbClr val="475569"/>
+                </a:solidFill>
+                <a:latin typeface="Arial"/>
+              </a:rPr>
+              <a:t>•  Stage 4: 41 PV-promising (composite y </a:t>
+            </a:r>
+            <a:r>
+              <a:rPr sz="1400" b="0" baseline="30000">
+                <a:solidFill>
+                  <a:srgbClr val="475569"/>
+                </a:solidFill>
+                <a:latin typeface="Arial"/>
+              </a:rPr>
+              <a:t>&gt;</a:t>
+            </a:r>
+            <a:r>
+              <a:rPr sz="1400" b="0">
+                <a:solidFill>
+                  <a:srgbClr val="475569"/>
+                </a:solidFill>
+                <a:latin typeface="Arial"/>
+              </a:rPr>
+              <a:t> 0.05)</a:t>
+            </a:r>
+          </a:p>
+          <a:p>
+            <a:pPr algn="l"/>
+            <a:r>
+              <a:rPr sz="1400" b="0">
+                <a:solidFill>
+                  <a:srgbClr val="475569"/>
+                </a:solidFill>
+                <a:latin typeface="Arial"/>
+              </a:rPr>
+              <a:t>•  Stage 5: 14-material action list (y </a:t>
+            </a:r>
+            <a:r>
+              <a:rPr sz="1400" b="0" baseline="30000">
+                <a:solidFill>
+                  <a:srgbClr val="475569"/>
+                </a:solidFill>
+                <a:latin typeface="Arial"/>
+              </a:rPr>
+              <a:t>&gt;</a:t>
+            </a:r>
+            <a:r>
+              <a:rPr sz="1400" b="0">
+                <a:solidFill>
+                  <a:srgbClr val="475569"/>
+                </a:solidFill>
+                <a:latin typeface="Arial"/>
+              </a:rPr>
+              <a:t> 0.10) feeds next DFT round</a:t>
+            </a:r>
+          </a:p>
+          <a:p>
+            <a:pPr algn="l"/>
+            <a:r>
+              <a:rPr sz="1400" b="0">
+                <a:solidFill>
+                  <a:srgbClr val="475569"/>
+                </a:solidFill>
+                <a:latin typeface="Arial"/>
+              </a:rPr>
+              <a:t>•  Funnel narrows by 4 orders of magnitude — actionable size for synthesis triage</a:t>
             </a:r>
           </a:p>
         </p:txBody>
@@ -5731,7 +6190,7 @@
                 </a:solidFill>
                 <a:latin typeface="Arial"/>
               </a:rPr>
-              <a:t> · Pnma · the Shockley–Queisser bullseye</a:t>
+              <a:t> · Pnma (SG 62) · the Shockley–Queisser bullseye</a:t>
             </a:r>
           </a:p>
         </p:txBody>
@@ -5752,8 +6211,8 @@
         </p:blipFill>
         <p:spPr>
           <a:xfrm>
-            <a:off x="457200" y="1828800"/>
-            <a:ext cx="4937760" cy="2926080"/>
+            <a:off x="1552170" y="1828800"/>
+            <a:ext cx="2747819" cy="2926080"/>
           </a:xfrm>
           <a:prstGeom prst="rect">
             <a:avLst/>
@@ -5808,7 +6267,7 @@
                 </a:solidFill>
                 <a:latin typeface="Arial"/>
               </a:rPr>
-              <a:t> = 1.12 eV (within 0.22 eV of SQ optimum 1.34 eV)</a:t>
+              <a:t> = 1.12 eV — within 0.22 eV of SQ optimum (1.34 eV)</a:t>
             </a:r>
           </a:p>
           <a:p>
@@ -5856,7 +6315,19 @@
                 </a:solidFill>
                 <a:latin typeface="Arial"/>
               </a:rPr>
-              <a:t> · ε</a:t>
+              <a:t> — light carriers, mobility comparable to GaAs</a:t>
+            </a:r>
+          </a:p>
+          <a:p>
+            <a:pPr algn="l"/>
+            <a:r>
+              <a:rPr sz="1400" b="0">
+                <a:solidFill>
+                  <a:srgbClr val="475569"/>
+                </a:solidFill>
+                <a:latin typeface="Arial"/>
+              </a:rPr>
+              <a:t>•  ε</a:t>
             </a:r>
             <a:r>
               <a:rPr sz="1400" b="0" baseline="-25000">
@@ -5874,7 +6345,7 @@
                 </a:solidFill>
                 <a:latin typeface="Arial"/>
               </a:rPr>
-              <a:t> = 19.5 (strong dielectric screening)</a:t>
+              <a:t> = 19.5 — strong dielectric screening, suppresses Frenkel-exciton formation</a:t>
             </a:r>
           </a:p>
           <a:p>
@@ -5922,7 +6393,7 @@
                 </a:solidFill>
                 <a:latin typeface="Arial"/>
               </a:rPr>
-              <a:t>T at 300 K (Wannier–Mott)</a:t>
+              <a:t>T at 300 K (Wannier–Mott regime)</a:t>
             </a:r>
           </a:p>
           <a:p>
@@ -5935,6 +6406,18 @@
                 <a:latin typeface="Arial"/>
               </a:rPr>
               <a:t>•  Composite PV score y = 0.487 — top of the screened set</a:t>
+            </a:r>
+          </a:p>
+          <a:p>
+            <a:pPr algn="l"/>
+            <a:r>
+              <a:rPr sz="1400" b="0">
+                <a:solidFill>
+                  <a:srgbClr val="475569"/>
+                </a:solidFill>
+                <a:latin typeface="Arial"/>
+              </a:rPr>
+              <a:t>•  Synthesis precedent: Sn–Zr–Se ternary phases reported, no PV device yet</a:t>
             </a:r>
           </a:p>
         </p:txBody>
@@ -6264,8 +6747,8 @@
         </p:blipFill>
         <p:spPr>
           <a:xfrm>
-            <a:off x="457200" y="1828800"/>
-            <a:ext cx="4937760" cy="2926080"/>
+            <a:off x="1710519" y="1828800"/>
+            <a:ext cx="2431121" cy="2926080"/>
           </a:xfrm>
           <a:prstGeom prst="rect">
             <a:avLst/>
@@ -6320,7 +6803,19 @@
                 </a:solidFill>
                 <a:latin typeface="Arial"/>
               </a:rPr>
-              <a:t> = 1.28 eV · m</a:t>
+              <a:t> = 1.28 eV — also near the SQ optimum</a:t>
+            </a:r>
+          </a:p>
+          <a:p>
+            <a:pPr algn="l"/>
+            <a:r>
+              <a:rPr sz="1400" b="0">
+                <a:solidFill>
+                  <a:srgbClr val="475569"/>
+                </a:solidFill>
+                <a:latin typeface="Arial"/>
+              </a:rPr>
+              <a:t>•  m</a:t>
             </a:r>
             <a:r>
               <a:rPr sz="1400" b="0" baseline="-25000">
@@ -6349,6 +6844,15 @@
               </a:rPr>
               <a:t>0</a:t>
             </a:r>
+            <a:r>
+              <a:rPr sz="1400" b="0">
+                <a:solidFill>
+                  <a:srgbClr val="475569"/>
+                </a:solidFill>
+                <a:latin typeface="Arial"/>
+              </a:rPr>
+              <a:t> — heavier than Hit #1 but still PV-grade</a:t>
+            </a:r>
           </a:p>
           <a:p>
             <a:pPr algn="l"/>
@@ -6377,7 +6881,7 @@
                 </a:solidFill>
                 <a:latin typeface="Arial"/>
               </a:rPr>
-              <a:t> = 12.6 · E</a:t>
+              <a:t> = 12.6 — moderate screening; E</a:t>
             </a:r>
             <a:r>
               <a:rPr sz="1400" b="0" baseline="-25000">
@@ -6395,19 +6899,79 @@
                 </a:solidFill>
                 <a:latin typeface="Arial"/>
               </a:rPr>
-              <a:t> = 56 meV (Wannier–Mott regime)</a:t>
-            </a:r>
-          </a:p>
-          <a:p>
-            <a:pPr algn="l"/>
-            <a:r>
-              <a:rPr sz="1400" b="0">
-                <a:solidFill>
-                  <a:srgbClr val="475569"/>
-                </a:solidFill>
-                <a:latin typeface="Arial"/>
-              </a:rPr>
-              <a:t>•  PV score y = 0.298 — different prototype family, complements Hit #1</a:t>
+              <a:t> = 56 meV</a:t>
+            </a:r>
+          </a:p>
+          <a:p>
+            <a:pPr algn="l"/>
+            <a:r>
+              <a:rPr sz="1400" b="0">
+                <a:solidFill>
+                  <a:srgbClr val="475569"/>
+                </a:solidFill>
+                <a:latin typeface="Arial"/>
+              </a:rPr>
+              <a:t>•  PV score y = 0.298 — different prototype family complements Hit #1</a:t>
+            </a:r>
+          </a:p>
+          <a:p>
+            <a:pPr algn="l"/>
+            <a:r>
+              <a:rPr sz="1400" b="0">
+                <a:solidFill>
+                  <a:srgbClr val="475569"/>
+                </a:solidFill>
+                <a:latin typeface="Arial"/>
+              </a:rPr>
+              <a:t>•  Sb 5s</a:t>
+            </a:r>
+            <a:r>
+              <a:rPr sz="1400" b="0" baseline="30000">
+                <a:solidFill>
+                  <a:srgbClr val="475569"/>
+                </a:solidFill>
+                <a:latin typeface="Arial"/>
+              </a:rPr>
+              <a:t>2</a:t>
+            </a:r>
+            <a:r>
+              <a:rPr sz="1400" b="0">
+                <a:solidFill>
+                  <a:srgbClr val="475569"/>
+                </a:solidFill>
+                <a:latin typeface="Arial"/>
+              </a:rPr>
+              <a:t> lone-pair character produces deep, dispersive VBM</a:t>
+            </a:r>
+          </a:p>
+          <a:p>
+            <a:pPr algn="l"/>
+            <a:r>
+              <a:rPr sz="1400" b="0">
+                <a:solidFill>
+                  <a:srgbClr val="475569"/>
+                </a:solidFill>
+                <a:latin typeface="Arial"/>
+              </a:rPr>
+              <a:t>•  Cs</a:t>
+            </a:r>
+            <a:r>
+              <a:rPr sz="1400" b="0" baseline="-25000">
+                <a:solidFill>
+                  <a:srgbClr val="475569"/>
+                </a:solidFill>
+                <a:latin typeface="Arial"/>
+              </a:rPr>
+              <a:t>2</a:t>
+            </a:r>
+            <a:r>
+              <a:rPr sz="1400" b="0">
+                <a:solidFill>
+                  <a:srgbClr val="475569"/>
+                </a:solidFill>
+                <a:latin typeface="Arial"/>
+              </a:rPr>
+              <a:t>SbSe-type ternaries known synthesisable from solution routes</a:t>
             </a:r>
           </a:p>
         </p:txBody>
@@ -6932,19 +7496,97 @@
                 </a:solidFill>
                 <a:latin typeface="Arial"/>
               </a:rPr>
-              <a:t>•  Need carrier transport at full stack scale (drift-diffusion + Poisson)</a:t>
-            </a:r>
-          </a:p>
-          <a:p>
-            <a:pPr algn="l"/>
-            <a:r>
-              <a:rPr sz="1400" b="0">
-                <a:solidFill>
-                  <a:srgbClr val="475569"/>
-                </a:solidFill>
-                <a:latin typeface="Arial"/>
-              </a:rPr>
-              <a:t>•  Need TMM optics, contacts, hysteresis, mobile ions (perovskite)</a:t>
+              <a:t>•  DFT delivers E</a:t>
+            </a:r>
+            <a:r>
+              <a:rPr sz="1400" b="0" baseline="-25000">
+                <a:solidFill>
+                  <a:srgbClr val="475569"/>
+                </a:solidFill>
+                <a:latin typeface="Arial"/>
+              </a:rPr>
+              <a:t>g</a:t>
+            </a:r>
+            <a:r>
+              <a:rPr sz="1400" b="0">
+                <a:solidFill>
+                  <a:srgbClr val="475569"/>
+                </a:solidFill>
+                <a:latin typeface="Arial"/>
+              </a:rPr>
+              <a:t>, m</a:t>
+            </a:r>
+            <a:r>
+              <a:rPr sz="1400" b="0" baseline="30000">
+                <a:solidFill>
+                  <a:srgbClr val="475569"/>
+                </a:solidFill>
+                <a:latin typeface="Arial"/>
+              </a:rPr>
+              <a:t>*</a:t>
+            </a:r>
+            <a:r>
+              <a:rPr sz="1400" b="0">
+                <a:solidFill>
+                  <a:srgbClr val="475569"/>
+                </a:solidFill>
+                <a:latin typeface="Arial"/>
+              </a:rPr>
+              <a:t>, ε, E</a:t>
+            </a:r>
+            <a:r>
+              <a:rPr sz="1400" b="0" baseline="-25000">
+                <a:solidFill>
+                  <a:srgbClr val="475569"/>
+                </a:solidFill>
+                <a:latin typeface="Arial"/>
+              </a:rPr>
+              <a:t>b</a:t>
+            </a:r>
+            <a:r>
+              <a:rPr sz="1400" b="0">
+                <a:solidFill>
+                  <a:srgbClr val="475569"/>
+                </a:solidFill>
+                <a:latin typeface="Arial"/>
+              </a:rPr>
+              <a:t> — all bulk material-level descriptors</a:t>
+            </a:r>
+          </a:p>
+          <a:p>
+            <a:pPr algn="l"/>
+            <a:r>
+              <a:rPr sz="1400" b="0">
+                <a:solidFill>
+                  <a:srgbClr val="475569"/>
+                </a:solidFill>
+                <a:latin typeface="Arial"/>
+              </a:rPr>
+              <a:t>•  Device PCE depends on stack geometry, contacts, optical absorption, recombination</a:t>
+            </a:r>
+          </a:p>
+          <a:p>
+            <a:pPr algn="l"/>
+            <a:r>
+              <a:rPr sz="1400" b="0">
+                <a:solidFill>
+                  <a:srgbClr val="475569"/>
+                </a:solidFill>
+                <a:latin typeface="Arial"/>
+              </a:rPr>
+              <a:t>•  Need drift-diffusion + Poisson at full layer scale (HTL · absorber · ETL)</a:t>
+            </a:r>
+          </a:p>
+          <a:p>
+            <a:pPr algn="l"/>
+            <a:r>
+              <a:rPr sz="1400" b="0">
+                <a:solidFill>
+                  <a:srgbClr val="475569"/>
+                </a:solidFill>
+                <a:latin typeface="Arial"/>
+              </a:rPr>
+              <a:t>•  Need TMM optics for thin-film interference / coherent absorption</a:t>
             </a:r>
           </a:p>
           <a:p>
@@ -6957,6 +7599,18 @@
                 <a:latin typeface="Arial"/>
               </a:rPr>
               <a:t>•  Need 2D effects: grains, lateral non-uniformity, single-grain-boundary recomb</a:t>
+            </a:r>
+          </a:p>
+          <a:p>
+            <a:pPr algn="l"/>
+            <a:r>
+              <a:rPr sz="1400" b="0">
+                <a:solidFill>
+                  <a:srgbClr val="475569"/>
+                </a:solidFill>
+                <a:latin typeface="Arial"/>
+              </a:rPr>
+              <a:t>•  Need mobile-ion transport for hysteresis (perovskite-class absorbers)</a:t>
             </a:r>
           </a:p>
         </p:txBody>
@@ -7219,19 +7873,19 @@
                 </a:solidFill>
                 <a:latin typeface="Arial"/>
               </a:rPr>
-              <a:t>•  Backend: Python solver + FastAPI SSE streaming</a:t>
-            </a:r>
-          </a:p>
-          <a:p>
-            <a:pPr algn="l"/>
-            <a:r>
-              <a:rPr sz="1400" b="0">
-                <a:solidFill>
-                  <a:srgbClr val="475569"/>
-                </a:solidFill>
-                <a:latin typeface="Arial"/>
-              </a:rPr>
-              <a:t>•  Frontend: Vite/TS workstation with publication-mode plotting</a:t>
+              <a:t>•  Backend: Python solver + FastAPI SSE streaming for live progress</a:t>
+            </a:r>
+          </a:p>
+          <a:p>
+            <a:pPr algn="l"/>
+            <a:r>
+              <a:rPr sz="1400" b="0">
+                <a:solidFill>
+                  <a:srgbClr val="475569"/>
+                </a:solidFill>
+                <a:latin typeface="Arial"/>
+              </a:rPr>
+              <a:t>•  Frontend: Vite / TypeScript workstation with publication-mode plotting</a:t>
             </a:r>
           </a:p>
           <a:p>
@@ -7244,6 +7898,78 @@
                 <a:latin typeface="Arial"/>
               </a:rPr>
               <a:t>•  Solver: Radau implicit + BDF fallback + bisection-in-time on stiff steps</a:t>
+            </a:r>
+          </a:p>
+          <a:p>
+            <a:pPr algn="l"/>
+            <a:r>
+              <a:rPr sz="1400" b="0">
+                <a:solidFill>
+                  <a:srgbClr val="475569"/>
+                </a:solidFill>
+                <a:latin typeface="Arial"/>
+              </a:rPr>
+              <a:t>•  TMM optics: coherent multi-layer with regenerated ASTM G-173 AM1.5G spectrum</a:t>
+            </a:r>
+          </a:p>
+          <a:p>
+            <a:pPr algn="l"/>
+            <a:r>
+              <a:rPr sz="1400" b="0">
+                <a:solidFill>
+                  <a:srgbClr val="475569"/>
+                </a:solidFill>
+                <a:latin typeface="Arial"/>
+              </a:rPr>
+              <a:t>•  Selective contacts: Robin S</a:t>
+            </a:r>
+            <a:r>
+              <a:rPr sz="1400" b="0" baseline="-25000">
+                <a:solidFill>
+                  <a:srgbClr val="475569"/>
+                </a:solidFill>
+                <a:latin typeface="Arial"/>
+              </a:rPr>
+              <a:t>n</a:t>
+            </a:r>
+            <a:r>
+              <a:rPr sz="1400" b="0">
+                <a:solidFill>
+                  <a:srgbClr val="475569"/>
+                </a:solidFill>
+                <a:latin typeface="Arial"/>
+              </a:rPr>
+              <a:t>, S</a:t>
+            </a:r>
+            <a:r>
+              <a:rPr sz="1400" b="0" baseline="-25000">
+                <a:solidFill>
+                  <a:srgbClr val="475569"/>
+                </a:solidFill>
+                <a:latin typeface="Arial"/>
+              </a:rPr>
+              <a:t>p</a:t>
+            </a:r>
+            <a:r>
+              <a:rPr sz="1400" b="0">
+                <a:solidFill>
+                  <a:srgbClr val="475569"/>
+                </a:solidFill>
+                <a:latin typeface="Arial"/>
+              </a:rPr>
+              <a:t> formulation, validated 2D ↔ 1D parity at 6 µV</a:t>
+            </a:r>
+          </a:p>
+          <a:p>
+            <a:pPr algn="l"/>
+            <a:r>
+              <a:rPr sz="1400" b="0">
+                <a:solidFill>
+                  <a:srgbClr val="475569"/>
+                </a:solidFill>
+                <a:latin typeface="Arial"/>
+              </a:rPr>
+              <a:t>•  Open-source, scriptable, REST-driven — composable into screening pipelines</a:t>
             </a:r>
           </a:p>
         </p:txBody>
@@ -7492,8 +8218,8 @@
         </p:blipFill>
         <p:spPr>
           <a:xfrm>
-            <a:off x="457200" y="1828800"/>
-            <a:ext cx="4937760" cy="2926080"/>
+            <a:off x="457200" y="1984785"/>
+            <a:ext cx="4937760" cy="2614108"/>
           </a:xfrm>
           <a:prstGeom prst="rect">
             <a:avLst/>
@@ -7780,8 +8506,8 @@
         </p:blipFill>
         <p:spPr>
           <a:xfrm>
-            <a:off x="457200" y="1828800"/>
-            <a:ext cx="4937760" cy="2926080"/>
+            <a:off x="457200" y="1909267"/>
+            <a:ext cx="4937760" cy="2765145"/>
           </a:xfrm>
           <a:prstGeom prst="rect">
             <a:avLst/>
@@ -7848,7 +8574,7 @@
                 </a:solidFill>
                 <a:latin typeface="Arial"/>
               </a:rPr>
-              <a:t> = 0.91 V → 2D V</a:t>
+              <a:t> = 0.910 V → 2D V</a:t>
             </a:r>
             <a:r>
               <a:rPr sz="1400" b="0" baseline="-25000">
@@ -7866,19 +8592,55 @@
                 </a:solidFill>
                 <a:latin typeface="Arial"/>
               </a:rPr>
-              <a:t> = 0.86 V (real GB-recomb signal)</a:t>
-            </a:r>
-          </a:p>
-          <a:p>
-            <a:pPr algn="l"/>
-            <a:r>
-              <a:rPr sz="1400" b="0">
-                <a:solidFill>
-                  <a:srgbClr val="475569"/>
-                </a:solidFill>
-                <a:latin typeface="Arial"/>
-              </a:rPr>
-              <a:t>•  Captured fidelity is the prerequisite for predicting candidate-material performance</a:t>
+              <a:t> = 0.860 V</a:t>
+            </a:r>
+          </a:p>
+          <a:p>
+            <a:pPr algn="l"/>
+            <a:r>
+              <a:rPr sz="1400" b="0">
+                <a:solidFill>
+                  <a:srgbClr val="475569"/>
+                </a:solidFill>
+                <a:latin typeface="Arial"/>
+              </a:rPr>
+              <a:t>•  50 mV drop is the real grain-boundary recombination signal</a:t>
+            </a:r>
+          </a:p>
+          <a:p>
+            <a:pPr algn="l"/>
+            <a:r>
+              <a:rPr sz="1400" b="0">
+                <a:solidFill>
+                  <a:srgbClr val="475569"/>
+                </a:solidFill>
+                <a:latin typeface="Arial"/>
+              </a:rPr>
+              <a:t>•  1D would mis-predict device performance by hiding this loss channel</a:t>
+            </a:r>
+          </a:p>
+          <a:p>
+            <a:pPr algn="l"/>
+            <a:r>
+              <a:rPr sz="1400" b="0">
+                <a:solidFill>
+                  <a:srgbClr val="475569"/>
+                </a:solidFill>
+                <a:latin typeface="Arial"/>
+              </a:rPr>
+              <a:t>•  2D is the prerequisite for honest candidate-material PCE prediction</a:t>
+            </a:r>
+          </a:p>
+          <a:p>
+            <a:pPr algn="l"/>
+            <a:r>
+              <a:rPr sz="1400" b="0">
+                <a:solidFill>
+                  <a:srgbClr val="475569"/>
+                </a:solidFill>
+                <a:latin typeface="Arial"/>
+              </a:rPr>
+              <a:t>•  Solver throughput: 28-voltage 2D sweep finishes in ~22 min on 4 cores</a:t>
             </a:r>
           </a:p>
         </p:txBody>
@@ -8294,8 +9056,8 @@
         </p:blipFill>
         <p:spPr>
           <a:xfrm>
-            <a:off x="457200" y="1828800"/>
-            <a:ext cx="4937760" cy="2926080"/>
+            <a:off x="457200" y="1909267"/>
+            <a:ext cx="4937760" cy="2765145"/>
           </a:xfrm>
           <a:prstGeom prst="rect">
             <a:avLst/>
@@ -8332,19 +9094,37 @@
                 </a:solidFill>
                 <a:latin typeface="Arial"/>
               </a:rPr>
-              <a:t>•  Closes the loop from DB scan to predicted device performance</a:t>
-            </a:r>
-          </a:p>
-          <a:p>
-            <a:pPr algn="l"/>
-            <a:r>
-              <a:rPr sz="1400" b="0">
-                <a:solidFill>
-                  <a:srgbClr val="475569"/>
-                </a:solidFill>
-                <a:latin typeface="Arial"/>
-              </a:rPr>
-              <a:t>•  Placeholder candidate today — real Se</a:t>
+              <a:t>•  Closes the loop from &gt; 10</a:t>
+            </a:r>
+            <a:r>
+              <a:rPr sz="1400" b="0" baseline="30000">
+                <a:solidFill>
+                  <a:srgbClr val="475569"/>
+                </a:solidFill>
+                <a:latin typeface="Arial"/>
+              </a:rPr>
+              <a:t>5</a:t>
+            </a:r>
+            <a:r>
+              <a:rPr sz="1400" b="0">
+                <a:solidFill>
+                  <a:srgbClr val="475569"/>
+                </a:solidFill>
+                <a:latin typeface="Arial"/>
+              </a:rPr>
+              <a:t> DB scan to predicted device performance</a:t>
+            </a:r>
+          </a:p>
+          <a:p>
+            <a:pPr algn="l"/>
+            <a:r>
+              <a:rPr sz="1400" b="0">
+                <a:solidFill>
+                  <a:srgbClr val="475569"/>
+                </a:solidFill>
+                <a:latin typeface="Arial"/>
+              </a:rPr>
+              <a:t>•  Placeholder candidate today — V</a:t>
             </a:r>
             <a:r>
               <a:rPr sz="1400" b="0" baseline="-25000">
@@ -8353,6 +9133,54 @@
                 </a:solidFill>
                 <a:latin typeface="Arial"/>
               </a:rPr>
+              <a:t>oc</a:t>
+            </a:r>
+            <a:r>
+              <a:rPr sz="1400" b="0">
+                <a:solidFill>
+                  <a:srgbClr val="475569"/>
+                </a:solidFill>
+                <a:latin typeface="Arial"/>
+              </a:rPr>
+              <a:t> +30 mV nudge over MAPbI</a:t>
+            </a:r>
+            <a:r>
+              <a:rPr sz="1400" b="0" baseline="-25000">
+                <a:solidFill>
+                  <a:srgbClr val="475569"/>
+                </a:solidFill>
+                <a:latin typeface="Arial"/>
+              </a:rPr>
+              <a:t>3</a:t>
+            </a:r>
+            <a:r>
+              <a:rPr sz="1400" b="0">
+                <a:solidFill>
+                  <a:srgbClr val="475569"/>
+                </a:solidFill>
+                <a:latin typeface="Arial"/>
+              </a:rPr>
+              <a:t> baseline</a:t>
+            </a:r>
+          </a:p>
+          <a:p>
+            <a:pPr algn="l"/>
+            <a:r>
+              <a:rPr sz="1400" b="0">
+                <a:solidFill>
+                  <a:srgbClr val="475569"/>
+                </a:solidFill>
+                <a:latin typeface="Arial"/>
+              </a:rPr>
+              <a:t>•  Real Se</a:t>
+            </a:r>
+            <a:r>
+              <a:rPr sz="1400" b="0" baseline="-25000">
+                <a:solidFill>
+                  <a:srgbClr val="475569"/>
+                </a:solidFill>
+                <a:latin typeface="Arial"/>
+              </a:rPr>
               <a:t>16</a:t>
             </a:r>
             <a:r>
@@ -8398,7 +9226,31 @@
                 </a:solidFill>
                 <a:latin typeface="Arial"/>
               </a:rPr>
-              <a:t> J–V slots in once TMM optics + DFT params land in the 2D solver</a:t>
+              <a:t> J–V slots in once TMM n,k + DFT params land in the 2D solver</a:t>
+            </a:r>
+          </a:p>
+          <a:p>
+            <a:pPr algn="l"/>
+            <a:r>
+              <a:rPr sz="1400" b="0">
+                <a:solidFill>
+                  <a:srgbClr val="475569"/>
+                </a:solidFill>
+                <a:latin typeface="Arial"/>
+              </a:rPr>
+              <a:t>•  Predicted device PCE is the metric synthesis groups care about</a:t>
+            </a:r>
+          </a:p>
+          <a:p>
+            <a:pPr algn="l"/>
+            <a:r>
+              <a:rPr sz="1400" b="0">
+                <a:solidFill>
+                  <a:srgbClr val="475569"/>
+                </a:solidFill>
+                <a:latin typeface="Arial"/>
+              </a:rPr>
+              <a:t>•  Sets up the experimental collaboration with explicit, falsifiable performance targets</a:t>
             </a:r>
           </a:p>
         </p:txBody>
@@ -8661,7 +9513,7 @@
                 </a:solidFill>
                 <a:latin typeface="Arial"/>
               </a:rPr>
-              <a:t>•  Multi-task learning on the ~36 k MP PBE gaps (closes prototype-grouped R</a:t>
+              <a:t>•  Multi-task learning on the ~36 k MP PBE gaps — closes prototype-grouped R</a:t>
             </a:r>
             <a:r>
               <a:rPr sz="1400" b="0" baseline="30000">
@@ -8679,19 +9531,19 @@
                 </a:solidFill>
                 <a:latin typeface="Arial"/>
               </a:rPr>
-              <a:t> gap)</a:t>
-            </a:r>
-          </a:p>
-          <a:p>
-            <a:pPr algn="l"/>
-            <a:r>
-              <a:rPr sz="1400" b="0">
-                <a:solidFill>
-                  <a:srgbClr val="475569"/>
-                </a:solidFill>
-                <a:latin typeface="Arial"/>
-              </a:rPr>
-              <a:t>•  SLME (Yu &amp; Zunger) replacing the SQ upper bound — needs absorption coefficient α(E)</a:t>
+              <a:t> gap</a:t>
+            </a:r>
+          </a:p>
+          <a:p>
+            <a:pPr algn="l"/>
+            <a:r>
+              <a:rPr sz="1400" b="0">
+                <a:solidFill>
+                  <a:srgbClr val="475569"/>
+                </a:solidFill>
+                <a:latin typeface="Arial"/>
+              </a:rPr>
+              <a:t>•  SLME (Yu &amp; Zunger PRL 2012) replacing the SQ upper bound — needs absorption coefficient α(E)</a:t>
             </a:r>
           </a:p>
           <a:p>
@@ -8758,6 +9610,30 @@
                 <a:latin typeface="Arial"/>
               </a:rPr>
               <a:t> DFT batch in SG 62, 12, 72, 15</a:t>
+            </a:r>
+          </a:p>
+          <a:p>
+            <a:pPr algn="l"/>
+            <a:r>
+              <a:rPr sz="1400" b="0">
+                <a:solidFill>
+                  <a:srgbClr val="475569"/>
+                </a:solidFill>
+                <a:latin typeface="Arial"/>
+              </a:rPr>
+              <a:t>•  Closed-loop automation: DFT batch submission and re-fit on label return</a:t>
+            </a:r>
+          </a:p>
+          <a:p>
+            <a:pPr algn="l"/>
+            <a:r>
+              <a:rPr sz="1400" b="0">
+                <a:solidFill>
+                  <a:srgbClr val="475569"/>
+                </a:solidFill>
+                <a:latin typeface="Arial"/>
+              </a:rPr>
+              <a:t>•  Experimental collaboration to synthesise top-3 hits and feed measured J–V back into ML</a:t>
             </a:r>
           </a:p>
         </p:txBody>
@@ -9020,7 +9896,7 @@
                 </a:solidFill>
                 <a:latin typeface="Arial"/>
               </a:rPr>
-              <a:t>•  473-material small-sample ML beats the GPR / GB / ExT baseline by +50 % R</a:t>
+              <a:t>•  473-material small-sample ML beats GPR / GB / ExT baseline by +50 % R</a:t>
             </a:r>
             <a:r>
               <a:rPr sz="1400" b="0" baseline="30000">
@@ -9095,37 +9971,43 @@
                 </a:solidFill>
                 <a:latin typeface="Arial"/>
               </a:rPr>
-              <a:t> sits at the SQ bullseye (1.12 eV, 7 meV E</a:t>
-            </a:r>
-            <a:r>
-              <a:rPr sz="1400" b="0" baseline="-25000">
-                <a:solidFill>
-                  <a:srgbClr val="475569"/>
-                </a:solidFill>
-                <a:latin typeface="Arial"/>
-              </a:rPr>
-              <a:t>b</a:t>
-            </a:r>
-            <a:r>
-              <a:rPr sz="1400" b="0">
-                <a:solidFill>
-                  <a:srgbClr val="475569"/>
-                </a:solidFill>
-                <a:latin typeface="Arial"/>
-              </a:rPr>
-              <a:t>)</a:t>
-            </a:r>
-          </a:p>
-          <a:p>
-            <a:pPr algn="l"/>
-            <a:r>
-              <a:rPr sz="1400" b="0">
-                <a:solidFill>
-                  <a:srgbClr val="475569"/>
-                </a:solidFill>
-                <a:latin typeface="Arial"/>
-              </a:rPr>
-              <a:t>•  SolarLab 2D drift-diffusion is the bridge from predicted DFT params to predicted device J–V</a:t>
+              <a:t> sits at the SQ bullseye</a:t>
+            </a:r>
+          </a:p>
+          <a:p>
+            <a:pPr algn="l"/>
+            <a:r>
+              <a:rPr sz="1400" b="0">
+                <a:solidFill>
+                  <a:srgbClr val="475569"/>
+                </a:solidFill>
+                <a:latin typeface="Arial"/>
+              </a:rPr>
+              <a:t>•  SolarLab 2D drift-diffusion is the bridge from DFT params to predicted device J–V</a:t>
+            </a:r>
+          </a:p>
+          <a:p>
+            <a:pPr algn="l"/>
+            <a:r>
+              <a:rPr sz="1400" b="0">
+                <a:solidFill>
+                  <a:srgbClr val="475569"/>
+                </a:solidFill>
+                <a:latin typeface="Arial"/>
+              </a:rPr>
+              <a:t>•  DFT cost crystallised into a tiny, actionable subspace fed by an honest grouped-CV diagnostic</a:t>
+            </a:r>
+          </a:p>
+          <a:p>
+            <a:pPr algn="l"/>
+            <a:r>
+              <a:rPr sz="1400" b="0">
+                <a:solidFill>
+                  <a:srgbClr val="475569"/>
+                </a:solidFill>
+                <a:latin typeface="Arial"/>
+              </a:rPr>
+              <a:t>•  Synthesis collaboration is the closing leg of the discovery → simulation → experiment loop</a:t>
             </a:r>
           </a:p>
         </p:txBody>
@@ -9400,7 +10282,55 @@
                 </a:solidFill>
                 <a:latin typeface="Arial"/>
               </a:rPr>
-              <a:t>•  Yu &amp; Zunger PRL 108, 068701 (2012) · Blank et al. PRA 8, 024032 (2017) · MP / OQMD · matminer / Magpie</a:t>
+              <a:t>•  Yu &amp; Zunger PRL 108, 068701 (2012) — SLME framework</a:t>
+            </a:r>
+          </a:p>
+          <a:p>
+            <a:pPr algn="l"/>
+            <a:r>
+              <a:rPr sz="1400" b="0">
+                <a:solidFill>
+                  <a:srgbClr val="475569"/>
+                </a:solidFill>
+                <a:latin typeface="Arial"/>
+              </a:rPr>
+              <a:t>•  Blank et al. PRA 8, 024032 (2017) — detailed-balance PV screening metric</a:t>
+            </a:r>
+          </a:p>
+          <a:p>
+            <a:pPr algn="l"/>
+            <a:r>
+              <a:rPr sz="1400" b="0">
+                <a:solidFill>
+                  <a:srgbClr val="475569"/>
+                </a:solidFill>
+                <a:latin typeface="Arial"/>
+              </a:rPr>
+              <a:t>•  MP / OQMD — Jain et al. APL Mat 2013 · Saal et al. JOM 2013</a:t>
+            </a:r>
+          </a:p>
+          <a:p>
+            <a:pPr algn="l"/>
+            <a:r>
+              <a:rPr sz="1400" b="0">
+                <a:solidFill>
+                  <a:srgbClr val="475569"/>
+                </a:solidFill>
+                <a:latin typeface="Arial"/>
+              </a:rPr>
+              <a:t>•  matminer + Magpie — Ward et al. CMS 2018 / npj CM 2016</a:t>
+            </a:r>
+          </a:p>
+          <a:p>
+            <a:pPr algn="l"/>
+            <a:r>
+              <a:rPr sz="1400" b="0">
+                <a:solidFill>
+                  <a:srgbClr val="475569"/>
+                </a:solidFill>
+                <a:latin typeface="Arial"/>
+              </a:rPr>
+              <a:t>•  MEGNet — Chen et al. Chem. Mater. 2019</a:t>
             </a:r>
           </a:p>
         </p:txBody>
@@ -9649,8 +10579,8 @@
         </p:blipFill>
         <p:spPr>
           <a:xfrm>
-            <a:off x="457200" y="1828800"/>
-            <a:ext cx="4937760" cy="2926080"/>
+            <a:off x="487679" y="1828800"/>
+            <a:ext cx="4876800" cy="2926080"/>
           </a:xfrm>
           <a:prstGeom prst="rect">
             <a:avLst/>
@@ -9687,7 +10617,7 @@
                 </a:solidFill>
                 <a:latin typeface="Arial"/>
               </a:rPr>
-              <a:t>•  Si / CIGS: T</a:t>
+              <a:t>•  Si: indirect-gap, ~22 % single-junction PCE ceiling, T</a:t>
             </a:r>
             <a:r>
               <a:rPr sz="1400" b="0" baseline="-25000">
@@ -9705,7 +10635,7 @@
                 </a:solidFill>
                 <a:latin typeface="Arial"/>
               </a:rPr>
-              <a:t> &gt; 10</a:t>
+              <a:t> </a:t>
             </a:r>
             <a:r>
               <a:rPr sz="1400" b="0" baseline="30000">
@@ -9714,6 +10644,24 @@
                 </a:solidFill>
                 <a:latin typeface="Arial"/>
               </a:rPr>
+              <a:t>&gt;</a:t>
+            </a:r>
+            <a:r>
+              <a:rPr sz="1400" b="0">
+                <a:solidFill>
+                  <a:srgbClr val="475569"/>
+                </a:solidFill>
+                <a:latin typeface="Arial"/>
+              </a:rPr>
+              <a:t> 10</a:t>
+            </a:r>
+            <a:r>
+              <a:rPr sz="1400" b="0" baseline="30000">
+                <a:solidFill>
+                  <a:srgbClr val="475569"/>
+                </a:solidFill>
+                <a:latin typeface="Arial"/>
+              </a:rPr>
               <a:t>4</a:t>
             </a:r>
             <a:r>
@@ -9723,19 +10671,49 @@
                 </a:solidFill>
                 <a:latin typeface="Arial"/>
               </a:rPr>
-              <a:t> h, PCE ceiling ~22 % (indirect gap, purity ceiling)</a:t>
-            </a:r>
-          </a:p>
-          <a:p>
-            <a:pPr algn="l"/>
-            <a:r>
-              <a:rPr sz="1400" b="0">
-                <a:solidFill>
-                  <a:srgbClr val="475569"/>
-                </a:solidFill>
-                <a:latin typeface="Arial"/>
-              </a:rPr>
-              <a:t>•  Perovskite: PCE &gt; 25 %, T</a:t>
+              <a:t> h</a:t>
+            </a:r>
+          </a:p>
+          <a:p>
+            <a:pPr algn="l"/>
+            <a:r>
+              <a:rPr sz="1400" b="0">
+                <a:solidFill>
+                  <a:srgbClr val="475569"/>
+                </a:solidFill>
+                <a:latin typeface="Arial"/>
+              </a:rPr>
+              <a:t>•  CIGS: direct-gap chalcogenide, 23.4 % record, but Cu / In / Ga supply constraints</a:t>
+            </a:r>
+          </a:p>
+          <a:p>
+            <a:pPr algn="l"/>
+            <a:r>
+              <a:rPr sz="1400" b="0">
+                <a:solidFill>
+                  <a:srgbClr val="475569"/>
+                </a:solidFill>
+                <a:latin typeface="Arial"/>
+              </a:rPr>
+              <a:t>•  Perovskite: PCE </a:t>
+            </a:r>
+            <a:r>
+              <a:rPr sz="1400" b="0" baseline="30000">
+                <a:solidFill>
+                  <a:srgbClr val="475569"/>
+                </a:solidFill>
+                <a:latin typeface="Arial"/>
+              </a:rPr>
+              <a:t>&gt;</a:t>
+            </a:r>
+            <a:r>
+              <a:rPr sz="1400" b="0">
+                <a:solidFill>
+                  <a:srgbClr val="475569"/>
+                </a:solidFill>
+                <a:latin typeface="Arial"/>
+              </a:rPr>
+              <a:t> 26 %, but T</a:t>
             </a:r>
             <a:r>
               <a:rPr sz="1400" b="0" baseline="-25000">
@@ -9753,19 +10731,133 @@
                 </a:solidFill>
                 <a:latin typeface="Arial"/>
               </a:rPr>
-              <a:t> often &lt; 500 h</a:t>
-            </a:r>
-          </a:p>
-          <a:p>
-            <a:pPr algn="l"/>
-            <a:r>
-              <a:rPr sz="1400" b="0">
-                <a:solidFill>
-                  <a:srgbClr val="475569"/>
-                </a:solidFill>
-                <a:latin typeface="Arial"/>
-              </a:rPr>
-              <a:t>•  Need a third path: a stable inorganic absorber with direct-or-near-direct gap</a:t>
+              <a:t> often &lt; 500 h under 1-sun + 85 °C</a:t>
+            </a:r>
+          </a:p>
+          <a:p>
+            <a:pPr algn="l"/>
+            <a:r>
+              <a:rPr sz="1400" b="0">
+                <a:solidFill>
+                  <a:srgbClr val="475569"/>
+                </a:solidFill>
+                <a:latin typeface="Arial"/>
+              </a:rPr>
+              <a:t>•  Shockley–Queisser optimum E</a:t>
+            </a:r>
+            <a:r>
+              <a:rPr sz="1400" b="0" baseline="-25000">
+                <a:solidFill>
+                  <a:srgbClr val="475569"/>
+                </a:solidFill>
+                <a:latin typeface="Arial"/>
+              </a:rPr>
+              <a:t>g</a:t>
+            </a:r>
+            <a:r>
+              <a:rPr sz="1400" b="0">
+                <a:solidFill>
+                  <a:srgbClr val="475569"/>
+                </a:solidFill>
+                <a:latin typeface="Arial"/>
+              </a:rPr>
+              <a:t> ≈ 1.34 eV, single-junction ceiling 33.7 %</a:t>
+            </a:r>
+          </a:p>
+          <a:p>
+            <a:pPr algn="l"/>
+            <a:r>
+              <a:rPr sz="1400" b="0">
+                <a:solidFill>
+                  <a:srgbClr val="475569"/>
+                </a:solidFill>
+                <a:latin typeface="Arial"/>
+              </a:rPr>
+              <a:t>•  Target box: PCE </a:t>
+            </a:r>
+            <a:r>
+              <a:rPr sz="1400" b="0" baseline="30000">
+                <a:solidFill>
+                  <a:srgbClr val="475569"/>
+                </a:solidFill>
+                <a:latin typeface="Arial"/>
+              </a:rPr>
+              <a:t>&gt;</a:t>
+            </a:r>
+            <a:r>
+              <a:rPr sz="1400" b="0">
+                <a:solidFill>
+                  <a:srgbClr val="475569"/>
+                </a:solidFill>
+                <a:latin typeface="Arial"/>
+              </a:rPr>
+              <a:t> 25 % AND T</a:t>
+            </a:r>
+            <a:r>
+              <a:rPr sz="1400" b="0" baseline="-25000">
+                <a:solidFill>
+                  <a:srgbClr val="475569"/>
+                </a:solidFill>
+                <a:latin typeface="Arial"/>
+              </a:rPr>
+              <a:t>80</a:t>
+            </a:r>
+            <a:r>
+              <a:rPr sz="1400" b="0">
+                <a:solidFill>
+                  <a:srgbClr val="475569"/>
+                </a:solidFill>
+                <a:latin typeface="Arial"/>
+              </a:rPr>
+              <a:t> </a:t>
+            </a:r>
+            <a:r>
+              <a:rPr sz="1400" b="0" baseline="30000">
+                <a:solidFill>
+                  <a:srgbClr val="475569"/>
+                </a:solidFill>
+                <a:latin typeface="Arial"/>
+              </a:rPr>
+              <a:t>&gt;</a:t>
+            </a:r>
+            <a:r>
+              <a:rPr sz="1400" b="0">
+                <a:solidFill>
+                  <a:srgbClr val="475569"/>
+                </a:solidFill>
+                <a:latin typeface="Arial"/>
+              </a:rPr>
+              <a:t> 10</a:t>
+            </a:r>
+            <a:r>
+              <a:rPr sz="1400" b="0" baseline="30000">
+                <a:solidFill>
+                  <a:srgbClr val="475569"/>
+                </a:solidFill>
+                <a:latin typeface="Arial"/>
+              </a:rPr>
+              <a:t>5</a:t>
+            </a:r>
+            <a:r>
+              <a:rPr sz="1400" b="0">
+                <a:solidFill>
+                  <a:srgbClr val="475569"/>
+                </a:solidFill>
+                <a:latin typeface="Arial"/>
+              </a:rPr>
+              <a:t> h — empty today</a:t>
+            </a:r>
+          </a:p>
+          <a:p>
+            <a:pPr algn="l"/>
+            <a:r>
+              <a:rPr sz="1400" b="0">
+                <a:solidFill>
+                  <a:srgbClr val="475569"/>
+                </a:solidFill>
+                <a:latin typeface="Arial"/>
+              </a:rPr>
+              <a:t>•  Need a third path: stable inorganic absorber with direct-or-near-direct gap</a:t>
             </a:r>
           </a:p>
         </p:txBody>
@@ -10028,7 +11120,19 @@
                 </a:solidFill>
                 <a:latin typeface="Arial"/>
               </a:rPr>
-              <a:t>•  Perovskite caught up to Si in &lt;10 years</a:t>
+              <a:t>•  Si record 27.6 % (UNSW 2024) — half a century of incremental gain</a:t>
+            </a:r>
+          </a:p>
+          <a:p>
+            <a:pPr algn="l"/>
+            <a:r>
+              <a:rPr sz="1400" b="0">
+                <a:solidFill>
+                  <a:srgbClr val="475569"/>
+                </a:solidFill>
+                <a:latin typeface="Arial"/>
+              </a:rPr>
+              <a:t>•  Perovskite record 26.7 % (UNIST 2024) — caught Si in &lt;10 years</a:t>
             </a:r>
           </a:p>
           <a:p>
@@ -10058,19 +11162,43 @@
                 </a:solidFill>
                 <a:latin typeface="Arial"/>
               </a:rPr>
-              <a:t> 100×</a:t>
-            </a:r>
-          </a:p>
-          <a:p>
-            <a:pPr algn="l"/>
-            <a:r>
-              <a:rPr sz="1400" b="0">
-                <a:solidFill>
-                  <a:srgbClr val="475569"/>
-                </a:solidFill>
-                <a:latin typeface="Arial"/>
-              </a:rPr>
-              <a:t>•  Commercial deployment needs both — motivates new absorber chemistries</a:t>
+              <a:t> 100× under stress: ion migration, A-site loss, photo-degradation</a:t>
+            </a:r>
+          </a:p>
+          <a:p>
+            <a:pPr algn="l"/>
+            <a:r>
+              <a:rPr sz="1400" b="0">
+                <a:solidFill>
+                  <a:srgbClr val="475569"/>
+                </a:solidFill>
+                <a:latin typeface="Arial"/>
+              </a:rPr>
+              <a:t>•  Encapsulation buys time but doesn't solve absorber-side instability</a:t>
+            </a:r>
+          </a:p>
+          <a:p>
+            <a:pPr algn="l"/>
+            <a:r>
+              <a:rPr sz="1400" b="0">
+                <a:solidFill>
+                  <a:srgbClr val="475569"/>
+                </a:solidFill>
+                <a:latin typeface="Arial"/>
+              </a:rPr>
+              <a:t>•  Commercial-scale module deployment needs both efficiency and outdoor lifetime</a:t>
+            </a:r>
+          </a:p>
+          <a:p>
+            <a:pPr algn="l"/>
+            <a:r>
+              <a:rPr sz="1400" b="0">
+                <a:solidFill>
+                  <a:srgbClr val="475569"/>
+                </a:solidFill>
+                <a:latin typeface="Arial"/>
+              </a:rPr>
+              <a:t>•  Motivates discovery of new absorber chemistries that satisfy both at once</a:t>
             </a:r>
           </a:p>
         </p:txBody>
@@ -10298,7 +11426,7 @@
                 </a:solidFill>
                 <a:latin typeface="Arial"/>
               </a:rPr>
-              <a:t>Six-step funnel: problem → screen → candidates → device → outlook</a:t>
+              <a:t>Six stages from materials database to predicted device performance</a:t>
             </a:r>
           </a:p>
         </p:txBody>
@@ -10319,8 +11447,8 @@
         </p:blipFill>
         <p:spPr>
           <a:xfrm>
-            <a:off x="457200" y="1828800"/>
-            <a:ext cx="4937760" cy="2926080"/>
+            <a:off x="457200" y="1903094"/>
+            <a:ext cx="4937760" cy="2777490"/>
           </a:xfrm>
           <a:prstGeom prst="rect">
             <a:avLst/>
@@ -10330,6 +11458,101 @@
       <p:sp>
         <p:nvSpPr>
           <p:cNvPr id="7" name="TextBox 6"/>
+          <p:cNvSpPr txBox="1"/>
+          <p:nvPr/>
+        </p:nvSpPr>
+        <p:spPr>
+          <a:xfrm>
+            <a:off x="5669280" y="1828800"/>
+            <a:ext cx="3017520" cy="2926080"/>
+          </a:xfrm>
+          <a:prstGeom prst="rect">
+            <a:avLst/>
+          </a:prstGeom>
+          <a:noFill/>
+        </p:spPr>
+        <p:txBody>
+          <a:bodyPr wrap="square">
+            <a:spAutoFit/>
+          </a:bodyPr>
+          <a:lstStyle/>
+          <a:p>
+            <a:pPr algn="l"/>
+            <a:r>
+              <a:rPr sz="1400" b="0">
+                <a:solidFill>
+                  <a:srgbClr val="475569"/>
+                </a:solidFill>
+                <a:latin typeface="Arial"/>
+              </a:rPr>
+              <a:t>•  01 PROBLEM — efficiency–stability deadlock</a:t>
+            </a:r>
+          </a:p>
+          <a:p>
+            <a:pPr algn="l"/>
+            <a:r>
+              <a:rPr sz="1400" b="0">
+                <a:solidFill>
+                  <a:srgbClr val="475569"/>
+                </a:solidFill>
+                <a:latin typeface="Arial"/>
+              </a:rPr>
+              <a:t>•  02 STRATEGY — chalcogenide structural prior</a:t>
+            </a:r>
+          </a:p>
+          <a:p>
+            <a:pPr algn="l"/>
+            <a:r>
+              <a:rPr sz="1400" b="0">
+                <a:solidFill>
+                  <a:srgbClr val="475569"/>
+                </a:solidFill>
+                <a:latin typeface="Arial"/>
+              </a:rPr>
+              <a:t>•  03 ML + FEATURES — small-sample HSE06 surrogate</a:t>
+            </a:r>
+          </a:p>
+          <a:p>
+            <a:pPr algn="l"/>
+            <a:r>
+              <a:rPr sz="1400" b="0">
+                <a:solidFill>
+                  <a:srgbClr val="475569"/>
+                </a:solidFill>
+                <a:latin typeface="Arial"/>
+              </a:rPr>
+              <a:t>•  04 CANDIDATES — 14-material action list</a:t>
+            </a:r>
+          </a:p>
+          <a:p>
+            <a:pPr algn="l"/>
+            <a:r>
+              <a:rPr sz="1400" b="0">
+                <a:solidFill>
+                  <a:srgbClr val="475569"/>
+                </a:solidFill>
+                <a:latin typeface="Arial"/>
+              </a:rPr>
+              <a:t>•  05 BRIDGE — 1D + 2D drift-diffusion device sim (SolarLab)</a:t>
+            </a:r>
+          </a:p>
+          <a:p>
+            <a:pPr algn="l"/>
+            <a:r>
+              <a:rPr sz="1400" b="0">
+                <a:solidFill>
+                  <a:srgbClr val="475569"/>
+                </a:solidFill>
+                <a:latin typeface="Arial"/>
+              </a:rPr>
+              <a:t>•  06 PAYOFF — predicted device J–V + outlook</a:t>
+            </a:r>
+          </a:p>
+        </p:txBody>
+      </p:sp>
+      <p:sp>
+        <p:nvSpPr>
+          <p:cNvPr id="8" name="TextBox 7"/>
           <p:cNvSpPr txBox="1"/>
           <p:nvPr/>
         </p:nvSpPr>
@@ -10364,7 +11587,7 @@
       </p:sp>
       <p:sp>
         <p:nvSpPr>
-          <p:cNvPr id="8" name="TextBox 7"/>
+          <p:cNvPr id="9" name="TextBox 8"/>
           <p:cNvSpPr txBox="1"/>
           <p:nvPr/>
         </p:nvSpPr>
@@ -10770,19 +11993,19 @@
                 </a:solidFill>
                 <a:latin typeface="Arial"/>
               </a:rPr>
-              <a:t>•  Anion: S, Se, Te. Selenides dominate the productive subspace.</a:t>
-            </a:r>
-          </a:p>
-          <a:p>
-            <a:pPr algn="l"/>
-            <a:r>
-              <a:rPr sz="1400" b="0">
-                <a:solidFill>
-                  <a:srgbClr val="475569"/>
-                </a:solidFill>
-                <a:latin typeface="Arial"/>
-              </a:rPr>
-              <a:t>•  Cation: Sb, Sn, Bi (6s</a:t>
+              <a:t>•  Anion: S, Se, Te. Selenides occupy 11 / 14 of the action list (incl. top-6)</a:t>
+            </a:r>
+          </a:p>
+          <a:p>
+            <a:pPr algn="l"/>
+            <a:r>
+              <a:rPr sz="1400" b="0">
+                <a:solidFill>
+                  <a:srgbClr val="475569"/>
+                </a:solidFill>
+                <a:latin typeface="Arial"/>
+              </a:rPr>
+              <a:t>•  Cation: Sb, Sn, Bi 6s</a:t>
             </a:r>
             <a:r>
               <a:rPr sz="1400" b="0" baseline="30000">
@@ -10818,19 +12041,181 @@
                 </a:solidFill>
                 <a:latin typeface="Arial"/>
               </a:rPr>
-              <a:t> lone pair) + Cs / Ca / Sr / K spectator</a:t>
-            </a:r>
-          </a:p>
-          <a:p>
-            <a:pPr algn="l"/>
-            <a:r>
-              <a:rPr sz="1400" b="0">
-                <a:solidFill>
-                  <a:srgbClr val="475569"/>
-                </a:solidFill>
-                <a:latin typeface="Arial"/>
-              </a:rPr>
-              <a:t>•  Constrains DB scan to physically plausible, synthesisable candidates</a:t>
+              <a:t> lone-pair → deep, dispersive valence-band tops</a:t>
+            </a:r>
+          </a:p>
+          <a:p>
+            <a:pPr algn="l"/>
+            <a:r>
+              <a:rPr sz="1400" b="0">
+                <a:solidFill>
+                  <a:srgbClr val="475569"/>
+                </a:solidFill>
+                <a:latin typeface="Arial"/>
+              </a:rPr>
+              <a:t>•  Spectator: Cs, Ca, Sr, K — donate charge without flattening the band</a:t>
+            </a:r>
+          </a:p>
+          <a:p>
+            <a:pPr algn="l"/>
+            <a:r>
+              <a:rPr sz="1400" b="0">
+                <a:solidFill>
+                  <a:srgbClr val="475569"/>
+                </a:solidFill>
+                <a:latin typeface="Arial"/>
+              </a:rPr>
+              <a:t>•  Stoichiometry: AB</a:t>
+            </a:r>
+            <a:r>
+              <a:rPr sz="1400" b="0" baseline="-25000">
+                <a:solidFill>
+                  <a:srgbClr val="475569"/>
+                </a:solidFill>
+                <a:latin typeface="Arial"/>
+              </a:rPr>
+              <a:t>2</a:t>
+            </a:r>
+            <a:r>
+              <a:rPr sz="1400" b="0">
+                <a:solidFill>
+                  <a:srgbClr val="475569"/>
+                </a:solidFill>
+                <a:latin typeface="Arial"/>
+              </a:rPr>
+              <a:t>C</a:t>
+            </a:r>
+            <a:r>
+              <a:rPr sz="1400" b="0" baseline="-25000">
+                <a:solidFill>
+                  <a:srgbClr val="475569"/>
+                </a:solidFill>
+                <a:latin typeface="Arial"/>
+              </a:rPr>
+              <a:t>4</a:t>
+            </a:r>
+            <a:r>
+              <a:rPr sz="1400" b="0">
+                <a:solidFill>
+                  <a:srgbClr val="475569"/>
+                </a:solidFill>
+                <a:latin typeface="Arial"/>
+              </a:rPr>
+              <a:t> </a:t>
+            </a:r>
+            <a:r>
+              <a:rPr sz="1400" b="0" baseline="30000">
+                <a:solidFill>
+                  <a:srgbClr val="475569"/>
+                </a:solidFill>
+                <a:latin typeface="Arial"/>
+              </a:rPr>
+              <a:t>≫</a:t>
+            </a:r>
+            <a:r>
+              <a:rPr sz="1400" b="0">
+                <a:solidFill>
+                  <a:srgbClr val="475569"/>
+                </a:solidFill>
+                <a:latin typeface="Arial"/>
+              </a:rPr>
+              <a:t> ABC</a:t>
+            </a:r>
+            <a:r>
+              <a:rPr sz="1400" b="0" baseline="-25000">
+                <a:solidFill>
+                  <a:srgbClr val="475569"/>
+                </a:solidFill>
+                <a:latin typeface="Arial"/>
+              </a:rPr>
+              <a:t>3</a:t>
+            </a:r>
+            <a:r>
+              <a:rPr sz="1400" b="0">
+                <a:solidFill>
+                  <a:srgbClr val="475569"/>
+                </a:solidFill>
+                <a:latin typeface="Arial"/>
+              </a:rPr>
+              <a:t> ≈ ABC</a:t>
+            </a:r>
+            <a:r>
+              <a:rPr sz="1400" b="0" baseline="-25000">
+                <a:solidFill>
+                  <a:srgbClr val="475569"/>
+                </a:solidFill>
+                <a:latin typeface="Arial"/>
+              </a:rPr>
+              <a:t>2</a:t>
+            </a:r>
+            <a:r>
+              <a:rPr sz="1400" b="0">
+                <a:solidFill>
+                  <a:srgbClr val="475569"/>
+                </a:solidFill>
+                <a:latin typeface="Arial"/>
+              </a:rPr>
+              <a:t> </a:t>
+            </a:r>
+            <a:r>
+              <a:rPr sz="1400" b="0" baseline="30000">
+                <a:solidFill>
+                  <a:srgbClr val="475569"/>
+                </a:solidFill>
+                <a:latin typeface="Arial"/>
+              </a:rPr>
+              <a:t>≫</a:t>
+            </a:r>
+            <a:r>
+              <a:rPr sz="1400" b="0">
+                <a:solidFill>
+                  <a:srgbClr val="475569"/>
+                </a:solidFill>
+                <a:latin typeface="Arial"/>
+              </a:rPr>
+              <a:t> everything else</a:t>
+            </a:r>
+          </a:p>
+          <a:p>
+            <a:pPr algn="l"/>
+            <a:r>
+              <a:rPr sz="1400" b="0">
+                <a:solidFill>
+                  <a:srgbClr val="475569"/>
+                </a:solidFill>
+                <a:latin typeface="Arial"/>
+              </a:rPr>
+              <a:t>•  Symmetry: Pnma (SG 62) dominant; expand into 12, 14, 72, 15</a:t>
+            </a:r>
+          </a:p>
+          <a:p>
+            <a:pPr algn="l"/>
+            <a:r>
+              <a:rPr sz="1400" b="0">
+                <a:solidFill>
+                  <a:srgbClr val="475569"/>
+                </a:solidFill>
+                <a:latin typeface="Arial"/>
+              </a:rPr>
+              <a:t>•  Constrains &gt; 10</a:t>
+            </a:r>
+            <a:r>
+              <a:rPr sz="1400" b="0" baseline="30000">
+                <a:solidFill>
+                  <a:srgbClr val="475569"/>
+                </a:solidFill>
+                <a:latin typeface="Arial"/>
+              </a:rPr>
+              <a:t>5</a:t>
+            </a:r>
+            <a:r>
+              <a:rPr sz="1400" b="0">
+                <a:solidFill>
+                  <a:srgbClr val="475569"/>
+                </a:solidFill>
+                <a:latin typeface="Arial"/>
+              </a:rPr>
+              <a:t> DB scan to physically plausible, synthesisable subspace</a:t>
             </a:r>
           </a:p>
         </p:txBody>
@@ -11079,8 +12464,8 @@
         </p:blipFill>
         <p:spPr>
           <a:xfrm>
-            <a:off x="457200" y="1828800"/>
-            <a:ext cx="4937760" cy="2926080"/>
+            <a:off x="457200" y="2649931"/>
+            <a:ext cx="4937760" cy="1283817"/>
           </a:xfrm>
           <a:prstGeom prst="rect">
             <a:avLst/>

--- a/presentations/jmi-2026/output/jmi-2026.pptx
+++ b/presentations/jmi-2026/output/jmi-2026.pptx
@@ -3389,7 +3389,7 @@
                 </a:solidFill>
                 <a:latin typeface="Arial"/>
               </a:rPr>
-              <a:t>Why a surrogate at all</a:t>
+              <a:t>Motivation for a learned surrogate</a:t>
             </a:r>
           </a:p>
         </p:txBody>
@@ -3424,7 +3424,7 @@
                 </a:solidFill>
                 <a:latin typeface="Arial"/>
               </a:rPr>
-              <a:t>HSE06 + DFPT four-stage VASP workflow per material</a:t>
+              <a:t>Four-stage HSE06 and DFPT workflow executed in VASP for each candidate</a:t>
             </a:r>
           </a:p>
         </p:txBody>
@@ -3459,31 +3459,19 @@
                 </a:solidFill>
                 <a:latin typeface="Arial"/>
               </a:rPr>
-              <a:t>•  Stage 1 PBE relax → Stage 2 SCF → Stage 3 DFPT dielectric → Stage 4 HSE06 band</a:t>
-            </a:r>
-          </a:p>
-          <a:p>
-            <a:pPr algn="l"/>
-            <a:r>
-              <a:rPr sz="1400" b="0">
-                <a:solidFill>
-                  <a:srgbClr val="475569"/>
-                </a:solidFill>
-                <a:latin typeface="Arial"/>
-              </a:rPr>
-              <a:t>•  DFPT + HSE06 dominate cost: hours-to-days per structure on ~64-core HPC nodes</a:t>
-            </a:r>
-          </a:p>
-          <a:p>
-            <a:pPr algn="l"/>
-            <a:r>
-              <a:rPr sz="1400" b="0">
-                <a:solidFill>
-                  <a:srgbClr val="475569"/>
-                </a:solidFill>
-                <a:latin typeface="Arial"/>
-              </a:rPr>
-              <a:t>•  PBE relax: O(N</a:t>
+              <a:t>•  Stage 1 PBE relaxation → Stage 2 SCF → Stage 3 DFPT dielectric tensor → Stage 4 HSE06 band structure</a:t>
+            </a:r>
+          </a:p>
+          <a:p>
+            <a:pPr algn="l"/>
+            <a:r>
+              <a:rPr sz="1400" b="0">
+                <a:solidFill>
+                  <a:srgbClr val="475569"/>
+                </a:solidFill>
+                <a:latin typeface="Arial"/>
+              </a:rPr>
+              <a:t>•  DFPT and HSE06 dominate runtime, requiring 10</a:t>
             </a:r>
             <a:r>
               <a:rPr sz="1400" b="0" baseline="30000">
@@ -3492,6 +3480,54 @@
                 </a:solidFill>
                 <a:latin typeface="Arial"/>
               </a:rPr>
+              <a:t>0</a:t>
+            </a:r>
+            <a:r>
+              <a:rPr sz="1400" b="0">
+                <a:solidFill>
+                  <a:srgbClr val="475569"/>
+                </a:solidFill>
+                <a:latin typeface="Arial"/>
+              </a:rPr>
+              <a:t>–10</a:t>
+            </a:r>
+            <a:r>
+              <a:rPr sz="1400" b="0" baseline="30000">
+                <a:solidFill>
+                  <a:srgbClr val="475569"/>
+                </a:solidFill>
+                <a:latin typeface="Arial"/>
+              </a:rPr>
+              <a:t>2</a:t>
+            </a:r>
+            <a:r>
+              <a:rPr sz="1400" b="0">
+                <a:solidFill>
+                  <a:srgbClr val="475569"/>
+                </a:solidFill>
+                <a:latin typeface="Arial"/>
+              </a:rPr>
+              <a:t> CPU-hours per structure on a 64-core node</a:t>
+            </a:r>
+          </a:p>
+          <a:p>
+            <a:pPr algn="l"/>
+            <a:r>
+              <a:rPr sz="1400" b="0">
+                <a:solidFill>
+                  <a:srgbClr val="475569"/>
+                </a:solidFill>
+                <a:latin typeface="Arial"/>
+              </a:rPr>
+              <a:t>•  PBE relaxation scales as O(N</a:t>
+            </a:r>
+            <a:r>
+              <a:rPr sz="1400" b="0" baseline="30000">
+                <a:solidFill>
+                  <a:srgbClr val="475569"/>
+                </a:solidFill>
+                <a:latin typeface="Arial"/>
+              </a:rPr>
               <a:t>3</a:t>
             </a:r>
             <a:r>
@@ -3501,31 +3537,31 @@
                 </a:solidFill>
                 <a:latin typeface="Arial"/>
               </a:rPr>
-              <a:t>) plane-wave eigensolve · HSE06 adds ~10× cost from exact-exchange [Heyd et al. 2003]</a:t>
-            </a:r>
-          </a:p>
-          <a:p>
-            <a:pPr algn="l"/>
-            <a:r>
-              <a:rPr sz="1400" b="0">
-                <a:solidFill>
-                  <a:srgbClr val="475569"/>
-                </a:solidFill>
-                <a:latin typeface="Arial"/>
-              </a:rPr>
-              <a:t>•  DFPT dielectric tensor: linear-response Sternheimer equation, ~2× SCF cost [Baroni et al. 2001]</a:t>
-            </a:r>
-          </a:p>
-          <a:p>
-            <a:pPr algn="l"/>
-            <a:r>
-              <a:rPr sz="1400" b="0">
-                <a:solidFill>
-                  <a:srgbClr val="475569"/>
-                </a:solidFill>
-                <a:latin typeface="Arial"/>
-              </a:rPr>
-              <a:t>•  MP + OQMD pool </a:t>
+              <a:t>) in plane-wave eigensolve; HSE06 adds ~10× overhead via exact exchange [Heyd et al. 2003]</a:t>
+            </a:r>
+          </a:p>
+          <a:p>
+            <a:pPr algn="l"/>
+            <a:r>
+              <a:rPr sz="1400" b="0">
+                <a:solidFill>
+                  <a:srgbClr val="475569"/>
+                </a:solidFill>
+                <a:latin typeface="Arial"/>
+              </a:rPr>
+              <a:t>•  DFPT dielectric tensor obtained from the linear-response Sternheimer equation at ~2× SCF cost [Baroni et al. 2001]</a:t>
+            </a:r>
+          </a:p>
+          <a:p>
+            <a:pPr algn="l"/>
+            <a:r>
+              <a:rPr sz="1400" b="0">
+                <a:solidFill>
+                  <a:srgbClr val="475569"/>
+                </a:solidFill>
+                <a:latin typeface="Arial"/>
+              </a:rPr>
+              <a:t>•  Combined MP and OQMD pool exceeds 10</a:t>
             </a:r>
             <a:r>
               <a:rPr sz="1400" b="0" baseline="30000">
@@ -3534,24 +3570,6 @@
                 </a:solidFill>
                 <a:latin typeface="Arial"/>
               </a:rPr>
-              <a:t>&gt;</a:t>
-            </a:r>
-            <a:r>
-              <a:rPr sz="1400" b="0">
-                <a:solidFill>
-                  <a:srgbClr val="475569"/>
-                </a:solidFill>
-                <a:latin typeface="Arial"/>
-              </a:rPr>
-              <a:t> 10</a:t>
-            </a:r>
-            <a:r>
-              <a:rPr sz="1400" b="0" baseline="30000">
-                <a:solidFill>
-                  <a:srgbClr val="475569"/>
-                </a:solidFill>
-                <a:latin typeface="Arial"/>
-              </a:rPr>
               <a:t>5</a:t>
             </a:r>
             <a:r>
@@ -3561,19 +3579,19 @@
                 </a:solidFill>
                 <a:latin typeface="Arial"/>
               </a:rPr>
-              <a:t> candidates — full-DFT enumeration is infeasible</a:t>
-            </a:r>
-          </a:p>
-          <a:p>
-            <a:pPr algn="l"/>
-            <a:r>
-              <a:rPr sz="1400" b="0">
-                <a:solidFill>
-                  <a:srgbClr val="475569"/>
-                </a:solidFill>
-                <a:latin typeface="Arial"/>
-              </a:rPr>
-              <a:t>•  Strategy: train a surrogate on 473 DFT-labelled materials, extrapolate by ML</a:t>
+              <a:t> candidates, rendering full-DFT enumeration computationally infeasible</a:t>
+            </a:r>
+          </a:p>
+          <a:p>
+            <a:pPr algn="l"/>
+            <a:r>
+              <a:rPr sz="1400" b="0">
+                <a:solidFill>
+                  <a:srgbClr val="475569"/>
+                </a:solidFill>
+                <a:latin typeface="Arial"/>
+              </a:rPr>
+              <a:t>•  Approach: train a learned surrogate on 473 DFT-labelled materials and use it to rank the unlabelled pool</a:t>
             </a:r>
           </a:p>
         </p:txBody>
@@ -4115,7 +4133,7 @@
                 </a:solidFill>
                 <a:latin typeface="Arial"/>
               </a:rPr>
-              <a:t>Composite PV figure of merit</a:t>
+              <a:t>Composite photovoltaic figure of merit</a:t>
             </a:r>
           </a:p>
         </p:txBody>
@@ -4150,7 +4168,7 @@
                 </a:solidFill>
                 <a:latin typeface="Arial"/>
               </a:rPr>
-              <a:t>Four physically motivated factors fuse into one scalar target y ∈ [0, 1]</a:t>
+              <a:t>Four physically motivated factors combined into a single scalar target y ∈ [0, 1]</a:t>
             </a:r>
           </a:p>
         </p:txBody>
@@ -4305,7 +4323,7 @@
                 </a:solidFill>
                 <a:latin typeface="Arial"/>
               </a:rPr>
-              <a:t>): triangular SQ window — 1 at 1.34 eV, linearly to 0 at 0.5 / 2.5 eV</a:t>
+              <a:t>): triangular Shockley–Queisser window peaked at 1.34 eV, vanishing at 0.5 and 2.5 eV</a:t>
             </a:r>
           </a:p>
           <a:p>
@@ -4335,19 +4353,19 @@
                 </a:solidFill>
                 <a:latin typeface="Arial"/>
               </a:rPr>
-              <a:t>): sigmoid-like decay rewarding light carriers (high mobility)</a:t>
-            </a:r>
-          </a:p>
-          <a:p>
-            <a:pPr algn="l"/>
-            <a:r>
-              <a:rPr sz="1400" b="0">
-                <a:solidFill>
-                  <a:srgbClr val="475569"/>
-                </a:solidFill>
-                <a:latin typeface="Arial"/>
-              </a:rPr>
-              <a:t>•  tanh(ε / 10): saturates above ε ≈ 10 — diminishing returns on dielectric screening</a:t>
+              <a:t>): monotonic decay rewarding low effective mass and therefore high mobility</a:t>
+            </a:r>
+          </a:p>
+          <a:p>
+            <a:pPr algn="l"/>
+            <a:r>
+              <a:rPr sz="1400" b="0">
+                <a:solidFill>
+                  <a:srgbClr val="475569"/>
+                </a:solidFill>
+                <a:latin typeface="Arial"/>
+              </a:rPr>
+              <a:t>•  tanh(ε / 10): saturates above ε ≈ 10 to reflect diminishing returns from dielectric screening</a:t>
             </a:r>
           </a:p>
           <a:p>
@@ -4377,7 +4395,7 @@
                 </a:solidFill>
                 <a:latin typeface="Arial"/>
               </a:rPr>
-              <a:t> / 0.1): rewards Wannier–Mott (E</a:t>
+              <a:t> / 0.1): favours Wannier–Mott regimes (E</a:t>
             </a:r>
             <a:r>
               <a:rPr sz="1400" b="0" baseline="-25000">
@@ -4395,19 +4413,19 @@
                 </a:solidFill>
                 <a:latin typeface="Arial"/>
               </a:rPr>
-              <a:t> &lt; 0.1 eV); penalises Frenkel-exciton systems</a:t>
-            </a:r>
-          </a:p>
-          <a:p>
-            <a:pPr algn="l"/>
-            <a:r>
-              <a:rPr sz="1400" b="0">
-                <a:solidFill>
-                  <a:srgbClr val="475569"/>
-                </a:solidFill>
-                <a:latin typeface="Arial"/>
-              </a:rPr>
-              <a:t>•  Bounded, differentiable, physically interpretable — single regression head replaces four heads</a:t>
+              <a:t> &lt; 0.1 eV) and penalises Frenkel-exciton systems</a:t>
+            </a:r>
+          </a:p>
+          <a:p>
+            <a:pPr algn="l"/>
+            <a:r>
+              <a:rPr sz="1400" b="0">
+                <a:solidFill>
+                  <a:srgbClr val="475569"/>
+                </a:solidFill>
+                <a:latin typeface="Arial"/>
+              </a:rPr>
+              <a:t>•  Bounded, differentiable, physically interpretable; replaces four independent regression heads with one</a:t>
             </a:r>
           </a:p>
         </p:txBody>
@@ -4565,7 +4583,7 @@
                 </a:solidFill>
                 <a:latin typeface="Arial"/>
               </a:rPr>
-              <a:t>HistGBR — gradient boosting on histograms</a:t>
+              <a:t>Histogram-based gradient boosting regression</a:t>
             </a:r>
           </a:p>
         </p:txBody>
@@ -4600,7 +4618,7 @@
                 </a:solidFill>
                 <a:latin typeface="Arial"/>
               </a:rPr>
-              <a:t>Stagewise additive function approximation [Friedman 2001 · Ke et al. 2017]</a:t>
+              <a:t>Stage-wise additive function approximation [Friedman 2001 · Ke et al. 2017]</a:t>
             </a:r>
           </a:p>
         </p:txBody>
@@ -4689,7 +4707,7 @@
                 </a:solidFill>
                 <a:latin typeface="Arial"/>
               </a:rPr>
-              <a:t>(x), with h</a:t>
+              <a:t>(x), where h</a:t>
             </a:r>
             <a:r>
               <a:rPr sz="1400" b="0" baseline="-25000">
@@ -4707,7 +4725,7 @@
                 </a:solidFill>
                 <a:latin typeface="Arial"/>
               </a:rPr>
-              <a:t> fitting the negative gradient of the loss at F</a:t>
+              <a:t> fits the negative gradient of the loss at F</a:t>
             </a:r>
             <a:r>
               <a:rPr sz="1400" b="0" baseline="-25000">
@@ -4728,43 +4746,43 @@
                 </a:solidFill>
                 <a:latin typeface="Arial"/>
               </a:rPr>
-              <a:t>•  Histogram binning (256 buckets): O(N · F · K) feature-bin scans → ~3× faster than plain GBR</a:t>
-            </a:r>
-          </a:p>
-          <a:p>
-            <a:pPr algn="l"/>
-            <a:r>
-              <a:rPr sz="1400" b="0">
-                <a:solidFill>
-                  <a:srgbClr val="475569"/>
-                </a:solidFill>
-                <a:latin typeface="Arial"/>
-              </a:rPr>
-              <a:t>•  Native NaN routing: missing values learn their own split direction at each node</a:t>
-            </a:r>
-          </a:p>
-          <a:p>
-            <a:pPr algn="l"/>
-            <a:r>
-              <a:rPr sz="1400" b="0">
-                <a:solidFill>
-                  <a:srgbClr val="475569"/>
-                </a:solidFill>
-                <a:latin typeface="Arial"/>
-              </a:rPr>
-              <a:t>•  Hyperparameters: 600 boosting iters · max depth 4 · learning rate 0.05 · min-samples-leaf 10</a:t>
-            </a:r>
-          </a:p>
-          <a:p>
-            <a:pPr algn="l"/>
-            <a:r>
-              <a:rPr sz="1400" b="0">
-                <a:solidFill>
-                  <a:srgbClr val="475569"/>
-                </a:solidFill>
-                <a:latin typeface="Arial"/>
-              </a:rPr>
-              <a:t>•  TransformedTargetRegressor wraps a log</a:t>
+              <a:t>•  Histogram binning into 256 discrete buckets reduces a split scan from O(N) to O(B), yielding ~3× speedup</a:t>
+            </a:r>
+          </a:p>
+          <a:p>
+            <a:pPr algn="l"/>
+            <a:r>
+              <a:rPr sz="1400" b="0">
+                <a:solidFill>
+                  <a:srgbClr val="475569"/>
+                </a:solidFill>
+                <a:latin typeface="Arial"/>
+              </a:rPr>
+              <a:t>•  Native NaN handling: missing values learn an independent split direction at each tree node</a:t>
+            </a:r>
+          </a:p>
+          <a:p>
+            <a:pPr algn="l"/>
+            <a:r>
+              <a:rPr sz="1400" b="0">
+                <a:solidFill>
+                  <a:srgbClr val="475569"/>
+                </a:solidFill>
+                <a:latin typeface="Arial"/>
+              </a:rPr>
+              <a:t>•  Hyperparameters: 600 boosting iterations · maximum depth 4 · learning rate 0.05 · minimum samples per leaf 10</a:t>
+            </a:r>
+          </a:p>
+          <a:p>
+            <a:pPr algn="l"/>
+            <a:r>
+              <a:rPr sz="1400" b="0">
+                <a:solidFill>
+                  <a:srgbClr val="475569"/>
+                </a:solidFill>
+                <a:latin typeface="Arial"/>
+              </a:rPr>
+              <a:t>•  Target wrapped in log</a:t>
             </a:r>
             <a:r>
               <a:rPr sz="1400" b="0" baseline="-25000">
@@ -4782,19 +4800,19 @@
                 </a:solidFill>
                 <a:latin typeface="Arial"/>
               </a:rPr>
-              <a:t>p(y / 0.08) target → expm1 inverse</a:t>
-            </a:r>
-          </a:p>
-          <a:p>
-            <a:pPr algn="l"/>
-            <a:r>
-              <a:rPr sz="1400" b="0">
-                <a:solidFill>
-                  <a:srgbClr val="475569"/>
-                </a:solidFill>
-                <a:latin typeface="Arial"/>
-              </a:rPr>
-              <a:t>•  log target compresses heavy-tailed y; equalises booster resolution at peak (y ≈ 0.5) and bulk (y ≈ 0.01)</a:t>
+              <a:t>p(y / 0.08) by TransformedTargetRegressor; inverse via 0.08 · expm1</a:t>
+            </a:r>
+          </a:p>
+          <a:p>
+            <a:pPr algn="l"/>
+            <a:r>
+              <a:rPr sz="1400" b="0">
+                <a:solidFill>
+                  <a:srgbClr val="475569"/>
+                </a:solidFill>
+                <a:latin typeface="Arial"/>
+              </a:rPr>
+              <a:t>•  Logarithmic transform compresses the heavy-tailed PV-score distribution and equalises booster resolution near peak (y ≈ 0.5) and bulk (y ≈ 0.01)</a:t>
             </a:r>
           </a:p>
         </p:txBody>
@@ -4952,7 +4970,7 @@
                 </a:solidFill>
                 <a:latin typeface="Arial"/>
               </a:rPr>
-              <a:t>GPR + RF — calibrated uncertainty source</a:t>
+              <a:t>Gaussian-process and random-forest uncertainty stack</a:t>
             </a:r>
           </a:p>
         </p:txBody>
@@ -4987,7 +5005,7 @@
                 </a:solidFill>
                 <a:latin typeface="Arial"/>
               </a:rPr>
-              <a:t>Matérn-5/2 kernel + WhiteKernel noise [Rasmussen &amp; Williams 2006]</a:t>
+              <a:t>Matérn-5/2 kernel with additive white noise [Rasmussen &amp; Williams 2006]</a:t>
             </a:r>
           </a:p>
         </p:txBody>
@@ -5160,19 +5178,19 @@
                 </a:solidFill>
                 <a:latin typeface="Arial"/>
               </a:rPr>
-              <a:t>‖ / ℓ — anisotropic length-scale ℓ optimised by L-BFGS-B on marginal log-likelihood</a:t>
-            </a:r>
-          </a:p>
-          <a:p>
-            <a:pPr algn="l"/>
-            <a:r>
-              <a:rPr sz="1400" b="0">
-                <a:solidFill>
-                  <a:srgbClr val="475569"/>
-                </a:solidFill>
-                <a:latin typeface="Arial"/>
-              </a:rPr>
-              <a:t>•  WhiteKernel σ</a:t>
+              <a:t>‖ / ℓ; the anisotropic length-scale ℓ is optimised by L-BFGS-B on the marginal log-likelihood</a:t>
+            </a:r>
+          </a:p>
+          <a:p>
+            <a:pPr algn="l"/>
+            <a:r>
+              <a:rPr sz="1400" b="0">
+                <a:solidFill>
+                  <a:srgbClr val="475569"/>
+                </a:solidFill>
+                <a:latin typeface="Arial"/>
+              </a:rPr>
+              <a:t>•  White-noise variance σ</a:t>
             </a:r>
             <a:r>
               <a:rPr sz="1400" b="0" baseline="-25000">
@@ -5199,31 +5217,31 @@
                 </a:solidFill>
                 <a:latin typeface="Arial"/>
               </a:rPr>
-              <a:t> absorbs DFT scatter (typically 0.02 – 0.05 on the log target)</a:t>
-            </a:r>
-          </a:p>
-          <a:p>
-            <a:pPr algn="l"/>
-            <a:r>
-              <a:rPr sz="1400" b="0">
-                <a:solidFill>
-                  <a:srgbClr val="475569"/>
-                </a:solidFill>
-                <a:latin typeface="Arial"/>
-              </a:rPr>
-              <a:t>•  Random Forest layer (300 trees) corrects GPR underconfidence in sparse regions</a:t>
-            </a:r>
-          </a:p>
-          <a:p>
-            <a:pPr algn="l"/>
-            <a:r>
-              <a:rPr sz="1400" b="0">
-                <a:solidFill>
-                  <a:srgbClr val="475569"/>
-                </a:solidFill>
-                <a:latin typeface="Arial"/>
-              </a:rPr>
-              <a:t>•  Stack: μ(x) = w</a:t>
+              <a:t> absorbs DFT scatter, typically 0.02 – 0.05 on the log target</a:t>
+            </a:r>
+          </a:p>
+          <a:p>
+            <a:pPr algn="l"/>
+            <a:r>
+              <a:rPr sz="1400" b="0">
+                <a:solidFill>
+                  <a:srgbClr val="475569"/>
+                </a:solidFill>
+                <a:latin typeface="Arial"/>
+              </a:rPr>
+              <a:t>•  A random-forest predictor (300 trees) compensates for GP underconfidence in sparsely sampled regions</a:t>
+            </a:r>
+          </a:p>
+          <a:p>
+            <a:pPr algn="l"/>
+            <a:r>
+              <a:rPr sz="1400" b="0">
+                <a:solidFill>
+                  <a:srgbClr val="475569"/>
+                </a:solidFill>
+                <a:latin typeface="Arial"/>
+              </a:rPr>
+              <a:t>•  Stack mean: μ(x) = w</a:t>
             </a:r>
             <a:r>
               <a:rPr sz="1400" b="0" baseline="-25000">
@@ -5295,7 +5313,7 @@
                 </a:solidFill>
                 <a:latin typeface="Arial"/>
               </a:rPr>
-              <a:t> · σ</a:t>
+              <a:t> · variance: σ</a:t>
             </a:r>
             <a:r>
               <a:rPr sz="1400" b="0" baseline="30000">
@@ -5424,43 +5442,7 @@
                 </a:solidFill>
                 <a:latin typeface="Arial"/>
               </a:rPr>
-              <a:t>•  Weights w</a:t>
-            </a:r>
-            <a:r>
-              <a:rPr sz="1400" b="0" baseline="-25000">
-                <a:solidFill>
-                  <a:srgbClr val="475569"/>
-                </a:solidFill>
-                <a:latin typeface="Arial"/>
-              </a:rPr>
-              <a:t>GP</a:t>
-            </a:r>
-            <a:r>
-              <a:rPr sz="1400" b="0">
-                <a:solidFill>
-                  <a:srgbClr val="475569"/>
-                </a:solidFill>
-                <a:latin typeface="Arial"/>
-              </a:rPr>
-              <a:t>, w</a:t>
-            </a:r>
-            <a:r>
-              <a:rPr sz="1400" b="0" baseline="-25000">
-                <a:solidFill>
-                  <a:srgbClr val="475569"/>
-                </a:solidFill>
-                <a:latin typeface="Arial"/>
-              </a:rPr>
-              <a:t>RF</a:t>
-            </a:r>
-            <a:r>
-              <a:rPr sz="1400" b="0">
-                <a:solidFill>
-                  <a:srgbClr val="475569"/>
-                </a:solidFill>
-                <a:latin typeface="Arial"/>
-              </a:rPr>
-              <a:t> from non-negative ridge on out-of-fold predictions — calibrated, not residual-fit</a:t>
+              <a:t>•  Mixing weights are obtained via non-negative ridge regression on out-of-fold predictions, ensuring calibration</a:t>
             </a:r>
           </a:p>
         </p:txBody>
@@ -5618,7 +5600,7 @@
                 </a:solidFill>
                 <a:latin typeface="Arial"/>
               </a:rPr>
-              <a:t>UCB acquisition for active learning</a:t>
+              <a:t>Upper-confidence-bound acquisition for active learning</a:t>
             </a:r>
           </a:p>
         </p:txBody>
@@ -5653,7 +5635,7 @@
                 </a:solidFill>
                 <a:latin typeface="Arial"/>
               </a:rPr>
-              <a:t>Sequentially pick the next DFT batch [Snoek et al. 2012]</a:t>
+              <a:t>Sequential selection of the next DFT batch [Snoek et al. 2012]</a:t>
             </a:r>
           </a:p>
         </p:txBody>
@@ -5706,67 +5688,67 @@
                 </a:solidFill>
                 <a:latin typeface="Arial"/>
               </a:rPr>
-              <a:t>(x) = μ(x) + κ · σ(x), κ = 2</a:t>
-            </a:r>
-          </a:p>
-          <a:p>
-            <a:pPr algn="l"/>
-            <a:r>
-              <a:rPr sz="1400" b="0">
-                <a:solidFill>
-                  <a:srgbClr val="475569"/>
-                </a:solidFill>
-                <a:latin typeface="Arial"/>
-              </a:rPr>
-              <a:t>•  μ(x) from HistGBR (better mean predictor on labelled set)</a:t>
-            </a:r>
-          </a:p>
-          <a:p>
-            <a:pPr algn="l"/>
-            <a:r>
-              <a:rPr sz="1400" b="0">
-                <a:solidFill>
-                  <a:srgbClr val="475569"/>
-                </a:solidFill>
-                <a:latin typeface="Arial"/>
-              </a:rPr>
-              <a:t>•  σ(x) from GPR + RF stack (calibrated uncertainty source)</a:t>
-            </a:r>
-          </a:p>
-          <a:p>
-            <a:pPr algn="l"/>
-            <a:r>
-              <a:rPr sz="1400" b="0">
-                <a:solidFill>
-                  <a:srgbClr val="475569"/>
-                </a:solidFill>
-                <a:latin typeface="Arial"/>
-              </a:rPr>
-              <a:t>•  κ = 2 spans exploitation (high μ) and exploration (high σ) — typical Bayesian-opt regime</a:t>
-            </a:r>
-          </a:p>
-          <a:p>
-            <a:pPr algn="l"/>
-            <a:r>
-              <a:rPr sz="1400" b="0">
-                <a:solidFill>
-                  <a:srgbClr val="475569"/>
-                </a:solidFill>
-                <a:latin typeface="Arial"/>
-              </a:rPr>
-              <a:t>•  Decoupling μ and σ between two models avoids GP underconfidence at the high-score tail</a:t>
-            </a:r>
-          </a:p>
-          <a:p>
-            <a:pPr algn="l"/>
-            <a:r>
-              <a:rPr sz="1400" b="0">
-                <a:solidFill>
-                  <a:srgbClr val="475569"/>
-                </a:solidFill>
-                <a:latin typeface="Arial"/>
-              </a:rPr>
-              <a:t>•  Top-N(x | α) → next active-learning DFT batch; labels feed back into both models</a:t>
+              <a:t>(x) = μ(x) + κ · σ(x), with κ = 2</a:t>
+            </a:r>
+          </a:p>
+          <a:p>
+            <a:pPr algn="l"/>
+            <a:r>
+              <a:rPr sz="1400" b="0">
+                <a:solidFill>
+                  <a:srgbClr val="475569"/>
+                </a:solidFill>
+                <a:latin typeface="Arial"/>
+              </a:rPr>
+              <a:t>•  Posterior mean μ(x) is taken from HistGBR, the more accurate mean predictor on labelled data</a:t>
+            </a:r>
+          </a:p>
+          <a:p>
+            <a:pPr algn="l"/>
+            <a:r>
+              <a:rPr sz="1400" b="0">
+                <a:solidFill>
+                  <a:srgbClr val="475569"/>
+                </a:solidFill>
+                <a:latin typeface="Arial"/>
+              </a:rPr>
+              <a:t>•  Posterior standard deviation σ(x) is taken from the GPR + RF stack as a calibrated uncertainty source</a:t>
+            </a:r>
+          </a:p>
+          <a:p>
+            <a:pPr algn="l"/>
+            <a:r>
+              <a:rPr sz="1400" b="0">
+                <a:solidFill>
+                  <a:srgbClr val="475569"/>
+                </a:solidFill>
+                <a:latin typeface="Arial"/>
+              </a:rPr>
+              <a:t>•  κ = 2 balances exploitation (high μ) and exploration (high σ) and is standard in Bayesian optimisation</a:t>
+            </a:r>
+          </a:p>
+          <a:p>
+            <a:pPr algn="l"/>
+            <a:r>
+              <a:rPr sz="1400" b="0">
+                <a:solidFill>
+                  <a:srgbClr val="475569"/>
+                </a:solidFill>
+                <a:latin typeface="Arial"/>
+              </a:rPr>
+              <a:t>•  Decoupling μ and σ between two models prevents GP underconfidence from suppressing the high-score tail</a:t>
+            </a:r>
+          </a:p>
+          <a:p>
+            <a:pPr algn="l"/>
+            <a:r>
+              <a:rPr sz="1400" b="0">
+                <a:solidFill>
+                  <a:srgbClr val="475569"/>
+                </a:solidFill>
+                <a:latin typeface="Arial"/>
+              </a:rPr>
+              <a:t>•  Top-N entries by α become the next active-learning DFT batch; returned labels are fed back into both models</a:t>
             </a:r>
           </a:p>
         </p:txBody>
@@ -5924,7 +5906,7 @@
                 </a:solidFill>
                 <a:latin typeface="Arial"/>
               </a:rPr>
-              <a:t>Validation — random vs grouped CV</a:t>
+              <a:t>Validation under random and grouped cross-validation</a:t>
             </a:r>
           </a:p>
         </p:txBody>
@@ -5959,7 +5941,7 @@
                 </a:solidFill>
                 <a:latin typeface="Arial"/>
               </a:rPr>
-              <a:t>5-fold × 5-seed random CV on n = 473</a:t>
+              <a:t>5-fold × 5-seed random CV on n = 473 labelled materials</a:t>
             </a:r>
           </a:p>
         </p:txBody>
@@ -6018,7 +6000,7 @@
                 </a:solidFill>
                 <a:latin typeface="Arial"/>
               </a:rPr>
-              <a:t>•  HistGBR R</a:t>
+              <a:t>•  HistGBR achieves R</a:t>
             </a:r>
             <a:r>
               <a:rPr sz="1400" b="0" baseline="30000">
@@ -6036,19 +6018,19 @@
                 </a:solidFill>
                 <a:latin typeface="Arial"/>
               </a:rPr>
-              <a:t> = 0.466 ± 0.035 · MAE = 0.012 · top-20 recall = 0.50</a:t>
-            </a:r>
-          </a:p>
-          <a:p>
-            <a:pPr algn="l"/>
-            <a:r>
-              <a:rPr sz="1400" b="0">
-                <a:solidFill>
-                  <a:srgbClr val="475569"/>
-                </a:solidFill>
-                <a:latin typeface="Arial"/>
-              </a:rPr>
-              <a:t>•  +50 % R</a:t>
+              <a:t> = 0.466 ± 0.035 · MAE = 0.012 · top-20 recall 0.50</a:t>
+            </a:r>
+          </a:p>
+          <a:p>
+            <a:pPr algn="l"/>
+            <a:r>
+              <a:rPr sz="1400" b="0">
+                <a:solidFill>
+                  <a:srgbClr val="475569"/>
+                </a:solidFill>
+                <a:latin typeface="Arial"/>
+              </a:rPr>
+              <a:t>•  Improves over the prior GPR / GB / ExtraTrees baseline by +50 % in R</a:t>
             </a:r>
             <a:r>
               <a:rPr sz="1400" b="0" baseline="30000">
@@ -6066,31 +6048,31 @@
                 </a:solidFill>
                 <a:latin typeface="Arial"/>
               </a:rPr>
-              <a:t> over the GPR / GB / ExT baseline (was 0.31)</a:t>
-            </a:r>
-          </a:p>
-          <a:p>
-            <a:pPr algn="l"/>
-            <a:r>
-              <a:rPr sz="1400" b="0">
-                <a:solidFill>
-                  <a:srgbClr val="475569"/>
-                </a:solidFill>
-                <a:latin typeface="Arial"/>
-              </a:rPr>
-              <a:t>•  Ablation: GBR 0.399 · ExtraTrees 0.234 · MEGNet fine-tune 0.307 · MEGNet frozen 0.366</a:t>
-            </a:r>
-          </a:p>
-          <a:p>
-            <a:pPr algn="l"/>
-            <a:r>
-              <a:rPr sz="1400" b="0">
-                <a:solidFill>
-                  <a:srgbClr val="475569"/>
-                </a:solidFill>
-                <a:latin typeface="Arial"/>
-              </a:rPr>
-              <a:t>•  Repeated OOF averaging → global R</a:t>
+              <a:t> (0.31 → 0.466)</a:t>
+            </a:r>
+          </a:p>
+          <a:p>
+            <a:pPr algn="l"/>
+            <a:r>
+              <a:rPr sz="1400" b="0">
+                <a:solidFill>
+                  <a:srgbClr val="475569"/>
+                </a:solidFill>
+                <a:latin typeface="Arial"/>
+              </a:rPr>
+              <a:t>•  Ablation: GBR 0.399 · ExtraTrees 0.234 · MEGNet fine-tuned 0.307 · MEGNet frozen 0.366</a:t>
+            </a:r>
+          </a:p>
+          <a:p>
+            <a:pPr algn="l"/>
+            <a:r>
+              <a:rPr sz="1400" b="0">
+                <a:solidFill>
+                  <a:srgbClr val="475569"/>
+                </a:solidFill>
+                <a:latin typeface="Arial"/>
+              </a:rPr>
+              <a:t>•  Repeated out-of-fold averaging across seeds yields global R</a:t>
             </a:r>
             <a:r>
               <a:rPr sz="1400" b="0" baseline="30000">
@@ -6108,19 +6090,19 @@
                 </a:solidFill>
                 <a:latin typeface="Arial"/>
               </a:rPr>
-              <a:t> = 0.492, top-20 recall 0.50 (poster headline)</a:t>
-            </a:r>
-          </a:p>
-          <a:p>
-            <a:pPr algn="l"/>
-            <a:r>
-              <a:rPr sz="1400" b="0">
-                <a:solidFill>
-                  <a:srgbClr val="475569"/>
-                </a:solidFill>
-                <a:latin typeface="Arial"/>
-              </a:rPr>
-              <a:t>•  Prototype-grouped CV R</a:t>
+              <a:t> = 0.492 and top-20 recall 0.50</a:t>
+            </a:r>
+          </a:p>
+          <a:p>
+            <a:pPr algn="l"/>
+            <a:r>
+              <a:rPr sz="1400" b="0">
+                <a:solidFill>
+                  <a:srgbClr val="475569"/>
+                </a:solidFill>
+                <a:latin typeface="Arial"/>
+              </a:rPr>
+              <a:t>•  Prototype-grouped CV gives R</a:t>
             </a:r>
             <a:r>
               <a:rPr sz="1400" b="0" baseline="30000">
@@ -6138,19 +6120,19 @@
                 </a:solidFill>
                 <a:latin typeface="Arial"/>
               </a:rPr>
-              <a:t> ≈ 0 — model does not extrapolate to unseen prototype</a:t>
-            </a:r>
-          </a:p>
-          <a:p>
-            <a:pPr algn="l"/>
-            <a:r>
-              <a:rPr sz="1400" b="0">
-                <a:solidFill>
-                  <a:srgbClr val="475569"/>
-                </a:solidFill>
-                <a:latin typeface="Arial"/>
-              </a:rPr>
-              <a:t>•  Chalcogen-grouped CV R</a:t>
+              <a:t> ≈ 0, indicating poor extrapolation to unseen structural prototypes</a:t>
+            </a:r>
+          </a:p>
+          <a:p>
+            <a:pPr algn="l"/>
+            <a:r>
+              <a:rPr sz="1400" b="0">
+                <a:solidFill>
+                  <a:srgbClr val="475569"/>
+                </a:solidFill>
+                <a:latin typeface="Arial"/>
+              </a:rPr>
+              <a:t>•  Chalcogen-family-grouped CV gives R</a:t>
             </a:r>
             <a:r>
               <a:rPr sz="1400" b="0" baseline="30000">
@@ -6168,7 +6150,7 @@
                 </a:solidFill>
                 <a:latin typeface="Arial"/>
               </a:rPr>
-              <a:t> ≈ 0.15 — Se hold-out is the hardest</a:t>
+              <a:t> ≈ 0.15, with Se the most challenging hold-out</a:t>
             </a:r>
           </a:p>
         </p:txBody>
@@ -6361,7 +6343,7 @@
                 </a:solidFill>
                 <a:latin typeface="Arial"/>
               </a:rPr>
-              <a:t>Diagnostic for the next active-learning batch</a:t>
+              <a:t>Diagnostic informing the next active-learning batch</a:t>
             </a:r>
           </a:p>
         </p:txBody>
@@ -6396,43 +6378,43 @@
                 </a:solidFill>
                 <a:latin typeface="Arial"/>
               </a:rPr>
-              <a:t>•  Score = RMSE · √n + 0.02 · missed-top-20 (penalises ranking errors)</a:t>
-            </a:r>
-          </a:p>
-          <a:p>
-            <a:pPr algn="l"/>
-            <a:r>
-              <a:rPr sz="1400" b="0">
-                <a:solidFill>
-                  <a:srgbClr val="475569"/>
-                </a:solidFill>
-                <a:latin typeface="Arial"/>
-              </a:rPr>
-              <a:t>•  Se (n = 182): RMSE 0.042, 17 true top-20, 9 missed → highest priority</a:t>
-            </a:r>
-          </a:p>
-          <a:p>
-            <a:pPr algn="l"/>
-            <a:r>
-              <a:rPr sz="1400" b="0">
-                <a:solidFill>
-                  <a:srgbClr val="475569"/>
-                </a:solidFill>
-                <a:latin typeface="Arial"/>
-              </a:rPr>
-              <a:t>•  high-score bin (y &gt; 0.1, n = 14): RMSE 0.145 — under-modelled tail</a:t>
-            </a:r>
-          </a:p>
-          <a:p>
-            <a:pPr algn="l"/>
-            <a:r>
-              <a:rPr sz="1400" b="0">
-                <a:solidFill>
-                  <a:srgbClr val="475569"/>
-                </a:solidFill>
-                <a:latin typeface="Arial"/>
-              </a:rPr>
-              <a:t>•  SG 62 Pnma (n = 182): RMSE 0.034, 4 missed of 10</a:t>
+              <a:t>•  Score = RMSE · √n + 0.02 · (missed top-20), penalising ranking errors at the high-score tail</a:t>
+            </a:r>
+          </a:p>
+          <a:p>
+            <a:pPr algn="l"/>
+            <a:r>
+              <a:rPr sz="1400" b="0">
+                <a:solidFill>
+                  <a:srgbClr val="475569"/>
+                </a:solidFill>
+                <a:latin typeface="Arial"/>
+              </a:rPr>
+              <a:t>•  Se (n = 182): RMSE 0.042, 17 true top-20 candidates, 9 missed by HistGBR — highest priority</a:t>
+            </a:r>
+          </a:p>
+          <a:p>
+            <a:pPr algn="l"/>
+            <a:r>
+              <a:rPr sz="1400" b="0">
+                <a:solidFill>
+                  <a:srgbClr val="475569"/>
+                </a:solidFill>
+                <a:latin typeface="Arial"/>
+              </a:rPr>
+              <a:t>•  High-score bin (y &gt; 0.1, n = 14): RMSE 0.145, identifying the under-modelled tail</a:t>
+            </a:r>
+          </a:p>
+          <a:p>
+            <a:pPr algn="l"/>
+            <a:r>
+              <a:rPr sz="1400" b="0">
+                <a:solidFill>
+                  <a:srgbClr val="475569"/>
+                </a:solidFill>
+                <a:latin typeface="Arial"/>
+              </a:rPr>
+              <a:t>•  Pnma (SG 62, n = 182): RMSE 0.034, 4 of 10 true top-20 missed</a:t>
             </a:r>
           </a:p>
           <a:p>
@@ -6480,7 +6462,7 @@
                 </a:solidFill>
                 <a:latin typeface="Arial"/>
               </a:rPr>
-              <a:t> (n = 91): RMSE 0.045, 1 missed of 7</a:t>
+              <a:t> (n = 91): RMSE 0.045, 1 of 7 true top-20 missed</a:t>
             </a:r>
           </a:p>
           <a:p>
@@ -6510,7 +6492,7 @@
                 </a:solidFill>
                 <a:latin typeface="Arial"/>
               </a:rPr>
-              <a:t> (n = 56): RMSE 0.045, 50 % miss-rate of top-20 — sharpest data gap</a:t>
+              <a:t> (n = 56): RMSE 0.045, 50 % top-20 miss rate — the most pronounced data-coverage gap</a:t>
             </a:r>
           </a:p>
         </p:txBody>
@@ -6799,7 +6781,7 @@
                 </a:solidFill>
                 <a:latin typeface="Arial"/>
               </a:rPr>
-              <a:t>Top-14 candidates (PV score y &gt; 0.10)</a:t>
+              <a:t>Top-fourteen candidates (PV score y &gt; 0.10)</a:t>
             </a:r>
           </a:p>
         </p:txBody>
@@ -6834,7 +6816,7 @@
                 </a:solidFill>
                 <a:latin typeface="Arial"/>
               </a:rPr>
-              <a:t>All chalcogenides · 11 / 14 selenides · AB</a:t>
+              <a:t>All entries are chalcogenides; eleven of fourteen are selenides; AB</a:t>
             </a:r>
             <a:r>
               <a:rPr sz="1600" b="0" baseline="-25000">
@@ -6870,7 +6852,7 @@
                 </a:solidFill>
                 <a:latin typeface="Arial"/>
               </a:rPr>
-              <a:t> dominates</a:t>
+              <a:t> is the dominant prototype</a:t>
             </a:r>
           </a:p>
         </p:txBody>
@@ -6929,7 +6911,7 @@
                 </a:solidFill>
                 <a:latin typeface="Arial"/>
               </a:rPr>
-              <a:t>•  Anion-rich Se preferred · 11 / 14 are selenides, top-6 all Se</a:t>
+              <a:t>•  Selenides preferred: 11 of 14 are Se-based and the top six are all Se</a:t>
             </a:r>
           </a:p>
           <a:p>
@@ -6977,7 +6959,7 @@
                 </a:solidFill>
                 <a:latin typeface="Arial"/>
               </a:rPr>
-              <a:t> supplies 7 / 14 · ABC</a:t>
+              <a:t> supplies 7 of 14 entries; the remainder is split between ABC</a:t>
             </a:r>
             <a:r>
               <a:rPr sz="1400" b="0" baseline="-25000">
@@ -6995,7 +6977,7 @@
                 </a:solidFill>
                 <a:latin typeface="Arial"/>
               </a:rPr>
-              <a:t> / ABC</a:t>
+              <a:t> and ABC</a:t>
             </a:r>
             <a:r>
               <a:rPr sz="1400" b="0" baseline="-25000">
@@ -7006,50 +6988,41 @@
               </a:rPr>
               <a:t>2</a:t>
             </a:r>
-            <a:r>
-              <a:rPr sz="1400" b="0">
-                <a:solidFill>
-                  <a:srgbClr val="475569"/>
-                </a:solidFill>
-                <a:latin typeface="Arial"/>
-              </a:rPr>
-              <a:t> fill the rest</a:t>
-            </a:r>
-          </a:p>
-          <a:p>
-            <a:pPr algn="l"/>
-            <a:r>
-              <a:rPr sz="1400" b="0">
-                <a:solidFill>
-                  <a:srgbClr val="475569"/>
-                </a:solidFill>
-                <a:latin typeface="Arial"/>
-              </a:rPr>
-              <a:t>•  Pnma (SG 62) holds 7 / 14 — extend into 12, 14, 72, 15 next</a:t>
-            </a:r>
-          </a:p>
-          <a:p>
-            <a:pPr algn="l"/>
-            <a:r>
-              <a:rPr sz="1400" b="0">
-                <a:solidFill>
-                  <a:srgbClr val="475569"/>
-                </a:solidFill>
-                <a:latin typeface="Arial"/>
-              </a:rPr>
-              <a:t>•  PV-score range 0.10 – 0.49 across the 14</a:t>
-            </a:r>
-          </a:p>
-          <a:p>
-            <a:pPr algn="l"/>
-            <a:r>
-              <a:rPr sz="1400" b="0">
-                <a:solidFill>
-                  <a:srgbClr val="475569"/>
-                </a:solidFill>
-                <a:latin typeface="Arial"/>
-              </a:rPr>
-              <a:t>•  ⟨E</a:t>
+          </a:p>
+          <a:p>
+            <a:pPr algn="l"/>
+            <a:r>
+              <a:rPr sz="1400" b="0">
+                <a:solidFill>
+                  <a:srgbClr val="475569"/>
+                </a:solidFill>
+                <a:latin typeface="Arial"/>
+              </a:rPr>
+              <a:t>•  Pnma (SG 62) accounts for 7 of 14; remaining entries fall in SG 12, 14, 72 and 15</a:t>
+            </a:r>
+          </a:p>
+          <a:p>
+            <a:pPr algn="l"/>
+            <a:r>
+              <a:rPr sz="1400" b="0">
+                <a:solidFill>
+                  <a:srgbClr val="475569"/>
+                </a:solidFill>
+                <a:latin typeface="Arial"/>
+              </a:rPr>
+              <a:t>•  PV-score distribution spans 0.10 to 0.49 across the shortlist</a:t>
+            </a:r>
+          </a:p>
+          <a:p>
+            <a:pPr algn="l"/>
+            <a:r>
+              <a:rPr sz="1400" b="0">
+                <a:solidFill>
+                  <a:srgbClr val="475569"/>
+                </a:solidFill>
+                <a:latin typeface="Arial"/>
+              </a:rPr>
+              <a:t>•  Aggregate descriptors: ⟨E</a:t>
             </a:r>
             <a:r>
               <a:rPr sz="1400" b="0" baseline="-25000">
@@ -7106,7 +7079,7 @@
                 </a:solidFill>
                 <a:latin typeface="Arial"/>
               </a:rPr>
-              <a:t>•  24 % direct-gap; remaining 76 % retained for combined low-m</a:t>
+              <a:t>•  24 % are direct-gap; the remaining 76 % are retained for combined low m</a:t>
             </a:r>
             <a:r>
               <a:rPr sz="1400" b="0" baseline="30000">
@@ -7124,7 +7097,7 @@
                 </a:solidFill>
                 <a:latin typeface="Arial"/>
               </a:rPr>
-              <a:t> / high-ε / low-E</a:t>
+              <a:t>, high ε and low E</a:t>
             </a:r>
             <a:r>
               <a:rPr sz="1400" b="0" baseline="-25000">
@@ -7475,7 +7448,7 @@
                 </a:solidFill>
                 <a:latin typeface="Arial"/>
               </a:rPr>
-              <a:t> MP/OQMD → 647 DFT → 473 ML → 41 PV → 14 action list</a:t>
+              <a:t> MP / OQMD → 647 DFT-screened → 473 ML-ready → 41 PV-promising → 14 shortlist</a:t>
             </a:r>
           </a:p>
         </p:txBody>
@@ -7552,43 +7525,43 @@
                 </a:solidFill>
                 <a:latin typeface="Arial"/>
               </a:rPr>
-              <a:t> MP + OQMD entries</a:t>
-            </a:r>
-          </a:p>
-          <a:p>
-            <a:pPr algn="l"/>
-            <a:r>
-              <a:rPr sz="1400" b="0">
-                <a:solidFill>
-                  <a:srgbClr val="475569"/>
-                </a:solidFill>
-                <a:latin typeface="Arial"/>
-              </a:rPr>
-              <a:t>•  Stage 2: 647 with full HSE band + DFPT dielectric completed</a:t>
-            </a:r>
-          </a:p>
-          <a:p>
-            <a:pPr algn="l"/>
-            <a:r>
-              <a:rPr sz="1400" b="0">
-                <a:solidFill>
-                  <a:srgbClr val="475569"/>
-                </a:solidFill>
-                <a:latin typeface="Arial"/>
-              </a:rPr>
-              <a:t>•  Stage 3: 473 ML-ready (drop metallic / missing CONTCAR — 174 dropped)</a:t>
-            </a:r>
-          </a:p>
-          <a:p>
-            <a:pPr algn="l"/>
-            <a:r>
-              <a:rPr sz="1400" b="0">
-                <a:solidFill>
-                  <a:srgbClr val="475569"/>
-                </a:solidFill>
-                <a:latin typeface="Arial"/>
-              </a:rPr>
-              <a:t>•  Stage 4: 41 PV-promising (composite y </a:t>
+              <a:t> structures sourced from Materials Project and OQMD</a:t>
+            </a:r>
+          </a:p>
+          <a:p>
+            <a:pPr algn="l"/>
+            <a:r>
+              <a:rPr sz="1400" b="0">
+                <a:solidFill>
+                  <a:srgbClr val="475569"/>
+                </a:solidFill>
+                <a:latin typeface="Arial"/>
+              </a:rPr>
+              <a:t>•  Stage 2: 647 candidates with HSE band structure and DFPT dielectric tensor completed</a:t>
+            </a:r>
+          </a:p>
+          <a:p>
+            <a:pPr algn="l"/>
+            <a:r>
+              <a:rPr sz="1400" b="0">
+                <a:solidFill>
+                  <a:srgbClr val="475569"/>
+                </a:solidFill>
+                <a:latin typeface="Arial"/>
+              </a:rPr>
+              <a:t>•  Stage 3: 473 ML-ready candidates after removing metallic-band and missing-CONTCAR entries (174 excluded)</a:t>
+            </a:r>
+          </a:p>
+          <a:p>
+            <a:pPr algn="l"/>
+            <a:r>
+              <a:rPr sz="1400" b="0">
+                <a:solidFill>
+                  <a:srgbClr val="475569"/>
+                </a:solidFill>
+                <a:latin typeface="Arial"/>
+              </a:rPr>
+              <a:t>•  Stage 4: 41 PV-promising candidates with composite score y </a:t>
             </a:r>
             <a:r>
               <a:rPr sz="1400" b="0" baseline="30000">
@@ -7606,19 +7579,19 @@
                 </a:solidFill>
                 <a:latin typeface="Arial"/>
               </a:rPr>
-              <a:t> 0.05)</a:t>
-            </a:r>
-          </a:p>
-          <a:p>
-            <a:pPr algn="l"/>
-            <a:r>
-              <a:rPr sz="1400" b="0">
-                <a:solidFill>
-                  <a:srgbClr val="475569"/>
-                </a:solidFill>
-                <a:latin typeface="Arial"/>
-              </a:rPr>
-              <a:t>•  Stage 5: 14-material action list (y </a:t>
+              <a:t> 0.05</a:t>
+            </a:r>
+          </a:p>
+          <a:p>
+            <a:pPr algn="l"/>
+            <a:r>
+              <a:rPr sz="1400" b="0">
+                <a:solidFill>
+                  <a:srgbClr val="475569"/>
+                </a:solidFill>
+                <a:latin typeface="Arial"/>
+              </a:rPr>
+              <a:t>•  Stage 5: 14-candidate shortlist with y </a:t>
             </a:r>
             <a:r>
               <a:rPr sz="1400" b="0" baseline="30000">
@@ -7636,19 +7609,19 @@
                 </a:solidFill>
                 <a:latin typeface="Arial"/>
               </a:rPr>
-              <a:t> 0.10) feeds next DFT round</a:t>
-            </a:r>
-          </a:p>
-          <a:p>
-            <a:pPr algn="l"/>
-            <a:r>
-              <a:rPr sz="1400" b="0">
-                <a:solidFill>
-                  <a:srgbClr val="475569"/>
-                </a:solidFill>
-                <a:latin typeface="Arial"/>
-              </a:rPr>
-              <a:t>•  Funnel narrows by 4 orders of magnitude — actionable size for synthesis triage</a:t>
+              <a:t> 0.10 feeding the next active-learning DFT round</a:t>
+            </a:r>
+          </a:p>
+          <a:p>
+            <a:pPr algn="l"/>
+            <a:r>
+              <a:rPr sz="1400" b="0">
+                <a:solidFill>
+                  <a:srgbClr val="475569"/>
+                </a:solidFill>
+                <a:latin typeface="Arial"/>
+              </a:rPr>
+              <a:t>•  Funnel narrows by approximately four orders of magnitude into a tractable shortlist for experimental verification</a:t>
             </a:r>
           </a:p>
         </p:txBody>
@@ -7806,7 +7779,7 @@
                 </a:solidFill>
                 <a:latin typeface="Arial"/>
               </a:rPr>
-              <a:t>Hit #1 — Se</a:t>
+              <a:t>Lead candidate — Se</a:t>
             </a:r>
             <a:r>
               <a:rPr sz="2800" b="1" baseline="-25000">
@@ -7922,7 +7895,7 @@
                 </a:solidFill>
                 <a:latin typeface="Arial"/>
               </a:rPr>
-              <a:t> · Pnma (SG 62) · the Shockley–Queisser bullseye</a:t>
+              <a:t> prototype · Pnma (SG 62) · near-optimal Shockley–Queisser gap</a:t>
             </a:r>
           </a:p>
         </p:txBody>
@@ -7999,7 +7972,7 @@
                 </a:solidFill>
                 <a:latin typeface="Arial"/>
               </a:rPr>
-              <a:t> = 1.12 eV — within 0.22 eV of SQ optimum (1.34 eV)</a:t>
+              <a:t> = 1.12 eV, within 0.22 eV of the Shockley–Queisser optimum at 1.34 eV</a:t>
             </a:r>
           </a:p>
           <a:p>
@@ -8047,7 +8020,7 @@
                 </a:solidFill>
                 <a:latin typeface="Arial"/>
               </a:rPr>
-              <a:t> — light carriers, mobility comparable to GaAs</a:t>
+              <a:t>, indicating low effective mass and high carrier mobility</a:t>
             </a:r>
           </a:p>
           <a:p>
@@ -8077,7 +8050,7 @@
                 </a:solidFill>
                 <a:latin typeface="Arial"/>
               </a:rPr>
-              <a:t> = 19.5 — strong dielectric screening, suppresses Frenkel formation</a:t>
+              <a:t> = 19.5, providing strong dielectric screening and suppressing Frenkel-exciton formation</a:t>
             </a:r>
           </a:p>
           <a:p>
@@ -8107,7 +8080,7 @@
                 </a:solidFill>
                 <a:latin typeface="Arial"/>
               </a:rPr>
-              <a:t> = 7 meV — well below k</a:t>
+              <a:t> = 7 meV, well below k</a:t>
             </a:r>
             <a:r>
               <a:rPr sz="1400" b="0" baseline="-25000">
@@ -8125,31 +8098,31 @@
                 </a:solidFill>
                 <a:latin typeface="Arial"/>
               </a:rPr>
-              <a:t>T at 300 K (Wannier–Mott)</a:t>
-            </a:r>
-          </a:p>
-          <a:p>
-            <a:pPr algn="l"/>
-            <a:r>
-              <a:rPr sz="1400" b="0">
-                <a:solidFill>
-                  <a:srgbClr val="475569"/>
-                </a:solidFill>
-                <a:latin typeface="Arial"/>
-              </a:rPr>
-              <a:t>•  Composite PV score y = 0.487 — top of the screened set</a:t>
-            </a:r>
-          </a:p>
-          <a:p>
-            <a:pPr algn="l"/>
-            <a:r>
-              <a:rPr sz="1400" b="0">
-                <a:solidFill>
-                  <a:srgbClr val="475569"/>
-                </a:solidFill>
-                <a:latin typeface="Arial"/>
-              </a:rPr>
-              <a:t>•  Synthesis precedent: Sn–Zr–Se ternary phases reported, no PV device yet</a:t>
+              <a:t>T at 300 K, placing the absorber in the Wannier–Mott regime</a:t>
+            </a:r>
+          </a:p>
+          <a:p>
+            <a:pPr algn="l"/>
+            <a:r>
+              <a:rPr sz="1400" b="0">
+                <a:solidFill>
+                  <a:srgbClr val="475569"/>
+                </a:solidFill>
+                <a:latin typeface="Arial"/>
+              </a:rPr>
+              <a:t>•  Composite PV score y = 0.487, the highest in the screened set</a:t>
+            </a:r>
+          </a:p>
+          <a:p>
+            <a:pPr algn="l"/>
+            <a:r>
+              <a:rPr sz="1400" b="0">
+                <a:solidFill>
+                  <a:srgbClr val="475569"/>
+                </a:solidFill>
+                <a:latin typeface="Arial"/>
+              </a:rPr>
+              <a:t>•  Sn–Zr–Se ternary phases have reported synthesis routes; no photovoltaic-device demonstration to date</a:t>
             </a:r>
           </a:p>
         </p:txBody>
@@ -8307,7 +8280,7 @@
                 </a:solidFill>
                 <a:latin typeface="Arial"/>
               </a:rPr>
-              <a:t>Hit #2 — Cs</a:t>
+              <a:t>Secondary candidate — Cs</a:t>
             </a:r>
             <a:r>
               <a:rPr sz="2800" b="1" baseline="-25000">
@@ -8405,7 +8378,7 @@
                 </a:solidFill>
                 <a:latin typeface="Arial"/>
               </a:rPr>
-              <a:t> · C2/m (SG 12) · Sb 5s</a:t>
+              <a:t> prototype · C2/m (SG 12) · Sb 5s</a:t>
             </a:r>
             <a:r>
               <a:rPr sz="1600" b="0" baseline="30000">
@@ -8423,7 +8396,7 @@
                 </a:solidFill>
                 <a:latin typeface="Arial"/>
               </a:rPr>
-              <a:t> lone pair</a:t>
+              <a:t> lone-pair active cation</a:t>
             </a:r>
           </a:p>
         </p:txBody>
@@ -8500,7 +8473,7 @@
                 </a:solidFill>
                 <a:latin typeface="Arial"/>
               </a:rPr>
-              <a:t> = 1.28 eV — also near the SQ optimum</a:t>
+              <a:t> = 1.28 eV, near the Shockley–Queisser optimum</a:t>
             </a:r>
           </a:p>
           <a:p>
@@ -8548,7 +8521,7 @@
                 </a:solidFill>
                 <a:latin typeface="Arial"/>
               </a:rPr>
-              <a:t> — heavier than Hit #1 but still PV-grade</a:t>
+              <a:t>, heavier than the lead candidate but within the device-relevant range</a:t>
             </a:r>
           </a:p>
           <a:p>
@@ -8578,7 +8551,7 @@
                 </a:solidFill>
                 <a:latin typeface="Arial"/>
               </a:rPr>
-              <a:t> = 12.6 — moderate screening; E</a:t>
+              <a:t> = 12.6, indicating moderate dielectric screening; E</a:t>
             </a:r>
             <a:r>
               <a:rPr sz="1400" b="0" baseline="-25000">
@@ -8608,7 +8581,7 @@
                 </a:solidFill>
                 <a:latin typeface="Arial"/>
               </a:rPr>
-              <a:t>•  PV score y = 0.298 — different prototype family, complements Hit #1</a:t>
+              <a:t>•  Composite PV score y = 0.298, complementing the lead candidate from a distinct structural prototype</a:t>
             </a:r>
           </a:p>
           <a:p>
@@ -8638,37 +8611,19 @@
                 </a:solidFill>
                 <a:latin typeface="Arial"/>
               </a:rPr>
-              <a:t> lone-pair character produces deep, dispersive VBM</a:t>
-            </a:r>
-          </a:p>
-          <a:p>
-            <a:pPr algn="l"/>
-            <a:r>
-              <a:rPr sz="1400" b="0">
-                <a:solidFill>
-                  <a:srgbClr val="475569"/>
-                </a:solidFill>
-                <a:latin typeface="Arial"/>
-              </a:rPr>
-              <a:t>•  Cs</a:t>
-            </a:r>
-            <a:r>
-              <a:rPr sz="1400" b="0" baseline="-25000">
-                <a:solidFill>
-                  <a:srgbClr val="475569"/>
-                </a:solidFill>
-                <a:latin typeface="Arial"/>
-              </a:rPr>
-              <a:t>2</a:t>
-            </a:r>
-            <a:r>
-              <a:rPr sz="1400" b="0">
-                <a:solidFill>
-                  <a:srgbClr val="475569"/>
-                </a:solidFill>
-                <a:latin typeface="Arial"/>
-              </a:rPr>
-              <a:t>SbSe-type ternaries known synthesisable from solution routes</a:t>
+              <a:t> lone-pair character produces a deep, dispersive valence-band maximum</a:t>
+            </a:r>
+          </a:p>
+          <a:p>
+            <a:pPr algn="l"/>
+            <a:r>
+              <a:rPr sz="1400" b="0">
+                <a:solidFill>
+                  <a:srgbClr val="475569"/>
+                </a:solidFill>
+                <a:latin typeface="Arial"/>
+              </a:rPr>
+              <a:t>•  Cs–Sb–Se ternary phases have established solution-processing synthesis routes</a:t>
             </a:r>
           </a:p>
         </p:txBody>
@@ -8957,7 +8912,7 @@
                 </a:solidFill>
                 <a:latin typeface="Arial"/>
               </a:rPr>
-              <a:t>Why device simulation</a:t>
+              <a:t>Motivation for device-scale simulation</a:t>
             </a:r>
           </a:p>
         </p:txBody>
@@ -8992,7 +8947,7 @@
                 </a:solidFill>
                 <a:latin typeface="Arial"/>
               </a:rPr>
-              <a:t>DFT params alone don't predict PCE</a:t>
+              <a:t>Bulk material descriptors alone do not determine device-level performance</a:t>
             </a:r>
           </a:p>
         </p:txBody>
@@ -9063,7 +9018,7 @@
                 </a:solidFill>
                 <a:latin typeface="Arial"/>
               </a:rPr>
-              <a:t>, ε, E</a:t>
+              <a:t>, ε and E</a:t>
             </a:r>
             <a:r>
               <a:rPr sz="1400" b="0" baseline="-25000">
@@ -9081,67 +9036,67 @@
                 </a:solidFill>
                 <a:latin typeface="Arial"/>
               </a:rPr>
-              <a:t> — bulk material-level descriptors only</a:t>
-            </a:r>
-          </a:p>
-          <a:p>
-            <a:pPr algn="l"/>
-            <a:r>
-              <a:rPr sz="1400" b="0">
-                <a:solidFill>
-                  <a:srgbClr val="475569"/>
-                </a:solidFill>
-                <a:latin typeface="Arial"/>
-              </a:rPr>
-              <a:t>•  Device PCE depends on stack geometry, contacts, optical absorption, recombination</a:t>
-            </a:r>
-          </a:p>
-          <a:p>
-            <a:pPr algn="l"/>
-            <a:r>
-              <a:rPr sz="1400" b="0">
-                <a:solidFill>
-                  <a:srgbClr val="475569"/>
-                </a:solidFill>
-                <a:latin typeface="Arial"/>
-              </a:rPr>
-              <a:t>•  Need drift-diffusion + Poisson at full layer scale (HTL · absorber · ETL)</a:t>
-            </a:r>
-          </a:p>
-          <a:p>
-            <a:pPr algn="l"/>
-            <a:r>
-              <a:rPr sz="1400" b="0">
-                <a:solidFill>
-                  <a:srgbClr val="475569"/>
-                </a:solidFill>
-                <a:latin typeface="Arial"/>
-              </a:rPr>
-              <a:t>•  Need TMM coherent optics for thin-film interference [Pettersson et al. 1999]</a:t>
-            </a:r>
-          </a:p>
-          <a:p>
-            <a:pPr algn="l"/>
-            <a:r>
-              <a:rPr sz="1400" b="0">
-                <a:solidFill>
-                  <a:srgbClr val="475569"/>
-                </a:solidFill>
-                <a:latin typeface="Arial"/>
-              </a:rPr>
-              <a:t>•  Need 2D effects: grains, lateral non-uniformity, single-grain-boundary recombination</a:t>
-            </a:r>
-          </a:p>
-          <a:p>
-            <a:pPr algn="l"/>
-            <a:r>
-              <a:rPr sz="1400" b="0">
-                <a:solidFill>
-                  <a:srgbClr val="475569"/>
-                </a:solidFill>
-                <a:latin typeface="Arial"/>
-              </a:rPr>
-              <a:t>•  Need mobile-ion transport for hysteresis (perovskite-class absorbers)</a:t>
+              <a:t> as bulk material-level descriptors</a:t>
+            </a:r>
+          </a:p>
+          <a:p>
+            <a:pPr algn="l"/>
+            <a:r>
+              <a:rPr sz="1400" b="0">
+                <a:solidFill>
+                  <a:srgbClr val="475569"/>
+                </a:solidFill>
+                <a:latin typeface="Arial"/>
+              </a:rPr>
+              <a:t>•  Device performance additionally depends on stack geometry, contact selectivity, optical absorption and recombination kinetics</a:t>
+            </a:r>
+          </a:p>
+          <a:p>
+            <a:pPr algn="l"/>
+            <a:r>
+              <a:rPr sz="1400" b="0">
+                <a:solidFill>
+                  <a:srgbClr val="475569"/>
+                </a:solidFill>
+                <a:latin typeface="Arial"/>
+              </a:rPr>
+              <a:t>•  Drift-diffusion coupled to the Poisson equation is required across the full HTL / absorber / ETL stack</a:t>
+            </a:r>
+          </a:p>
+          <a:p>
+            <a:pPr algn="l"/>
+            <a:r>
+              <a:rPr sz="1400" b="0">
+                <a:solidFill>
+                  <a:srgbClr val="475569"/>
+                </a:solidFill>
+                <a:latin typeface="Arial"/>
+              </a:rPr>
+              <a:t>•  Coherent transfer-matrix-method (TMM) optics are required for thin-film interference [Pettersson et al. 1999]</a:t>
+            </a:r>
+          </a:p>
+          <a:p>
+            <a:pPr algn="l"/>
+            <a:r>
+              <a:rPr sz="1400" b="0">
+                <a:solidFill>
+                  <a:srgbClr val="475569"/>
+                </a:solidFill>
+                <a:latin typeface="Arial"/>
+              </a:rPr>
+              <a:t>•  Two-dimensional effects (grain boundaries, lateral non-uniformity) cannot be captured in 1D</a:t>
+            </a:r>
+          </a:p>
+          <a:p>
+            <a:pPr algn="l"/>
+            <a:r>
+              <a:rPr sz="1400" b="0">
+                <a:solidFill>
+                  <a:srgbClr val="475569"/>
+                </a:solidFill>
+                <a:latin typeface="Arial"/>
+              </a:rPr>
+              <a:t>•  Mobile-ion transport must be included to reproduce hysteresis in perovskite-class absorbers</a:t>
             </a:r>
           </a:p>
         </p:txBody>
@@ -9299,7 +9254,7 @@
                 </a:solidFill>
                 <a:latin typeface="Arial"/>
               </a:rPr>
-              <a:t>SolarLab software stack</a:t>
+              <a:t>SolarLab device-simulation framework</a:t>
             </a:r>
           </a:p>
         </p:txBody>
@@ -9369,55 +9324,55 @@
                 </a:solidFill>
                 <a:latin typeface="Arial"/>
               </a:rPr>
-              <a:t>•  Backend: Python solver + FastAPI SSE streaming for live progress</a:t>
-            </a:r>
-          </a:p>
-          <a:p>
-            <a:pPr algn="l"/>
-            <a:r>
-              <a:rPr sz="1400" b="0">
-                <a:solidFill>
-                  <a:srgbClr val="475569"/>
-                </a:solidFill>
-                <a:latin typeface="Arial"/>
-              </a:rPr>
-              <a:t>•  Frontend: Vite / TypeScript workstation with publication-mode plotting</a:t>
-            </a:r>
-          </a:p>
-          <a:p>
-            <a:pPr algn="l"/>
-            <a:r>
-              <a:rPr sz="1400" b="0">
-                <a:solidFill>
-                  <a:srgbClr val="475569"/>
-                </a:solidFill>
-                <a:latin typeface="Arial"/>
-              </a:rPr>
-              <a:t>•  Solver: Radau implicit + BDF fallback + bisection-in-time on stiff steps</a:t>
-            </a:r>
-          </a:p>
-          <a:p>
-            <a:pPr algn="l"/>
-            <a:r>
-              <a:rPr sz="1400" b="0">
-                <a:solidFill>
-                  <a:srgbClr val="475569"/>
-                </a:solidFill>
-                <a:latin typeface="Arial"/>
-              </a:rPr>
-              <a:t>•  TMM optics: coherent multi-layer with ASTM G-173 AM1.5G spectrum</a:t>
-            </a:r>
-          </a:p>
-          <a:p>
-            <a:pPr algn="l"/>
-            <a:r>
-              <a:rPr sz="1400" b="0">
-                <a:solidFill>
-                  <a:srgbClr val="475569"/>
-                </a:solidFill>
-                <a:latin typeface="Arial"/>
-              </a:rPr>
-              <a:t>•  Selective contacts: Robin S</a:t>
+              <a:t>•  Backend: Python solver with FastAPI server-sent events streaming intermediate results</a:t>
+            </a:r>
+          </a:p>
+          <a:p>
+            <a:pPr algn="l"/>
+            <a:r>
+              <a:rPr sz="1400" b="0">
+                <a:solidFill>
+                  <a:srgbClr val="475569"/>
+                </a:solidFill>
+                <a:latin typeface="Arial"/>
+              </a:rPr>
+              <a:t>•  Frontend: TypeScript / Vite workstation with publication-quality figure rendering</a:t>
+            </a:r>
+          </a:p>
+          <a:p>
+            <a:pPr algn="l"/>
+            <a:r>
+              <a:rPr sz="1400" b="0">
+                <a:solidFill>
+                  <a:srgbClr val="475569"/>
+                </a:solidFill>
+                <a:latin typeface="Arial"/>
+              </a:rPr>
+              <a:t>•  Numerical scheme: Radau implicit Runge–Kutta with BDF fallback and bisection-in-time on stiff steps</a:t>
+            </a:r>
+          </a:p>
+          <a:p>
+            <a:pPr algn="l"/>
+            <a:r>
+              <a:rPr sz="1400" b="0">
+                <a:solidFill>
+                  <a:srgbClr val="475569"/>
+                </a:solidFill>
+                <a:latin typeface="Arial"/>
+              </a:rPr>
+              <a:t>•  Optics: coherent transfer-matrix-method using the ASTM G-173 AM1.5G reference spectrum</a:t>
+            </a:r>
+          </a:p>
+          <a:p>
+            <a:pPr algn="l"/>
+            <a:r>
+              <a:rPr sz="1400" b="0">
+                <a:solidFill>
+                  <a:srgbClr val="475569"/>
+                </a:solidFill>
+                <a:latin typeface="Arial"/>
+              </a:rPr>
+              <a:t>•  Selective contacts: Robin formulation in S</a:t>
             </a:r>
             <a:r>
               <a:rPr sz="1400" b="0" baseline="-25000">
@@ -9435,7 +9390,7 @@
                 </a:solidFill>
                 <a:latin typeface="Arial"/>
               </a:rPr>
-              <a:t>, S</a:t>
+              <a:t> and S</a:t>
             </a:r>
             <a:r>
               <a:rPr sz="1400" b="0" baseline="-25000">
@@ -9453,19 +9408,19 @@
                 </a:solidFill>
                 <a:latin typeface="Arial"/>
               </a:rPr>
-              <a:t> formulation, validated 2D ↔ 1D parity at 6 µV</a:t>
-            </a:r>
-          </a:p>
-          <a:p>
-            <a:pPr algn="l"/>
-            <a:r>
-              <a:rPr sz="1400" b="0">
-                <a:solidFill>
-                  <a:srgbClr val="475569"/>
-                </a:solidFill>
-                <a:latin typeface="Arial"/>
-              </a:rPr>
-              <a:t>•  Open-source, scriptable, REST-driven — composable into screening pipelines</a:t>
+              <a:t>, validated against the 1D solver to 6 µV</a:t>
+            </a:r>
+          </a:p>
+          <a:p>
+            <a:pPr algn="l"/>
+            <a:r>
+              <a:rPr sz="1400" b="0">
+                <a:solidFill>
+                  <a:srgbClr val="475569"/>
+                </a:solidFill>
+                <a:latin typeface="Arial"/>
+              </a:rPr>
+              <a:t>•  Open-source, scriptable and REST-driven; designed for integration into high-throughput screening pipelines</a:t>
             </a:r>
           </a:p>
         </p:txBody>
@@ -9623,7 +9578,7 @@
                 </a:solidFill>
                 <a:latin typeface="Arial"/>
               </a:rPr>
-              <a:t>Drift-diffusion equations</a:t>
+              <a:t>Drift-diffusion governing equations</a:t>
             </a:r>
           </a:p>
         </p:txBody>
@@ -9658,7 +9613,7 @@
                 </a:solidFill>
                 <a:latin typeface="Arial"/>
               </a:rPr>
-              <a:t>Three coupled PDEs per absorber layer [Selberherr 1984]</a:t>
+              <a:t>Three coupled partial differential equations per absorber layer [Selberherr 1984]</a:t>
             </a:r>
           </a:p>
         </p:txBody>
@@ -9693,7 +9648,7 @@
                 </a:solidFill>
                 <a:latin typeface="Arial"/>
               </a:rPr>
-              <a:t>•  Continuity (electrons): ∂n/∂t = (1/q) ∇·J</a:t>
+              <a:t>•  Electron continuity: ∂n/∂t = (1/q) ∇·J</a:t>
             </a:r>
             <a:r>
               <a:rPr sz="1400" b="0" baseline="-25000">
@@ -9723,7 +9678,7 @@
                 </a:solidFill>
                 <a:latin typeface="Arial"/>
               </a:rPr>
-              <a:t>•  Continuity (holes):     ∂p/∂t = −(1/q) ∇·J</a:t>
+              <a:t>•  Hole continuity:     ∂p/∂t = −(1/q) ∇·J</a:t>
             </a:r>
             <a:r>
               <a:rPr sz="1400" b="0" baseline="-25000">
@@ -9753,7 +9708,7 @@
                 </a:solidFill>
                 <a:latin typeface="Arial"/>
               </a:rPr>
-              <a:t>•  Poisson: ∇·(ε</a:t>
+              <a:t>•  Poisson equation: ∇·(ε</a:t>
             </a:r>
             <a:r>
               <a:rPr sz="1400" b="0" baseline="-25000">
@@ -9855,7 +9810,7 @@
                 </a:solidFill>
                 <a:latin typeface="Arial"/>
               </a:rPr>
-              <a:t>•  Currents: J</a:t>
+              <a:t>•  Current densities: J</a:t>
             </a:r>
             <a:r>
               <a:rPr sz="1400" b="0" baseline="-25000">
@@ -9909,7 +9864,7 @@
                 </a:solidFill>
                 <a:latin typeface="Arial"/>
               </a:rPr>
-              <a:t> ∇n   ·   J</a:t>
+              <a:t> ∇n · J</a:t>
             </a:r>
             <a:r>
               <a:rPr sz="1400" b="0" baseline="-25000">
@@ -9975,7 +9930,7 @@
                 </a:solidFill>
                 <a:latin typeface="Arial"/>
               </a:rPr>
-              <a:t>•  Recombination R: SRH + Auger + radiative; Einstein D = (k</a:t>
+              <a:t>•  Recombination R: Shockley–Read–Hall, Auger and radiative channels; Einstein relation D = (k</a:t>
             </a:r>
             <a:r>
               <a:rPr sz="1400" b="0" baseline="-25000">
@@ -10005,7 +9960,7 @@
                 </a:solidFill>
                 <a:latin typeface="Arial"/>
               </a:rPr>
-              <a:t>•  Generation G: from TMM optics (next slide), driven by AM1.5G spectrum</a:t>
+              <a:t>•  Generation G: optical generation profile from the TMM model integrated over the AM1.5G spectrum</a:t>
             </a:r>
           </a:p>
         </p:txBody>
@@ -10163,7 +10118,7 @@
                 </a:solidFill>
                 <a:latin typeface="Arial"/>
               </a:rPr>
-              <a:t>TMM optics</a:t>
+              <a:t>Transfer-matrix-method optics</a:t>
             </a:r>
           </a:p>
         </p:txBody>
@@ -10198,7 +10153,7 @@
                 </a:solidFill>
                 <a:latin typeface="Arial"/>
               </a:rPr>
-              <a:t>Coherent multi-layer interference [Pettersson et al. 1999 · Born &amp; Wolf]</a:t>
+              <a:t>Coherent multi-layer thin-film interference [Pettersson et al. 1999 · Born &amp; Wolf]</a:t>
             </a:r>
           </a:p>
         </p:txBody>
@@ -10233,7 +10188,7 @@
                 </a:solidFill>
                 <a:latin typeface="Arial"/>
               </a:rPr>
-              <a:t>•  Each layer j has 2×2 characteristic matrix L</a:t>
+              <a:t>•  Each layer j is represented by a 2×2 characteristic matrix L</a:t>
             </a:r>
             <a:r>
               <a:rPr sz="1400" b="0" baseline="-25000">
@@ -10251,7 +10206,7 @@
                 </a:solidFill>
                 <a:latin typeface="Arial"/>
               </a:rPr>
-              <a:t> in the (E, H) basis</a:t>
+              <a:t> acting on the tangential (E, H) field components</a:t>
             </a:r>
           </a:p>
           <a:p>
@@ -10473,7 +10428,7 @@
                 </a:solidFill>
                 <a:latin typeface="Arial"/>
               </a:rPr>
-              <a:t> · ñ</a:t>
+              <a:t> with complex refractive index ñ</a:t>
             </a:r>
             <a:r>
               <a:rPr sz="1400" b="0" baseline="-25000">
@@ -10491,7 +10446,7 @@
                 </a:solidFill>
                 <a:latin typeface="Arial"/>
               </a:rPr>
-              <a:t> = n + i k complex</a:t>
+              <a:t> = n + i k</a:t>
             </a:r>
           </a:p>
           <a:p>
@@ -10521,7 +10476,7 @@
                 </a:solidFill>
                 <a:latin typeface="Arial"/>
               </a:rPr>
-              <a:t> · L</a:t>
+              <a:t> L</a:t>
             </a:r>
             <a:r>
               <a:rPr sz="1400" b="0" baseline="-25000">
@@ -10539,7 +10494,7 @@
                 </a:solidFill>
                 <a:latin typeface="Arial"/>
               </a:rPr>
-              <a:t> · … · L</a:t>
+              <a:t> … L</a:t>
             </a:r>
             <a:r>
               <a:rPr sz="1400" b="0" baseline="-25000">
@@ -10557,7 +10512,7 @@
                 </a:solidFill>
                 <a:latin typeface="Arial"/>
               </a:rPr>
-              <a:t> yields R, T, A per λ</a:t>
+              <a:t> yields wavelength-resolved R, T and A</a:t>
             </a:r>
           </a:p>
           <a:p>
@@ -10587,19 +10542,19 @@
                 </a:solidFill>
                 <a:latin typeface="Arial"/>
               </a:rPr>
-              <a:t> · α(λ) integrated over AM1.5G</a:t>
-            </a:r>
-          </a:p>
-          <a:p>
-            <a:pPr algn="l"/>
-            <a:r>
-              <a:rPr sz="1400" b="0">
-                <a:solidFill>
-                  <a:srgbClr val="475569"/>
-                </a:solidFill>
-                <a:latin typeface="Arial"/>
-              </a:rPr>
-              <a:t>•  Replaces Beer–Lambert (no interference) — captures back-reflector + interface effects</a:t>
+              <a:t> α(λ), integrated over the AM1.5G spectrum</a:t>
+            </a:r>
+          </a:p>
+          <a:p>
+            <a:pPr algn="l"/>
+            <a:r>
+              <a:rPr sz="1400" b="0">
+                <a:solidFill>
+                  <a:srgbClr val="475569"/>
+                </a:solidFill>
+                <a:latin typeface="Arial"/>
+              </a:rPr>
+              <a:t>•  Supersedes the Beer–Lambert approximation by capturing interference, back-reflector and interface effects</a:t>
             </a:r>
           </a:p>
         </p:txBody>
@@ -10792,7 +10747,7 @@
                 </a:solidFill>
                 <a:latin typeface="Arial"/>
               </a:rPr>
-              <a:t>Drives J–V hysteresis in perovskites [Calado et al. 2016 · van Reenen et al. 2015]</a:t>
+              <a:t>Origin of J–V hysteresis in perovskite solar cells [Calado et al. 2016 · van Reenen et al. 2015]</a:t>
             </a:r>
           </a:p>
         </p:txBody>
@@ -10827,7 +10782,7 @@
                 </a:solidFill>
                 <a:latin typeface="Arial"/>
               </a:rPr>
-              <a:t>•  Continuity for ion vacancy density P: ∂P/∂t = ∇·(D</a:t>
+              <a:t>•  Continuity for ion-vacancy density P: ∂P/∂t = ∇·(D</a:t>
             </a:r>
             <a:r>
               <a:rPr sz="1400" b="0" baseline="-25000">
@@ -10893,7 +10848,7 @@
                 </a:solidFill>
                 <a:latin typeface="Arial"/>
               </a:rPr>
-              <a:t>•  Steric (1 − P / P</a:t>
+              <a:t>•  The steric factor (1 − P / P</a:t>
             </a:r>
             <a:r>
               <a:rPr sz="1400" b="0" baseline="-25000">
@@ -10911,19 +10866,19 @@
                 </a:solidFill>
                 <a:latin typeface="Arial"/>
               </a:rPr>
-              <a:t>) factor caps ion density at the lattice site limit</a:t>
-            </a:r>
-          </a:p>
-          <a:p>
-            <a:pPr algn="l"/>
-            <a:r>
-              <a:rPr sz="1400" b="0">
-                <a:solidFill>
-                  <a:srgbClr val="475569"/>
-                </a:solidFill>
-                <a:latin typeface="Arial"/>
-              </a:rPr>
-              <a:t>•  P</a:t>
+              <a:t>) caps ion density at the available lattice-site limit</a:t>
+            </a:r>
+          </a:p>
+          <a:p>
+            <a:pPr algn="l"/>
+            <a:r>
+              <a:rPr sz="1400" b="0">
+                <a:solidFill>
+                  <a:srgbClr val="475569"/>
+                </a:solidFill>
+                <a:latin typeface="Arial"/>
+              </a:rPr>
+              <a:t>•  Estimated P</a:t>
             </a:r>
             <a:r>
               <a:rPr sz="1400" b="0" baseline="-25000">
@@ -10941,7 +10896,7 @@
                 </a:solidFill>
                 <a:latin typeface="Arial"/>
               </a:rPr>
-              <a:t> ≈ 1 – 5 % of cation site density in MAPbI</a:t>
+              <a:t> is approximately 1 – 5 % of the cation-site density in MAPbI</a:t>
             </a:r>
             <a:r>
               <a:rPr sz="1400" b="0" baseline="-25000">
@@ -10952,38 +10907,29 @@
               </a:rPr>
               <a:t>3</a:t>
             </a:r>
-            <a:r>
-              <a:rPr sz="1400" b="0">
-                <a:solidFill>
-                  <a:srgbClr val="475569"/>
-                </a:solidFill>
-                <a:latin typeface="Arial"/>
-              </a:rPr>
-              <a:t> absorber</a:t>
-            </a:r>
-          </a:p>
-          <a:p>
-            <a:pPr algn="l"/>
-            <a:r>
-              <a:rPr sz="1400" b="0">
-                <a:solidFill>
-                  <a:srgbClr val="475569"/>
-                </a:solidFill>
-                <a:latin typeface="Arial"/>
-              </a:rPr>
-              <a:t>•  Ion drift redistributes charge under bias → screens electric field → modifies recomb</a:t>
-            </a:r>
-          </a:p>
-          <a:p>
-            <a:pPr algn="l"/>
-            <a:r>
-              <a:rPr sz="1400" b="0">
-                <a:solidFill>
-                  <a:srgbClr val="475569"/>
-                </a:solidFill>
-                <a:latin typeface="Arial"/>
-              </a:rPr>
-              <a:t>•  Coupled into Poisson via ρ</a:t>
+          </a:p>
+          <a:p>
+            <a:pPr algn="l"/>
+            <a:r>
+              <a:rPr sz="1400" b="0">
+                <a:solidFill>
+                  <a:srgbClr val="475569"/>
+                </a:solidFill>
+                <a:latin typeface="Arial"/>
+              </a:rPr>
+              <a:t>•  Ion drift under bias redistributes mobile charge, screens the electric field and modulates the recombination rate</a:t>
+            </a:r>
+          </a:p>
+          <a:p>
+            <a:pPr algn="l"/>
+            <a:r>
+              <a:rPr sz="1400" b="0">
+                <a:solidFill>
+                  <a:srgbClr val="475569"/>
+                </a:solidFill>
+                <a:latin typeface="Arial"/>
+              </a:rPr>
+              <a:t>•  Couples into the Poisson equation via the source term ρ</a:t>
             </a:r>
             <a:r>
               <a:rPr sz="1400" b="0" baseline="-25000">
@@ -11019,19 +10965,19 @@
                 </a:solidFill>
                 <a:latin typeface="Arial"/>
               </a:rPr>
-              <a:t>) source</a:t>
-            </a:r>
-          </a:p>
-          <a:p>
-            <a:pPr algn="l"/>
-            <a:r>
-              <a:rPr sz="1400" b="0">
-                <a:solidFill>
-                  <a:srgbClr val="475569"/>
-                </a:solidFill>
-                <a:latin typeface="Arial"/>
-              </a:rPr>
-              <a:t>•  Time scale 0.01 – 100 s — explains slow J–V scan-rate dependence in hysteretic PSCs</a:t>
+              <a:t>)</a:t>
+            </a:r>
+          </a:p>
+          <a:p>
+            <a:pPr algn="l"/>
+            <a:r>
+              <a:rPr sz="1400" b="0">
+                <a:solidFill>
+                  <a:srgbClr val="475569"/>
+                </a:solidFill>
+                <a:latin typeface="Arial"/>
+              </a:rPr>
+              <a:t>•  Characteristic time scale of 0.01 – 100 s reproduces the observed scan-rate dependence of perovskite J–V curves</a:t>
             </a:r>
           </a:p>
         </p:txBody>
@@ -11189,7 +11135,7 @@
                 </a:solidFill>
                 <a:latin typeface="Arial"/>
               </a:rPr>
-              <a:t>Selective Robin contacts</a:t>
+              <a:t>Selective Robin contact boundary conditions</a:t>
             </a:r>
           </a:p>
         </p:txBody>
@@ -11224,7 +11170,7 @@
                 </a:solidFill>
                 <a:latin typeface="Arial"/>
               </a:rPr>
-              <a:t>Surface-recombination boundary conditions, not Dirichlet pinning</a:t>
+              <a:t>Surface-recombination boundary conditions in place of Dirichlet pinning</a:t>
             </a:r>
           </a:p>
         </p:txBody>
@@ -11499,7 +11445,7 @@
                 </a:solidFill>
                 <a:latin typeface="Arial"/>
               </a:rPr>
-              <a:t>•  Selectivity: S</a:t>
+              <a:t>•  Contact selectivity: S</a:t>
             </a:r>
             <a:r>
               <a:rPr sz="1400" b="0" baseline="-25000">
@@ -11553,43 +11499,43 @@
                 </a:solidFill>
                 <a:latin typeface="Arial"/>
               </a:rPr>
-              <a:t> makes left contact hole-extracting (HTL-like)</a:t>
-            </a:r>
-          </a:p>
-          <a:p>
-            <a:pPr algn="l"/>
-            <a:r>
-              <a:rPr sz="1400" b="0">
-                <a:solidFill>
-                  <a:srgbClr val="475569"/>
-                </a:solidFill>
-                <a:latin typeface="Arial"/>
-              </a:rPr>
-              <a:t>•  Limit S → ∞ recovers Dirichlet (carrier pinned to equilibrium)</a:t>
-            </a:r>
-          </a:p>
-          <a:p>
-            <a:pPr algn="l"/>
-            <a:r>
-              <a:rPr sz="1400" b="0">
-                <a:solidFill>
-                  <a:srgbClr val="475569"/>
-                </a:solidFill>
-                <a:latin typeface="Arial"/>
-              </a:rPr>
-              <a:t>•  Limit S → 0 makes contact perfectly blocking (zero-flux Neumann)</a:t>
-            </a:r>
-          </a:p>
-          <a:p>
-            <a:pPr algn="l"/>
-            <a:r>
-              <a:rPr sz="1400" b="0">
-                <a:solidFill>
-                  <a:srgbClr val="475569"/>
-                </a:solidFill>
-                <a:latin typeface="Arial"/>
-              </a:rPr>
-              <a:t>•  Captures real ETL / HTL physics SCAPS-1D approximates with pinned boundaries</a:t>
+              <a:t> yields a hole-extracting (HTL-type) left contact</a:t>
+            </a:r>
+          </a:p>
+          <a:p>
+            <a:pPr algn="l"/>
+            <a:r>
+              <a:rPr sz="1400" b="0">
+                <a:solidFill>
+                  <a:srgbClr val="475569"/>
+                </a:solidFill>
+                <a:latin typeface="Arial"/>
+              </a:rPr>
+              <a:t>•  Limit S → ∞ recovers the Dirichlet condition (carrier density pinned to equilibrium)</a:t>
+            </a:r>
+          </a:p>
+          <a:p>
+            <a:pPr algn="l"/>
+            <a:r>
+              <a:rPr sz="1400" b="0">
+                <a:solidFill>
+                  <a:srgbClr val="475569"/>
+                </a:solidFill>
+                <a:latin typeface="Arial"/>
+              </a:rPr>
+              <a:t>•  Limit S → 0 yields a perfectly blocking (zero-flux Neumann) contact</a:t>
+            </a:r>
+          </a:p>
+          <a:p>
+            <a:pPr algn="l"/>
+            <a:r>
+              <a:rPr sz="1400" b="0">
+                <a:solidFill>
+                  <a:srgbClr val="475569"/>
+                </a:solidFill>
+                <a:latin typeface="Arial"/>
+              </a:rPr>
+              <a:t>•  Captures the surface-recombination physics that SCAPS-1D approximates via Dirichlet pinning</a:t>
             </a:r>
           </a:p>
         </p:txBody>
@@ -11747,7 +11693,7 @@
                 </a:solidFill>
                 <a:latin typeface="Arial"/>
               </a:rPr>
-              <a:t>Efficiency–stability landscape</a:t>
+              <a:t>Efficiency–stability design space for thin-film photovoltaics</a:t>
             </a:r>
           </a:p>
         </p:txBody>
@@ -11782,7 +11728,7 @@
                 </a:solidFill>
                 <a:latin typeface="Arial"/>
               </a:rPr>
-              <a:t>Two regimes, one underserved corner</a:t>
+              <a:t>Two established regimes, one unoccupied region</a:t>
             </a:r>
           </a:p>
         </p:txBody>
@@ -11841,7 +11787,7 @@
                 </a:solidFill>
                 <a:latin typeface="Arial"/>
               </a:rPr>
-              <a:t>•  Si: indirect-gap, ~22 % single-junction PCE ceiling, T</a:t>
+              <a:t>•  Si: indirect band gap, ~22 % single-junction PCE ceiling, T</a:t>
             </a:r>
             <a:r>
               <a:rPr sz="1400" b="0" baseline="-25000">
@@ -11907,7 +11853,7 @@
                 </a:solidFill>
                 <a:latin typeface="Arial"/>
               </a:rPr>
-              <a:t>•  CIGS: direct-gap chalcogenide, 23.4 % record, but Cu / In / Ga supply constraints</a:t>
+              <a:t>•  CIGS: direct-gap chalcogenide, 23.4 % record, constrained by In and Ga reserves</a:t>
             </a:r>
           </a:p>
           <a:p>
@@ -11955,19 +11901,19 @@
                 </a:solidFill>
                 <a:latin typeface="Arial"/>
               </a:rPr>
-              <a:t> often &lt; 500 h under 1-sun + 85 °C</a:t>
-            </a:r>
-          </a:p>
-          <a:p>
-            <a:pPr algn="l"/>
-            <a:r>
-              <a:rPr sz="1400" b="0">
-                <a:solidFill>
-                  <a:srgbClr val="475569"/>
-                </a:solidFill>
-                <a:latin typeface="Arial"/>
-              </a:rPr>
-              <a:t>•  Shockley–Queisser optimum E</a:t>
+              <a:t> frequently &lt; 500 h under 1-sun, 85 °C</a:t>
+            </a:r>
+          </a:p>
+          <a:p>
+            <a:pPr algn="l"/>
+            <a:r>
+              <a:rPr sz="1400" b="0">
+                <a:solidFill>
+                  <a:srgbClr val="475569"/>
+                </a:solidFill>
+                <a:latin typeface="Arial"/>
+              </a:rPr>
+              <a:t>•  Detailed-balance limit at E</a:t>
             </a:r>
             <a:r>
               <a:rPr sz="1400" b="0" baseline="-25000">
@@ -11985,19 +11931,19 @@
                 </a:solidFill>
                 <a:latin typeface="Arial"/>
               </a:rPr>
-              <a:t> ≈ 1.34 eV; single-junction ceiling 33.7 % [Shockley &amp; Queisser 1961]</a:t>
-            </a:r>
-          </a:p>
-          <a:p>
-            <a:pPr algn="l"/>
-            <a:r>
-              <a:rPr sz="1400" b="0">
-                <a:solidFill>
-                  <a:srgbClr val="475569"/>
-                </a:solidFill>
-                <a:latin typeface="Arial"/>
-              </a:rPr>
-              <a:t>•  Target box: PCE </a:t>
+              <a:t> ≈ 1.34 eV reaches 33.7 % [Shockley &amp; Queisser 1961]</a:t>
+            </a:r>
+          </a:p>
+          <a:p>
+            <a:pPr algn="l"/>
+            <a:r>
+              <a:rPr sz="1400" b="0">
+                <a:solidFill>
+                  <a:srgbClr val="475569"/>
+                </a:solidFill>
+                <a:latin typeface="Arial"/>
+              </a:rPr>
+              <a:t>•  Target region: PCE </a:t>
             </a:r>
             <a:r>
               <a:rPr sz="1400" b="0" baseline="30000">
@@ -12015,7 +11961,7 @@
                 </a:solidFill>
                 <a:latin typeface="Arial"/>
               </a:rPr>
-              <a:t> 25 % AND T</a:t>
+              <a:t> 25 % combined with T</a:t>
             </a:r>
             <a:r>
               <a:rPr sz="1400" b="0" baseline="-25000">
@@ -12069,19 +12015,19 @@
                 </a:solidFill>
                 <a:latin typeface="Arial"/>
               </a:rPr>
-              <a:t> h — empty today</a:t>
-            </a:r>
-          </a:p>
-          <a:p>
-            <a:pPr algn="l"/>
-            <a:r>
-              <a:rPr sz="1400" b="0">
-                <a:solidFill>
-                  <a:srgbClr val="475569"/>
-                </a:solidFill>
-                <a:latin typeface="Arial"/>
-              </a:rPr>
-              <a:t>•  Need a third path: stable inorganic absorber with direct-or-near-direct gap</a:t>
+              <a:t> h is currently unoccupied</a:t>
+            </a:r>
+          </a:p>
+          <a:p>
+            <a:pPr algn="l"/>
+            <a:r>
+              <a:rPr sz="1400" b="0">
+                <a:solidFill>
+                  <a:srgbClr val="475569"/>
+                </a:solidFill>
+                <a:latin typeface="Arial"/>
+              </a:rPr>
+              <a:t>•  These constraints motivate a third absorber class with a direct or near-direct gap</a:t>
             </a:r>
           </a:p>
         </p:txBody>
@@ -12239,7 +12185,7 @@
                 </a:solidFill>
                 <a:latin typeface="Arial"/>
               </a:rPr>
-              <a:t>Capability vs SCAPS-1D</a:t>
+              <a:t>Capability comparison with SCAPS-1D</a:t>
             </a:r>
           </a:p>
         </p:txBody>
@@ -12274,7 +12220,7 @@
                 </a:solidFill>
                 <a:latin typeface="Arial"/>
               </a:rPr>
-              <a:t>What the dominant 1D reference [Burgelman et al. 2000] leaves on the table</a:t>
+              <a:t>Capabilities absent from the SCAPS-1D reference solver [Burgelman et al. 2000]</a:t>
             </a:r>
           </a:p>
         </p:txBody>
@@ -12456,7 +12402,7 @@
                 </a:solidFill>
                 <a:latin typeface="Arial"/>
               </a:rPr>
-              <a:t>1D vs 2D fidelity</a:t>
+              <a:t>1D and 2D solver fidelity comparison</a:t>
             </a:r>
           </a:p>
         </p:txBody>
@@ -12491,7 +12437,7 @@
                 </a:solidFill>
                 <a:latin typeface="Arial"/>
               </a:rPr>
-              <a:t>Same MAPbI</a:t>
+              <a:t>Identical MAPbI</a:t>
             </a:r>
             <a:r>
               <a:rPr sz="1600" b="0" baseline="-25000">
@@ -12509,7 +12455,7 @@
                 </a:solidFill>
                 <a:latin typeface="Arial"/>
               </a:rPr>
-              <a:t> stack — 50 mV V</a:t>
+              <a:t> stack: a 50 mV V</a:t>
             </a:r>
             <a:r>
               <a:rPr sz="1600" b="0" baseline="-25000">
@@ -12527,7 +12473,7 @@
                 </a:solidFill>
                 <a:latin typeface="Arial"/>
               </a:rPr>
-              <a:t> drop in 2D from grain-boundary recombination</a:t>
+              <a:t> reduction in 2D attributable to grain-boundary recombination</a:t>
             </a:r>
           </a:p>
         </p:txBody>
@@ -12586,7 +12532,7 @@
                 </a:solidFill>
                 <a:latin typeface="Arial"/>
               </a:rPr>
-              <a:t>•  Identical layer stack, both solvers</a:t>
+              <a:t>•  Identical layer stack and material parameters in both solvers</a:t>
             </a:r>
           </a:p>
           <a:p>
@@ -12616,7 +12562,7 @@
                 </a:solidFill>
                 <a:latin typeface="Arial"/>
               </a:rPr>
-              <a:t> = 0.910 V → 2D V</a:t>
+              <a:t> = 0.910 V is reduced to 2D V</a:t>
             </a:r>
             <a:r>
               <a:rPr sz="1400" b="0" baseline="-25000">
@@ -12646,43 +12592,43 @@
                 </a:solidFill>
                 <a:latin typeface="Arial"/>
               </a:rPr>
-              <a:t>•  50 mV drop is the real grain-boundary recombination signal</a:t>
-            </a:r>
-          </a:p>
-          <a:p>
-            <a:pPr algn="l"/>
-            <a:r>
-              <a:rPr sz="1400" b="0">
-                <a:solidFill>
-                  <a:srgbClr val="475569"/>
-                </a:solidFill>
-                <a:latin typeface="Arial"/>
-              </a:rPr>
-              <a:t>•  1D would mis-predict device performance by hiding this loss channel</a:t>
-            </a:r>
-          </a:p>
-          <a:p>
-            <a:pPr algn="l"/>
-            <a:r>
-              <a:rPr sz="1400" b="0">
-                <a:solidFill>
-                  <a:srgbClr val="475569"/>
-                </a:solidFill>
-                <a:latin typeface="Arial"/>
-              </a:rPr>
-              <a:t>•  2D is the prerequisite for honest candidate-material PCE prediction</a:t>
-            </a:r>
-          </a:p>
-          <a:p>
-            <a:pPr algn="l"/>
-            <a:r>
-              <a:rPr sz="1400" b="0">
-                <a:solidFill>
-                  <a:srgbClr val="475569"/>
-                </a:solidFill>
-                <a:latin typeface="Arial"/>
-              </a:rPr>
-              <a:t>•  Solver throughput: 28-voltage 2D sweep finishes in ~22 min on 4 cores</a:t>
+              <a:t>•  The 50 mV reduction reflects the grain-boundary recombination channel resolved only in 2D</a:t>
+            </a:r>
+          </a:p>
+          <a:p>
+            <a:pPr algn="l"/>
+            <a:r>
+              <a:rPr sz="1400" b="0">
+                <a:solidFill>
+                  <a:srgbClr val="475569"/>
+                </a:solidFill>
+                <a:latin typeface="Arial"/>
+              </a:rPr>
+              <a:t>•  1D models would misestimate device performance by omitting this loss channel</a:t>
+            </a:r>
+          </a:p>
+          <a:p>
+            <a:pPr algn="l"/>
+            <a:r>
+              <a:rPr sz="1400" b="0">
+                <a:solidFill>
+                  <a:srgbClr val="475569"/>
+                </a:solidFill>
+                <a:latin typeface="Arial"/>
+              </a:rPr>
+              <a:t>•  2D simulation is therefore a prerequisite for quantitatively predicting candidate-material performance</a:t>
+            </a:r>
+          </a:p>
+          <a:p>
+            <a:pPr algn="l"/>
+            <a:r>
+              <a:rPr sz="1400" b="0">
+                <a:solidFill>
+                  <a:srgbClr val="475569"/>
+                </a:solidFill>
+                <a:latin typeface="Arial"/>
+              </a:rPr>
+              <a:t>•  Solver throughput: a 28-voltage 2D sweep completes in approximately 22 minutes on 4 CPU cores</a:t>
             </a:r>
           </a:p>
         </p:txBody>
@@ -12971,7 +12917,7 @@
                 </a:solidFill>
                 <a:latin typeface="Arial"/>
               </a:rPr>
-              <a:t>Predicted device J–V on a top candidate</a:t>
+              <a:t>Predicted device J–V for a leading candidate</a:t>
             </a:r>
           </a:p>
         </p:txBody>
@@ -13006,7 +12952,7 @@
                 </a:solidFill>
                 <a:latin typeface="Arial"/>
               </a:rPr>
-              <a:t>DFT params </a:t>
+              <a:t>DFT parameters </a:t>
             </a:r>
             <a:r>
               <a:rPr sz="1600" b="0" baseline="30000">
@@ -13024,7 +12970,7 @@
                 </a:solidFill>
                 <a:latin typeface="Arial"/>
               </a:rPr>
-              <a:t> device sim </a:t>
+              <a:t> device simulation </a:t>
             </a:r>
             <a:r>
               <a:rPr sz="1600" b="0" baseline="30000">
@@ -13042,7 +12988,7 @@
                 </a:solidFill>
                 <a:latin typeface="Arial"/>
               </a:rPr>
-              <a:t> PCE</a:t>
+              <a:t> predicted PCE</a:t>
             </a:r>
           </a:p>
         </p:txBody>
@@ -13101,7 +13047,7 @@
                 </a:solidFill>
                 <a:latin typeface="Arial"/>
               </a:rPr>
-              <a:t>•  Closes the loop from &gt; 10</a:t>
+              <a:t>•  Closes the workflow from a &gt; 10</a:t>
             </a:r>
             <a:r>
               <a:rPr sz="1400" b="0" baseline="30000">
@@ -13119,19 +13065,19 @@
                 </a:solidFill>
                 <a:latin typeface="Arial"/>
               </a:rPr>
-              <a:t> DB scan to predicted device performance</a:t>
-            </a:r>
-          </a:p>
-          <a:p>
-            <a:pPr algn="l"/>
-            <a:r>
-              <a:rPr sz="1400" b="0">
-                <a:solidFill>
-                  <a:srgbClr val="475569"/>
-                </a:solidFill>
-                <a:latin typeface="Arial"/>
-              </a:rPr>
-              <a:t>•  Placeholder candidate today — V</a:t>
+              <a:t> candidate database scan to a predicted device-level J–V</a:t>
+            </a:r>
+          </a:p>
+          <a:p>
+            <a:pPr algn="l"/>
+            <a:r>
+              <a:rPr sz="1400" b="0">
+                <a:solidFill>
+                  <a:srgbClr val="475569"/>
+                </a:solidFill>
+                <a:latin typeface="Arial"/>
+              </a:rPr>
+              <a:t>•  Current curve uses a placeholder candidate (MAPbI</a:t>
             </a:r>
             <a:r>
               <a:rPr sz="1400" b="0" baseline="-25000">
@@ -13140,6 +13086,24 @@
                 </a:solidFill>
                 <a:latin typeface="Arial"/>
               </a:rPr>
+              <a:t>3</a:t>
+            </a:r>
+            <a:r>
+              <a:rPr sz="1400" b="0">
+                <a:solidFill>
+                  <a:srgbClr val="475569"/>
+                </a:solidFill>
+                <a:latin typeface="Arial"/>
+              </a:rPr>
+              <a:t> baseline with V</a:t>
+            </a:r>
+            <a:r>
+              <a:rPr sz="1400" b="0" baseline="-25000">
+                <a:solidFill>
+                  <a:srgbClr val="475569"/>
+                </a:solidFill>
+                <a:latin typeface="Arial"/>
+              </a:rPr>
               <a:t>oc</a:t>
             </a:r>
             <a:r>
@@ -13149,7 +13113,19 @@
                 </a:solidFill>
                 <a:latin typeface="Arial"/>
               </a:rPr>
-              <a:t> +30 mV nudge over MAPbI</a:t>
+              <a:t> shifted by +30 mV)</a:t>
+            </a:r>
+          </a:p>
+          <a:p>
+            <a:pPr algn="l"/>
+            <a:r>
+              <a:rPr sz="1400" b="0">
+                <a:solidFill>
+                  <a:srgbClr val="475569"/>
+                </a:solidFill>
+                <a:latin typeface="Arial"/>
+              </a:rPr>
+              <a:t>•  The Se</a:t>
             </a:r>
             <a:r>
               <a:rPr sz="1400" b="0" baseline="-25000">
@@ -13158,28 +13134,16 @@
                 </a:solidFill>
                 <a:latin typeface="Arial"/>
               </a:rPr>
-              <a:t>3</a:t>
-            </a:r>
-            <a:r>
-              <a:rPr sz="1400" b="0">
-                <a:solidFill>
-                  <a:srgbClr val="475569"/>
-                </a:solidFill>
-                <a:latin typeface="Arial"/>
-              </a:rPr>
-              <a:t> baseline</a:t>
-            </a:r>
-          </a:p>
-          <a:p>
-            <a:pPr algn="l"/>
-            <a:r>
-              <a:rPr sz="1400" b="0">
-                <a:solidFill>
-                  <a:srgbClr val="475569"/>
-                </a:solidFill>
-                <a:latin typeface="Arial"/>
-              </a:rPr>
-              <a:t>•  Real Se</a:t>
+              <a:t>16</a:t>
+            </a:r>
+            <a:r>
+              <a:rPr sz="1400" b="0">
+                <a:solidFill>
+                  <a:srgbClr val="475569"/>
+                </a:solidFill>
+                <a:latin typeface="Arial"/>
+              </a:rPr>
+              <a:t>Sn</a:t>
             </a:r>
             <a:r>
               <a:rPr sz="1400" b="0" baseline="-25000">
@@ -13188,16 +13152,16 @@
                 </a:solidFill>
                 <a:latin typeface="Arial"/>
               </a:rPr>
-              <a:t>16</a:t>
-            </a:r>
-            <a:r>
-              <a:rPr sz="1400" b="0">
-                <a:solidFill>
-                  <a:srgbClr val="475569"/>
-                </a:solidFill>
-                <a:latin typeface="Arial"/>
-              </a:rPr>
-              <a:t>Sn</a:t>
+              <a:t>8</a:t>
+            </a:r>
+            <a:r>
+              <a:rPr sz="1400" b="0">
+                <a:solidFill>
+                  <a:srgbClr val="475569"/>
+                </a:solidFill>
+                <a:latin typeface="Arial"/>
+              </a:rPr>
+              <a:t>Zr</a:t>
             </a:r>
             <a:r>
               <a:rPr sz="1400" b="0" baseline="-25000">
@@ -13206,24 +13170,6 @@
                 </a:solidFill>
                 <a:latin typeface="Arial"/>
               </a:rPr>
-              <a:t>8</a:t>
-            </a:r>
-            <a:r>
-              <a:rPr sz="1400" b="0">
-                <a:solidFill>
-                  <a:srgbClr val="475569"/>
-                </a:solidFill>
-                <a:latin typeface="Arial"/>
-              </a:rPr>
-              <a:t>Zr</a:t>
-            </a:r>
-            <a:r>
-              <a:rPr sz="1400" b="0" baseline="-25000">
-                <a:solidFill>
-                  <a:srgbClr val="475569"/>
-                </a:solidFill>
-                <a:latin typeface="Arial"/>
-              </a:rPr>
               <a:t>4</a:t>
             </a:r>
             <a:r>
@@ -13233,31 +13179,31 @@
                 </a:solidFill>
                 <a:latin typeface="Arial"/>
               </a:rPr>
-              <a:t> J–V slots in once TMM n,k + DFT params land in the 2D solver</a:t>
-            </a:r>
-          </a:p>
-          <a:p>
-            <a:pPr algn="l"/>
-            <a:r>
-              <a:rPr sz="1400" b="0">
-                <a:solidFill>
-                  <a:srgbClr val="475569"/>
-                </a:solidFill>
-                <a:latin typeface="Arial"/>
-              </a:rPr>
-              <a:t>•  Predicted device PCE is the metric synthesis groups care about</a:t>
-            </a:r>
-          </a:p>
-          <a:p>
-            <a:pPr algn="l"/>
-            <a:r>
-              <a:rPr sz="1400" b="0">
-                <a:solidFill>
-                  <a:srgbClr val="475569"/>
-                </a:solidFill>
-                <a:latin typeface="Arial"/>
-              </a:rPr>
-              <a:t>•  Sets up the experimental collaboration with explicit, falsifiable performance targets</a:t>
+              <a:t> J–V will replace the placeholder once n, k data and DFT-derived parameters are integrated into the 2D solver</a:t>
+            </a:r>
+          </a:p>
+          <a:p>
+            <a:pPr algn="l"/>
+            <a:r>
+              <a:rPr sz="1400" b="0">
+                <a:solidFill>
+                  <a:srgbClr val="475569"/>
+                </a:solidFill>
+                <a:latin typeface="Arial"/>
+              </a:rPr>
+              <a:t>•  Predicted device-level PCE is the figure of merit relevant for synthesis decisions</a:t>
+            </a:r>
+          </a:p>
+          <a:p>
+            <a:pPr algn="l"/>
+            <a:r>
+              <a:rPr sz="1400" b="0">
+                <a:solidFill>
+                  <a:srgbClr val="475569"/>
+                </a:solidFill>
+                <a:latin typeface="Arial"/>
+              </a:rPr>
+              <a:t>•  Establishes explicit, falsifiable performance targets for the experimental collaboration</a:t>
             </a:r>
           </a:p>
         </p:txBody>
@@ -13450,7 +13396,7 @@
                 </a:solidFill>
                 <a:latin typeface="Arial"/>
               </a:rPr>
-              <a:t>Three concrete next steps</a:t>
+              <a:t>Planned extensions</a:t>
             </a:r>
           </a:p>
         </p:txBody>
@@ -13485,10 +13431,34 @@
                 </a:solidFill>
                 <a:latin typeface="Arial"/>
               </a:rPr>
-              <a:t>•  Multi-task learning on the ~36 k MP PBE gaps — closes prototype-grouped R</a:t>
-            </a:r>
-            <a:r>
-              <a:rPr sz="1400" b="0" baseline="30000">
+              <a:t>•  Multi-task learning on the ~36 000 PBE gaps in Materials Project to close the prototype-grouped CV gap</a:t>
+            </a:r>
+          </a:p>
+          <a:p>
+            <a:pPr algn="l"/>
+            <a:r>
+              <a:rPr sz="1400" b="0">
+                <a:solidFill>
+                  <a:srgbClr val="475569"/>
+                </a:solidFill>
+                <a:latin typeface="Arial"/>
+              </a:rPr>
+              <a:t>•  Spectroscopic Limited Maximum Efficiency (SLME) replacing the SQ upper bound, requiring the absorption coefficient α(E) [Yu &amp; Zunger 2012]</a:t>
+            </a:r>
+          </a:p>
+          <a:p>
+            <a:pPr algn="l"/>
+            <a:r>
+              <a:rPr sz="1400" b="0">
+                <a:solidFill>
+                  <a:srgbClr val="475569"/>
+                </a:solidFill>
+                <a:latin typeface="Arial"/>
+              </a:rPr>
+              <a:t>•  Targeted DFT batch on Se-rich AB</a:t>
+            </a:r>
+            <a:r>
+              <a:rPr sz="1400" b="0" baseline="-25000">
                 <a:solidFill>
                   <a:srgbClr val="475569"/>
                 </a:solidFill>
@@ -13503,31 +13473,7 @@
                 </a:solidFill>
                 <a:latin typeface="Arial"/>
               </a:rPr>
-              <a:t> gap</a:t>
-            </a:r>
-          </a:p>
-          <a:p>
-            <a:pPr algn="l"/>
-            <a:r>
-              <a:rPr sz="1400" b="0">
-                <a:solidFill>
-                  <a:srgbClr val="475569"/>
-                </a:solidFill>
-                <a:latin typeface="Arial"/>
-              </a:rPr>
-              <a:t>•  SLME (Yu &amp; Zunger 2012) replacing the SQ upper bound — needs absorption coefficient α(E)</a:t>
-            </a:r>
-          </a:p>
-          <a:p>
-            <a:pPr algn="l"/>
-            <a:r>
-              <a:rPr sz="1400" b="0">
-                <a:solidFill>
-                  <a:srgbClr val="475569"/>
-                </a:solidFill>
-                <a:latin typeface="Arial"/>
-              </a:rPr>
-              <a:t>•  Targeted Se-rich AB</a:t>
+              <a:t>C</a:t>
             </a:r>
             <a:r>
               <a:rPr sz="1400" b="0" baseline="-25000">
@@ -13536,16 +13482,16 @@
                 </a:solidFill>
                 <a:latin typeface="Arial"/>
               </a:rPr>
-              <a:t>2</a:t>
-            </a:r>
-            <a:r>
-              <a:rPr sz="1400" b="0">
-                <a:solidFill>
-                  <a:srgbClr val="475569"/>
-                </a:solidFill>
-                <a:latin typeface="Arial"/>
-              </a:rPr>
-              <a:t>C</a:t>
+              <a:t>4</a:t>
+            </a:r>
+            <a:r>
+              <a:rPr sz="1400" b="0">
+                <a:solidFill>
+                  <a:srgbClr val="475569"/>
+                </a:solidFill>
+                <a:latin typeface="Arial"/>
+              </a:rPr>
+              <a:t> and ABC</a:t>
             </a:r>
             <a:r>
               <a:rPr sz="1400" b="0" baseline="-25000">
@@ -13554,24 +13500,6 @@
                 </a:solidFill>
                 <a:latin typeface="Arial"/>
               </a:rPr>
-              <a:t>4</a:t>
-            </a:r>
-            <a:r>
-              <a:rPr sz="1400" b="0">
-                <a:solidFill>
-                  <a:srgbClr val="475569"/>
-                </a:solidFill>
-                <a:latin typeface="Arial"/>
-              </a:rPr>
-              <a:t> / ABC</a:t>
-            </a:r>
-            <a:r>
-              <a:rPr sz="1400" b="0" baseline="-25000">
-                <a:solidFill>
-                  <a:srgbClr val="475569"/>
-                </a:solidFill>
-                <a:latin typeface="Arial"/>
-              </a:rPr>
               <a:t>3</a:t>
             </a:r>
             <a:r>
@@ -13581,31 +13509,31 @@
                 </a:solidFill>
                 <a:latin typeface="Arial"/>
               </a:rPr>
-              <a:t> DFT batch in SG 62, 12, 72, 15</a:t>
-            </a:r>
-          </a:p>
-          <a:p>
-            <a:pPr algn="l"/>
-            <a:r>
-              <a:rPr sz="1400" b="0">
-                <a:solidFill>
-                  <a:srgbClr val="475569"/>
-                </a:solidFill>
-                <a:latin typeface="Arial"/>
-              </a:rPr>
-              <a:t>•  Closed-loop automation: DFT batch submission and re-fit on label return</a:t>
-            </a:r>
-          </a:p>
-          <a:p>
-            <a:pPr algn="l"/>
-            <a:r>
-              <a:rPr sz="1400" b="0">
-                <a:solidFill>
-                  <a:srgbClr val="475569"/>
-                </a:solidFill>
-                <a:latin typeface="Arial"/>
-              </a:rPr>
-              <a:t>•  Experimental collaboration to synthesise top-3 hits and feed measured J–V back into ML</a:t>
+              <a:t> candidates in SG 62, 12, 72 and 15</a:t>
+            </a:r>
+          </a:p>
+          <a:p>
+            <a:pPr algn="l"/>
+            <a:r>
+              <a:rPr sz="1400" b="0">
+                <a:solidFill>
+                  <a:srgbClr val="475569"/>
+                </a:solidFill>
+                <a:latin typeface="Arial"/>
+              </a:rPr>
+              <a:t>•  Closed-loop automation of DFT batch submission and surrogate re-fitting on label return</a:t>
+            </a:r>
+          </a:p>
+          <a:p>
+            <a:pPr algn="l"/>
+            <a:r>
+              <a:rPr sz="1400" b="0">
+                <a:solidFill>
+                  <a:srgbClr val="475569"/>
+                </a:solidFill>
+                <a:latin typeface="Arial"/>
+              </a:rPr>
+              <a:t>•  Experimental collaboration to synthesise the top three candidates and feed measured J–V data back into the ML pipeline</a:t>
             </a:r>
           </a:p>
         </p:txBody>
@@ -13798,7 +13726,7 @@
                 </a:solidFill>
                 <a:latin typeface="Arial"/>
               </a:rPr>
-              <a:t>Three takeaways</a:t>
+              <a:t>Principal findings</a:t>
             </a:r>
           </a:p>
         </p:txBody>
@@ -13833,7 +13761,7 @@
                 </a:solidFill>
                 <a:latin typeface="Arial"/>
               </a:rPr>
-              <a:t>•  473-material small-sample ML beats GPR / GB / ExT baseline by +50 % R</a:t>
+              <a:t>•  Small-sample ML on 473 DFT-labelled materials improves the GPR / GB / ExtraTrees baseline by +50 % in R</a:t>
             </a:r>
             <a:r>
               <a:rPr sz="1400" b="0" baseline="30000">
@@ -13854,7 +13782,7 @@
                 </a:solidFill>
                 <a:latin typeface="Arial"/>
               </a:rPr>
-              <a:t>•  14-material chalcogenide action list — Se</a:t>
+              <a:t>•  Fourteen-candidate chalcogenide shortlist; Se</a:t>
             </a:r>
             <a:r>
               <a:rPr sz="1400" b="0" baseline="-25000">
@@ -13908,43 +13836,43 @@
                 </a:solidFill>
                 <a:latin typeface="Arial"/>
               </a:rPr>
-              <a:t> sits at the SQ bullseye</a:t>
-            </a:r>
-          </a:p>
-          <a:p>
-            <a:pPr algn="l"/>
-            <a:r>
-              <a:rPr sz="1400" b="0">
-                <a:solidFill>
-                  <a:srgbClr val="475569"/>
-                </a:solidFill>
-                <a:latin typeface="Arial"/>
-              </a:rPr>
-              <a:t>•  SolarLab 2D drift-diffusion is the bridge from DFT params to predicted device J–V</a:t>
-            </a:r>
-          </a:p>
-          <a:p>
-            <a:pPr algn="l"/>
-            <a:r>
-              <a:rPr sz="1400" b="0">
-                <a:solidFill>
-                  <a:srgbClr val="475569"/>
-                </a:solidFill>
-                <a:latin typeface="Arial"/>
-              </a:rPr>
-              <a:t>•  DFT cost crystallised into a tiny, actionable subspace fed by an honest grouped-CV diagnostic</a:t>
-            </a:r>
-          </a:p>
-          <a:p>
-            <a:pPr algn="l"/>
-            <a:r>
-              <a:rPr sz="1400" b="0">
-                <a:solidFill>
-                  <a:srgbClr val="475569"/>
-                </a:solidFill>
-                <a:latin typeface="Arial"/>
-              </a:rPr>
-              <a:t>•  Synthesis collaboration is the closing leg of the discovery → simulation → experiment loop</a:t>
+              <a:t> sits near the Shockley–Queisser optimum</a:t>
+            </a:r>
+          </a:p>
+          <a:p>
+            <a:pPr algn="l"/>
+            <a:r>
+              <a:rPr sz="1400" b="0">
+                <a:solidFill>
+                  <a:srgbClr val="475569"/>
+                </a:solidFill>
+                <a:latin typeface="Arial"/>
+              </a:rPr>
+              <a:t>•  SolarLab 2D drift-diffusion provides the bridge from DFT-derived parameters to predicted device-level J–V</a:t>
+            </a:r>
+          </a:p>
+          <a:p>
+            <a:pPr algn="l"/>
+            <a:r>
+              <a:rPr sz="1400" b="0">
+                <a:solidFill>
+                  <a:srgbClr val="475569"/>
+                </a:solidFill>
+                <a:latin typeface="Arial"/>
+              </a:rPr>
+              <a:t>•  Compact, physically motivated descriptor and small-sample model identify a tractable subspace under stringent grouped-CV diagnostics</a:t>
+            </a:r>
+          </a:p>
+          <a:p>
+            <a:pPr algn="l"/>
+            <a:r>
+              <a:rPr sz="1400" b="0">
+                <a:solidFill>
+                  <a:srgbClr val="475569"/>
+                </a:solidFill>
+                <a:latin typeface="Arial"/>
+              </a:rPr>
+              <a:t>•  Experimental collaboration completes the discovery → simulation → experiment loop</a:t>
             </a:r>
           </a:p>
         </p:txBody>
@@ -14474,7 +14402,7 @@
                 </a:solidFill>
                 <a:latin typeface="Arial"/>
               </a:rPr>
-              <a:t>Why neither alone works</a:t>
+              <a:t>Limitations of the established absorbers</a:t>
             </a:r>
           </a:p>
         </p:txBody>
@@ -14509,7 +14437,7 @@
                 </a:solidFill>
                 <a:latin typeface="Arial"/>
               </a:rPr>
-              <a:t>PCE timeline + accelerated-aging gap</a:t>
+              <a:t>Record-cell PCE timeline and accelerated-aging stability gap</a:t>
             </a:r>
           </a:p>
         </p:txBody>
@@ -14544,19 +14472,19 @@
                 </a:solidFill>
                 <a:latin typeface="Arial"/>
               </a:rPr>
-              <a:t>•  Si record 27.6 % (UNSW 2024) — half a century of incremental gain</a:t>
-            </a:r>
-          </a:p>
-          <a:p>
-            <a:pPr algn="l"/>
-            <a:r>
-              <a:rPr sz="1400" b="0">
-                <a:solidFill>
-                  <a:srgbClr val="475569"/>
-                </a:solidFill>
-                <a:latin typeface="Arial"/>
-              </a:rPr>
-              <a:t>•  Perovskite record 26.7 % (UNIST 2024) — caught Si in &lt;10 years</a:t>
+              <a:t>•  Si record 27.6 % (UNSW 2024) — five decades of incremental improvement</a:t>
+            </a:r>
+          </a:p>
+          <a:p>
+            <a:pPr algn="l"/>
+            <a:r>
+              <a:rPr sz="1400" b="0">
+                <a:solidFill>
+                  <a:srgbClr val="475569"/>
+                </a:solidFill>
+                <a:latin typeface="Arial"/>
+              </a:rPr>
+              <a:t>•  Perovskite record 26.7 % (UNIST 2024) — single-junction parity with Si in under a decade</a:t>
             </a:r>
           </a:p>
           <a:p>
@@ -14586,43 +14514,43 @@
                 </a:solidFill>
                 <a:latin typeface="Arial"/>
               </a:rPr>
-              <a:t> 100× under stress: ion migration, A-site loss, photo-degradation</a:t>
-            </a:r>
-          </a:p>
-          <a:p>
-            <a:pPr algn="l"/>
-            <a:r>
-              <a:rPr sz="1400" b="0">
-                <a:solidFill>
-                  <a:srgbClr val="475569"/>
-                </a:solidFill>
-                <a:latin typeface="Arial"/>
-              </a:rPr>
-              <a:t>•  Encapsulation buys time but doesn't solve absorber-side instability [Boyd et al. 2019]</a:t>
-            </a:r>
-          </a:p>
-          <a:p>
-            <a:pPr algn="l"/>
-            <a:r>
-              <a:rPr sz="1400" b="0">
-                <a:solidFill>
-                  <a:srgbClr val="475569"/>
-                </a:solidFill>
-                <a:latin typeface="Arial"/>
-              </a:rPr>
-              <a:t>•  Commercial-scale module deployment needs both efficiency and outdoor lifetime</a:t>
-            </a:r>
-          </a:p>
-          <a:p>
-            <a:pPr algn="l"/>
-            <a:r>
-              <a:rPr sz="1400" b="0">
-                <a:solidFill>
-                  <a:srgbClr val="475569"/>
-                </a:solidFill>
-                <a:latin typeface="Arial"/>
-              </a:rPr>
-              <a:t>•  Motivates discovery of new absorber chemistries that satisfy both at once</a:t>
+              <a:t> 100× under operating stress (ion migration, A-site loss, photo-induced degradation)</a:t>
+            </a:r>
+          </a:p>
+          <a:p>
+            <a:pPr algn="l"/>
+            <a:r>
+              <a:rPr sz="1400" b="0">
+                <a:solidFill>
+                  <a:srgbClr val="475569"/>
+                </a:solidFill>
+                <a:latin typeface="Arial"/>
+              </a:rPr>
+              <a:t>•  Encapsulation mitigates ingress but does not address intrinsic absorber-side instability [Boyd et al. 2019]</a:t>
+            </a:r>
+          </a:p>
+          <a:p>
+            <a:pPr algn="l"/>
+            <a:r>
+              <a:rPr sz="1400" b="0">
+                <a:solidFill>
+                  <a:srgbClr val="475569"/>
+                </a:solidFill>
+                <a:latin typeface="Arial"/>
+              </a:rPr>
+              <a:t>•  Module-scale commercial deployment requires both record-class efficiency and outdoor lifetime</a:t>
+            </a:r>
+          </a:p>
+          <a:p>
+            <a:pPr algn="l"/>
+            <a:r>
+              <a:rPr sz="1400" b="0">
+                <a:solidFill>
+                  <a:srgbClr val="475569"/>
+                </a:solidFill>
+                <a:latin typeface="Arial"/>
+              </a:rPr>
+              <a:t>•  Motivates the discovery of new absorber chemistries that satisfy both criteria simultaneously</a:t>
             </a:r>
           </a:p>
         </p:txBody>
@@ -14780,7 +14708,7 @@
                 </a:solidFill>
                 <a:latin typeface="Arial"/>
               </a:rPr>
-              <a:t>Talk roadmap</a:t>
+              <a:t>Talk outline</a:t>
             </a:r>
           </a:p>
         </p:txBody>
@@ -14815,7 +14743,7 @@
                 </a:solidFill>
                 <a:latin typeface="Arial"/>
               </a:rPr>
-              <a:t>Six stages from materials database to predicted device performance</a:t>
+              <a:t>Six stages connecting the materials database to predicted device performance</a:t>
             </a:r>
           </a:p>
         </p:txBody>
@@ -14874,67 +14802,67 @@
                 </a:solidFill>
                 <a:latin typeface="Arial"/>
               </a:rPr>
-              <a:t>•  01 PROBLEM — efficiency–stability deadlock</a:t>
-            </a:r>
-          </a:p>
-          <a:p>
-            <a:pPr algn="l"/>
-            <a:r>
-              <a:rPr sz="1400" b="0">
-                <a:solidFill>
-                  <a:srgbClr val="475569"/>
-                </a:solidFill>
-                <a:latin typeface="Arial"/>
-              </a:rPr>
-              <a:t>•  02 STRATEGY — chalcogenide structural prior</a:t>
-            </a:r>
-          </a:p>
-          <a:p>
-            <a:pPr algn="l"/>
-            <a:r>
-              <a:rPr sz="1400" b="0">
-                <a:solidFill>
-                  <a:srgbClr val="475569"/>
-                </a:solidFill>
-                <a:latin typeface="Arial"/>
-              </a:rPr>
-              <a:t>•  03 ML + FEATURES — small-sample HSE06 surrogate (8 slides)</a:t>
-            </a:r>
-          </a:p>
-          <a:p>
-            <a:pPr algn="l"/>
-            <a:r>
-              <a:rPr sz="1400" b="0">
-                <a:solidFill>
-                  <a:srgbClr val="475569"/>
-                </a:solidFill>
-                <a:latin typeface="Arial"/>
-              </a:rPr>
-              <a:t>•  04 CANDIDATES — 14-material action list</a:t>
-            </a:r>
-          </a:p>
-          <a:p>
-            <a:pPr algn="l"/>
-            <a:r>
-              <a:rPr sz="1400" b="0">
-                <a:solidFill>
-                  <a:srgbClr val="475569"/>
-                </a:solidFill>
-                <a:latin typeface="Arial"/>
-              </a:rPr>
-              <a:t>•  05 BRIDGE — 1D + 2D drift-diffusion device sim (8 slides)</a:t>
-            </a:r>
-          </a:p>
-          <a:p>
-            <a:pPr algn="l"/>
-            <a:r>
-              <a:rPr sz="1400" b="0">
-                <a:solidFill>
-                  <a:srgbClr val="475569"/>
-                </a:solidFill>
-                <a:latin typeface="Arial"/>
-              </a:rPr>
-              <a:t>•  06 PAYOFF — predicted device J–V + outlook</a:t>
+              <a:t>•  01 PROBLEM — efficiency–stability tradeoff</a:t>
+            </a:r>
+          </a:p>
+          <a:p>
+            <a:pPr algn="l"/>
+            <a:r>
+              <a:rPr sz="1400" b="0">
+                <a:solidFill>
+                  <a:srgbClr val="475569"/>
+                </a:solidFill>
+                <a:latin typeface="Arial"/>
+              </a:rPr>
+              <a:t>•  02 STRATEGY — chalcogenide structural template</a:t>
+            </a:r>
+          </a:p>
+          <a:p>
+            <a:pPr algn="l"/>
+            <a:r>
+              <a:rPr sz="1400" b="0">
+                <a:solidFill>
+                  <a:srgbClr val="475569"/>
+                </a:solidFill>
+                <a:latin typeface="Arial"/>
+              </a:rPr>
+              <a:t>•  03 ML AND FEATURES — small-sample HSE06 surrogate (8 slides)</a:t>
+            </a:r>
+          </a:p>
+          <a:p>
+            <a:pPr algn="l"/>
+            <a:r>
+              <a:rPr sz="1400" b="0">
+                <a:solidFill>
+                  <a:srgbClr val="475569"/>
+                </a:solidFill>
+                <a:latin typeface="Arial"/>
+              </a:rPr>
+              <a:t>•  04 CANDIDATES — fourteen-material shortlist</a:t>
+            </a:r>
+          </a:p>
+          <a:p>
+            <a:pPr algn="l"/>
+            <a:r>
+              <a:rPr sz="1400" b="0">
+                <a:solidFill>
+                  <a:srgbClr val="475569"/>
+                </a:solidFill>
+                <a:latin typeface="Arial"/>
+              </a:rPr>
+              <a:t>•  05 BRIDGE — 1D and 2D drift-diffusion device simulation (8 slides)</a:t>
+            </a:r>
+          </a:p>
+          <a:p>
+            <a:pPr algn="l"/>
+            <a:r>
+              <a:rPr sz="1400" b="0">
+                <a:solidFill>
+                  <a:srgbClr val="475569"/>
+                </a:solidFill>
+                <a:latin typeface="Arial"/>
+              </a:rPr>
+              <a:t>•  06 PAYOFF — predicted device J–V and outlook</a:t>
             </a:r>
           </a:p>
         </p:txBody>
@@ -15312,7 +15240,7 @@
                 </a:solidFill>
                 <a:latin typeface="Arial"/>
               </a:rPr>
-              <a:t> skeletons; heavy-p-block cations on chalcogen anions</a:t>
+              <a:t> frameworks with heavy-p-block cations on chalcogen anions</a:t>
             </a:r>
           </a:p>
         </p:txBody>
@@ -15347,19 +15275,19 @@
                 </a:solidFill>
                 <a:latin typeface="Arial"/>
               </a:rPr>
-              <a:t>•  Anion: S, Se, Te. Selenides occupy 11 / 14 of the action list (incl. top-6)</a:t>
-            </a:r>
-          </a:p>
-          <a:p>
-            <a:pPr algn="l"/>
-            <a:r>
-              <a:rPr sz="1400" b="0">
-                <a:solidFill>
-                  <a:srgbClr val="475569"/>
-                </a:solidFill>
-                <a:latin typeface="Arial"/>
-              </a:rPr>
-              <a:t>•  Cation: Sb, Sn, Bi 6s</a:t>
+              <a:t>•  Anion sublattice: S, Se, Te. Selenides comprise 11 of 14 shortlisted candidates, including the top six</a:t>
+            </a:r>
+          </a:p>
+          <a:p>
+            <a:pPr algn="l"/>
+            <a:r>
+              <a:rPr sz="1400" b="0">
+                <a:solidFill>
+                  <a:srgbClr val="475569"/>
+                </a:solidFill>
+                <a:latin typeface="Arial"/>
+              </a:rPr>
+              <a:t>•  Active cation: Sb, Sn, Bi (6s</a:t>
             </a:r>
             <a:r>
               <a:rPr sz="1400" b="0" baseline="30000">
@@ -15395,31 +15323,31 @@
                 </a:solidFill>
                 <a:latin typeface="Arial"/>
               </a:rPr>
-              <a:t> lone-pair → deep, dispersive valence-band tops</a:t>
-            </a:r>
-          </a:p>
-          <a:p>
-            <a:pPr algn="l"/>
-            <a:r>
-              <a:rPr sz="1400" b="0">
-                <a:solidFill>
-                  <a:srgbClr val="475569"/>
-                </a:solidFill>
-                <a:latin typeface="Arial"/>
-              </a:rPr>
-              <a:t>•  Spectator: Cs, Ca, Sr, K — donate charge without flattening the band</a:t>
-            </a:r>
-          </a:p>
-          <a:p>
-            <a:pPr algn="l"/>
-            <a:r>
-              <a:rPr sz="1400" b="0">
-                <a:solidFill>
-                  <a:srgbClr val="475569"/>
-                </a:solidFill>
-                <a:latin typeface="Arial"/>
-              </a:rPr>
-              <a:t>•  Stoichiometry: AB</a:t>
+              <a:t> lone pair) producing dispersive valence-band maxima</a:t>
+            </a:r>
+          </a:p>
+          <a:p>
+            <a:pPr algn="l"/>
+            <a:r>
+              <a:rPr sz="1400" b="0">
+                <a:solidFill>
+                  <a:srgbClr val="475569"/>
+                </a:solidFill>
+                <a:latin typeface="Arial"/>
+              </a:rPr>
+              <a:t>•  Spectator cation: Cs, Ca, Sr, K donate charge without contracting the valence-band dispersion</a:t>
+            </a:r>
+          </a:p>
+          <a:p>
+            <a:pPr algn="l"/>
+            <a:r>
+              <a:rPr sz="1400" b="0">
+                <a:solidFill>
+                  <a:srgbClr val="475569"/>
+                </a:solidFill>
+                <a:latin typeface="Arial"/>
+              </a:rPr>
+              <a:t>•  Stoichiometry preference: AB</a:t>
             </a:r>
             <a:r>
               <a:rPr sz="1400" b="0" baseline="-25000">
@@ -15509,7 +15437,31 @@
                 </a:solidFill>
                 <a:latin typeface="Arial"/>
               </a:rPr>
-              <a:t> </a:t>
+              <a:t> in the screened subset</a:t>
+            </a:r>
+          </a:p>
+          <a:p>
+            <a:pPr algn="l"/>
+            <a:r>
+              <a:rPr sz="1400" b="0">
+                <a:solidFill>
+                  <a:srgbClr val="475569"/>
+                </a:solidFill>
+                <a:latin typeface="Arial"/>
+              </a:rPr>
+              <a:t>•  Symmetry distribution: Pnma (SG 62) is dominant; followed by SG 12, 14, 72 and 15</a:t>
+            </a:r>
+          </a:p>
+          <a:p>
+            <a:pPr algn="l"/>
+            <a:r>
+              <a:rPr sz="1400" b="0">
+                <a:solidFill>
+                  <a:srgbClr val="475569"/>
+                </a:solidFill>
+                <a:latin typeface="Arial"/>
+              </a:rPr>
+              <a:t>•  Constrains the &gt; 10</a:t>
             </a:r>
             <a:r>
               <a:rPr sz="1400" b="0" baseline="30000">
@@ -15518,48 +15470,6 @@
                 </a:solidFill>
                 <a:latin typeface="Arial"/>
               </a:rPr>
-              <a:t>≫</a:t>
-            </a:r>
-            <a:r>
-              <a:rPr sz="1400" b="0">
-                <a:solidFill>
-                  <a:srgbClr val="475569"/>
-                </a:solidFill>
-                <a:latin typeface="Arial"/>
-              </a:rPr>
-              <a:t> everything else</a:t>
-            </a:r>
-          </a:p>
-          <a:p>
-            <a:pPr algn="l"/>
-            <a:r>
-              <a:rPr sz="1400" b="0">
-                <a:solidFill>
-                  <a:srgbClr val="475569"/>
-                </a:solidFill>
-                <a:latin typeface="Arial"/>
-              </a:rPr>
-              <a:t>•  Symmetry: Pnma (SG 62) dominant; expand into 12, 14, 72, 15</a:t>
-            </a:r>
-          </a:p>
-          <a:p>
-            <a:pPr algn="l"/>
-            <a:r>
-              <a:rPr sz="1400" b="0">
-                <a:solidFill>
-                  <a:srgbClr val="475569"/>
-                </a:solidFill>
-                <a:latin typeface="Arial"/>
-              </a:rPr>
-              <a:t>•  Constrains &gt; 10</a:t>
-            </a:r>
-            <a:r>
-              <a:rPr sz="1400" b="0" baseline="30000">
-                <a:solidFill>
-                  <a:srgbClr val="475569"/>
-                </a:solidFill>
-                <a:latin typeface="Arial"/>
-              </a:rPr>
               <a:t>5</a:t>
             </a:r>
             <a:r>
@@ -15569,7 +15479,7 @@
                 </a:solidFill>
                 <a:latin typeface="Arial"/>
               </a:rPr>
-              <a:t> DB scan to physically plausible, synthesisable subspace</a:t>
+              <a:t> candidate pool to a physically plausible, synthetically accessible subspace</a:t>
             </a:r>
           </a:p>
         </p:txBody>

--- a/presentations/jmi-2026/output/jmi-2026.pptx
+++ b/presentations/jmi-2026/output/jmi-2026.pptx
@@ -3184,7 +3184,7 @@
           <a:p>
             <a:pPr algn="ctr"/>
             <a:r>
-              <a:rPr sz="1600" b="0">
+              <a:rPr sz="1500" b="0">
                 <a:solidFill>
                   <a:srgbClr val="475569"/>
                 </a:solidFill>
@@ -3369,8 +3369,8 @@
         </p:nvSpPr>
         <p:spPr>
           <a:xfrm>
-            <a:off x="457200" y="731520"/>
-            <a:ext cx="8229600" cy="548640"/>
+            <a:off x="457200" y="640080"/>
+            <a:ext cx="8229600" cy="640080"/>
           </a:xfrm>
           <a:prstGeom prst="rect">
             <a:avLst/>
@@ -3385,7 +3385,7 @@
           <a:p>
             <a:pPr algn="l"/>
             <a:r>
-              <a:rPr sz="2800" b="1">
+              <a:rPr sz="2200" b="1">
                 <a:solidFill>
                   <a:srgbClr val="1C2533"/>
                 </a:solidFill>
@@ -3404,8 +3404,8 @@
         </p:nvSpPr>
         <p:spPr>
           <a:xfrm>
-            <a:off x="457200" y="1280160"/>
-            <a:ext cx="8229600" cy="365760"/>
+            <a:off x="457200" y="1325880"/>
+            <a:ext cx="8229600" cy="411480"/>
           </a:xfrm>
           <a:prstGeom prst="rect">
             <a:avLst/>
@@ -3420,7 +3420,7 @@
           <a:p>
             <a:pPr algn="l"/>
             <a:r>
-              <a:rPr sz="1600" b="0">
+              <a:rPr sz="1500" b="0">
                 <a:solidFill>
                   <a:srgbClr val="475569"/>
                 </a:solidFill>
@@ -3447,8 +3447,8 @@
         </p:blipFill>
         <p:spPr>
           <a:xfrm>
-            <a:off x="457200" y="2649931"/>
-            <a:ext cx="4937760" cy="1283817"/>
+            <a:off x="457200" y="2130552"/>
+            <a:ext cx="8229600" cy="2139696"/>
           </a:xfrm>
           <a:prstGeom prst="rect">
             <a:avLst/>
@@ -3463,7 +3463,7 @@
         </p:nvSpPr>
         <p:spPr>
           <a:xfrm>
-            <a:off x="6858000" y="4617720"/>
+            <a:off x="6858000" y="4663440"/>
             <a:ext cx="1828800" cy="274320"/>
           </a:xfrm>
           <a:prstGeom prst="rect">
@@ -3717,8 +3717,8 @@
         </p:nvSpPr>
         <p:spPr>
           <a:xfrm>
-            <a:off x="457200" y="731520"/>
-            <a:ext cx="8229600" cy="548640"/>
+            <a:off x="457200" y="640080"/>
+            <a:ext cx="8229600" cy="640080"/>
           </a:xfrm>
           <a:prstGeom prst="rect">
             <a:avLst/>
@@ -3733,7 +3733,7 @@
           <a:p>
             <a:pPr algn="l"/>
             <a:r>
-              <a:rPr sz="2800" b="1">
+              <a:rPr sz="2200" b="1">
                 <a:solidFill>
                   <a:srgbClr val="1C2533"/>
                 </a:solidFill>
@@ -3752,8 +3752,8 @@
         </p:nvSpPr>
         <p:spPr>
           <a:xfrm>
-            <a:off x="457200" y="1280160"/>
-            <a:ext cx="8229600" cy="365760"/>
+            <a:off x="457200" y="1325880"/>
+            <a:ext cx="8229600" cy="411480"/>
           </a:xfrm>
           <a:prstGeom prst="rect">
             <a:avLst/>
@@ -3768,7 +3768,7 @@
           <a:p>
             <a:pPr algn="l"/>
             <a:r>
-              <a:rPr sz="1600" b="0">
+              <a:rPr sz="1500" b="0">
                 <a:solidFill>
                   <a:srgbClr val="475569"/>
                 </a:solidFill>
@@ -3788,22 +3788,26 @@
         <p:spPr>
           <a:xfrm>
             <a:off x="457200" y="1828800"/>
-            <a:ext cx="8229600" cy="2926080"/>
-          </a:xfrm>
-          <a:prstGeom prst="rect">
-            <a:avLst/>
-          </a:prstGeom>
-          <a:noFill/>
-        </p:spPr>
-        <p:txBody>
-          <a:bodyPr wrap="square">
-            <a:spAutoFit/>
-          </a:bodyPr>
-          <a:lstStyle/>
-          <a:p>
-            <a:pPr algn="l"/>
-            <a:r>
-              <a:rPr sz="1400" b="0">
+            <a:ext cx="8229600" cy="2743200"/>
+          </a:xfrm>
+          <a:prstGeom prst="rect">
+            <a:avLst/>
+          </a:prstGeom>
+          <a:noFill/>
+        </p:spPr>
+        <p:txBody>
+          <a:bodyPr wrap="square">
+            <a:spAutoFit/>
+          </a:bodyPr>
+          <a:lstStyle/>
+          <a:p>
+            <a:pPr algn="l">
+              <a:spcAft>
+                <a:spcPts val="200"/>
+              </a:spcAft>
+            </a:pPr>
+            <a:r>
+              <a:rPr sz="1300" b="0">
                 <a:solidFill>
                   <a:srgbClr val="475569"/>
                 </a:solidFill>
@@ -3813,9 +3817,13 @@
             </a:r>
           </a:p>
           <a:p>
-            <a:pPr algn="l"/>
-            <a:r>
-              <a:rPr sz="1400" b="0">
+            <a:pPr algn="l">
+              <a:spcAft>
+                <a:spcPts val="200"/>
+              </a:spcAft>
+            </a:pPr>
+            <a:r>
+              <a:rPr sz="1300" b="0">
                 <a:solidFill>
                   <a:srgbClr val="475569"/>
                 </a:solidFill>
@@ -3824,7 +3832,7 @@
               <a:t>•  DFPT and HSE06 dominate runtime, requiring 10</a:t>
             </a:r>
             <a:r>
-              <a:rPr sz="1400" b="0" baseline="30000">
+              <a:rPr sz="1300" b="0" baseline="30000">
                 <a:solidFill>
                   <a:srgbClr val="475569"/>
                 </a:solidFill>
@@ -3833,7 +3841,7 @@
               <a:t>0</a:t>
             </a:r>
             <a:r>
-              <a:rPr sz="1400" b="0">
+              <a:rPr sz="1300" b="0">
                 <a:solidFill>
                   <a:srgbClr val="475569"/>
                 </a:solidFill>
@@ -3842,7 +3850,7 @@
               <a:t>–10</a:t>
             </a:r>
             <a:r>
-              <a:rPr sz="1400" b="0" baseline="30000">
+              <a:rPr sz="1300" b="0" baseline="30000">
                 <a:solidFill>
                   <a:srgbClr val="475569"/>
                 </a:solidFill>
@@ -3851,7 +3859,7 @@
               <a:t>2</a:t>
             </a:r>
             <a:r>
-              <a:rPr sz="1400" b="0">
+              <a:rPr sz="1300" b="0">
                 <a:solidFill>
                   <a:srgbClr val="475569"/>
                 </a:solidFill>
@@ -3861,9 +3869,13 @@
             </a:r>
           </a:p>
           <a:p>
-            <a:pPr algn="l"/>
-            <a:r>
-              <a:rPr sz="1400" b="0">
+            <a:pPr algn="l">
+              <a:spcAft>
+                <a:spcPts val="200"/>
+              </a:spcAft>
+            </a:pPr>
+            <a:r>
+              <a:rPr sz="1300" b="0">
                 <a:solidFill>
                   <a:srgbClr val="475569"/>
                 </a:solidFill>
@@ -3872,7 +3884,7 @@
               <a:t>•  PBE relaxation scales as O(N</a:t>
             </a:r>
             <a:r>
-              <a:rPr sz="1400" b="0" baseline="30000">
+              <a:rPr sz="1300" b="0" baseline="30000">
                 <a:solidFill>
                   <a:srgbClr val="475569"/>
                 </a:solidFill>
@@ -3881,7 +3893,7 @@
               <a:t>3</a:t>
             </a:r>
             <a:r>
-              <a:rPr sz="1400" b="0">
+              <a:rPr sz="1300" b="0">
                 <a:solidFill>
                   <a:srgbClr val="475569"/>
                 </a:solidFill>
@@ -3891,9 +3903,13 @@
             </a:r>
           </a:p>
           <a:p>
-            <a:pPr algn="l"/>
-            <a:r>
-              <a:rPr sz="1400" b="0">
+            <a:pPr algn="l">
+              <a:spcAft>
+                <a:spcPts val="200"/>
+              </a:spcAft>
+            </a:pPr>
+            <a:r>
+              <a:rPr sz="1300" b="0">
                 <a:solidFill>
                   <a:srgbClr val="475569"/>
                 </a:solidFill>
@@ -3903,9 +3919,13 @@
             </a:r>
           </a:p>
           <a:p>
-            <a:pPr algn="l"/>
-            <a:r>
-              <a:rPr sz="1400" b="0">
+            <a:pPr algn="l">
+              <a:spcAft>
+                <a:spcPts val="200"/>
+              </a:spcAft>
+            </a:pPr>
+            <a:r>
+              <a:rPr sz="1300" b="0">
                 <a:solidFill>
                   <a:srgbClr val="475569"/>
                 </a:solidFill>
@@ -3914,7 +3934,7 @@
               <a:t>•  Combined MP and OQMD pool exceeds 10</a:t>
             </a:r>
             <a:r>
-              <a:rPr sz="1400" b="0" baseline="30000">
+              <a:rPr sz="1300" b="0" baseline="30000">
                 <a:solidFill>
                   <a:srgbClr val="475569"/>
                 </a:solidFill>
@@ -3923,7 +3943,7 @@
               <a:t>5</a:t>
             </a:r>
             <a:r>
-              <a:rPr sz="1400" b="0">
+              <a:rPr sz="1300" b="0">
                 <a:solidFill>
                   <a:srgbClr val="475569"/>
                 </a:solidFill>
@@ -3933,9 +3953,13 @@
             </a:r>
           </a:p>
           <a:p>
-            <a:pPr algn="l"/>
-            <a:r>
-              <a:rPr sz="1400" b="0">
+            <a:pPr algn="l">
+              <a:spcAft>
+                <a:spcPts val="200"/>
+              </a:spcAft>
+            </a:pPr>
+            <a:r>
+              <a:rPr sz="1300" b="0">
                 <a:solidFill>
                   <a:srgbClr val="475569"/>
                 </a:solidFill>
@@ -3954,7 +3978,7 @@
         </p:nvSpPr>
         <p:spPr>
           <a:xfrm>
-            <a:off x="6858000" y="4617720"/>
+            <a:off x="6858000" y="4663440"/>
             <a:ext cx="1828800" cy="274320"/>
           </a:xfrm>
           <a:prstGeom prst="rect">
@@ -4077,8 +4101,8 @@
         </p:nvSpPr>
         <p:spPr>
           <a:xfrm>
-            <a:off x="457200" y="731520"/>
-            <a:ext cx="8229600" cy="548640"/>
+            <a:off x="457200" y="640080"/>
+            <a:ext cx="8229600" cy="640080"/>
           </a:xfrm>
           <a:prstGeom prst="rect">
             <a:avLst/>
@@ -4093,7 +4117,7 @@
           <a:p>
             <a:pPr algn="l"/>
             <a:r>
-              <a:rPr sz="2800" b="1">
+              <a:rPr sz="2200" b="1">
                 <a:solidFill>
                   <a:srgbClr val="1C2533"/>
                 </a:solidFill>
@@ -4112,8 +4136,8 @@
         </p:nvSpPr>
         <p:spPr>
           <a:xfrm>
-            <a:off x="457200" y="1280160"/>
-            <a:ext cx="8229600" cy="365760"/>
+            <a:off x="457200" y="1325880"/>
+            <a:ext cx="8229600" cy="411480"/>
           </a:xfrm>
           <a:prstGeom prst="rect">
             <a:avLst/>
@@ -4128,7 +4152,7 @@
           <a:p>
             <a:pPr algn="l"/>
             <a:r>
-              <a:rPr sz="1600" b="0">
+              <a:rPr sz="1500" b="0">
                 <a:solidFill>
                   <a:srgbClr val="475569"/>
                 </a:solidFill>
@@ -4155,8 +4179,8 @@
         </p:blipFill>
         <p:spPr>
           <a:xfrm>
-            <a:off x="1013591" y="1828800"/>
-            <a:ext cx="3824976" cy="2926080"/>
+            <a:off x="1133122" y="1828800"/>
+            <a:ext cx="3585915" cy="2743200"/>
           </a:xfrm>
           <a:prstGeom prst="rect">
             <a:avLst/>
@@ -4172,22 +4196,26 @@
         <p:spPr>
           <a:xfrm>
             <a:off x="5669280" y="1828800"/>
-            <a:ext cx="3017520" cy="2926080"/>
-          </a:xfrm>
-          <a:prstGeom prst="rect">
-            <a:avLst/>
-          </a:prstGeom>
-          <a:noFill/>
-        </p:spPr>
-        <p:txBody>
-          <a:bodyPr wrap="square">
-            <a:spAutoFit/>
-          </a:bodyPr>
-          <a:lstStyle/>
-          <a:p>
-            <a:pPr algn="l"/>
-            <a:r>
-              <a:rPr sz="1400" b="0">
+            <a:ext cx="3017520" cy="2743200"/>
+          </a:xfrm>
+          <a:prstGeom prst="rect">
+            <a:avLst/>
+          </a:prstGeom>
+          <a:noFill/>
+        </p:spPr>
+        <p:txBody>
+          <a:bodyPr wrap="square">
+            <a:spAutoFit/>
+          </a:bodyPr>
+          <a:lstStyle/>
+          <a:p>
+            <a:pPr algn="l">
+              <a:spcAft>
+                <a:spcPts val="200"/>
+              </a:spcAft>
+            </a:pPr>
+            <a:r>
+              <a:rPr sz="1300" b="0">
                 <a:solidFill>
                   <a:srgbClr val="475569"/>
                 </a:solidFill>
@@ -4197,9 +4225,13 @@
             </a:r>
           </a:p>
           <a:p>
-            <a:pPr algn="l"/>
-            <a:r>
-              <a:rPr sz="1400" b="0">
+            <a:pPr algn="l">
+              <a:spcAft>
+                <a:spcPts val="200"/>
+              </a:spcAft>
+            </a:pPr>
+            <a:r>
+              <a:rPr sz="1300" b="0">
                 <a:solidFill>
                   <a:srgbClr val="475569"/>
                 </a:solidFill>
@@ -4208,7 +4240,7 @@
               <a:t>•  Magpie reduces a formula A</a:t>
             </a:r>
             <a:r>
-              <a:rPr sz="1400" b="0" baseline="-25000">
+              <a:rPr sz="1300" b="0" baseline="-25000">
                 <a:solidFill>
                   <a:srgbClr val="475569"/>
                 </a:solidFill>
@@ -4217,7 +4249,7 @@
               <a:t>a</a:t>
             </a:r>
             <a:r>
-              <a:rPr sz="1400" b="0">
+              <a:rPr sz="1300" b="0">
                 <a:solidFill>
                   <a:srgbClr val="475569"/>
                 </a:solidFill>
@@ -4226,7 +4258,7 @@
               <a:t>B</a:t>
             </a:r>
             <a:r>
-              <a:rPr sz="1400" b="0" baseline="-25000">
+              <a:rPr sz="1300" b="0" baseline="-25000">
                 <a:solidFill>
                   <a:srgbClr val="475569"/>
                 </a:solidFill>
@@ -4235,7 +4267,7 @@
               <a:t>b</a:t>
             </a:r>
             <a:r>
-              <a:rPr sz="1400" b="0">
+              <a:rPr sz="1300" b="0">
                 <a:solidFill>
                   <a:srgbClr val="475569"/>
                 </a:solidFill>
@@ -4244,7 +4276,7 @@
               <a:t>C</a:t>
             </a:r>
             <a:r>
-              <a:rPr sz="1400" b="0" baseline="-25000">
+              <a:rPr sz="1300" b="0" baseline="-25000">
                 <a:solidFill>
                   <a:srgbClr val="475569"/>
                 </a:solidFill>
@@ -4253,7 +4285,7 @@
               <a:t>c</a:t>
             </a:r>
             <a:r>
-              <a:rPr sz="1400" b="0">
+              <a:rPr sz="1300" b="0">
                 <a:solidFill>
                   <a:srgbClr val="475569"/>
                 </a:solidFill>
@@ -4263,9 +4295,13 @@
             </a:r>
           </a:p>
           <a:p>
-            <a:pPr algn="l"/>
-            <a:r>
-              <a:rPr sz="1400" b="0">
+            <a:pPr algn="l">
+              <a:spcAft>
+                <a:spcPts val="200"/>
+              </a:spcAft>
+            </a:pPr>
+            <a:r>
+              <a:rPr sz="1300" b="0">
                 <a:solidFill>
                   <a:srgbClr val="475569"/>
                 </a:solidFill>
@@ -4275,9 +4311,13 @@
             </a:r>
           </a:p>
           <a:p>
-            <a:pPr algn="l"/>
-            <a:r>
-              <a:rPr sz="1400" b="0">
+            <a:pPr algn="l">
+              <a:spcAft>
+                <a:spcPts val="200"/>
+              </a:spcAft>
+            </a:pPr>
+            <a:r>
+              <a:rPr sz="1300" b="0">
                 <a:solidFill>
                   <a:srgbClr val="475569"/>
                 </a:solidFill>
@@ -4287,9 +4327,13 @@
             </a:r>
           </a:p>
           <a:p>
-            <a:pPr algn="l"/>
-            <a:r>
-              <a:rPr sz="1400" b="0">
+            <a:pPr algn="l">
+              <a:spcAft>
+                <a:spcPts val="200"/>
+              </a:spcAft>
+            </a:pPr>
+            <a:r>
+              <a:rPr sz="1300" b="0">
                 <a:solidFill>
                   <a:srgbClr val="475569"/>
                 </a:solidFill>
@@ -4299,9 +4343,13 @@
             </a:r>
           </a:p>
           <a:p>
-            <a:pPr algn="l"/>
-            <a:r>
-              <a:rPr sz="1400" b="0">
+            <a:pPr algn="l">
+              <a:spcAft>
+                <a:spcPts val="200"/>
+              </a:spcAft>
+            </a:pPr>
+            <a:r>
+              <a:rPr sz="1300" b="0">
                 <a:solidFill>
                   <a:srgbClr val="475569"/>
                 </a:solidFill>
@@ -4310,7 +4358,7 @@
               <a:t>•  Frozen MEGNet 16-D embeddings give R</a:t>
             </a:r>
             <a:r>
-              <a:rPr sz="1400" b="0" baseline="30000">
+              <a:rPr sz="1300" b="0" baseline="30000">
                 <a:solidFill>
                   <a:srgbClr val="475569"/>
                 </a:solidFill>
@@ -4319,7 +4367,7 @@
               <a:t>2</a:t>
             </a:r>
             <a:r>
-              <a:rPr sz="1400" b="0">
+              <a:rPr sz="1300" b="0">
                 <a:solidFill>
                   <a:srgbClr val="475569"/>
                 </a:solidFill>
@@ -4338,7 +4386,7 @@
         </p:nvSpPr>
         <p:spPr>
           <a:xfrm>
-            <a:off x="6858000" y="4617720"/>
+            <a:off x="6858000" y="4663440"/>
             <a:ext cx="1828800" cy="274320"/>
           </a:xfrm>
           <a:prstGeom prst="rect">
@@ -4461,8 +4509,8 @@
         </p:nvSpPr>
         <p:spPr>
           <a:xfrm>
-            <a:off x="457200" y="731520"/>
-            <a:ext cx="8229600" cy="548640"/>
+            <a:off x="457200" y="640080"/>
+            <a:ext cx="8229600" cy="640080"/>
           </a:xfrm>
           <a:prstGeom prst="rect">
             <a:avLst/>
@@ -4477,7 +4525,7 @@
           <a:p>
             <a:pPr algn="l"/>
             <a:r>
-              <a:rPr sz="2800" b="1">
+              <a:rPr sz="2200" b="1">
                 <a:solidFill>
                   <a:srgbClr val="1C2533"/>
                 </a:solidFill>
@@ -4496,8 +4544,8 @@
         </p:nvSpPr>
         <p:spPr>
           <a:xfrm>
-            <a:off x="457200" y="1280160"/>
-            <a:ext cx="8229600" cy="365760"/>
+            <a:off x="457200" y="1325880"/>
+            <a:ext cx="8229600" cy="411480"/>
           </a:xfrm>
           <a:prstGeom prst="rect">
             <a:avLst/>
@@ -4512,7 +4560,7 @@
           <a:p>
             <a:pPr algn="l"/>
             <a:r>
-              <a:rPr sz="1600" b="0">
+              <a:rPr sz="1500" b="0">
                 <a:solidFill>
                   <a:srgbClr val="475569"/>
                 </a:solidFill>
@@ -4532,22 +4580,26 @@
         <p:spPr>
           <a:xfrm>
             <a:off x="457200" y="1828800"/>
-            <a:ext cx="8229600" cy="2926080"/>
-          </a:xfrm>
-          <a:prstGeom prst="rect">
-            <a:avLst/>
-          </a:prstGeom>
-          <a:noFill/>
-        </p:spPr>
-        <p:txBody>
-          <a:bodyPr wrap="square">
-            <a:spAutoFit/>
-          </a:bodyPr>
-          <a:lstStyle/>
-          <a:p>
-            <a:pPr algn="l"/>
-            <a:r>
-              <a:rPr sz="1400" b="0">
+            <a:ext cx="8229600" cy="2743200"/>
+          </a:xfrm>
+          <a:prstGeom prst="rect">
+            <a:avLst/>
+          </a:prstGeom>
+          <a:noFill/>
+        </p:spPr>
+        <p:txBody>
+          <a:bodyPr wrap="square">
+            <a:spAutoFit/>
+          </a:bodyPr>
+          <a:lstStyle/>
+          <a:p>
+            <a:pPr algn="l">
+              <a:spcAft>
+                <a:spcPts val="200"/>
+              </a:spcAft>
+            </a:pPr>
+            <a:r>
+              <a:rPr sz="1300" b="0">
                 <a:solidFill>
                   <a:srgbClr val="475569"/>
                 </a:solidFill>
@@ -4556,7 +4608,7 @@
               <a:t>•  y = f</a:t>
             </a:r>
             <a:r>
-              <a:rPr sz="1400" b="0" baseline="-25000">
+              <a:rPr sz="1300" b="0" baseline="-25000">
                 <a:solidFill>
                   <a:srgbClr val="475569"/>
                 </a:solidFill>
@@ -4565,7 +4617,7 @@
               <a:t>gap</a:t>
             </a:r>
             <a:r>
-              <a:rPr sz="1400" b="0">
+              <a:rPr sz="1300" b="0">
                 <a:solidFill>
                   <a:srgbClr val="475569"/>
                 </a:solidFill>
@@ -4574,7 +4626,7 @@
               <a:t>(E</a:t>
             </a:r>
             <a:r>
-              <a:rPr sz="1400" b="0" baseline="-25000">
+              <a:rPr sz="1300" b="0" baseline="-25000">
                 <a:solidFill>
                   <a:srgbClr val="475569"/>
                 </a:solidFill>
@@ -4583,7 +4635,7 @@
               <a:t>g</a:t>
             </a:r>
             <a:r>
-              <a:rPr sz="1400" b="0">
+              <a:rPr sz="1300" b="0">
                 <a:solidFill>
                   <a:srgbClr val="475569"/>
                 </a:solidFill>
@@ -4592,7 +4644,7 @@
               <a:t>) · 1 / (1 + m</a:t>
             </a:r>
             <a:r>
-              <a:rPr sz="1400" b="0" baseline="-25000">
+              <a:rPr sz="1300" b="0" baseline="-25000">
                 <a:solidFill>
                   <a:srgbClr val="475569"/>
                 </a:solidFill>
@@ -4601,7 +4653,7 @@
               <a:t>avg</a:t>
             </a:r>
             <a:r>
-              <a:rPr sz="1400" b="0">
+              <a:rPr sz="1300" b="0">
                 <a:solidFill>
                   <a:srgbClr val="475569"/>
                 </a:solidFill>
@@ -4610,7 +4662,7 @@
               <a:t>) · tanh(ε / 10) · 1 / (1 + E</a:t>
             </a:r>
             <a:r>
-              <a:rPr sz="1400" b="0" baseline="-25000">
+              <a:rPr sz="1300" b="0" baseline="-25000">
                 <a:solidFill>
                   <a:srgbClr val="475569"/>
                 </a:solidFill>
@@ -4619,7 +4671,7 @@
               <a:t>b</a:t>
             </a:r>
             <a:r>
-              <a:rPr sz="1400" b="0">
+              <a:rPr sz="1300" b="0">
                 <a:solidFill>
                   <a:srgbClr val="475569"/>
                 </a:solidFill>
@@ -4629,9 +4681,13 @@
             </a:r>
           </a:p>
           <a:p>
-            <a:pPr algn="l"/>
-            <a:r>
-              <a:rPr sz="1400" b="0">
+            <a:pPr algn="l">
+              <a:spcAft>
+                <a:spcPts val="200"/>
+              </a:spcAft>
+            </a:pPr>
+            <a:r>
+              <a:rPr sz="1300" b="0">
                 <a:solidFill>
                   <a:srgbClr val="475569"/>
                 </a:solidFill>
@@ -4640,7 +4696,7 @@
               <a:t>•  f</a:t>
             </a:r>
             <a:r>
-              <a:rPr sz="1400" b="0" baseline="-25000">
+              <a:rPr sz="1300" b="0" baseline="-25000">
                 <a:solidFill>
                   <a:srgbClr val="475569"/>
                 </a:solidFill>
@@ -4649,7 +4705,7 @@
               <a:t>gap</a:t>
             </a:r>
             <a:r>
-              <a:rPr sz="1400" b="0">
+              <a:rPr sz="1300" b="0">
                 <a:solidFill>
                   <a:srgbClr val="475569"/>
                 </a:solidFill>
@@ -4658,7 +4714,7 @@
               <a:t>(E</a:t>
             </a:r>
             <a:r>
-              <a:rPr sz="1400" b="0" baseline="-25000">
+              <a:rPr sz="1300" b="0" baseline="-25000">
                 <a:solidFill>
                   <a:srgbClr val="475569"/>
                 </a:solidFill>
@@ -4667,7 +4723,7 @@
               <a:t>g</a:t>
             </a:r>
             <a:r>
-              <a:rPr sz="1400" b="0">
+              <a:rPr sz="1300" b="0">
                 <a:solidFill>
                   <a:srgbClr val="475569"/>
                 </a:solidFill>
@@ -4677,9 +4733,13 @@
             </a:r>
           </a:p>
           <a:p>
-            <a:pPr algn="l"/>
-            <a:r>
-              <a:rPr sz="1400" b="0">
+            <a:pPr algn="l">
+              <a:spcAft>
+                <a:spcPts val="200"/>
+              </a:spcAft>
+            </a:pPr>
+            <a:r>
+              <a:rPr sz="1300" b="0">
                 <a:solidFill>
                   <a:srgbClr val="475569"/>
                 </a:solidFill>
@@ -4688,7 +4748,7 @@
               <a:t>•  1 / (1 + m</a:t>
             </a:r>
             <a:r>
-              <a:rPr sz="1400" b="0" baseline="-25000">
+              <a:rPr sz="1300" b="0" baseline="-25000">
                 <a:solidFill>
                   <a:srgbClr val="475569"/>
                 </a:solidFill>
@@ -4697,7 +4757,7 @@
               <a:t>avg</a:t>
             </a:r>
             <a:r>
-              <a:rPr sz="1400" b="0">
+              <a:rPr sz="1300" b="0">
                 <a:solidFill>
                   <a:srgbClr val="475569"/>
                 </a:solidFill>
@@ -4707,9 +4767,13 @@
             </a:r>
           </a:p>
           <a:p>
-            <a:pPr algn="l"/>
-            <a:r>
-              <a:rPr sz="1400" b="0">
+            <a:pPr algn="l">
+              <a:spcAft>
+                <a:spcPts val="200"/>
+              </a:spcAft>
+            </a:pPr>
+            <a:r>
+              <a:rPr sz="1300" b="0">
                 <a:solidFill>
                   <a:srgbClr val="475569"/>
                 </a:solidFill>
@@ -4719,9 +4783,13 @@
             </a:r>
           </a:p>
           <a:p>
-            <a:pPr algn="l"/>
-            <a:r>
-              <a:rPr sz="1400" b="0">
+            <a:pPr algn="l">
+              <a:spcAft>
+                <a:spcPts val="200"/>
+              </a:spcAft>
+            </a:pPr>
+            <a:r>
+              <a:rPr sz="1300" b="0">
                 <a:solidFill>
                   <a:srgbClr val="475569"/>
                 </a:solidFill>
@@ -4730,7 +4798,7 @@
               <a:t>•  1 / (1 + E</a:t>
             </a:r>
             <a:r>
-              <a:rPr sz="1400" b="0" baseline="-25000">
+              <a:rPr sz="1300" b="0" baseline="-25000">
                 <a:solidFill>
                   <a:srgbClr val="475569"/>
                 </a:solidFill>
@@ -4739,7 +4807,7 @@
               <a:t>b</a:t>
             </a:r>
             <a:r>
-              <a:rPr sz="1400" b="0">
+              <a:rPr sz="1300" b="0">
                 <a:solidFill>
                   <a:srgbClr val="475569"/>
                 </a:solidFill>
@@ -4748,7 +4816,7 @@
               <a:t> / 0.1): favours Wannier–Mott regimes (E</a:t>
             </a:r>
             <a:r>
-              <a:rPr sz="1400" b="0" baseline="-25000">
+              <a:rPr sz="1300" b="0" baseline="-25000">
                 <a:solidFill>
                   <a:srgbClr val="475569"/>
                 </a:solidFill>
@@ -4757,7 +4825,7 @@
               <a:t>b</a:t>
             </a:r>
             <a:r>
-              <a:rPr sz="1400" b="0">
+              <a:rPr sz="1300" b="0">
                 <a:solidFill>
                   <a:srgbClr val="475569"/>
                 </a:solidFill>
@@ -4767,9 +4835,13 @@
             </a:r>
           </a:p>
           <a:p>
-            <a:pPr algn="l"/>
-            <a:r>
-              <a:rPr sz="1400" b="0">
+            <a:pPr algn="l">
+              <a:spcAft>
+                <a:spcPts val="200"/>
+              </a:spcAft>
+            </a:pPr>
+            <a:r>
+              <a:rPr sz="1300" b="0">
                 <a:solidFill>
                   <a:srgbClr val="475569"/>
                 </a:solidFill>
@@ -4788,7 +4860,7 @@
         </p:nvSpPr>
         <p:spPr>
           <a:xfrm>
-            <a:off x="6858000" y="4617720"/>
+            <a:off x="6858000" y="4663440"/>
             <a:ext cx="1828800" cy="274320"/>
           </a:xfrm>
           <a:prstGeom prst="rect">
@@ -4911,8 +4983,8 @@
         </p:nvSpPr>
         <p:spPr>
           <a:xfrm>
-            <a:off x="457200" y="731520"/>
-            <a:ext cx="8229600" cy="548640"/>
+            <a:off x="457200" y="640080"/>
+            <a:ext cx="8229600" cy="640080"/>
           </a:xfrm>
           <a:prstGeom prst="rect">
             <a:avLst/>
@@ -4927,7 +4999,7 @@
           <a:p>
             <a:pPr algn="l"/>
             <a:r>
-              <a:rPr sz="2800" b="1">
+              <a:rPr sz="2200" b="1">
                 <a:solidFill>
                   <a:srgbClr val="1C2533"/>
                 </a:solidFill>
@@ -4946,8 +5018,8 @@
         </p:nvSpPr>
         <p:spPr>
           <a:xfrm>
-            <a:off x="457200" y="1280160"/>
-            <a:ext cx="8229600" cy="365760"/>
+            <a:off x="457200" y="1325880"/>
+            <a:ext cx="8229600" cy="411480"/>
           </a:xfrm>
           <a:prstGeom prst="rect">
             <a:avLst/>
@@ -4962,7 +5034,7 @@
           <a:p>
             <a:pPr algn="l"/>
             <a:r>
-              <a:rPr sz="1600" b="0">
+              <a:rPr sz="1500" b="0">
                 <a:solidFill>
                   <a:srgbClr val="475569"/>
                 </a:solidFill>
@@ -4982,22 +5054,26 @@
         <p:spPr>
           <a:xfrm>
             <a:off x="457200" y="1828800"/>
-            <a:ext cx="8229600" cy="2926080"/>
-          </a:xfrm>
-          <a:prstGeom prst="rect">
-            <a:avLst/>
-          </a:prstGeom>
-          <a:noFill/>
-        </p:spPr>
-        <p:txBody>
-          <a:bodyPr wrap="square">
-            <a:spAutoFit/>
-          </a:bodyPr>
-          <a:lstStyle/>
-          <a:p>
-            <a:pPr algn="l"/>
-            <a:r>
-              <a:rPr sz="1400" b="0">
+            <a:ext cx="8229600" cy="2743200"/>
+          </a:xfrm>
+          <a:prstGeom prst="rect">
+            <a:avLst/>
+          </a:prstGeom>
+          <a:noFill/>
+        </p:spPr>
+        <p:txBody>
+          <a:bodyPr wrap="square">
+            <a:spAutoFit/>
+          </a:bodyPr>
+          <a:lstStyle/>
+          <a:p>
+            <a:pPr algn="l">
+              <a:spcAft>
+                <a:spcPts val="200"/>
+              </a:spcAft>
+            </a:pPr>
+            <a:r>
+              <a:rPr sz="1300" b="0">
                 <a:solidFill>
                   <a:srgbClr val="475569"/>
                 </a:solidFill>
@@ -5006,7 +5082,7 @@
               <a:t>•  F</a:t>
             </a:r>
             <a:r>
-              <a:rPr sz="1400" b="0" baseline="-25000">
+              <a:rPr sz="1300" b="0" baseline="-25000">
                 <a:solidFill>
                   <a:srgbClr val="475569"/>
                 </a:solidFill>
@@ -5015,7 +5091,7 @@
               <a:t>m</a:t>
             </a:r>
             <a:r>
-              <a:rPr sz="1400" b="0">
+              <a:rPr sz="1300" b="0">
                 <a:solidFill>
                   <a:srgbClr val="475569"/>
                 </a:solidFill>
@@ -5024,7 +5100,7 @@
               <a:t>(x) = F</a:t>
             </a:r>
             <a:r>
-              <a:rPr sz="1400" b="0" baseline="-25000">
+              <a:rPr sz="1300" b="0" baseline="-25000">
                 <a:solidFill>
                   <a:srgbClr val="475569"/>
                 </a:solidFill>
@@ -5033,7 +5109,7 @@
               <a:t>m-1</a:t>
             </a:r>
             <a:r>
-              <a:rPr sz="1400" b="0">
+              <a:rPr sz="1300" b="0">
                 <a:solidFill>
                   <a:srgbClr val="475569"/>
                 </a:solidFill>
@@ -5042,7 +5118,7 @@
               <a:t>(x) + ν · h</a:t>
             </a:r>
             <a:r>
-              <a:rPr sz="1400" b="0" baseline="-25000">
+              <a:rPr sz="1300" b="0" baseline="-25000">
                 <a:solidFill>
                   <a:srgbClr val="475569"/>
                 </a:solidFill>
@@ -5051,7 +5127,7 @@
               <a:t>m</a:t>
             </a:r>
             <a:r>
-              <a:rPr sz="1400" b="0">
+              <a:rPr sz="1300" b="0">
                 <a:solidFill>
                   <a:srgbClr val="475569"/>
                 </a:solidFill>
@@ -5060,7 +5136,7 @@
               <a:t>(x), where h</a:t>
             </a:r>
             <a:r>
-              <a:rPr sz="1400" b="0" baseline="-25000">
+              <a:rPr sz="1300" b="0" baseline="-25000">
                 <a:solidFill>
                   <a:srgbClr val="475569"/>
                 </a:solidFill>
@@ -5069,7 +5145,7 @@
               <a:t>m</a:t>
             </a:r>
             <a:r>
-              <a:rPr sz="1400" b="0">
+              <a:rPr sz="1300" b="0">
                 <a:solidFill>
                   <a:srgbClr val="475569"/>
                 </a:solidFill>
@@ -5078,7 +5154,7 @@
               <a:t> fits the negative gradient of the loss at F</a:t>
             </a:r>
             <a:r>
-              <a:rPr sz="1400" b="0" baseline="-25000">
+              <a:rPr sz="1300" b="0" baseline="-25000">
                 <a:solidFill>
                   <a:srgbClr val="475569"/>
                 </a:solidFill>
@@ -5088,9 +5164,13 @@
             </a:r>
           </a:p>
           <a:p>
-            <a:pPr algn="l"/>
-            <a:r>
-              <a:rPr sz="1400" b="0">
+            <a:pPr algn="l">
+              <a:spcAft>
+                <a:spcPts val="200"/>
+              </a:spcAft>
+            </a:pPr>
+            <a:r>
+              <a:rPr sz="1300" b="0">
                 <a:solidFill>
                   <a:srgbClr val="475569"/>
                 </a:solidFill>
@@ -5100,9 +5180,13 @@
             </a:r>
           </a:p>
           <a:p>
-            <a:pPr algn="l"/>
-            <a:r>
-              <a:rPr sz="1400" b="0">
+            <a:pPr algn="l">
+              <a:spcAft>
+                <a:spcPts val="200"/>
+              </a:spcAft>
+            </a:pPr>
+            <a:r>
+              <a:rPr sz="1300" b="0">
                 <a:solidFill>
                   <a:srgbClr val="475569"/>
                 </a:solidFill>
@@ -5112,9 +5196,13 @@
             </a:r>
           </a:p>
           <a:p>
-            <a:pPr algn="l"/>
-            <a:r>
-              <a:rPr sz="1400" b="0">
+            <a:pPr algn="l">
+              <a:spcAft>
+                <a:spcPts val="200"/>
+              </a:spcAft>
+            </a:pPr>
+            <a:r>
+              <a:rPr sz="1300" b="0">
                 <a:solidFill>
                   <a:srgbClr val="475569"/>
                 </a:solidFill>
@@ -5124,9 +5212,13 @@
             </a:r>
           </a:p>
           <a:p>
-            <a:pPr algn="l"/>
-            <a:r>
-              <a:rPr sz="1400" b="0">
+            <a:pPr algn="l">
+              <a:spcAft>
+                <a:spcPts val="200"/>
+              </a:spcAft>
+            </a:pPr>
+            <a:r>
+              <a:rPr sz="1300" b="0">
                 <a:solidFill>
                   <a:srgbClr val="475569"/>
                 </a:solidFill>
@@ -5135,7 +5227,7 @@
               <a:t>•  Target wrapped in log</a:t>
             </a:r>
             <a:r>
-              <a:rPr sz="1400" b="0" baseline="-25000">
+              <a:rPr sz="1300" b="0" baseline="-25000">
                 <a:solidFill>
                   <a:srgbClr val="475569"/>
                 </a:solidFill>
@@ -5144,7 +5236,7 @@
               <a:t>1</a:t>
             </a:r>
             <a:r>
-              <a:rPr sz="1400" b="0">
+              <a:rPr sz="1300" b="0">
                 <a:solidFill>
                   <a:srgbClr val="475569"/>
                 </a:solidFill>
@@ -5154,9 +5246,13 @@
             </a:r>
           </a:p>
           <a:p>
-            <a:pPr algn="l"/>
-            <a:r>
-              <a:rPr sz="1400" b="0">
+            <a:pPr algn="l">
+              <a:spcAft>
+                <a:spcPts val="200"/>
+              </a:spcAft>
+            </a:pPr>
+            <a:r>
+              <a:rPr sz="1300" b="0">
                 <a:solidFill>
                   <a:srgbClr val="475569"/>
                 </a:solidFill>
@@ -5175,7 +5271,7 @@
         </p:nvSpPr>
         <p:spPr>
           <a:xfrm>
-            <a:off x="6858000" y="4617720"/>
+            <a:off x="6858000" y="4663440"/>
             <a:ext cx="1828800" cy="274320"/>
           </a:xfrm>
           <a:prstGeom prst="rect">
@@ -5298,8 +5394,8 @@
         </p:nvSpPr>
         <p:spPr>
           <a:xfrm>
-            <a:off x="457200" y="731520"/>
-            <a:ext cx="8229600" cy="548640"/>
+            <a:off x="457200" y="640080"/>
+            <a:ext cx="8229600" cy="640080"/>
           </a:xfrm>
           <a:prstGeom prst="rect">
             <a:avLst/>
@@ -5314,7 +5410,7 @@
           <a:p>
             <a:pPr algn="l"/>
             <a:r>
-              <a:rPr sz="2800" b="1">
+              <a:rPr sz="2200" b="1">
                 <a:solidFill>
                   <a:srgbClr val="1C2533"/>
                 </a:solidFill>
@@ -5333,8 +5429,8 @@
         </p:nvSpPr>
         <p:spPr>
           <a:xfrm>
-            <a:off x="457200" y="1280160"/>
-            <a:ext cx="8229600" cy="365760"/>
+            <a:off x="457200" y="1325880"/>
+            <a:ext cx="8229600" cy="411480"/>
           </a:xfrm>
           <a:prstGeom prst="rect">
             <a:avLst/>
@@ -5349,7 +5445,7 @@
           <a:p>
             <a:pPr algn="l"/>
             <a:r>
-              <a:rPr sz="1600" b="0">
+              <a:rPr sz="1500" b="0">
                 <a:solidFill>
                   <a:srgbClr val="475569"/>
                 </a:solidFill>
@@ -5369,22 +5465,26 @@
         <p:spPr>
           <a:xfrm>
             <a:off x="457200" y="1828800"/>
-            <a:ext cx="8229600" cy="2926080"/>
-          </a:xfrm>
-          <a:prstGeom prst="rect">
-            <a:avLst/>
-          </a:prstGeom>
-          <a:noFill/>
-        </p:spPr>
-        <p:txBody>
-          <a:bodyPr wrap="square">
-            <a:spAutoFit/>
-          </a:bodyPr>
-          <a:lstStyle/>
-          <a:p>
-            <a:pPr algn="l"/>
-            <a:r>
-              <a:rPr sz="1400" b="0">
+            <a:ext cx="8229600" cy="2743200"/>
+          </a:xfrm>
+          <a:prstGeom prst="rect">
+            <a:avLst/>
+          </a:prstGeom>
+          <a:noFill/>
+        </p:spPr>
+        <p:txBody>
+          <a:bodyPr wrap="square">
+            <a:spAutoFit/>
+          </a:bodyPr>
+          <a:lstStyle/>
+          <a:p>
+            <a:pPr algn="l">
+              <a:spcAft>
+                <a:spcPts val="200"/>
+              </a:spcAft>
+            </a:pPr>
+            <a:r>
+              <a:rPr sz="1300" b="0">
                 <a:solidFill>
                   <a:srgbClr val="475569"/>
                 </a:solidFill>
@@ -5393,7 +5493,7 @@
               <a:t>•  k(x, x</a:t>
             </a:r>
             <a:r>
-              <a:rPr sz="1400" b="0" baseline="30000">
+              <a:rPr sz="1300" b="0" baseline="30000">
                 <a:solidFill>
                   <a:srgbClr val="475569"/>
                 </a:solidFill>
@@ -5402,7 +5502,7 @@
               <a:t>'</a:t>
             </a:r>
             <a:r>
-              <a:rPr sz="1400" b="0">
+              <a:rPr sz="1300" b="0">
                 <a:solidFill>
                   <a:srgbClr val="475569"/>
                 </a:solidFill>
@@ -5411,7 +5511,7 @@
               <a:t>) = σ</a:t>
             </a:r>
             <a:r>
-              <a:rPr sz="1400" b="0" baseline="-25000">
+              <a:rPr sz="1300" b="0" baseline="-25000">
                 <a:solidFill>
                   <a:srgbClr val="475569"/>
                 </a:solidFill>
@@ -5420,7 +5520,7 @@
               <a:t>f</a:t>
             </a:r>
             <a:r>
-              <a:rPr sz="1400" b="0" baseline="30000">
+              <a:rPr sz="1300" b="0" baseline="30000">
                 <a:solidFill>
                   <a:srgbClr val="475569"/>
                 </a:solidFill>
@@ -5429,7 +5529,7 @@
               <a:t>2</a:t>
             </a:r>
             <a:r>
-              <a:rPr sz="1400" b="0">
+              <a:rPr sz="1300" b="0">
                 <a:solidFill>
                   <a:srgbClr val="475569"/>
                 </a:solidFill>
@@ -5438,7 +5538,7 @@
               <a:t> (1 + √5 r + (5/3) r</a:t>
             </a:r>
             <a:r>
-              <a:rPr sz="1400" b="0" baseline="30000">
+              <a:rPr sz="1300" b="0" baseline="30000">
                 <a:solidFill>
                   <a:srgbClr val="475569"/>
                 </a:solidFill>
@@ -5447,7 +5547,7 @@
               <a:t>2</a:t>
             </a:r>
             <a:r>
-              <a:rPr sz="1400" b="0">
+              <a:rPr sz="1300" b="0">
                 <a:solidFill>
                   <a:srgbClr val="475569"/>
                 </a:solidFill>
@@ -5456,7 +5556,7 @@
               <a:t>) exp(−√5 r) + σ</a:t>
             </a:r>
             <a:r>
-              <a:rPr sz="1400" b="0" baseline="-25000">
+              <a:rPr sz="1300" b="0" baseline="-25000">
                 <a:solidFill>
                   <a:srgbClr val="475569"/>
                 </a:solidFill>
@@ -5465,7 +5565,7 @@
               <a:t>n</a:t>
             </a:r>
             <a:r>
-              <a:rPr sz="1400" b="0" baseline="30000">
+              <a:rPr sz="1300" b="0" baseline="30000">
                 <a:solidFill>
                   <a:srgbClr val="475569"/>
                 </a:solidFill>
@@ -5474,7 +5574,7 @@
               <a:t>2</a:t>
             </a:r>
             <a:r>
-              <a:rPr sz="1400" b="0">
+              <a:rPr sz="1300" b="0">
                 <a:solidFill>
                   <a:srgbClr val="475569"/>
                 </a:solidFill>
@@ -5483,7 +5583,7 @@
               <a:t> δ(x − x</a:t>
             </a:r>
             <a:r>
-              <a:rPr sz="1400" b="0" baseline="30000">
+              <a:rPr sz="1300" b="0" baseline="30000">
                 <a:solidFill>
                   <a:srgbClr val="475569"/>
                 </a:solidFill>
@@ -5492,7 +5592,7 @@
               <a:t>'</a:t>
             </a:r>
             <a:r>
-              <a:rPr sz="1400" b="0">
+              <a:rPr sz="1300" b="0">
                 <a:solidFill>
                   <a:srgbClr val="475569"/>
                 </a:solidFill>
@@ -5502,9 +5602,13 @@
             </a:r>
           </a:p>
           <a:p>
-            <a:pPr algn="l"/>
-            <a:r>
-              <a:rPr sz="1400" b="0">
+            <a:pPr algn="l">
+              <a:spcAft>
+                <a:spcPts val="200"/>
+              </a:spcAft>
+            </a:pPr>
+            <a:r>
+              <a:rPr sz="1300" b="0">
                 <a:solidFill>
                   <a:srgbClr val="475569"/>
                 </a:solidFill>
@@ -5513,7 +5617,7 @@
               <a:t>•  r = ‖x − x</a:t>
             </a:r>
             <a:r>
-              <a:rPr sz="1400" b="0" baseline="30000">
+              <a:rPr sz="1300" b="0" baseline="30000">
                 <a:solidFill>
                   <a:srgbClr val="475569"/>
                 </a:solidFill>
@@ -5522,7 +5626,7 @@
               <a:t>'</a:t>
             </a:r>
             <a:r>
-              <a:rPr sz="1400" b="0">
+              <a:rPr sz="1300" b="0">
                 <a:solidFill>
                   <a:srgbClr val="475569"/>
                 </a:solidFill>
@@ -5532,9 +5636,13 @@
             </a:r>
           </a:p>
           <a:p>
-            <a:pPr algn="l"/>
-            <a:r>
-              <a:rPr sz="1400" b="0">
+            <a:pPr algn="l">
+              <a:spcAft>
+                <a:spcPts val="200"/>
+              </a:spcAft>
+            </a:pPr>
+            <a:r>
+              <a:rPr sz="1300" b="0">
                 <a:solidFill>
                   <a:srgbClr val="475569"/>
                 </a:solidFill>
@@ -5543,7 +5651,7 @@
               <a:t>•  White-noise variance σ</a:t>
             </a:r>
             <a:r>
-              <a:rPr sz="1400" b="0" baseline="-25000">
+              <a:rPr sz="1300" b="0" baseline="-25000">
                 <a:solidFill>
                   <a:srgbClr val="475569"/>
                 </a:solidFill>
@@ -5552,7 +5660,7 @@
               <a:t>n</a:t>
             </a:r>
             <a:r>
-              <a:rPr sz="1400" b="0" baseline="30000">
+              <a:rPr sz="1300" b="0" baseline="30000">
                 <a:solidFill>
                   <a:srgbClr val="475569"/>
                 </a:solidFill>
@@ -5561,7 +5669,7 @@
               <a:t>2</a:t>
             </a:r>
             <a:r>
-              <a:rPr sz="1400" b="0">
+              <a:rPr sz="1300" b="0">
                 <a:solidFill>
                   <a:srgbClr val="475569"/>
                 </a:solidFill>
@@ -5571,9 +5679,13 @@
             </a:r>
           </a:p>
           <a:p>
-            <a:pPr algn="l"/>
-            <a:r>
-              <a:rPr sz="1400" b="0">
+            <a:pPr algn="l">
+              <a:spcAft>
+                <a:spcPts val="200"/>
+              </a:spcAft>
+            </a:pPr>
+            <a:r>
+              <a:rPr sz="1300" b="0">
                 <a:solidFill>
                   <a:srgbClr val="475569"/>
                 </a:solidFill>
@@ -5583,9 +5695,13 @@
             </a:r>
           </a:p>
           <a:p>
-            <a:pPr algn="l"/>
-            <a:r>
-              <a:rPr sz="1400" b="0">
+            <a:pPr algn="l">
+              <a:spcAft>
+                <a:spcPts val="200"/>
+              </a:spcAft>
+            </a:pPr>
+            <a:r>
+              <a:rPr sz="1300" b="0">
                 <a:solidFill>
                   <a:srgbClr val="475569"/>
                 </a:solidFill>
@@ -5594,7 +5710,7 @@
               <a:t>•  Stack mean: μ(x) = w</a:t>
             </a:r>
             <a:r>
-              <a:rPr sz="1400" b="0" baseline="-25000">
+              <a:rPr sz="1300" b="0" baseline="-25000">
                 <a:solidFill>
                   <a:srgbClr val="475569"/>
                 </a:solidFill>
@@ -5603,7 +5719,7 @@
               <a:t>GP</a:t>
             </a:r>
             <a:r>
-              <a:rPr sz="1400" b="0">
+              <a:rPr sz="1300" b="0">
                 <a:solidFill>
                   <a:srgbClr val="475569"/>
                 </a:solidFill>
@@ -5612,7 +5728,7 @@
               <a:t> μ</a:t>
             </a:r>
             <a:r>
-              <a:rPr sz="1400" b="0" baseline="-25000">
+              <a:rPr sz="1300" b="0" baseline="-25000">
                 <a:solidFill>
                   <a:srgbClr val="475569"/>
                 </a:solidFill>
@@ -5621,7 +5737,7 @@
               <a:t>GPR</a:t>
             </a:r>
             <a:r>
-              <a:rPr sz="1400" b="0">
+              <a:rPr sz="1300" b="0">
                 <a:solidFill>
                   <a:srgbClr val="475569"/>
                 </a:solidFill>
@@ -5630,7 +5746,7 @@
               <a:t> + w</a:t>
             </a:r>
             <a:r>
-              <a:rPr sz="1400" b="0" baseline="-25000">
+              <a:rPr sz="1300" b="0" baseline="-25000">
                 <a:solidFill>
                   <a:srgbClr val="475569"/>
                 </a:solidFill>
@@ -5639,7 +5755,7 @@
               <a:t>RF</a:t>
             </a:r>
             <a:r>
-              <a:rPr sz="1400" b="0">
+              <a:rPr sz="1300" b="0">
                 <a:solidFill>
                   <a:srgbClr val="475569"/>
                 </a:solidFill>
@@ -5648,7 +5764,7 @@
               <a:t> μ</a:t>
             </a:r>
             <a:r>
-              <a:rPr sz="1400" b="0" baseline="-25000">
+              <a:rPr sz="1300" b="0" baseline="-25000">
                 <a:solidFill>
                   <a:srgbClr val="475569"/>
                 </a:solidFill>
@@ -5657,7 +5773,7 @@
               <a:t>RF</a:t>
             </a:r>
             <a:r>
-              <a:rPr sz="1400" b="0">
+              <a:rPr sz="1300" b="0">
                 <a:solidFill>
                   <a:srgbClr val="475569"/>
                 </a:solidFill>
@@ -5666,7 +5782,7 @@
               <a:t> · variance: σ</a:t>
             </a:r>
             <a:r>
-              <a:rPr sz="1400" b="0" baseline="30000">
+              <a:rPr sz="1300" b="0" baseline="30000">
                 <a:solidFill>
                   <a:srgbClr val="475569"/>
                 </a:solidFill>
@@ -5675,7 +5791,7 @@
               <a:t>2</a:t>
             </a:r>
             <a:r>
-              <a:rPr sz="1400" b="0">
+              <a:rPr sz="1300" b="0">
                 <a:solidFill>
                   <a:srgbClr val="475569"/>
                 </a:solidFill>
@@ -5684,7 +5800,7 @@
               <a:t>(x) = w</a:t>
             </a:r>
             <a:r>
-              <a:rPr sz="1400" b="0" baseline="-25000">
+              <a:rPr sz="1300" b="0" baseline="-25000">
                 <a:solidFill>
                   <a:srgbClr val="475569"/>
                 </a:solidFill>
@@ -5693,7 +5809,7 @@
               <a:t>GP</a:t>
             </a:r>
             <a:r>
-              <a:rPr sz="1400" b="0" baseline="30000">
+              <a:rPr sz="1300" b="0" baseline="30000">
                 <a:solidFill>
                   <a:srgbClr val="475569"/>
                 </a:solidFill>
@@ -5702,7 +5818,7 @@
               <a:t>2</a:t>
             </a:r>
             <a:r>
-              <a:rPr sz="1400" b="0">
+              <a:rPr sz="1300" b="0">
                 <a:solidFill>
                   <a:srgbClr val="475569"/>
                 </a:solidFill>
@@ -5711,7 +5827,7 @@
               <a:t> σ</a:t>
             </a:r>
             <a:r>
-              <a:rPr sz="1400" b="0" baseline="-25000">
+              <a:rPr sz="1300" b="0" baseline="-25000">
                 <a:solidFill>
                   <a:srgbClr val="475569"/>
                 </a:solidFill>
@@ -5720,7 +5836,7 @@
               <a:t>GPR</a:t>
             </a:r>
             <a:r>
-              <a:rPr sz="1400" b="0" baseline="30000">
+              <a:rPr sz="1300" b="0" baseline="30000">
                 <a:solidFill>
                   <a:srgbClr val="475569"/>
                 </a:solidFill>
@@ -5729,7 +5845,7 @@
               <a:t>2</a:t>
             </a:r>
             <a:r>
-              <a:rPr sz="1400" b="0">
+              <a:rPr sz="1300" b="0">
                 <a:solidFill>
                   <a:srgbClr val="475569"/>
                 </a:solidFill>
@@ -5738,7 +5854,7 @@
               <a:t> + w</a:t>
             </a:r>
             <a:r>
-              <a:rPr sz="1400" b="0" baseline="-25000">
+              <a:rPr sz="1300" b="0" baseline="-25000">
                 <a:solidFill>
                   <a:srgbClr val="475569"/>
                 </a:solidFill>
@@ -5747,7 +5863,7 @@
               <a:t>RF</a:t>
             </a:r>
             <a:r>
-              <a:rPr sz="1400" b="0" baseline="30000">
+              <a:rPr sz="1300" b="0" baseline="30000">
                 <a:solidFill>
                   <a:srgbClr val="475569"/>
                 </a:solidFill>
@@ -5756,7 +5872,7 @@
               <a:t>2</a:t>
             </a:r>
             <a:r>
-              <a:rPr sz="1400" b="0">
+              <a:rPr sz="1300" b="0">
                 <a:solidFill>
                   <a:srgbClr val="475569"/>
                 </a:solidFill>
@@ -5765,7 +5881,7 @@
               <a:t> σ</a:t>
             </a:r>
             <a:r>
-              <a:rPr sz="1400" b="0" baseline="-25000">
+              <a:rPr sz="1300" b="0" baseline="-25000">
                 <a:solidFill>
                   <a:srgbClr val="475569"/>
                 </a:solidFill>
@@ -5774,7 +5890,7 @@
               <a:t>RF</a:t>
             </a:r>
             <a:r>
-              <a:rPr sz="1400" b="0" baseline="30000">
+              <a:rPr sz="1300" b="0" baseline="30000">
                 <a:solidFill>
                   <a:srgbClr val="475569"/>
                 </a:solidFill>
@@ -5784,9 +5900,13 @@
             </a:r>
           </a:p>
           <a:p>
-            <a:pPr algn="l"/>
-            <a:r>
-              <a:rPr sz="1400" b="0">
+            <a:pPr algn="l">
+              <a:spcAft>
+                <a:spcPts val="200"/>
+              </a:spcAft>
+            </a:pPr>
+            <a:r>
+              <a:rPr sz="1300" b="0">
                 <a:solidFill>
                   <a:srgbClr val="475569"/>
                 </a:solidFill>
@@ -5805,7 +5925,7 @@
         </p:nvSpPr>
         <p:spPr>
           <a:xfrm>
-            <a:off x="6858000" y="4617720"/>
+            <a:off x="6858000" y="4663440"/>
             <a:ext cx="1828800" cy="274320"/>
           </a:xfrm>
           <a:prstGeom prst="rect">
@@ -5928,8 +6048,8 @@
         </p:nvSpPr>
         <p:spPr>
           <a:xfrm>
-            <a:off x="457200" y="731520"/>
-            <a:ext cx="8229600" cy="548640"/>
+            <a:off x="457200" y="640080"/>
+            <a:ext cx="8229600" cy="640080"/>
           </a:xfrm>
           <a:prstGeom prst="rect">
             <a:avLst/>
@@ -5944,7 +6064,7 @@
           <a:p>
             <a:pPr algn="l"/>
             <a:r>
-              <a:rPr sz="2800" b="1">
+              <a:rPr sz="2200" b="1">
                 <a:solidFill>
                   <a:srgbClr val="1C2533"/>
                 </a:solidFill>
@@ -5963,8 +6083,8 @@
         </p:nvSpPr>
         <p:spPr>
           <a:xfrm>
-            <a:off x="457200" y="1280160"/>
-            <a:ext cx="8229600" cy="365760"/>
+            <a:off x="457200" y="1325880"/>
+            <a:ext cx="8229600" cy="411480"/>
           </a:xfrm>
           <a:prstGeom prst="rect">
             <a:avLst/>
@@ -5979,7 +6099,7 @@
           <a:p>
             <a:pPr algn="l"/>
             <a:r>
-              <a:rPr sz="1600" b="0">
+              <a:rPr sz="1500" b="0">
                 <a:solidFill>
                   <a:srgbClr val="475569"/>
                 </a:solidFill>
@@ -5999,22 +6119,26 @@
         <p:spPr>
           <a:xfrm>
             <a:off x="457200" y="1828800"/>
-            <a:ext cx="8229600" cy="2926080"/>
-          </a:xfrm>
-          <a:prstGeom prst="rect">
-            <a:avLst/>
-          </a:prstGeom>
-          <a:noFill/>
-        </p:spPr>
-        <p:txBody>
-          <a:bodyPr wrap="square">
-            <a:spAutoFit/>
-          </a:bodyPr>
-          <a:lstStyle/>
-          <a:p>
-            <a:pPr algn="l"/>
-            <a:r>
-              <a:rPr sz="1400" b="0">
+            <a:ext cx="8229600" cy="2743200"/>
+          </a:xfrm>
+          <a:prstGeom prst="rect">
+            <a:avLst/>
+          </a:prstGeom>
+          <a:noFill/>
+        </p:spPr>
+        <p:txBody>
+          <a:bodyPr wrap="square">
+            <a:spAutoFit/>
+          </a:bodyPr>
+          <a:lstStyle/>
+          <a:p>
+            <a:pPr algn="l">
+              <a:spcAft>
+                <a:spcPts val="200"/>
+              </a:spcAft>
+            </a:pPr>
+            <a:r>
+              <a:rPr sz="1300" b="0">
                 <a:solidFill>
                   <a:srgbClr val="475569"/>
                 </a:solidFill>
@@ -6023,7 +6147,7 @@
               <a:t>•  α</a:t>
             </a:r>
             <a:r>
-              <a:rPr sz="1400" b="0" baseline="-25000">
+              <a:rPr sz="1300" b="0" baseline="-25000">
                 <a:solidFill>
                   <a:srgbClr val="475569"/>
                 </a:solidFill>
@@ -6032,7 +6156,7 @@
               <a:t>UCB</a:t>
             </a:r>
             <a:r>
-              <a:rPr sz="1400" b="0">
+              <a:rPr sz="1300" b="0">
                 <a:solidFill>
                   <a:srgbClr val="475569"/>
                 </a:solidFill>
@@ -6042,9 +6166,13 @@
             </a:r>
           </a:p>
           <a:p>
-            <a:pPr algn="l"/>
-            <a:r>
-              <a:rPr sz="1400" b="0">
+            <a:pPr algn="l">
+              <a:spcAft>
+                <a:spcPts val="200"/>
+              </a:spcAft>
+            </a:pPr>
+            <a:r>
+              <a:rPr sz="1300" b="0">
                 <a:solidFill>
                   <a:srgbClr val="475569"/>
                 </a:solidFill>
@@ -6054,9 +6182,13 @@
             </a:r>
           </a:p>
           <a:p>
-            <a:pPr algn="l"/>
-            <a:r>
-              <a:rPr sz="1400" b="0">
+            <a:pPr algn="l">
+              <a:spcAft>
+                <a:spcPts val="200"/>
+              </a:spcAft>
+            </a:pPr>
+            <a:r>
+              <a:rPr sz="1300" b="0">
                 <a:solidFill>
                   <a:srgbClr val="475569"/>
                 </a:solidFill>
@@ -6066,9 +6198,13 @@
             </a:r>
           </a:p>
           <a:p>
-            <a:pPr algn="l"/>
-            <a:r>
-              <a:rPr sz="1400" b="0">
+            <a:pPr algn="l">
+              <a:spcAft>
+                <a:spcPts val="200"/>
+              </a:spcAft>
+            </a:pPr>
+            <a:r>
+              <a:rPr sz="1300" b="0">
                 <a:solidFill>
                   <a:srgbClr val="475569"/>
                 </a:solidFill>
@@ -6078,9 +6214,13 @@
             </a:r>
           </a:p>
           <a:p>
-            <a:pPr algn="l"/>
-            <a:r>
-              <a:rPr sz="1400" b="0">
+            <a:pPr algn="l">
+              <a:spcAft>
+                <a:spcPts val="200"/>
+              </a:spcAft>
+            </a:pPr>
+            <a:r>
+              <a:rPr sz="1300" b="0">
                 <a:solidFill>
                   <a:srgbClr val="475569"/>
                 </a:solidFill>
@@ -6090,9 +6230,13 @@
             </a:r>
           </a:p>
           <a:p>
-            <a:pPr algn="l"/>
-            <a:r>
-              <a:rPr sz="1400" b="0">
+            <a:pPr algn="l">
+              <a:spcAft>
+                <a:spcPts val="200"/>
+              </a:spcAft>
+            </a:pPr>
+            <a:r>
+              <a:rPr sz="1300" b="0">
                 <a:solidFill>
                   <a:srgbClr val="475569"/>
                 </a:solidFill>
@@ -6111,7 +6255,7 @@
         </p:nvSpPr>
         <p:spPr>
           <a:xfrm>
-            <a:off x="6858000" y="4617720"/>
+            <a:off x="6858000" y="4663440"/>
             <a:ext cx="1828800" cy="274320"/>
           </a:xfrm>
           <a:prstGeom prst="rect">
@@ -6234,8 +6378,8 @@
         </p:nvSpPr>
         <p:spPr>
           <a:xfrm>
-            <a:off x="457200" y="731520"/>
-            <a:ext cx="8229600" cy="548640"/>
+            <a:off x="457200" y="640080"/>
+            <a:ext cx="8229600" cy="640080"/>
           </a:xfrm>
           <a:prstGeom prst="rect">
             <a:avLst/>
@@ -6250,7 +6394,7 @@
           <a:p>
             <a:pPr algn="l"/>
             <a:r>
-              <a:rPr sz="2800" b="1">
+              <a:rPr sz="2200" b="1">
                 <a:solidFill>
                   <a:srgbClr val="1C2533"/>
                 </a:solidFill>
@@ -6269,8 +6413,8 @@
         </p:nvSpPr>
         <p:spPr>
           <a:xfrm>
-            <a:off x="457200" y="1280160"/>
-            <a:ext cx="8229600" cy="365760"/>
+            <a:off x="457200" y="1325880"/>
+            <a:ext cx="8229600" cy="411480"/>
           </a:xfrm>
           <a:prstGeom prst="rect">
             <a:avLst/>
@@ -6285,7 +6429,7 @@
           <a:p>
             <a:pPr algn="l"/>
             <a:r>
-              <a:rPr sz="1600" b="0">
+              <a:rPr sz="1500" b="0">
                 <a:solidFill>
                   <a:srgbClr val="475569"/>
                 </a:solidFill>
@@ -6312,7 +6456,7 @@
         </p:blipFill>
         <p:spPr>
           <a:xfrm>
-            <a:off x="457200" y="2491889"/>
+            <a:off x="457200" y="2400449"/>
             <a:ext cx="4937760" cy="1599901"/>
           </a:xfrm>
           <a:prstGeom prst="rect">
@@ -6329,22 +6473,26 @@
         <p:spPr>
           <a:xfrm>
             <a:off x="5669280" y="1828800"/>
-            <a:ext cx="3017520" cy="2926080"/>
-          </a:xfrm>
-          <a:prstGeom prst="rect">
-            <a:avLst/>
-          </a:prstGeom>
-          <a:noFill/>
-        </p:spPr>
-        <p:txBody>
-          <a:bodyPr wrap="square">
-            <a:spAutoFit/>
-          </a:bodyPr>
-          <a:lstStyle/>
-          <a:p>
-            <a:pPr algn="l"/>
-            <a:r>
-              <a:rPr sz="1400" b="0">
+            <a:ext cx="3017520" cy="2743200"/>
+          </a:xfrm>
+          <a:prstGeom prst="rect">
+            <a:avLst/>
+          </a:prstGeom>
+          <a:noFill/>
+        </p:spPr>
+        <p:txBody>
+          <a:bodyPr wrap="square">
+            <a:spAutoFit/>
+          </a:bodyPr>
+          <a:lstStyle/>
+          <a:p>
+            <a:pPr algn="l">
+              <a:spcAft>
+                <a:spcPts val="200"/>
+              </a:spcAft>
+            </a:pPr>
+            <a:r>
+              <a:rPr sz="1300" b="0">
                 <a:solidFill>
                   <a:srgbClr val="475569"/>
                 </a:solidFill>
@@ -6353,7 +6501,7 @@
               <a:t>•  HistGBR achieves R</a:t>
             </a:r>
             <a:r>
-              <a:rPr sz="1400" b="0" baseline="30000">
+              <a:rPr sz="1300" b="0" baseline="30000">
                 <a:solidFill>
                   <a:srgbClr val="475569"/>
                 </a:solidFill>
@@ -6362,7 +6510,7 @@
               <a:t>2</a:t>
             </a:r>
             <a:r>
-              <a:rPr sz="1400" b="0">
+              <a:rPr sz="1300" b="0">
                 <a:solidFill>
                   <a:srgbClr val="475569"/>
                 </a:solidFill>
@@ -6372,9 +6520,13 @@
             </a:r>
           </a:p>
           <a:p>
-            <a:pPr algn="l"/>
-            <a:r>
-              <a:rPr sz="1400" b="0">
+            <a:pPr algn="l">
+              <a:spcAft>
+                <a:spcPts val="200"/>
+              </a:spcAft>
+            </a:pPr>
+            <a:r>
+              <a:rPr sz="1300" b="0">
                 <a:solidFill>
                   <a:srgbClr val="475569"/>
                 </a:solidFill>
@@ -6383,7 +6535,7 @@
               <a:t>•  Improves over the prior GPR / GB / ExtraTrees baseline by +50 % in R</a:t>
             </a:r>
             <a:r>
-              <a:rPr sz="1400" b="0" baseline="30000">
+              <a:rPr sz="1300" b="0" baseline="30000">
                 <a:solidFill>
                   <a:srgbClr val="475569"/>
                 </a:solidFill>
@@ -6392,7 +6544,7 @@
               <a:t>2</a:t>
             </a:r>
             <a:r>
-              <a:rPr sz="1400" b="0">
+              <a:rPr sz="1300" b="0">
                 <a:solidFill>
                   <a:srgbClr val="475569"/>
                 </a:solidFill>
@@ -6402,9 +6554,13 @@
             </a:r>
           </a:p>
           <a:p>
-            <a:pPr algn="l"/>
-            <a:r>
-              <a:rPr sz="1400" b="0">
+            <a:pPr algn="l">
+              <a:spcAft>
+                <a:spcPts val="200"/>
+              </a:spcAft>
+            </a:pPr>
+            <a:r>
+              <a:rPr sz="1300" b="0">
                 <a:solidFill>
                   <a:srgbClr val="475569"/>
                 </a:solidFill>
@@ -6414,9 +6570,13 @@
             </a:r>
           </a:p>
           <a:p>
-            <a:pPr algn="l"/>
-            <a:r>
-              <a:rPr sz="1400" b="0">
+            <a:pPr algn="l">
+              <a:spcAft>
+                <a:spcPts val="200"/>
+              </a:spcAft>
+            </a:pPr>
+            <a:r>
+              <a:rPr sz="1300" b="0">
                 <a:solidFill>
                   <a:srgbClr val="475569"/>
                 </a:solidFill>
@@ -6425,7 +6585,7 @@
               <a:t>•  Repeated out-of-fold averaging across seeds yields global R</a:t>
             </a:r>
             <a:r>
-              <a:rPr sz="1400" b="0" baseline="30000">
+              <a:rPr sz="1300" b="0" baseline="30000">
                 <a:solidFill>
                   <a:srgbClr val="475569"/>
                 </a:solidFill>
@@ -6434,7 +6594,7 @@
               <a:t>2</a:t>
             </a:r>
             <a:r>
-              <a:rPr sz="1400" b="0">
+              <a:rPr sz="1300" b="0">
                 <a:solidFill>
                   <a:srgbClr val="475569"/>
                 </a:solidFill>
@@ -6444,9 +6604,13 @@
             </a:r>
           </a:p>
           <a:p>
-            <a:pPr algn="l"/>
-            <a:r>
-              <a:rPr sz="1400" b="0">
+            <a:pPr algn="l">
+              <a:spcAft>
+                <a:spcPts val="200"/>
+              </a:spcAft>
+            </a:pPr>
+            <a:r>
+              <a:rPr sz="1300" b="0">
                 <a:solidFill>
                   <a:srgbClr val="475569"/>
                 </a:solidFill>
@@ -6455,7 +6619,7 @@
               <a:t>•  Prototype-grouped CV gives R</a:t>
             </a:r>
             <a:r>
-              <a:rPr sz="1400" b="0" baseline="30000">
+              <a:rPr sz="1300" b="0" baseline="30000">
                 <a:solidFill>
                   <a:srgbClr val="475569"/>
                 </a:solidFill>
@@ -6464,7 +6628,7 @@
               <a:t>2</a:t>
             </a:r>
             <a:r>
-              <a:rPr sz="1400" b="0">
+              <a:rPr sz="1300" b="0">
                 <a:solidFill>
                   <a:srgbClr val="475569"/>
                 </a:solidFill>
@@ -6474,9 +6638,13 @@
             </a:r>
           </a:p>
           <a:p>
-            <a:pPr algn="l"/>
-            <a:r>
-              <a:rPr sz="1400" b="0">
+            <a:pPr algn="l">
+              <a:spcAft>
+                <a:spcPts val="200"/>
+              </a:spcAft>
+            </a:pPr>
+            <a:r>
+              <a:rPr sz="1300" b="0">
                 <a:solidFill>
                   <a:srgbClr val="475569"/>
                 </a:solidFill>
@@ -6485,7 +6653,7 @@
               <a:t>•  Chalcogen-family-grouped CV gives R</a:t>
             </a:r>
             <a:r>
-              <a:rPr sz="1400" b="0" baseline="30000">
+              <a:rPr sz="1300" b="0" baseline="30000">
                 <a:solidFill>
                   <a:srgbClr val="475569"/>
                 </a:solidFill>
@@ -6494,7 +6662,7 @@
               <a:t>2</a:t>
             </a:r>
             <a:r>
-              <a:rPr sz="1400" b="0">
+              <a:rPr sz="1300" b="0">
                 <a:solidFill>
                   <a:srgbClr val="475569"/>
                 </a:solidFill>
@@ -6513,7 +6681,7 @@
         </p:nvSpPr>
         <p:spPr>
           <a:xfrm>
-            <a:off x="6858000" y="4617720"/>
+            <a:off x="6858000" y="4663440"/>
             <a:ext cx="1828800" cy="274320"/>
           </a:xfrm>
           <a:prstGeom prst="rect">
@@ -6636,8 +6804,8 @@
         </p:nvSpPr>
         <p:spPr>
           <a:xfrm>
-            <a:off x="457200" y="731520"/>
-            <a:ext cx="8229600" cy="548640"/>
+            <a:off x="457200" y="640080"/>
+            <a:ext cx="8229600" cy="640080"/>
           </a:xfrm>
           <a:prstGeom prst="rect">
             <a:avLst/>
@@ -6652,7 +6820,7 @@
           <a:p>
             <a:pPr algn="l"/>
             <a:r>
-              <a:rPr sz="2800" b="1">
+              <a:rPr sz="2200" b="1">
                 <a:solidFill>
                   <a:srgbClr val="1C2533"/>
                 </a:solidFill>
@@ -6671,8 +6839,8 @@
         </p:nvSpPr>
         <p:spPr>
           <a:xfrm>
-            <a:off x="457200" y="1280160"/>
-            <a:ext cx="8229600" cy="365760"/>
+            <a:off x="457200" y="1325880"/>
+            <a:ext cx="8229600" cy="411480"/>
           </a:xfrm>
           <a:prstGeom prst="rect">
             <a:avLst/>
@@ -6687,7 +6855,7 @@
           <a:p>
             <a:pPr algn="l"/>
             <a:r>
-              <a:rPr sz="1600" b="0">
+              <a:rPr sz="1500" b="0">
                 <a:solidFill>
                   <a:srgbClr val="475569"/>
                 </a:solidFill>
@@ -6707,22 +6875,26 @@
         <p:spPr>
           <a:xfrm>
             <a:off x="457200" y="1828800"/>
-            <a:ext cx="8229600" cy="2926080"/>
-          </a:xfrm>
-          <a:prstGeom prst="rect">
-            <a:avLst/>
-          </a:prstGeom>
-          <a:noFill/>
-        </p:spPr>
-        <p:txBody>
-          <a:bodyPr wrap="square">
-            <a:spAutoFit/>
-          </a:bodyPr>
-          <a:lstStyle/>
-          <a:p>
-            <a:pPr algn="l"/>
-            <a:r>
-              <a:rPr sz="1400" b="0">
+            <a:ext cx="8229600" cy="2743200"/>
+          </a:xfrm>
+          <a:prstGeom prst="rect">
+            <a:avLst/>
+          </a:prstGeom>
+          <a:noFill/>
+        </p:spPr>
+        <p:txBody>
+          <a:bodyPr wrap="square">
+            <a:spAutoFit/>
+          </a:bodyPr>
+          <a:lstStyle/>
+          <a:p>
+            <a:pPr algn="l">
+              <a:spcAft>
+                <a:spcPts val="200"/>
+              </a:spcAft>
+            </a:pPr>
+            <a:r>
+              <a:rPr sz="1300" b="0">
                 <a:solidFill>
                   <a:srgbClr val="475569"/>
                 </a:solidFill>
@@ -6732,9 +6904,13 @@
             </a:r>
           </a:p>
           <a:p>
-            <a:pPr algn="l"/>
-            <a:r>
-              <a:rPr sz="1400" b="0">
+            <a:pPr algn="l">
+              <a:spcAft>
+                <a:spcPts val="200"/>
+              </a:spcAft>
+            </a:pPr>
+            <a:r>
+              <a:rPr sz="1300" b="0">
                 <a:solidFill>
                   <a:srgbClr val="475569"/>
                 </a:solidFill>
@@ -6744,9 +6920,13 @@
             </a:r>
           </a:p>
           <a:p>
-            <a:pPr algn="l"/>
-            <a:r>
-              <a:rPr sz="1400" b="0">
+            <a:pPr algn="l">
+              <a:spcAft>
+                <a:spcPts val="200"/>
+              </a:spcAft>
+            </a:pPr>
+            <a:r>
+              <a:rPr sz="1300" b="0">
                 <a:solidFill>
                   <a:srgbClr val="475569"/>
                 </a:solidFill>
@@ -6756,9 +6936,13 @@
             </a:r>
           </a:p>
           <a:p>
-            <a:pPr algn="l"/>
-            <a:r>
-              <a:rPr sz="1400" b="0">
+            <a:pPr algn="l">
+              <a:spcAft>
+                <a:spcPts val="200"/>
+              </a:spcAft>
+            </a:pPr>
+            <a:r>
+              <a:rPr sz="1300" b="0">
                 <a:solidFill>
                   <a:srgbClr val="475569"/>
                 </a:solidFill>
@@ -6768,9 +6952,13 @@
             </a:r>
           </a:p>
           <a:p>
-            <a:pPr algn="l"/>
-            <a:r>
-              <a:rPr sz="1400" b="0">
+            <a:pPr algn="l">
+              <a:spcAft>
+                <a:spcPts val="200"/>
+              </a:spcAft>
+            </a:pPr>
+            <a:r>
+              <a:rPr sz="1300" b="0">
                 <a:solidFill>
                   <a:srgbClr val="475569"/>
                 </a:solidFill>
@@ -6779,7 +6967,7 @@
               <a:t>•  AB</a:t>
             </a:r>
             <a:r>
-              <a:rPr sz="1400" b="0" baseline="-25000">
+              <a:rPr sz="1300" b="0" baseline="-25000">
                 <a:solidFill>
                   <a:srgbClr val="475569"/>
                 </a:solidFill>
@@ -6788,7 +6976,7 @@
               <a:t>2</a:t>
             </a:r>
             <a:r>
-              <a:rPr sz="1400" b="0">
+              <a:rPr sz="1300" b="0">
                 <a:solidFill>
                   <a:srgbClr val="475569"/>
                 </a:solidFill>
@@ -6797,7 +6985,7 @@
               <a:t>C</a:t>
             </a:r>
             <a:r>
-              <a:rPr sz="1400" b="0" baseline="-25000">
+              <a:rPr sz="1300" b="0" baseline="-25000">
                 <a:solidFill>
                   <a:srgbClr val="475569"/>
                 </a:solidFill>
@@ -6806,7 +6994,7 @@
               <a:t>4</a:t>
             </a:r>
             <a:r>
-              <a:rPr sz="1400" b="0">
+              <a:rPr sz="1300" b="0">
                 <a:solidFill>
                   <a:srgbClr val="475569"/>
                 </a:solidFill>
@@ -6816,9 +7004,13 @@
             </a:r>
           </a:p>
           <a:p>
-            <a:pPr algn="l"/>
-            <a:r>
-              <a:rPr sz="1400" b="0">
+            <a:pPr algn="l">
+              <a:spcAft>
+                <a:spcPts val="200"/>
+              </a:spcAft>
+            </a:pPr>
+            <a:r>
+              <a:rPr sz="1300" b="0">
                 <a:solidFill>
                   <a:srgbClr val="475569"/>
                 </a:solidFill>
@@ -6827,7 +7019,7 @@
               <a:t>•  ABC</a:t>
             </a:r>
             <a:r>
-              <a:rPr sz="1400" b="0" baseline="-25000">
+              <a:rPr sz="1300" b="0" baseline="-25000">
                 <a:solidFill>
                   <a:srgbClr val="475569"/>
                 </a:solidFill>
@@ -6836,7 +7028,7 @@
               <a:t>3</a:t>
             </a:r>
             <a:r>
-              <a:rPr sz="1400" b="0">
+              <a:rPr sz="1300" b="0">
                 <a:solidFill>
                   <a:srgbClr val="475569"/>
                 </a:solidFill>
@@ -6855,7 +7047,7 @@
         </p:nvSpPr>
         <p:spPr>
           <a:xfrm>
-            <a:off x="6858000" y="4617720"/>
+            <a:off x="6858000" y="4663440"/>
             <a:ext cx="1828800" cy="274320"/>
           </a:xfrm>
           <a:prstGeom prst="rect">
@@ -7240,8 +7432,8 @@
         </p:nvSpPr>
         <p:spPr>
           <a:xfrm>
-            <a:off x="457200" y="731520"/>
-            <a:ext cx="8229600" cy="548640"/>
+            <a:off x="457200" y="640080"/>
+            <a:ext cx="8229600" cy="640080"/>
           </a:xfrm>
           <a:prstGeom prst="rect">
             <a:avLst/>
@@ -7256,7 +7448,7 @@
           <a:p>
             <a:pPr algn="l"/>
             <a:r>
-              <a:rPr sz="2800" b="1">
+              <a:rPr sz="2200" b="1">
                 <a:solidFill>
                   <a:srgbClr val="1C2533"/>
                 </a:solidFill>
@@ -7275,8 +7467,8 @@
         </p:nvSpPr>
         <p:spPr>
           <a:xfrm>
-            <a:off x="457200" y="1280160"/>
-            <a:ext cx="8229600" cy="365760"/>
+            <a:off x="457200" y="1325880"/>
+            <a:ext cx="8229600" cy="411480"/>
           </a:xfrm>
           <a:prstGeom prst="rect">
             <a:avLst/>
@@ -7291,7 +7483,7 @@
           <a:p>
             <a:pPr algn="l"/>
             <a:r>
-              <a:rPr sz="1600" b="0">
+              <a:rPr sz="1500" b="0">
                 <a:solidFill>
                   <a:srgbClr val="475569"/>
                 </a:solidFill>
@@ -7300,7 +7492,7 @@
               <a:t>All entries are chalcogenides; eleven of fourteen are selenides; AB</a:t>
             </a:r>
             <a:r>
-              <a:rPr sz="1600" b="0" baseline="-25000">
+              <a:rPr sz="1500" b="0" baseline="-25000">
                 <a:solidFill>
                   <a:srgbClr val="475569"/>
                 </a:solidFill>
@@ -7309,7 +7501,7 @@
               <a:t>2</a:t>
             </a:r>
             <a:r>
-              <a:rPr sz="1600" b="0">
+              <a:rPr sz="1500" b="0">
                 <a:solidFill>
                   <a:srgbClr val="475569"/>
                 </a:solidFill>
@@ -7318,7 +7510,7 @@
               <a:t>C</a:t>
             </a:r>
             <a:r>
-              <a:rPr sz="1600" b="0" baseline="-25000">
+              <a:rPr sz="1500" b="0" baseline="-25000">
                 <a:solidFill>
                   <a:srgbClr val="475569"/>
                 </a:solidFill>
@@ -7327,7 +7519,7 @@
               <a:t>4</a:t>
             </a:r>
             <a:r>
-              <a:rPr sz="1600" b="0">
+              <a:rPr sz="1500" b="0">
                 <a:solidFill>
                   <a:srgbClr val="475569"/>
                 </a:solidFill>
@@ -7354,8 +7546,8 @@
         </p:blipFill>
         <p:spPr>
           <a:xfrm>
-            <a:off x="592870" y="1828800"/>
-            <a:ext cx="4666418" cy="2926080"/>
+            <a:off x="738696" y="1828800"/>
+            <a:ext cx="4374767" cy="2743200"/>
           </a:xfrm>
           <a:prstGeom prst="rect">
             <a:avLst/>
@@ -7371,22 +7563,26 @@
         <p:spPr>
           <a:xfrm>
             <a:off x="5669280" y="1828800"/>
-            <a:ext cx="3017520" cy="2926080"/>
-          </a:xfrm>
-          <a:prstGeom prst="rect">
-            <a:avLst/>
-          </a:prstGeom>
-          <a:noFill/>
-        </p:spPr>
-        <p:txBody>
-          <a:bodyPr wrap="square">
-            <a:spAutoFit/>
-          </a:bodyPr>
-          <a:lstStyle/>
-          <a:p>
-            <a:pPr algn="l"/>
-            <a:r>
-              <a:rPr sz="1400" b="0">
+            <a:ext cx="3017520" cy="2743200"/>
+          </a:xfrm>
+          <a:prstGeom prst="rect">
+            <a:avLst/>
+          </a:prstGeom>
+          <a:noFill/>
+        </p:spPr>
+        <p:txBody>
+          <a:bodyPr wrap="square">
+            <a:spAutoFit/>
+          </a:bodyPr>
+          <a:lstStyle/>
+          <a:p>
+            <a:pPr algn="l">
+              <a:spcAft>
+                <a:spcPts val="200"/>
+              </a:spcAft>
+            </a:pPr>
+            <a:r>
+              <a:rPr sz="1300" b="0">
                 <a:solidFill>
                   <a:srgbClr val="475569"/>
                 </a:solidFill>
@@ -7396,9 +7592,13 @@
             </a:r>
           </a:p>
           <a:p>
-            <a:pPr algn="l"/>
-            <a:r>
-              <a:rPr sz="1400" b="0">
+            <a:pPr algn="l">
+              <a:spcAft>
+                <a:spcPts val="200"/>
+              </a:spcAft>
+            </a:pPr>
+            <a:r>
+              <a:rPr sz="1300" b="0">
                 <a:solidFill>
                   <a:srgbClr val="475569"/>
                 </a:solidFill>
@@ -7407,7 +7607,7 @@
               <a:t>•  AB</a:t>
             </a:r>
             <a:r>
-              <a:rPr sz="1400" b="0" baseline="-25000">
+              <a:rPr sz="1300" b="0" baseline="-25000">
                 <a:solidFill>
                   <a:srgbClr val="475569"/>
                 </a:solidFill>
@@ -7416,7 +7616,7 @@
               <a:t>2</a:t>
             </a:r>
             <a:r>
-              <a:rPr sz="1400" b="0">
+              <a:rPr sz="1300" b="0">
                 <a:solidFill>
                   <a:srgbClr val="475569"/>
                 </a:solidFill>
@@ -7425,7 +7625,7 @@
               <a:t>C</a:t>
             </a:r>
             <a:r>
-              <a:rPr sz="1400" b="0" baseline="-25000">
+              <a:rPr sz="1300" b="0" baseline="-25000">
                 <a:solidFill>
                   <a:srgbClr val="475569"/>
                 </a:solidFill>
@@ -7434,7 +7634,7 @@
               <a:t>4</a:t>
             </a:r>
             <a:r>
-              <a:rPr sz="1400" b="0">
+              <a:rPr sz="1300" b="0">
                 <a:solidFill>
                   <a:srgbClr val="475569"/>
                 </a:solidFill>
@@ -7443,7 +7643,7 @@
               <a:t> supplies 7 of 14 entries; the remainder is split between ABC</a:t>
             </a:r>
             <a:r>
-              <a:rPr sz="1400" b="0" baseline="-25000">
+              <a:rPr sz="1300" b="0" baseline="-25000">
                 <a:solidFill>
                   <a:srgbClr val="475569"/>
                 </a:solidFill>
@@ -7452,7 +7652,7 @@
               <a:t>3</a:t>
             </a:r>
             <a:r>
-              <a:rPr sz="1400" b="0">
+              <a:rPr sz="1300" b="0">
                 <a:solidFill>
                   <a:srgbClr val="475569"/>
                 </a:solidFill>
@@ -7461,7 +7661,7 @@
               <a:t> and ABC</a:t>
             </a:r>
             <a:r>
-              <a:rPr sz="1400" b="0" baseline="-25000">
+              <a:rPr sz="1300" b="0" baseline="-25000">
                 <a:solidFill>
                   <a:srgbClr val="475569"/>
                 </a:solidFill>
@@ -7471,9 +7671,13 @@
             </a:r>
           </a:p>
           <a:p>
-            <a:pPr algn="l"/>
-            <a:r>
-              <a:rPr sz="1400" b="0">
+            <a:pPr algn="l">
+              <a:spcAft>
+                <a:spcPts val="200"/>
+              </a:spcAft>
+            </a:pPr>
+            <a:r>
+              <a:rPr sz="1300" b="0">
                 <a:solidFill>
                   <a:srgbClr val="475569"/>
                 </a:solidFill>
@@ -7483,9 +7687,13 @@
             </a:r>
           </a:p>
           <a:p>
-            <a:pPr algn="l"/>
-            <a:r>
-              <a:rPr sz="1400" b="0">
+            <a:pPr algn="l">
+              <a:spcAft>
+                <a:spcPts val="200"/>
+              </a:spcAft>
+            </a:pPr>
+            <a:r>
+              <a:rPr sz="1300" b="0">
                 <a:solidFill>
                   <a:srgbClr val="475569"/>
                 </a:solidFill>
@@ -7495,9 +7703,13 @@
             </a:r>
           </a:p>
           <a:p>
-            <a:pPr algn="l"/>
-            <a:r>
-              <a:rPr sz="1400" b="0">
+            <a:pPr algn="l">
+              <a:spcAft>
+                <a:spcPts val="200"/>
+              </a:spcAft>
+            </a:pPr>
+            <a:r>
+              <a:rPr sz="1300" b="0">
                 <a:solidFill>
                   <a:srgbClr val="475569"/>
                 </a:solidFill>
@@ -7506,7 +7718,7 @@
               <a:t>•  Aggregate descriptors: ⟨E</a:t>
             </a:r>
             <a:r>
-              <a:rPr sz="1400" b="0" baseline="-25000">
+              <a:rPr sz="1300" b="0" baseline="-25000">
                 <a:solidFill>
                   <a:srgbClr val="475569"/>
                 </a:solidFill>
@@ -7515,7 +7727,7 @@
               <a:t>g</a:t>
             </a:r>
             <a:r>
-              <a:rPr sz="1400" b="0">
+              <a:rPr sz="1300" b="0">
                 <a:solidFill>
                   <a:srgbClr val="475569"/>
                 </a:solidFill>
@@ -7524,7 +7736,7 @@
               <a:t>⟩ = 1.32 eV · ⟨ε⟩ = 12.5 · ⟨m</a:t>
             </a:r>
             <a:r>
-              <a:rPr sz="1400" b="0" baseline="-25000">
+              <a:rPr sz="1300" b="0" baseline="-25000">
                 <a:solidFill>
                   <a:srgbClr val="475569"/>
                 </a:solidFill>
@@ -7533,7 +7745,7 @@
               <a:t>avg</a:t>
             </a:r>
             <a:r>
-              <a:rPr sz="1400" b="0">
+              <a:rPr sz="1300" b="0">
                 <a:solidFill>
                   <a:srgbClr val="475569"/>
                 </a:solidFill>
@@ -7542,7 +7754,7 @@
               <a:t>⟩ = 0.58 m</a:t>
             </a:r>
             <a:r>
-              <a:rPr sz="1400" b="0" baseline="-25000">
+              <a:rPr sz="1300" b="0" baseline="-25000">
                 <a:solidFill>
                   <a:srgbClr val="475569"/>
                 </a:solidFill>
@@ -7552,9 +7764,13 @@
             </a:r>
           </a:p>
           <a:p>
-            <a:pPr algn="l"/>
-            <a:r>
-              <a:rPr sz="1400" b="0">
+            <a:pPr algn="l">
+              <a:spcAft>
+                <a:spcPts val="200"/>
+              </a:spcAft>
+            </a:pPr>
+            <a:r>
+              <a:rPr sz="1300" b="0">
                 <a:solidFill>
                   <a:srgbClr val="475569"/>
                 </a:solidFill>
@@ -7563,7 +7779,7 @@
               <a:t>•  24 % are direct-gap; the remaining 76 % are retained for combined low m</a:t>
             </a:r>
             <a:r>
-              <a:rPr sz="1400" b="0" baseline="30000">
+              <a:rPr sz="1300" b="0" baseline="30000">
                 <a:solidFill>
                   <a:srgbClr val="475569"/>
                 </a:solidFill>
@@ -7572,7 +7788,7 @@
               <a:t>*</a:t>
             </a:r>
             <a:r>
-              <a:rPr sz="1400" b="0">
+              <a:rPr sz="1300" b="0">
                 <a:solidFill>
                   <a:srgbClr val="475569"/>
                 </a:solidFill>
@@ -7581,7 +7797,7 @@
               <a:t>, high ε and low E</a:t>
             </a:r>
             <a:r>
-              <a:rPr sz="1400" b="0" baseline="-25000">
+              <a:rPr sz="1300" b="0" baseline="-25000">
                 <a:solidFill>
                   <a:srgbClr val="475569"/>
                 </a:solidFill>
@@ -7600,7 +7816,7 @@
         </p:nvSpPr>
         <p:spPr>
           <a:xfrm>
-            <a:off x="6858000" y="4617720"/>
+            <a:off x="6858000" y="4663440"/>
             <a:ext cx="1828800" cy="274320"/>
           </a:xfrm>
           <a:prstGeom prst="rect">
@@ -7723,8 +7939,8 @@
         </p:nvSpPr>
         <p:spPr>
           <a:xfrm>
-            <a:off x="457200" y="731520"/>
-            <a:ext cx="8229600" cy="548640"/>
+            <a:off x="457200" y="640080"/>
+            <a:ext cx="8229600" cy="640080"/>
           </a:xfrm>
           <a:prstGeom prst="rect">
             <a:avLst/>
@@ -7739,7 +7955,7 @@
           <a:p>
             <a:pPr algn="l"/>
             <a:r>
-              <a:rPr sz="2800" b="1">
+              <a:rPr sz="2200" b="1">
                 <a:solidFill>
                   <a:srgbClr val="1C2533"/>
                 </a:solidFill>
@@ -7758,8 +7974,8 @@
         </p:nvSpPr>
         <p:spPr>
           <a:xfrm>
-            <a:off x="457200" y="1280160"/>
-            <a:ext cx="8229600" cy="365760"/>
+            <a:off x="457200" y="1325880"/>
+            <a:ext cx="8229600" cy="411480"/>
           </a:xfrm>
           <a:prstGeom prst="rect">
             <a:avLst/>
@@ -7774,7 +7990,7 @@
           <a:p>
             <a:pPr algn="l"/>
             <a:r>
-              <a:rPr sz="1600" b="0">
+              <a:rPr sz="1500" b="0">
                 <a:solidFill>
                   <a:srgbClr val="475569"/>
                 </a:solidFill>
@@ -7783,7 +7999,7 @@
               <a:t>&gt;10</a:t>
             </a:r>
             <a:r>
-              <a:rPr sz="1600" b="0" baseline="30000">
+              <a:rPr sz="1500" b="0" baseline="30000">
                 <a:solidFill>
                   <a:srgbClr val="475569"/>
                 </a:solidFill>
@@ -7792,7 +8008,7 @@
               <a:t>5</a:t>
             </a:r>
             <a:r>
-              <a:rPr sz="1600" b="0">
+              <a:rPr sz="1500" b="0">
                 <a:solidFill>
                   <a:srgbClr val="475569"/>
                 </a:solidFill>
@@ -7819,7 +8035,7 @@
         </p:blipFill>
         <p:spPr>
           <a:xfrm>
-            <a:off x="457200" y="2807841"/>
+            <a:off x="457200" y="2716401"/>
             <a:ext cx="4937760" cy="967996"/>
           </a:xfrm>
           <a:prstGeom prst="rect">
@@ -7836,22 +8052,26 @@
         <p:spPr>
           <a:xfrm>
             <a:off x="5669280" y="1828800"/>
-            <a:ext cx="3017520" cy="2926080"/>
-          </a:xfrm>
-          <a:prstGeom prst="rect">
-            <a:avLst/>
-          </a:prstGeom>
-          <a:noFill/>
-        </p:spPr>
-        <p:txBody>
-          <a:bodyPr wrap="square">
-            <a:spAutoFit/>
-          </a:bodyPr>
-          <a:lstStyle/>
-          <a:p>
-            <a:pPr algn="l"/>
-            <a:r>
-              <a:rPr sz="1400" b="0">
+            <a:ext cx="3017520" cy="2743200"/>
+          </a:xfrm>
+          <a:prstGeom prst="rect">
+            <a:avLst/>
+          </a:prstGeom>
+          <a:noFill/>
+        </p:spPr>
+        <p:txBody>
+          <a:bodyPr wrap="square">
+            <a:spAutoFit/>
+          </a:bodyPr>
+          <a:lstStyle/>
+          <a:p>
+            <a:pPr algn="l">
+              <a:spcAft>
+                <a:spcPts val="200"/>
+              </a:spcAft>
+            </a:pPr>
+            <a:r>
+              <a:rPr sz="1300" b="0">
                 <a:solidFill>
                   <a:srgbClr val="475569"/>
                 </a:solidFill>
@@ -7860,7 +8080,7 @@
               <a:t>•  Stage 1: &gt; 10</a:t>
             </a:r>
             <a:r>
-              <a:rPr sz="1400" b="0" baseline="30000">
+              <a:rPr sz="1300" b="0" baseline="30000">
                 <a:solidFill>
                   <a:srgbClr val="475569"/>
                 </a:solidFill>
@@ -7869,7 +8089,7 @@
               <a:t>5</a:t>
             </a:r>
             <a:r>
-              <a:rPr sz="1400" b="0">
+              <a:rPr sz="1300" b="0">
                 <a:solidFill>
                   <a:srgbClr val="475569"/>
                 </a:solidFill>
@@ -7879,9 +8099,13 @@
             </a:r>
           </a:p>
           <a:p>
-            <a:pPr algn="l"/>
-            <a:r>
-              <a:rPr sz="1400" b="0">
+            <a:pPr algn="l">
+              <a:spcAft>
+                <a:spcPts val="200"/>
+              </a:spcAft>
+            </a:pPr>
+            <a:r>
+              <a:rPr sz="1300" b="0">
                 <a:solidFill>
                   <a:srgbClr val="475569"/>
                 </a:solidFill>
@@ -7891,9 +8115,13 @@
             </a:r>
           </a:p>
           <a:p>
-            <a:pPr algn="l"/>
-            <a:r>
-              <a:rPr sz="1400" b="0">
+            <a:pPr algn="l">
+              <a:spcAft>
+                <a:spcPts val="200"/>
+              </a:spcAft>
+            </a:pPr>
+            <a:r>
+              <a:rPr sz="1300" b="0">
                 <a:solidFill>
                   <a:srgbClr val="475569"/>
                 </a:solidFill>
@@ -7903,9 +8131,13 @@
             </a:r>
           </a:p>
           <a:p>
-            <a:pPr algn="l"/>
-            <a:r>
-              <a:rPr sz="1400" b="0">
+            <a:pPr algn="l">
+              <a:spcAft>
+                <a:spcPts val="200"/>
+              </a:spcAft>
+            </a:pPr>
+            <a:r>
+              <a:rPr sz="1300" b="0">
                 <a:solidFill>
                   <a:srgbClr val="475569"/>
                 </a:solidFill>
@@ -7914,7 +8146,7 @@
               <a:t>•  Stage 4: 41 PV-promising candidates with composite score y </a:t>
             </a:r>
             <a:r>
-              <a:rPr sz="1400" b="0" baseline="30000">
+              <a:rPr sz="1300" b="0" baseline="30000">
                 <a:solidFill>
                   <a:srgbClr val="475569"/>
                 </a:solidFill>
@@ -7923,7 +8155,7 @@
               <a:t>&gt;</a:t>
             </a:r>
             <a:r>
-              <a:rPr sz="1400" b="0">
+              <a:rPr sz="1300" b="0">
                 <a:solidFill>
                   <a:srgbClr val="475569"/>
                 </a:solidFill>
@@ -7933,9 +8165,13 @@
             </a:r>
           </a:p>
           <a:p>
-            <a:pPr algn="l"/>
-            <a:r>
-              <a:rPr sz="1400" b="0">
+            <a:pPr algn="l">
+              <a:spcAft>
+                <a:spcPts val="200"/>
+              </a:spcAft>
+            </a:pPr>
+            <a:r>
+              <a:rPr sz="1300" b="0">
                 <a:solidFill>
                   <a:srgbClr val="475569"/>
                 </a:solidFill>
@@ -7944,7 +8180,7 @@
               <a:t>•  Stage 5: 14-candidate shortlist with y </a:t>
             </a:r>
             <a:r>
-              <a:rPr sz="1400" b="0" baseline="30000">
+              <a:rPr sz="1300" b="0" baseline="30000">
                 <a:solidFill>
                   <a:srgbClr val="475569"/>
                 </a:solidFill>
@@ -7953,7 +8189,7 @@
               <a:t>&gt;</a:t>
             </a:r>
             <a:r>
-              <a:rPr sz="1400" b="0">
+              <a:rPr sz="1300" b="0">
                 <a:solidFill>
                   <a:srgbClr val="475569"/>
                 </a:solidFill>
@@ -7963,9 +8199,13 @@
             </a:r>
           </a:p>
           <a:p>
-            <a:pPr algn="l"/>
-            <a:r>
-              <a:rPr sz="1400" b="0">
+            <a:pPr algn="l">
+              <a:spcAft>
+                <a:spcPts val="200"/>
+              </a:spcAft>
+            </a:pPr>
+            <a:r>
+              <a:rPr sz="1300" b="0">
                 <a:solidFill>
                   <a:srgbClr val="475569"/>
                 </a:solidFill>
@@ -7984,7 +8224,7 @@
         </p:nvSpPr>
         <p:spPr>
           <a:xfrm>
-            <a:off x="6858000" y="4617720"/>
+            <a:off x="6858000" y="4663440"/>
             <a:ext cx="1828800" cy="274320"/>
           </a:xfrm>
           <a:prstGeom prst="rect">
@@ -8107,8 +8347,8 @@
         </p:nvSpPr>
         <p:spPr>
           <a:xfrm>
-            <a:off x="457200" y="731520"/>
-            <a:ext cx="8229600" cy="548640"/>
+            <a:off x="457200" y="640080"/>
+            <a:ext cx="8229600" cy="640080"/>
           </a:xfrm>
           <a:prstGeom prst="rect">
             <a:avLst/>
@@ -8123,7 +8363,7 @@
           <a:p>
             <a:pPr algn="l"/>
             <a:r>
-              <a:rPr sz="2800" b="1">
+              <a:rPr sz="2200" b="1">
                 <a:solidFill>
                   <a:srgbClr val="1C2533"/>
                 </a:solidFill>
@@ -8132,7 +8372,7 @@
               <a:t>Lead candidate — Se</a:t>
             </a:r>
             <a:r>
-              <a:rPr sz="2800" b="1" baseline="-25000">
+              <a:rPr sz="2200" b="1" baseline="-25000">
                 <a:solidFill>
                   <a:srgbClr val="1C2533"/>
                 </a:solidFill>
@@ -8141,7 +8381,7 @@
               <a:t>16</a:t>
             </a:r>
             <a:r>
-              <a:rPr sz="2800" b="1">
+              <a:rPr sz="2200" b="1">
                 <a:solidFill>
                   <a:srgbClr val="1C2533"/>
                 </a:solidFill>
@@ -8150,7 +8390,7 @@
               <a:t>Sn</a:t>
             </a:r>
             <a:r>
-              <a:rPr sz="2800" b="1" baseline="-25000">
+              <a:rPr sz="2200" b="1" baseline="-25000">
                 <a:solidFill>
                   <a:srgbClr val="1C2533"/>
                 </a:solidFill>
@@ -8159,7 +8399,7 @@
               <a:t>8</a:t>
             </a:r>
             <a:r>
-              <a:rPr sz="2800" b="1">
+              <a:rPr sz="2200" b="1">
                 <a:solidFill>
                   <a:srgbClr val="1C2533"/>
                 </a:solidFill>
@@ -8168,7 +8408,7 @@
               <a:t>Zr</a:t>
             </a:r>
             <a:r>
-              <a:rPr sz="2800" b="1" baseline="-25000">
+              <a:rPr sz="2200" b="1" baseline="-25000">
                 <a:solidFill>
                   <a:srgbClr val="1C2533"/>
                 </a:solidFill>
@@ -8187,8 +8427,8 @@
         </p:nvSpPr>
         <p:spPr>
           <a:xfrm>
-            <a:off x="457200" y="1280160"/>
-            <a:ext cx="8229600" cy="365760"/>
+            <a:off x="457200" y="1325880"/>
+            <a:ext cx="8229600" cy="411480"/>
           </a:xfrm>
           <a:prstGeom prst="rect">
             <a:avLst/>
@@ -8203,7 +8443,7 @@
           <a:p>
             <a:pPr algn="l"/>
             <a:r>
-              <a:rPr sz="1600" b="0">
+              <a:rPr sz="1500" b="0">
                 <a:solidFill>
                   <a:srgbClr val="475569"/>
                 </a:solidFill>
@@ -8212,7 +8452,7 @@
               <a:t>AB</a:t>
             </a:r>
             <a:r>
-              <a:rPr sz="1600" b="0" baseline="-25000">
+              <a:rPr sz="1500" b="0" baseline="-25000">
                 <a:solidFill>
                   <a:srgbClr val="475569"/>
                 </a:solidFill>
@@ -8221,7 +8461,7 @@
               <a:t>2</a:t>
             </a:r>
             <a:r>
-              <a:rPr sz="1600" b="0">
+              <a:rPr sz="1500" b="0">
                 <a:solidFill>
                   <a:srgbClr val="475569"/>
                 </a:solidFill>
@@ -8230,7 +8470,7 @@
               <a:t>C</a:t>
             </a:r>
             <a:r>
-              <a:rPr sz="1600" b="0" baseline="-25000">
+              <a:rPr sz="1500" b="0" baseline="-25000">
                 <a:solidFill>
                   <a:srgbClr val="475569"/>
                 </a:solidFill>
@@ -8239,7 +8479,7 @@
               <a:t>4</a:t>
             </a:r>
             <a:r>
-              <a:rPr sz="1600" b="0">
+              <a:rPr sz="1500" b="0">
                 <a:solidFill>
                   <a:srgbClr val="475569"/>
                 </a:solidFill>
@@ -8266,8 +8506,8 @@
         </p:blipFill>
         <p:spPr>
           <a:xfrm>
-            <a:off x="1552170" y="1828800"/>
-            <a:ext cx="2747819" cy="2926080"/>
+            <a:off x="1638039" y="1828800"/>
+            <a:ext cx="2576080" cy="2743200"/>
           </a:xfrm>
           <a:prstGeom prst="rect">
             <a:avLst/>
@@ -8283,22 +8523,26 @@
         <p:spPr>
           <a:xfrm>
             <a:off x="5669280" y="1828800"/>
-            <a:ext cx="3017520" cy="2926080"/>
-          </a:xfrm>
-          <a:prstGeom prst="rect">
-            <a:avLst/>
-          </a:prstGeom>
-          <a:noFill/>
-        </p:spPr>
-        <p:txBody>
-          <a:bodyPr wrap="square">
-            <a:spAutoFit/>
-          </a:bodyPr>
-          <a:lstStyle/>
-          <a:p>
-            <a:pPr algn="l"/>
-            <a:r>
-              <a:rPr sz="1400" b="0">
+            <a:ext cx="3017520" cy="2743200"/>
+          </a:xfrm>
+          <a:prstGeom prst="rect">
+            <a:avLst/>
+          </a:prstGeom>
+          <a:noFill/>
+        </p:spPr>
+        <p:txBody>
+          <a:bodyPr wrap="square">
+            <a:spAutoFit/>
+          </a:bodyPr>
+          <a:lstStyle/>
+          <a:p>
+            <a:pPr algn="l">
+              <a:spcAft>
+                <a:spcPts val="200"/>
+              </a:spcAft>
+            </a:pPr>
+            <a:r>
+              <a:rPr sz="1300" b="0">
                 <a:solidFill>
                   <a:srgbClr val="475569"/>
                 </a:solidFill>
@@ -8307,7 +8551,7 @@
               <a:t>•  E</a:t>
             </a:r>
             <a:r>
-              <a:rPr sz="1400" b="0" baseline="-25000">
+              <a:rPr sz="1300" b="0" baseline="-25000">
                 <a:solidFill>
                   <a:srgbClr val="475569"/>
                 </a:solidFill>
@@ -8316,7 +8560,7 @@
               <a:t>g</a:t>
             </a:r>
             <a:r>
-              <a:rPr sz="1400" b="0">
+              <a:rPr sz="1300" b="0">
                 <a:solidFill>
                   <a:srgbClr val="475569"/>
                 </a:solidFill>
@@ -8326,9 +8570,13 @@
             </a:r>
           </a:p>
           <a:p>
-            <a:pPr algn="l"/>
-            <a:r>
-              <a:rPr sz="1400" b="0">
+            <a:pPr algn="l">
+              <a:spcAft>
+                <a:spcPts val="200"/>
+              </a:spcAft>
+            </a:pPr>
+            <a:r>
+              <a:rPr sz="1300" b="0">
                 <a:solidFill>
                   <a:srgbClr val="475569"/>
                 </a:solidFill>
@@ -8337,7 +8585,7 @@
               <a:t>•  m</a:t>
             </a:r>
             <a:r>
-              <a:rPr sz="1400" b="0" baseline="-25000">
+              <a:rPr sz="1300" b="0" baseline="-25000">
                 <a:solidFill>
                   <a:srgbClr val="475569"/>
                 </a:solidFill>
@@ -8346,7 +8594,7 @@
               <a:t>avg</a:t>
             </a:r>
             <a:r>
-              <a:rPr sz="1400" b="0">
+              <a:rPr sz="1300" b="0">
                 <a:solidFill>
                   <a:srgbClr val="475569"/>
                 </a:solidFill>
@@ -8355,7 +8603,7 @@
               <a:t> = 0.43 m</a:t>
             </a:r>
             <a:r>
-              <a:rPr sz="1400" b="0" baseline="-25000">
+              <a:rPr sz="1300" b="0" baseline="-25000">
                 <a:solidFill>
                   <a:srgbClr val="475569"/>
                 </a:solidFill>
@@ -8364,7 +8612,7 @@
               <a:t>0</a:t>
             </a:r>
             <a:r>
-              <a:rPr sz="1400" b="0">
+              <a:rPr sz="1300" b="0">
                 <a:solidFill>
                   <a:srgbClr val="475569"/>
                 </a:solidFill>
@@ -8374,9 +8622,13 @@
             </a:r>
           </a:p>
           <a:p>
-            <a:pPr algn="l"/>
-            <a:r>
-              <a:rPr sz="1400" b="0">
+            <a:pPr algn="l">
+              <a:spcAft>
+                <a:spcPts val="200"/>
+              </a:spcAft>
+            </a:pPr>
+            <a:r>
+              <a:rPr sz="1300" b="0">
                 <a:solidFill>
                   <a:srgbClr val="475569"/>
                 </a:solidFill>
@@ -8385,7 +8637,7 @@
               <a:t>•  ε</a:t>
             </a:r>
             <a:r>
-              <a:rPr sz="1400" b="0" baseline="-25000">
+              <a:rPr sz="1300" b="0" baseline="-25000">
                 <a:solidFill>
                   <a:srgbClr val="475569"/>
                 </a:solidFill>
@@ -8394,7 +8646,7 @@
               <a:t>avg</a:t>
             </a:r>
             <a:r>
-              <a:rPr sz="1400" b="0">
+              <a:rPr sz="1300" b="0">
                 <a:solidFill>
                   <a:srgbClr val="475569"/>
                 </a:solidFill>
@@ -8404,9 +8656,13 @@
             </a:r>
           </a:p>
           <a:p>
-            <a:pPr algn="l"/>
-            <a:r>
-              <a:rPr sz="1400" b="0">
+            <a:pPr algn="l">
+              <a:spcAft>
+                <a:spcPts val="200"/>
+              </a:spcAft>
+            </a:pPr>
+            <a:r>
+              <a:rPr sz="1300" b="0">
                 <a:solidFill>
                   <a:srgbClr val="475569"/>
                 </a:solidFill>
@@ -8415,7 +8671,7 @@
               <a:t>•  E</a:t>
             </a:r>
             <a:r>
-              <a:rPr sz="1400" b="0" baseline="-25000">
+              <a:rPr sz="1300" b="0" baseline="-25000">
                 <a:solidFill>
                   <a:srgbClr val="475569"/>
                 </a:solidFill>
@@ -8424,7 +8680,7 @@
               <a:t>b</a:t>
             </a:r>
             <a:r>
-              <a:rPr sz="1400" b="0">
+              <a:rPr sz="1300" b="0">
                 <a:solidFill>
                   <a:srgbClr val="475569"/>
                 </a:solidFill>
@@ -8433,7 +8689,7 @@
               <a:t> = 7 meV, well below k</a:t>
             </a:r>
             <a:r>
-              <a:rPr sz="1400" b="0" baseline="-25000">
+              <a:rPr sz="1300" b="0" baseline="-25000">
                 <a:solidFill>
                   <a:srgbClr val="475569"/>
                 </a:solidFill>
@@ -8442,7 +8698,7 @@
               <a:t>B</a:t>
             </a:r>
             <a:r>
-              <a:rPr sz="1400" b="0">
+              <a:rPr sz="1300" b="0">
                 <a:solidFill>
                   <a:srgbClr val="475569"/>
                 </a:solidFill>
@@ -8452,9 +8708,13 @@
             </a:r>
           </a:p>
           <a:p>
-            <a:pPr algn="l"/>
-            <a:r>
-              <a:rPr sz="1400" b="0">
+            <a:pPr algn="l">
+              <a:spcAft>
+                <a:spcPts val="200"/>
+              </a:spcAft>
+            </a:pPr>
+            <a:r>
+              <a:rPr sz="1300" b="0">
                 <a:solidFill>
                   <a:srgbClr val="475569"/>
                 </a:solidFill>
@@ -8464,9 +8724,13 @@
             </a:r>
           </a:p>
           <a:p>
-            <a:pPr algn="l"/>
-            <a:r>
-              <a:rPr sz="1400" b="0">
+            <a:pPr algn="l">
+              <a:spcAft>
+                <a:spcPts val="200"/>
+              </a:spcAft>
+            </a:pPr>
+            <a:r>
+              <a:rPr sz="1300" b="0">
                 <a:solidFill>
                   <a:srgbClr val="475569"/>
                 </a:solidFill>
@@ -8485,7 +8749,7 @@
         </p:nvSpPr>
         <p:spPr>
           <a:xfrm>
-            <a:off x="6858000" y="4617720"/>
+            <a:off x="6858000" y="4663440"/>
             <a:ext cx="1828800" cy="274320"/>
           </a:xfrm>
           <a:prstGeom prst="rect">
@@ -8608,8 +8872,8 @@
         </p:nvSpPr>
         <p:spPr>
           <a:xfrm>
-            <a:off x="457200" y="731520"/>
-            <a:ext cx="8229600" cy="548640"/>
+            <a:off x="457200" y="640080"/>
+            <a:ext cx="8229600" cy="640080"/>
           </a:xfrm>
           <a:prstGeom prst="rect">
             <a:avLst/>
@@ -8624,7 +8888,7 @@
           <a:p>
             <a:pPr algn="l"/>
             <a:r>
-              <a:rPr sz="2800" b="1">
+              <a:rPr sz="2200" b="1">
                 <a:solidFill>
                   <a:srgbClr val="1C2533"/>
                 </a:solidFill>
@@ -8633,7 +8897,7 @@
               <a:t>Secondary candidate — Cs</a:t>
             </a:r>
             <a:r>
-              <a:rPr sz="2800" b="1" baseline="-25000">
+              <a:rPr sz="2200" b="1" baseline="-25000">
                 <a:solidFill>
                   <a:srgbClr val="1C2533"/>
                 </a:solidFill>
@@ -8642,7 +8906,7 @@
               <a:t>2</a:t>
             </a:r>
             <a:r>
-              <a:rPr sz="2800" b="1">
+              <a:rPr sz="2200" b="1">
                 <a:solidFill>
                   <a:srgbClr val="1C2533"/>
                 </a:solidFill>
@@ -8651,7 +8915,7 @@
               <a:t>Sb</a:t>
             </a:r>
             <a:r>
-              <a:rPr sz="2800" b="1" baseline="-25000">
+              <a:rPr sz="2200" b="1" baseline="-25000">
                 <a:solidFill>
                   <a:srgbClr val="1C2533"/>
                 </a:solidFill>
@@ -8660,7 +8924,7 @@
               <a:t>6</a:t>
             </a:r>
             <a:r>
-              <a:rPr sz="2800" b="1">
+              <a:rPr sz="2200" b="1">
                 <a:solidFill>
                   <a:srgbClr val="1C2533"/>
                 </a:solidFill>
@@ -8669,7 +8933,7 @@
               <a:t>Se</a:t>
             </a:r>
             <a:r>
-              <a:rPr sz="2800" b="1" baseline="-25000">
+              <a:rPr sz="2200" b="1" baseline="-25000">
                 <a:solidFill>
                   <a:srgbClr val="1C2533"/>
                 </a:solidFill>
@@ -8688,8 +8952,8 @@
         </p:nvSpPr>
         <p:spPr>
           <a:xfrm>
-            <a:off x="457200" y="1280160"/>
-            <a:ext cx="8229600" cy="365760"/>
+            <a:off x="457200" y="1325880"/>
+            <a:ext cx="8229600" cy="411480"/>
           </a:xfrm>
           <a:prstGeom prst="rect">
             <a:avLst/>
@@ -8704,7 +8968,7 @@
           <a:p>
             <a:pPr algn="l"/>
             <a:r>
-              <a:rPr sz="1600" b="0">
+              <a:rPr sz="1500" b="0">
                 <a:solidFill>
                   <a:srgbClr val="475569"/>
                 </a:solidFill>
@@ -8713,7 +8977,7 @@
               <a:t>ABC</a:t>
             </a:r>
             <a:r>
-              <a:rPr sz="1600" b="0" baseline="-25000">
+              <a:rPr sz="1500" b="0" baseline="-25000">
                 <a:solidFill>
                   <a:srgbClr val="475569"/>
                 </a:solidFill>
@@ -8722,7 +8986,7 @@
               <a:t>3</a:t>
             </a:r>
             <a:r>
-              <a:rPr sz="1600" b="0">
+              <a:rPr sz="1500" b="0">
                 <a:solidFill>
                   <a:srgbClr val="475569"/>
                 </a:solidFill>
@@ -8731,7 +8995,7 @@
               <a:t> prototype · C2/m (SG 12) · Sb 5s</a:t>
             </a:r>
             <a:r>
-              <a:rPr sz="1600" b="0" baseline="30000">
+              <a:rPr sz="1500" b="0" baseline="30000">
                 <a:solidFill>
                   <a:srgbClr val="475569"/>
                 </a:solidFill>
@@ -8740,7 +9004,7 @@
               <a:t>2</a:t>
             </a:r>
             <a:r>
-              <a:rPr sz="1600" b="0">
+              <a:rPr sz="1500" b="0">
                 <a:solidFill>
                   <a:srgbClr val="475569"/>
                 </a:solidFill>
@@ -8767,8 +9031,8 @@
         </p:blipFill>
         <p:spPr>
           <a:xfrm>
-            <a:off x="1710519" y="1828800"/>
-            <a:ext cx="2431121" cy="2926080"/>
+            <a:off x="1786491" y="1828800"/>
+            <a:ext cx="2279176" cy="2743200"/>
           </a:xfrm>
           <a:prstGeom prst="rect">
             <a:avLst/>
@@ -8784,22 +9048,26 @@
         <p:spPr>
           <a:xfrm>
             <a:off x="5669280" y="1828800"/>
-            <a:ext cx="3017520" cy="2926080"/>
-          </a:xfrm>
-          <a:prstGeom prst="rect">
-            <a:avLst/>
-          </a:prstGeom>
-          <a:noFill/>
-        </p:spPr>
-        <p:txBody>
-          <a:bodyPr wrap="square">
-            <a:spAutoFit/>
-          </a:bodyPr>
-          <a:lstStyle/>
-          <a:p>
-            <a:pPr algn="l"/>
-            <a:r>
-              <a:rPr sz="1400" b="0">
+            <a:ext cx="3017520" cy="2743200"/>
+          </a:xfrm>
+          <a:prstGeom prst="rect">
+            <a:avLst/>
+          </a:prstGeom>
+          <a:noFill/>
+        </p:spPr>
+        <p:txBody>
+          <a:bodyPr wrap="square">
+            <a:spAutoFit/>
+          </a:bodyPr>
+          <a:lstStyle/>
+          <a:p>
+            <a:pPr algn="l">
+              <a:spcAft>
+                <a:spcPts val="200"/>
+              </a:spcAft>
+            </a:pPr>
+            <a:r>
+              <a:rPr sz="1300" b="0">
                 <a:solidFill>
                   <a:srgbClr val="475569"/>
                 </a:solidFill>
@@ -8808,7 +9076,7 @@
               <a:t>•  E</a:t>
             </a:r>
             <a:r>
-              <a:rPr sz="1400" b="0" baseline="-25000">
+              <a:rPr sz="1300" b="0" baseline="-25000">
                 <a:solidFill>
                   <a:srgbClr val="475569"/>
                 </a:solidFill>
@@ -8817,7 +9085,7 @@
               <a:t>g</a:t>
             </a:r>
             <a:r>
-              <a:rPr sz="1400" b="0">
+              <a:rPr sz="1300" b="0">
                 <a:solidFill>
                   <a:srgbClr val="475569"/>
                 </a:solidFill>
@@ -8827,9 +9095,13 @@
             </a:r>
           </a:p>
           <a:p>
-            <a:pPr algn="l"/>
-            <a:r>
-              <a:rPr sz="1400" b="0">
+            <a:pPr algn="l">
+              <a:spcAft>
+                <a:spcPts val="200"/>
+              </a:spcAft>
+            </a:pPr>
+            <a:r>
+              <a:rPr sz="1300" b="0">
                 <a:solidFill>
                   <a:srgbClr val="475569"/>
                 </a:solidFill>
@@ -8838,7 +9110,7 @@
               <a:t>•  m</a:t>
             </a:r>
             <a:r>
-              <a:rPr sz="1400" b="0" baseline="-25000">
+              <a:rPr sz="1300" b="0" baseline="-25000">
                 <a:solidFill>
                   <a:srgbClr val="475569"/>
                 </a:solidFill>
@@ -8847,7 +9119,7 @@
               <a:t>avg</a:t>
             </a:r>
             <a:r>
-              <a:rPr sz="1400" b="0">
+              <a:rPr sz="1300" b="0">
                 <a:solidFill>
                   <a:srgbClr val="475569"/>
                 </a:solidFill>
@@ -8856,7 +9128,7 @@
               <a:t> = 0.81 m</a:t>
             </a:r>
             <a:r>
-              <a:rPr sz="1400" b="0" baseline="-25000">
+              <a:rPr sz="1300" b="0" baseline="-25000">
                 <a:solidFill>
                   <a:srgbClr val="475569"/>
                 </a:solidFill>
@@ -8865,7 +9137,7 @@
               <a:t>0</a:t>
             </a:r>
             <a:r>
-              <a:rPr sz="1400" b="0">
+              <a:rPr sz="1300" b="0">
                 <a:solidFill>
                   <a:srgbClr val="475569"/>
                 </a:solidFill>
@@ -8875,9 +9147,13 @@
             </a:r>
           </a:p>
           <a:p>
-            <a:pPr algn="l"/>
-            <a:r>
-              <a:rPr sz="1400" b="0">
+            <a:pPr algn="l">
+              <a:spcAft>
+                <a:spcPts val="200"/>
+              </a:spcAft>
+            </a:pPr>
+            <a:r>
+              <a:rPr sz="1300" b="0">
                 <a:solidFill>
                   <a:srgbClr val="475569"/>
                 </a:solidFill>
@@ -8886,7 +9162,7 @@
               <a:t>•  ε</a:t>
             </a:r>
             <a:r>
-              <a:rPr sz="1400" b="0" baseline="-25000">
+              <a:rPr sz="1300" b="0" baseline="-25000">
                 <a:solidFill>
                   <a:srgbClr val="475569"/>
                 </a:solidFill>
@@ -8895,7 +9171,7 @@
               <a:t>avg</a:t>
             </a:r>
             <a:r>
-              <a:rPr sz="1400" b="0">
+              <a:rPr sz="1300" b="0">
                 <a:solidFill>
                   <a:srgbClr val="475569"/>
                 </a:solidFill>
@@ -8904,7 +9180,7 @@
               <a:t> = 12.6, indicating moderate dielectric screening; E</a:t>
             </a:r>
             <a:r>
-              <a:rPr sz="1400" b="0" baseline="-25000">
+              <a:rPr sz="1300" b="0" baseline="-25000">
                 <a:solidFill>
                   <a:srgbClr val="475569"/>
                 </a:solidFill>
@@ -8913,7 +9189,7 @@
               <a:t>b</a:t>
             </a:r>
             <a:r>
-              <a:rPr sz="1400" b="0">
+              <a:rPr sz="1300" b="0">
                 <a:solidFill>
                   <a:srgbClr val="475569"/>
                 </a:solidFill>
@@ -8923,9 +9199,13 @@
             </a:r>
           </a:p>
           <a:p>
-            <a:pPr algn="l"/>
-            <a:r>
-              <a:rPr sz="1400" b="0">
+            <a:pPr algn="l">
+              <a:spcAft>
+                <a:spcPts val="200"/>
+              </a:spcAft>
+            </a:pPr>
+            <a:r>
+              <a:rPr sz="1300" b="0">
                 <a:solidFill>
                   <a:srgbClr val="475569"/>
                 </a:solidFill>
@@ -8935,9 +9215,13 @@
             </a:r>
           </a:p>
           <a:p>
-            <a:pPr algn="l"/>
-            <a:r>
-              <a:rPr sz="1400" b="0">
+            <a:pPr algn="l">
+              <a:spcAft>
+                <a:spcPts val="200"/>
+              </a:spcAft>
+            </a:pPr>
+            <a:r>
+              <a:rPr sz="1300" b="0">
                 <a:solidFill>
                   <a:srgbClr val="475569"/>
                 </a:solidFill>
@@ -8946,7 +9230,7 @@
               <a:t>•  Sb 5s</a:t>
             </a:r>
             <a:r>
-              <a:rPr sz="1400" b="0" baseline="30000">
+              <a:rPr sz="1300" b="0" baseline="30000">
                 <a:solidFill>
                   <a:srgbClr val="475569"/>
                 </a:solidFill>
@@ -8955,7 +9239,7 @@
               <a:t>2</a:t>
             </a:r>
             <a:r>
-              <a:rPr sz="1400" b="0">
+              <a:rPr sz="1300" b="0">
                 <a:solidFill>
                   <a:srgbClr val="475569"/>
                 </a:solidFill>
@@ -8965,9 +9249,13 @@
             </a:r>
           </a:p>
           <a:p>
-            <a:pPr algn="l"/>
-            <a:r>
-              <a:rPr sz="1400" b="0">
+            <a:pPr algn="l">
+              <a:spcAft>
+                <a:spcPts val="200"/>
+              </a:spcAft>
+            </a:pPr>
+            <a:r>
+              <a:rPr sz="1300" b="0">
                 <a:solidFill>
                   <a:srgbClr val="475569"/>
                 </a:solidFill>
@@ -8986,7 +9274,7 @@
         </p:nvSpPr>
         <p:spPr>
           <a:xfrm>
-            <a:off x="6858000" y="4617720"/>
+            <a:off x="6858000" y="4663440"/>
             <a:ext cx="1828800" cy="274320"/>
           </a:xfrm>
           <a:prstGeom prst="rect">
@@ -9240,8 +9528,8 @@
         </p:nvSpPr>
         <p:spPr>
           <a:xfrm>
-            <a:off x="457200" y="731520"/>
-            <a:ext cx="8229600" cy="548640"/>
+            <a:off x="457200" y="640080"/>
+            <a:ext cx="8229600" cy="640080"/>
           </a:xfrm>
           <a:prstGeom prst="rect">
             <a:avLst/>
@@ -9256,7 +9544,7 @@
           <a:p>
             <a:pPr algn="l"/>
             <a:r>
-              <a:rPr sz="2800" b="1">
+              <a:rPr sz="2200" b="1">
                 <a:solidFill>
                   <a:srgbClr val="1C2533"/>
                 </a:solidFill>
@@ -9275,8 +9563,8 @@
         </p:nvSpPr>
         <p:spPr>
           <a:xfrm>
-            <a:off x="457200" y="1280160"/>
-            <a:ext cx="8229600" cy="365760"/>
+            <a:off x="457200" y="1325880"/>
+            <a:ext cx="8229600" cy="411480"/>
           </a:xfrm>
           <a:prstGeom prst="rect">
             <a:avLst/>
@@ -9291,7 +9579,7 @@
           <a:p>
             <a:pPr algn="l"/>
             <a:r>
-              <a:rPr sz="1600" b="0">
+              <a:rPr sz="1500" b="0">
                 <a:solidFill>
                   <a:srgbClr val="475569"/>
                 </a:solidFill>
@@ -9311,22 +9599,26 @@
         <p:spPr>
           <a:xfrm>
             <a:off x="457200" y="1828800"/>
-            <a:ext cx="8229600" cy="2926080"/>
-          </a:xfrm>
-          <a:prstGeom prst="rect">
-            <a:avLst/>
-          </a:prstGeom>
-          <a:noFill/>
-        </p:spPr>
-        <p:txBody>
-          <a:bodyPr wrap="square">
-            <a:spAutoFit/>
-          </a:bodyPr>
-          <a:lstStyle/>
-          <a:p>
-            <a:pPr algn="l"/>
-            <a:r>
-              <a:rPr sz="1400" b="0">
+            <a:ext cx="8229600" cy="2743200"/>
+          </a:xfrm>
+          <a:prstGeom prst="rect">
+            <a:avLst/>
+          </a:prstGeom>
+          <a:noFill/>
+        </p:spPr>
+        <p:txBody>
+          <a:bodyPr wrap="square">
+            <a:spAutoFit/>
+          </a:bodyPr>
+          <a:lstStyle/>
+          <a:p>
+            <a:pPr algn="l">
+              <a:spcAft>
+                <a:spcPts val="200"/>
+              </a:spcAft>
+            </a:pPr>
+            <a:r>
+              <a:rPr sz="1300" b="0">
                 <a:solidFill>
                   <a:srgbClr val="475569"/>
                 </a:solidFill>
@@ -9335,7 +9627,7 @@
               <a:t>•  DFT delivers E</a:t>
             </a:r>
             <a:r>
-              <a:rPr sz="1400" b="0" baseline="-25000">
+              <a:rPr sz="1300" b="0" baseline="-25000">
                 <a:solidFill>
                   <a:srgbClr val="475569"/>
                 </a:solidFill>
@@ -9344,7 +9636,7 @@
               <a:t>g</a:t>
             </a:r>
             <a:r>
-              <a:rPr sz="1400" b="0">
+              <a:rPr sz="1300" b="0">
                 <a:solidFill>
                   <a:srgbClr val="475569"/>
                 </a:solidFill>
@@ -9353,7 +9645,7 @@
               <a:t>, m</a:t>
             </a:r>
             <a:r>
-              <a:rPr sz="1400" b="0" baseline="30000">
+              <a:rPr sz="1300" b="0" baseline="30000">
                 <a:solidFill>
                   <a:srgbClr val="475569"/>
                 </a:solidFill>
@@ -9362,7 +9654,7 @@
               <a:t>*</a:t>
             </a:r>
             <a:r>
-              <a:rPr sz="1400" b="0">
+              <a:rPr sz="1300" b="0">
                 <a:solidFill>
                   <a:srgbClr val="475569"/>
                 </a:solidFill>
@@ -9371,7 +9663,7 @@
               <a:t>, ε and E</a:t>
             </a:r>
             <a:r>
-              <a:rPr sz="1400" b="0" baseline="-25000">
+              <a:rPr sz="1300" b="0" baseline="-25000">
                 <a:solidFill>
                   <a:srgbClr val="475569"/>
                 </a:solidFill>
@@ -9380,7 +9672,7 @@
               <a:t>b</a:t>
             </a:r>
             <a:r>
-              <a:rPr sz="1400" b="0">
+              <a:rPr sz="1300" b="0">
                 <a:solidFill>
                   <a:srgbClr val="475569"/>
                 </a:solidFill>
@@ -9390,9 +9682,13 @@
             </a:r>
           </a:p>
           <a:p>
-            <a:pPr algn="l"/>
-            <a:r>
-              <a:rPr sz="1400" b="0">
+            <a:pPr algn="l">
+              <a:spcAft>
+                <a:spcPts val="200"/>
+              </a:spcAft>
+            </a:pPr>
+            <a:r>
+              <a:rPr sz="1300" b="0">
                 <a:solidFill>
                   <a:srgbClr val="475569"/>
                 </a:solidFill>
@@ -9402,9 +9698,13 @@
             </a:r>
           </a:p>
           <a:p>
-            <a:pPr algn="l"/>
-            <a:r>
-              <a:rPr sz="1400" b="0">
+            <a:pPr algn="l">
+              <a:spcAft>
+                <a:spcPts val="200"/>
+              </a:spcAft>
+            </a:pPr>
+            <a:r>
+              <a:rPr sz="1300" b="0">
                 <a:solidFill>
                   <a:srgbClr val="475569"/>
                 </a:solidFill>
@@ -9414,9 +9714,13 @@
             </a:r>
           </a:p>
           <a:p>
-            <a:pPr algn="l"/>
-            <a:r>
-              <a:rPr sz="1400" b="0">
+            <a:pPr algn="l">
+              <a:spcAft>
+                <a:spcPts val="200"/>
+              </a:spcAft>
+            </a:pPr>
+            <a:r>
+              <a:rPr sz="1300" b="0">
                 <a:solidFill>
                   <a:srgbClr val="475569"/>
                 </a:solidFill>
@@ -9426,9 +9730,13 @@
             </a:r>
           </a:p>
           <a:p>
-            <a:pPr algn="l"/>
-            <a:r>
-              <a:rPr sz="1400" b="0">
+            <a:pPr algn="l">
+              <a:spcAft>
+                <a:spcPts val="200"/>
+              </a:spcAft>
+            </a:pPr>
+            <a:r>
+              <a:rPr sz="1300" b="0">
                 <a:solidFill>
                   <a:srgbClr val="475569"/>
                 </a:solidFill>
@@ -9438,9 +9746,13 @@
             </a:r>
           </a:p>
           <a:p>
-            <a:pPr algn="l"/>
-            <a:r>
-              <a:rPr sz="1400" b="0">
+            <a:pPr algn="l">
+              <a:spcAft>
+                <a:spcPts val="200"/>
+              </a:spcAft>
+            </a:pPr>
+            <a:r>
+              <a:rPr sz="1300" b="0">
                 <a:solidFill>
                   <a:srgbClr val="475569"/>
                 </a:solidFill>
@@ -9459,7 +9771,7 @@
         </p:nvSpPr>
         <p:spPr>
           <a:xfrm>
-            <a:off x="6858000" y="4617720"/>
+            <a:off x="6858000" y="4663440"/>
             <a:ext cx="1828800" cy="274320"/>
           </a:xfrm>
           <a:prstGeom prst="rect">
@@ -9582,8 +9894,8 @@
         </p:nvSpPr>
         <p:spPr>
           <a:xfrm>
-            <a:off x="457200" y="731520"/>
-            <a:ext cx="8229600" cy="548640"/>
+            <a:off x="457200" y="640080"/>
+            <a:ext cx="8229600" cy="640080"/>
           </a:xfrm>
           <a:prstGeom prst="rect">
             <a:avLst/>
@@ -9598,7 +9910,7 @@
           <a:p>
             <a:pPr algn="l"/>
             <a:r>
-              <a:rPr sz="2800" b="1">
+              <a:rPr sz="2200" b="1">
                 <a:solidFill>
                   <a:srgbClr val="1C2533"/>
                 </a:solidFill>
@@ -9617,8 +9929,8 @@
         </p:nvSpPr>
         <p:spPr>
           <a:xfrm>
-            <a:off x="457200" y="1280160"/>
-            <a:ext cx="8229600" cy="365760"/>
+            <a:off x="457200" y="1325880"/>
+            <a:ext cx="8229600" cy="411480"/>
           </a:xfrm>
           <a:prstGeom prst="rect">
             <a:avLst/>
@@ -9633,7 +9945,7 @@
           <a:p>
             <a:pPr algn="l"/>
             <a:r>
-              <a:rPr sz="1600" b="0">
+              <a:rPr sz="1500" b="0">
                 <a:solidFill>
                   <a:srgbClr val="475569"/>
                 </a:solidFill>
@@ -9653,22 +9965,26 @@
         <p:spPr>
           <a:xfrm>
             <a:off x="457200" y="1828800"/>
-            <a:ext cx="8229600" cy="2926080"/>
-          </a:xfrm>
-          <a:prstGeom prst="rect">
-            <a:avLst/>
-          </a:prstGeom>
-          <a:noFill/>
-        </p:spPr>
-        <p:txBody>
-          <a:bodyPr wrap="square">
-            <a:spAutoFit/>
-          </a:bodyPr>
-          <a:lstStyle/>
-          <a:p>
-            <a:pPr algn="l"/>
-            <a:r>
-              <a:rPr sz="1400" b="0">
+            <a:ext cx="8229600" cy="2743200"/>
+          </a:xfrm>
+          <a:prstGeom prst="rect">
+            <a:avLst/>
+          </a:prstGeom>
+          <a:noFill/>
+        </p:spPr>
+        <p:txBody>
+          <a:bodyPr wrap="square">
+            <a:spAutoFit/>
+          </a:bodyPr>
+          <a:lstStyle/>
+          <a:p>
+            <a:pPr algn="l">
+              <a:spcAft>
+                <a:spcPts val="200"/>
+              </a:spcAft>
+            </a:pPr>
+            <a:r>
+              <a:rPr sz="1300" b="0">
                 <a:solidFill>
                   <a:srgbClr val="475569"/>
                 </a:solidFill>
@@ -9678,9 +9994,13 @@
             </a:r>
           </a:p>
           <a:p>
-            <a:pPr algn="l"/>
-            <a:r>
-              <a:rPr sz="1400" b="0">
+            <a:pPr algn="l">
+              <a:spcAft>
+                <a:spcPts val="200"/>
+              </a:spcAft>
+            </a:pPr>
+            <a:r>
+              <a:rPr sz="1300" b="0">
                 <a:solidFill>
                   <a:srgbClr val="475569"/>
                 </a:solidFill>
@@ -9690,9 +10010,13 @@
             </a:r>
           </a:p>
           <a:p>
-            <a:pPr algn="l"/>
-            <a:r>
-              <a:rPr sz="1400" b="0">
+            <a:pPr algn="l">
+              <a:spcAft>
+                <a:spcPts val="200"/>
+              </a:spcAft>
+            </a:pPr>
+            <a:r>
+              <a:rPr sz="1300" b="0">
                 <a:solidFill>
                   <a:srgbClr val="475569"/>
                 </a:solidFill>
@@ -9702,9 +10026,13 @@
             </a:r>
           </a:p>
           <a:p>
-            <a:pPr algn="l"/>
-            <a:r>
-              <a:rPr sz="1400" b="0">
+            <a:pPr algn="l">
+              <a:spcAft>
+                <a:spcPts val="200"/>
+              </a:spcAft>
+            </a:pPr>
+            <a:r>
+              <a:rPr sz="1300" b="0">
                 <a:solidFill>
                   <a:srgbClr val="475569"/>
                 </a:solidFill>
@@ -9714,9 +10042,13 @@
             </a:r>
           </a:p>
           <a:p>
-            <a:pPr algn="l"/>
-            <a:r>
-              <a:rPr sz="1400" b="0">
+            <a:pPr algn="l">
+              <a:spcAft>
+                <a:spcPts val="200"/>
+              </a:spcAft>
+            </a:pPr>
+            <a:r>
+              <a:rPr sz="1300" b="0">
                 <a:solidFill>
                   <a:srgbClr val="475569"/>
                 </a:solidFill>
@@ -9725,7 +10057,7 @@
               <a:t>•  Selective contacts: Robin formulation in S</a:t>
             </a:r>
             <a:r>
-              <a:rPr sz="1400" b="0" baseline="-25000">
+              <a:rPr sz="1300" b="0" baseline="-25000">
                 <a:solidFill>
                   <a:srgbClr val="475569"/>
                 </a:solidFill>
@@ -9734,7 +10066,7 @@
               <a:t>n</a:t>
             </a:r>
             <a:r>
-              <a:rPr sz="1400" b="0">
+              <a:rPr sz="1300" b="0">
                 <a:solidFill>
                   <a:srgbClr val="475569"/>
                 </a:solidFill>
@@ -9743,7 +10075,7 @@
               <a:t> and S</a:t>
             </a:r>
             <a:r>
-              <a:rPr sz="1400" b="0" baseline="-25000">
+              <a:rPr sz="1300" b="0" baseline="-25000">
                 <a:solidFill>
                   <a:srgbClr val="475569"/>
                 </a:solidFill>
@@ -9752,7 +10084,7 @@
               <a:t>p</a:t>
             </a:r>
             <a:r>
-              <a:rPr sz="1400" b="0">
+              <a:rPr sz="1300" b="0">
                 <a:solidFill>
                   <a:srgbClr val="475569"/>
                 </a:solidFill>
@@ -9762,9 +10094,13 @@
             </a:r>
           </a:p>
           <a:p>
-            <a:pPr algn="l"/>
-            <a:r>
-              <a:rPr sz="1400" b="0">
+            <a:pPr algn="l">
+              <a:spcAft>
+                <a:spcPts val="200"/>
+              </a:spcAft>
+            </a:pPr>
+            <a:r>
+              <a:rPr sz="1300" b="0">
                 <a:solidFill>
                   <a:srgbClr val="475569"/>
                 </a:solidFill>
@@ -9783,7 +10119,7 @@
         </p:nvSpPr>
         <p:spPr>
           <a:xfrm>
-            <a:off x="6858000" y="4617720"/>
+            <a:off x="6858000" y="4663440"/>
             <a:ext cx="1828800" cy="274320"/>
           </a:xfrm>
           <a:prstGeom prst="rect">
@@ -9906,8 +10242,8 @@
         </p:nvSpPr>
         <p:spPr>
           <a:xfrm>
-            <a:off x="457200" y="731520"/>
-            <a:ext cx="8229600" cy="548640"/>
+            <a:off x="457200" y="640080"/>
+            <a:ext cx="8229600" cy="640080"/>
           </a:xfrm>
           <a:prstGeom prst="rect">
             <a:avLst/>
@@ -9922,7 +10258,7 @@
           <a:p>
             <a:pPr algn="l"/>
             <a:r>
-              <a:rPr sz="2800" b="1">
+              <a:rPr sz="2200" b="1">
                 <a:solidFill>
                   <a:srgbClr val="1C2533"/>
                 </a:solidFill>
@@ -9941,8 +10277,8 @@
         </p:nvSpPr>
         <p:spPr>
           <a:xfrm>
-            <a:off x="457200" y="1280160"/>
-            <a:ext cx="8229600" cy="365760"/>
+            <a:off x="457200" y="1325880"/>
+            <a:ext cx="8229600" cy="411480"/>
           </a:xfrm>
           <a:prstGeom prst="rect">
             <a:avLst/>
@@ -9957,7 +10293,7 @@
           <a:p>
             <a:pPr algn="l"/>
             <a:r>
-              <a:rPr sz="1600" b="0">
+              <a:rPr sz="1500" b="0">
                 <a:solidFill>
                   <a:srgbClr val="475569"/>
                 </a:solidFill>
@@ -9977,22 +10313,26 @@
         <p:spPr>
           <a:xfrm>
             <a:off x="457200" y="1828800"/>
-            <a:ext cx="8229600" cy="2926080"/>
-          </a:xfrm>
-          <a:prstGeom prst="rect">
-            <a:avLst/>
-          </a:prstGeom>
-          <a:noFill/>
-        </p:spPr>
-        <p:txBody>
-          <a:bodyPr wrap="square">
-            <a:spAutoFit/>
-          </a:bodyPr>
-          <a:lstStyle/>
-          <a:p>
-            <a:pPr algn="l"/>
-            <a:r>
-              <a:rPr sz="1400" b="0">
+            <a:ext cx="8229600" cy="2743200"/>
+          </a:xfrm>
+          <a:prstGeom prst="rect">
+            <a:avLst/>
+          </a:prstGeom>
+          <a:noFill/>
+        </p:spPr>
+        <p:txBody>
+          <a:bodyPr wrap="square">
+            <a:spAutoFit/>
+          </a:bodyPr>
+          <a:lstStyle/>
+          <a:p>
+            <a:pPr algn="l">
+              <a:spcAft>
+                <a:spcPts val="200"/>
+              </a:spcAft>
+            </a:pPr>
+            <a:r>
+              <a:rPr sz="1300" b="0">
                 <a:solidFill>
                   <a:srgbClr val="475569"/>
                 </a:solidFill>
@@ -10001,7 +10341,7 @@
               <a:t>•  Electron continuity: ∂n/∂t = (1/q) ∇·J</a:t>
             </a:r>
             <a:r>
-              <a:rPr sz="1400" b="0" baseline="-25000">
+              <a:rPr sz="1300" b="0" baseline="-25000">
                 <a:solidFill>
                   <a:srgbClr val="475569"/>
                 </a:solidFill>
@@ -10010,7 +10350,7 @@
               <a:t>n</a:t>
             </a:r>
             <a:r>
-              <a:rPr sz="1400" b="0">
+              <a:rPr sz="1300" b="0">
                 <a:solidFill>
                   <a:srgbClr val="475569"/>
                 </a:solidFill>
@@ -10020,9 +10360,13 @@
             </a:r>
           </a:p>
           <a:p>
-            <a:pPr algn="l"/>
-            <a:r>
-              <a:rPr sz="1400" b="0">
+            <a:pPr algn="l">
+              <a:spcAft>
+                <a:spcPts val="200"/>
+              </a:spcAft>
+            </a:pPr>
+            <a:r>
+              <a:rPr sz="1300" b="0">
                 <a:solidFill>
                   <a:srgbClr val="475569"/>
                 </a:solidFill>
@@ -10031,7 +10375,7 @@
               <a:t>•  Hole continuity:     ∂p/∂t = −(1/q) ∇·J</a:t>
             </a:r>
             <a:r>
-              <a:rPr sz="1400" b="0" baseline="-25000">
+              <a:rPr sz="1300" b="0" baseline="-25000">
                 <a:solidFill>
                   <a:srgbClr val="475569"/>
                 </a:solidFill>
@@ -10040,7 +10384,7 @@
               <a:t>p</a:t>
             </a:r>
             <a:r>
-              <a:rPr sz="1400" b="0">
+              <a:rPr sz="1300" b="0">
                 <a:solidFill>
                   <a:srgbClr val="475569"/>
                 </a:solidFill>
@@ -10050,9 +10394,13 @@
             </a:r>
           </a:p>
           <a:p>
-            <a:pPr algn="l"/>
-            <a:r>
-              <a:rPr sz="1400" b="0">
+            <a:pPr algn="l">
+              <a:spcAft>
+                <a:spcPts val="200"/>
+              </a:spcAft>
+            </a:pPr>
+            <a:r>
+              <a:rPr sz="1300" b="0">
                 <a:solidFill>
                   <a:srgbClr val="475569"/>
                 </a:solidFill>
@@ -10061,7 +10409,7 @@
               <a:t>•  Poisson equation: ∇·(ε</a:t>
             </a:r>
             <a:r>
-              <a:rPr sz="1400" b="0" baseline="-25000">
+              <a:rPr sz="1300" b="0" baseline="-25000">
                 <a:solidFill>
                   <a:srgbClr val="475569"/>
                 </a:solidFill>
@@ -10070,7 +10418,7 @@
               <a:t>r</a:t>
             </a:r>
             <a:r>
-              <a:rPr sz="1400" b="0">
+              <a:rPr sz="1300" b="0">
                 <a:solidFill>
                   <a:srgbClr val="475569"/>
                 </a:solidFill>
@@ -10079,7 +10427,7 @@
               <a:t> ε</a:t>
             </a:r>
             <a:r>
-              <a:rPr sz="1400" b="0" baseline="-25000">
+              <a:rPr sz="1300" b="0" baseline="-25000">
                 <a:solidFill>
                   <a:srgbClr val="475569"/>
                 </a:solidFill>
@@ -10088,7 +10436,7 @@
               <a:t>0</a:t>
             </a:r>
             <a:r>
-              <a:rPr sz="1400" b="0">
+              <a:rPr sz="1300" b="0">
                 <a:solidFill>
                   <a:srgbClr val="475569"/>
                 </a:solidFill>
@@ -10097,7 +10445,7 @@
               <a:t> ∇φ) = −q (p − n + N</a:t>
             </a:r>
             <a:r>
-              <a:rPr sz="1400" b="0" baseline="-25000">
+              <a:rPr sz="1300" b="0" baseline="-25000">
                 <a:solidFill>
                   <a:srgbClr val="475569"/>
                 </a:solidFill>
@@ -10106,7 +10454,7 @@
               <a:t>D</a:t>
             </a:r>
             <a:r>
-              <a:rPr sz="1400" b="0">
+              <a:rPr sz="1300" b="0">
                 <a:solidFill>
                   <a:srgbClr val="475569"/>
                 </a:solidFill>
@@ -10115,7 +10463,7 @@
               <a:t> − N</a:t>
             </a:r>
             <a:r>
-              <a:rPr sz="1400" b="0" baseline="-25000">
+              <a:rPr sz="1300" b="0" baseline="-25000">
                 <a:solidFill>
                   <a:srgbClr val="475569"/>
                 </a:solidFill>
@@ -10124,7 +10472,7 @@
               <a:t>A</a:t>
             </a:r>
             <a:r>
-              <a:rPr sz="1400" b="0">
+              <a:rPr sz="1300" b="0">
                 <a:solidFill>
                   <a:srgbClr val="475569"/>
                 </a:solidFill>
@@ -10133,7 +10481,7 @@
               <a:t> + ρ</a:t>
             </a:r>
             <a:r>
-              <a:rPr sz="1400" b="0" baseline="-25000">
+              <a:rPr sz="1300" b="0" baseline="-25000">
                 <a:solidFill>
                   <a:srgbClr val="475569"/>
                 </a:solidFill>
@@ -10142,7 +10490,7 @@
               <a:t>ion</a:t>
             </a:r>
             <a:r>
-              <a:rPr sz="1400" b="0">
+              <a:rPr sz="1300" b="0">
                 <a:solidFill>
                   <a:srgbClr val="475569"/>
                 </a:solidFill>
@@ -10152,9 +10500,13 @@
             </a:r>
           </a:p>
           <a:p>
-            <a:pPr algn="l"/>
-            <a:r>
-              <a:rPr sz="1400" b="0">
+            <a:pPr algn="l">
+              <a:spcAft>
+                <a:spcPts val="200"/>
+              </a:spcAft>
+            </a:pPr>
+            <a:r>
+              <a:rPr sz="1300" b="0">
                 <a:solidFill>
                   <a:srgbClr val="475569"/>
                 </a:solidFill>
@@ -10163,7 +10515,7 @@
               <a:t>•  Current densities: J</a:t>
             </a:r>
             <a:r>
-              <a:rPr sz="1400" b="0" baseline="-25000">
+              <a:rPr sz="1300" b="0" baseline="-25000">
                 <a:solidFill>
                   <a:srgbClr val="475569"/>
                 </a:solidFill>
@@ -10172,7 +10524,7 @@
               <a:t>n</a:t>
             </a:r>
             <a:r>
-              <a:rPr sz="1400" b="0">
+              <a:rPr sz="1300" b="0">
                 <a:solidFill>
                   <a:srgbClr val="475569"/>
                 </a:solidFill>
@@ -10181,7 +10533,7 @@
               <a:t> = q μ</a:t>
             </a:r>
             <a:r>
-              <a:rPr sz="1400" b="0" baseline="-25000">
+              <a:rPr sz="1300" b="0" baseline="-25000">
                 <a:solidFill>
                   <a:srgbClr val="475569"/>
                 </a:solidFill>
@@ -10190,7 +10542,7 @@
               <a:t>n</a:t>
             </a:r>
             <a:r>
-              <a:rPr sz="1400" b="0">
+              <a:rPr sz="1300" b="0">
                 <a:solidFill>
                   <a:srgbClr val="475569"/>
                 </a:solidFill>
@@ -10199,7 +10551,7 @@
               <a:t> n E + q D</a:t>
             </a:r>
             <a:r>
-              <a:rPr sz="1400" b="0" baseline="-25000">
+              <a:rPr sz="1300" b="0" baseline="-25000">
                 <a:solidFill>
                   <a:srgbClr val="475569"/>
                 </a:solidFill>
@@ -10208,7 +10560,7 @@
               <a:t>n</a:t>
             </a:r>
             <a:r>
-              <a:rPr sz="1400" b="0">
+              <a:rPr sz="1300" b="0">
                 <a:solidFill>
                   <a:srgbClr val="475569"/>
                 </a:solidFill>
@@ -10217,7 +10569,7 @@
               <a:t> ∇n · J</a:t>
             </a:r>
             <a:r>
-              <a:rPr sz="1400" b="0" baseline="-25000">
+              <a:rPr sz="1300" b="0" baseline="-25000">
                 <a:solidFill>
                   <a:srgbClr val="475569"/>
                 </a:solidFill>
@@ -10226,7 +10578,7 @@
               <a:t>p</a:t>
             </a:r>
             <a:r>
-              <a:rPr sz="1400" b="0">
+              <a:rPr sz="1300" b="0">
                 <a:solidFill>
                   <a:srgbClr val="475569"/>
                 </a:solidFill>
@@ -10235,7 +10587,7 @@
               <a:t> = q μ</a:t>
             </a:r>
             <a:r>
-              <a:rPr sz="1400" b="0" baseline="-25000">
+              <a:rPr sz="1300" b="0" baseline="-25000">
                 <a:solidFill>
                   <a:srgbClr val="475569"/>
                 </a:solidFill>
@@ -10244,7 +10596,7 @@
               <a:t>p</a:t>
             </a:r>
             <a:r>
-              <a:rPr sz="1400" b="0">
+              <a:rPr sz="1300" b="0">
                 <a:solidFill>
                   <a:srgbClr val="475569"/>
                 </a:solidFill>
@@ -10253,7 +10605,7 @@
               <a:t> p E − q D</a:t>
             </a:r>
             <a:r>
-              <a:rPr sz="1400" b="0" baseline="-25000">
+              <a:rPr sz="1300" b="0" baseline="-25000">
                 <a:solidFill>
                   <a:srgbClr val="475569"/>
                 </a:solidFill>
@@ -10262,7 +10614,7 @@
               <a:t>p</a:t>
             </a:r>
             <a:r>
-              <a:rPr sz="1400" b="0">
+              <a:rPr sz="1300" b="0">
                 <a:solidFill>
                   <a:srgbClr val="475569"/>
                 </a:solidFill>
@@ -10272,9 +10624,13 @@
             </a:r>
           </a:p>
           <a:p>
-            <a:pPr algn="l"/>
-            <a:r>
-              <a:rPr sz="1400" b="0">
+            <a:pPr algn="l">
+              <a:spcAft>
+                <a:spcPts val="200"/>
+              </a:spcAft>
+            </a:pPr>
+            <a:r>
+              <a:rPr sz="1300" b="0">
                 <a:solidFill>
                   <a:srgbClr val="475569"/>
                 </a:solidFill>
@@ -10283,7 +10639,7 @@
               <a:t>•  Recombination R: Shockley–Read–Hall, Auger and radiative channels; Einstein relation D = (k</a:t>
             </a:r>
             <a:r>
-              <a:rPr sz="1400" b="0" baseline="-25000">
+              <a:rPr sz="1300" b="0" baseline="-25000">
                 <a:solidFill>
                   <a:srgbClr val="475569"/>
                 </a:solidFill>
@@ -10292,7 +10648,7 @@
               <a:t>B</a:t>
             </a:r>
             <a:r>
-              <a:rPr sz="1400" b="0">
+              <a:rPr sz="1300" b="0">
                 <a:solidFill>
                   <a:srgbClr val="475569"/>
                 </a:solidFill>
@@ -10302,9 +10658,13 @@
             </a:r>
           </a:p>
           <a:p>
-            <a:pPr algn="l"/>
-            <a:r>
-              <a:rPr sz="1400" b="0">
+            <a:pPr algn="l">
+              <a:spcAft>
+                <a:spcPts val="200"/>
+              </a:spcAft>
+            </a:pPr>
+            <a:r>
+              <a:rPr sz="1300" b="0">
                 <a:solidFill>
                   <a:srgbClr val="475569"/>
                 </a:solidFill>
@@ -10323,7 +10683,7 @@
         </p:nvSpPr>
         <p:spPr>
           <a:xfrm>
-            <a:off x="6858000" y="4617720"/>
+            <a:off x="6858000" y="4663440"/>
             <a:ext cx="1828800" cy="274320"/>
           </a:xfrm>
           <a:prstGeom prst="rect">
@@ -10446,8 +10806,8 @@
         </p:nvSpPr>
         <p:spPr>
           <a:xfrm>
-            <a:off x="457200" y="731520"/>
-            <a:ext cx="8229600" cy="548640"/>
+            <a:off x="457200" y="640080"/>
+            <a:ext cx="8229600" cy="640080"/>
           </a:xfrm>
           <a:prstGeom prst="rect">
             <a:avLst/>
@@ -10462,7 +10822,7 @@
           <a:p>
             <a:pPr algn="l"/>
             <a:r>
-              <a:rPr sz="2800" b="1">
+              <a:rPr sz="2200" b="1">
                 <a:solidFill>
                   <a:srgbClr val="1C2533"/>
                 </a:solidFill>
@@ -10481,8 +10841,8 @@
         </p:nvSpPr>
         <p:spPr>
           <a:xfrm>
-            <a:off x="457200" y="1280160"/>
-            <a:ext cx="8229600" cy="365760"/>
+            <a:off x="457200" y="1325880"/>
+            <a:ext cx="8229600" cy="411480"/>
           </a:xfrm>
           <a:prstGeom prst="rect">
             <a:avLst/>
@@ -10497,7 +10857,7 @@
           <a:p>
             <a:pPr algn="l"/>
             <a:r>
-              <a:rPr sz="1600" b="0">
+              <a:rPr sz="1500" b="0">
                 <a:solidFill>
                   <a:srgbClr val="475569"/>
                 </a:solidFill>
@@ -10517,22 +10877,26 @@
         <p:spPr>
           <a:xfrm>
             <a:off x="457200" y="1828800"/>
-            <a:ext cx="8229600" cy="2926080"/>
-          </a:xfrm>
-          <a:prstGeom prst="rect">
-            <a:avLst/>
-          </a:prstGeom>
-          <a:noFill/>
-        </p:spPr>
-        <p:txBody>
-          <a:bodyPr wrap="square">
-            <a:spAutoFit/>
-          </a:bodyPr>
-          <a:lstStyle/>
-          <a:p>
-            <a:pPr algn="l"/>
-            <a:r>
-              <a:rPr sz="1400" b="0">
+            <a:ext cx="8229600" cy="2743200"/>
+          </a:xfrm>
+          <a:prstGeom prst="rect">
+            <a:avLst/>
+          </a:prstGeom>
+          <a:noFill/>
+        </p:spPr>
+        <p:txBody>
+          <a:bodyPr wrap="square">
+            <a:spAutoFit/>
+          </a:bodyPr>
+          <a:lstStyle/>
+          <a:p>
+            <a:pPr algn="l">
+              <a:spcAft>
+                <a:spcPts val="200"/>
+              </a:spcAft>
+            </a:pPr>
+            <a:r>
+              <a:rPr sz="1300" b="0">
                 <a:solidFill>
                   <a:srgbClr val="475569"/>
                 </a:solidFill>
@@ -10541,7 +10905,7 @@
               <a:t>•  Each layer j is represented by a 2×2 characteristic matrix L</a:t>
             </a:r>
             <a:r>
-              <a:rPr sz="1400" b="0" baseline="-25000">
+              <a:rPr sz="1300" b="0" baseline="-25000">
                 <a:solidFill>
                   <a:srgbClr val="475569"/>
                 </a:solidFill>
@@ -10550,7 +10914,7 @@
               <a:t>j</a:t>
             </a:r>
             <a:r>
-              <a:rPr sz="1400" b="0">
+              <a:rPr sz="1300" b="0">
                 <a:solidFill>
                   <a:srgbClr val="475569"/>
                 </a:solidFill>
@@ -10560,9 +10924,13 @@
             </a:r>
           </a:p>
           <a:p>
-            <a:pPr algn="l"/>
-            <a:r>
-              <a:rPr sz="1400" b="0">
+            <a:pPr algn="l">
+              <a:spcAft>
+                <a:spcPts val="200"/>
+              </a:spcAft>
+            </a:pPr>
+            <a:r>
+              <a:rPr sz="1300" b="0">
                 <a:solidFill>
                   <a:srgbClr val="475569"/>
                 </a:solidFill>
@@ -10571,7 +10939,7 @@
               <a:t>•  L</a:t>
             </a:r>
             <a:r>
-              <a:rPr sz="1400" b="0" baseline="-25000">
+              <a:rPr sz="1300" b="0" baseline="-25000">
                 <a:solidFill>
                   <a:srgbClr val="475569"/>
                 </a:solidFill>
@@ -10580,7 +10948,7 @@
               <a:t>j</a:t>
             </a:r>
             <a:r>
-              <a:rPr sz="1400" b="0">
+              <a:rPr sz="1300" b="0">
                 <a:solidFill>
                   <a:srgbClr val="475569"/>
                 </a:solidFill>
@@ -10589,7 +10957,7 @@
               <a:t> = [[cos δ</a:t>
             </a:r>
             <a:r>
-              <a:rPr sz="1400" b="0" baseline="-25000">
+              <a:rPr sz="1300" b="0" baseline="-25000">
                 <a:solidFill>
                   <a:srgbClr val="475569"/>
                 </a:solidFill>
@@ -10598,7 +10966,7 @@
               <a:t>j</a:t>
             </a:r>
             <a:r>
-              <a:rPr sz="1400" b="0">
+              <a:rPr sz="1300" b="0">
                 <a:solidFill>
                   <a:srgbClr val="475569"/>
                 </a:solidFill>
@@ -10607,7 +10975,7 @@
               <a:t>, i sin δ</a:t>
             </a:r>
             <a:r>
-              <a:rPr sz="1400" b="0" baseline="-25000">
+              <a:rPr sz="1300" b="0" baseline="-25000">
                 <a:solidFill>
                   <a:srgbClr val="475569"/>
                 </a:solidFill>
@@ -10616,7 +10984,7 @@
               <a:t>j</a:t>
             </a:r>
             <a:r>
-              <a:rPr sz="1400" b="0">
+              <a:rPr sz="1300" b="0">
                 <a:solidFill>
                   <a:srgbClr val="475569"/>
                 </a:solidFill>
@@ -10625,7 +10993,7 @@
               <a:t> / η</a:t>
             </a:r>
             <a:r>
-              <a:rPr sz="1400" b="0" baseline="-25000">
+              <a:rPr sz="1300" b="0" baseline="-25000">
                 <a:solidFill>
                   <a:srgbClr val="475569"/>
                 </a:solidFill>
@@ -10634,7 +11002,7 @@
               <a:t>j</a:t>
             </a:r>
             <a:r>
-              <a:rPr sz="1400" b="0">
+              <a:rPr sz="1300" b="0">
                 <a:solidFill>
                   <a:srgbClr val="475569"/>
                 </a:solidFill>
@@ -10643,7 +11011,7 @@
               <a:t>], [i η</a:t>
             </a:r>
             <a:r>
-              <a:rPr sz="1400" b="0" baseline="-25000">
+              <a:rPr sz="1300" b="0" baseline="-25000">
                 <a:solidFill>
                   <a:srgbClr val="475569"/>
                 </a:solidFill>
@@ -10652,7 +11020,7 @@
               <a:t>j</a:t>
             </a:r>
             <a:r>
-              <a:rPr sz="1400" b="0">
+              <a:rPr sz="1300" b="0">
                 <a:solidFill>
                   <a:srgbClr val="475569"/>
                 </a:solidFill>
@@ -10661,7 +11029,7 @@
               <a:t> sin δ</a:t>
             </a:r>
             <a:r>
-              <a:rPr sz="1400" b="0" baseline="-25000">
+              <a:rPr sz="1300" b="0" baseline="-25000">
                 <a:solidFill>
                   <a:srgbClr val="475569"/>
                 </a:solidFill>
@@ -10670,7 +11038,7 @@
               <a:t>j</a:t>
             </a:r>
             <a:r>
-              <a:rPr sz="1400" b="0">
+              <a:rPr sz="1300" b="0">
                 <a:solidFill>
                   <a:srgbClr val="475569"/>
                 </a:solidFill>
@@ -10679,7 +11047,7 @@
               <a:t>, cos δ</a:t>
             </a:r>
             <a:r>
-              <a:rPr sz="1400" b="0" baseline="-25000">
+              <a:rPr sz="1300" b="0" baseline="-25000">
                 <a:solidFill>
                   <a:srgbClr val="475569"/>
                 </a:solidFill>
@@ -10688,7 +11056,7 @@
               <a:t>j</a:t>
             </a:r>
             <a:r>
-              <a:rPr sz="1400" b="0">
+              <a:rPr sz="1300" b="0">
                 <a:solidFill>
                   <a:srgbClr val="475569"/>
                 </a:solidFill>
@@ -10698,9 +11066,13 @@
             </a:r>
           </a:p>
           <a:p>
-            <a:pPr algn="l"/>
-            <a:r>
-              <a:rPr sz="1400" b="0">
+            <a:pPr algn="l">
+              <a:spcAft>
+                <a:spcPts val="200"/>
+              </a:spcAft>
+            </a:pPr>
+            <a:r>
+              <a:rPr sz="1300" b="0">
                 <a:solidFill>
                   <a:srgbClr val="475569"/>
                 </a:solidFill>
@@ -10709,7 +11081,7 @@
               <a:t>•  Phase thickness δ</a:t>
             </a:r>
             <a:r>
-              <a:rPr sz="1400" b="0" baseline="-25000">
+              <a:rPr sz="1300" b="0" baseline="-25000">
                 <a:solidFill>
                   <a:srgbClr val="475569"/>
                 </a:solidFill>
@@ -10718,7 +11090,7 @@
               <a:t>j</a:t>
             </a:r>
             <a:r>
-              <a:rPr sz="1400" b="0">
+              <a:rPr sz="1300" b="0">
                 <a:solidFill>
                   <a:srgbClr val="475569"/>
                 </a:solidFill>
@@ -10727,7 +11099,7 @@
               <a:t> = (2π / λ) ñ</a:t>
             </a:r>
             <a:r>
-              <a:rPr sz="1400" b="0" baseline="-25000">
+              <a:rPr sz="1300" b="0" baseline="-25000">
                 <a:solidFill>
                   <a:srgbClr val="475569"/>
                 </a:solidFill>
@@ -10736,7 +11108,7 @@
               <a:t>j</a:t>
             </a:r>
             <a:r>
-              <a:rPr sz="1400" b="0">
+              <a:rPr sz="1300" b="0">
                 <a:solidFill>
                   <a:srgbClr val="475569"/>
                 </a:solidFill>
@@ -10745,7 +11117,7 @@
               <a:t> d</a:t>
             </a:r>
             <a:r>
-              <a:rPr sz="1400" b="0" baseline="-25000">
+              <a:rPr sz="1300" b="0" baseline="-25000">
                 <a:solidFill>
                   <a:srgbClr val="475569"/>
                 </a:solidFill>
@@ -10754,7 +11126,7 @@
               <a:t>j</a:t>
             </a:r>
             <a:r>
-              <a:rPr sz="1400" b="0">
+              <a:rPr sz="1300" b="0">
                 <a:solidFill>
                   <a:srgbClr val="475569"/>
                 </a:solidFill>
@@ -10763,7 +11135,7 @@
               <a:t> cos θ</a:t>
             </a:r>
             <a:r>
-              <a:rPr sz="1400" b="0" baseline="-25000">
+              <a:rPr sz="1300" b="0" baseline="-25000">
                 <a:solidFill>
                   <a:srgbClr val="475569"/>
                 </a:solidFill>
@@ -10772,7 +11144,7 @@
               <a:t>j</a:t>
             </a:r>
             <a:r>
-              <a:rPr sz="1400" b="0">
+              <a:rPr sz="1300" b="0">
                 <a:solidFill>
                   <a:srgbClr val="475569"/>
                 </a:solidFill>
@@ -10781,7 +11153,7 @@
               <a:t> with complex refractive index ñ</a:t>
             </a:r>
             <a:r>
-              <a:rPr sz="1400" b="0" baseline="-25000">
+              <a:rPr sz="1300" b="0" baseline="-25000">
                 <a:solidFill>
                   <a:srgbClr val="475569"/>
                 </a:solidFill>
@@ -10790,7 +11162,7 @@
               <a:t>j</a:t>
             </a:r>
             <a:r>
-              <a:rPr sz="1400" b="0">
+              <a:rPr sz="1300" b="0">
                 <a:solidFill>
                   <a:srgbClr val="475569"/>
                 </a:solidFill>
@@ -10800,9 +11172,13 @@
             </a:r>
           </a:p>
           <a:p>
-            <a:pPr algn="l"/>
-            <a:r>
-              <a:rPr sz="1400" b="0">
+            <a:pPr algn="l">
+              <a:spcAft>
+                <a:spcPts val="200"/>
+              </a:spcAft>
+            </a:pPr>
+            <a:r>
+              <a:rPr sz="1300" b="0">
                 <a:solidFill>
                   <a:srgbClr val="475569"/>
                 </a:solidFill>
@@ -10811,7 +11187,7 @@
               <a:t>•  System matrix M = L</a:t>
             </a:r>
             <a:r>
-              <a:rPr sz="1400" b="0" baseline="-25000">
+              <a:rPr sz="1300" b="0" baseline="-25000">
                 <a:solidFill>
                   <a:srgbClr val="475569"/>
                 </a:solidFill>
@@ -10820,7 +11196,7 @@
               <a:t>1</a:t>
             </a:r>
             <a:r>
-              <a:rPr sz="1400" b="0">
+              <a:rPr sz="1300" b="0">
                 <a:solidFill>
                   <a:srgbClr val="475569"/>
                 </a:solidFill>
@@ -10829,7 +11205,7 @@
               <a:t> L</a:t>
             </a:r>
             <a:r>
-              <a:rPr sz="1400" b="0" baseline="-25000">
+              <a:rPr sz="1300" b="0" baseline="-25000">
                 <a:solidFill>
                   <a:srgbClr val="475569"/>
                 </a:solidFill>
@@ -10838,7 +11214,7 @@
               <a:t>2</a:t>
             </a:r>
             <a:r>
-              <a:rPr sz="1400" b="0">
+              <a:rPr sz="1300" b="0">
                 <a:solidFill>
                   <a:srgbClr val="475569"/>
                 </a:solidFill>
@@ -10847,7 +11223,7 @@
               <a:t> … L</a:t>
             </a:r>
             <a:r>
-              <a:rPr sz="1400" b="0" baseline="-25000">
+              <a:rPr sz="1300" b="0" baseline="-25000">
                 <a:solidFill>
                   <a:srgbClr val="475569"/>
                 </a:solidFill>
@@ -10856,7 +11232,7 @@
               <a:t>N</a:t>
             </a:r>
             <a:r>
-              <a:rPr sz="1400" b="0">
+              <a:rPr sz="1300" b="0">
                 <a:solidFill>
                   <a:srgbClr val="475569"/>
                 </a:solidFill>
@@ -10866,9 +11242,13 @@
             </a:r>
           </a:p>
           <a:p>
-            <a:pPr algn="l"/>
-            <a:r>
-              <a:rPr sz="1400" b="0">
+            <a:pPr algn="l">
+              <a:spcAft>
+                <a:spcPts val="200"/>
+              </a:spcAft>
+            </a:pPr>
+            <a:r>
+              <a:rPr sz="1300" b="0">
                 <a:solidFill>
                   <a:srgbClr val="475569"/>
                 </a:solidFill>
@@ -10877,7 +11257,7 @@
               <a:t>•  Generation profile G(x, λ) ∝ |E(x, λ)|</a:t>
             </a:r>
             <a:r>
-              <a:rPr sz="1400" b="0" baseline="30000">
+              <a:rPr sz="1300" b="0" baseline="30000">
                 <a:solidFill>
                   <a:srgbClr val="475569"/>
                 </a:solidFill>
@@ -10886,7 +11266,7 @@
               <a:t>2</a:t>
             </a:r>
             <a:r>
-              <a:rPr sz="1400" b="0">
+              <a:rPr sz="1300" b="0">
                 <a:solidFill>
                   <a:srgbClr val="475569"/>
                 </a:solidFill>
@@ -10896,9 +11276,13 @@
             </a:r>
           </a:p>
           <a:p>
-            <a:pPr algn="l"/>
-            <a:r>
-              <a:rPr sz="1400" b="0">
+            <a:pPr algn="l">
+              <a:spcAft>
+                <a:spcPts val="200"/>
+              </a:spcAft>
+            </a:pPr>
+            <a:r>
+              <a:rPr sz="1300" b="0">
                 <a:solidFill>
                   <a:srgbClr val="475569"/>
                 </a:solidFill>
@@ -10917,7 +11301,7 @@
         </p:nvSpPr>
         <p:spPr>
           <a:xfrm>
-            <a:off x="6858000" y="4617720"/>
+            <a:off x="6858000" y="4663440"/>
             <a:ext cx="1828800" cy="274320"/>
           </a:xfrm>
           <a:prstGeom prst="rect">
@@ -11040,8 +11424,8 @@
         </p:nvSpPr>
         <p:spPr>
           <a:xfrm>
-            <a:off x="457200" y="731520"/>
-            <a:ext cx="8229600" cy="548640"/>
+            <a:off x="457200" y="640080"/>
+            <a:ext cx="8229600" cy="640080"/>
           </a:xfrm>
           <a:prstGeom prst="rect">
             <a:avLst/>
@@ -11056,7 +11440,7 @@
           <a:p>
             <a:pPr algn="l"/>
             <a:r>
-              <a:rPr sz="2800" b="1">
+              <a:rPr sz="2200" b="1">
                 <a:solidFill>
                   <a:srgbClr val="1C2533"/>
                 </a:solidFill>
@@ -11075,8 +11459,8 @@
         </p:nvSpPr>
         <p:spPr>
           <a:xfrm>
-            <a:off x="457200" y="1280160"/>
-            <a:ext cx="8229600" cy="365760"/>
+            <a:off x="457200" y="1325880"/>
+            <a:ext cx="8229600" cy="411480"/>
           </a:xfrm>
           <a:prstGeom prst="rect">
             <a:avLst/>
@@ -11091,7 +11475,7 @@
           <a:p>
             <a:pPr algn="l"/>
             <a:r>
-              <a:rPr sz="1600" b="0">
+              <a:rPr sz="1500" b="0">
                 <a:solidFill>
                   <a:srgbClr val="475569"/>
                 </a:solidFill>
@@ -11118,8 +11502,8 @@
         </p:blipFill>
         <p:spPr>
           <a:xfrm>
-            <a:off x="487679" y="1828800"/>
-            <a:ext cx="4876800" cy="2926080"/>
+            <a:off x="640080" y="1828800"/>
+            <a:ext cx="4572000" cy="2743200"/>
           </a:xfrm>
           <a:prstGeom prst="rect">
             <a:avLst/>
@@ -11135,22 +11519,26 @@
         <p:spPr>
           <a:xfrm>
             <a:off x="5669280" y="1828800"/>
-            <a:ext cx="3017520" cy="2926080"/>
-          </a:xfrm>
-          <a:prstGeom prst="rect">
-            <a:avLst/>
-          </a:prstGeom>
-          <a:noFill/>
-        </p:spPr>
-        <p:txBody>
-          <a:bodyPr wrap="square">
-            <a:spAutoFit/>
-          </a:bodyPr>
-          <a:lstStyle/>
-          <a:p>
-            <a:pPr algn="l"/>
-            <a:r>
-              <a:rPr sz="1400" b="0">
+            <a:ext cx="3017520" cy="2743200"/>
+          </a:xfrm>
+          <a:prstGeom prst="rect">
+            <a:avLst/>
+          </a:prstGeom>
+          <a:noFill/>
+        </p:spPr>
+        <p:txBody>
+          <a:bodyPr wrap="square">
+            <a:spAutoFit/>
+          </a:bodyPr>
+          <a:lstStyle/>
+          <a:p>
+            <a:pPr algn="l">
+              <a:spcAft>
+                <a:spcPts val="200"/>
+              </a:spcAft>
+            </a:pPr>
+            <a:r>
+              <a:rPr sz="1300" b="0">
                 <a:solidFill>
                   <a:srgbClr val="475569"/>
                 </a:solidFill>
@@ -11159,7 +11547,7 @@
               <a:t>•  Si: indirect band gap, ~22 % single-junction PCE ceiling, T</a:t>
             </a:r>
             <a:r>
-              <a:rPr sz="1400" b="0" baseline="-25000">
+              <a:rPr sz="1300" b="0" baseline="-25000">
                 <a:solidFill>
                   <a:srgbClr val="475569"/>
                 </a:solidFill>
@@ -11168,7 +11556,7 @@
               <a:t>80</a:t>
             </a:r>
             <a:r>
-              <a:rPr sz="1400" b="0">
+              <a:rPr sz="1300" b="0">
                 <a:solidFill>
                   <a:srgbClr val="475569"/>
                 </a:solidFill>
@@ -11177,7 +11565,7 @@
               <a:t> </a:t>
             </a:r>
             <a:r>
-              <a:rPr sz="1400" b="0" baseline="30000">
+              <a:rPr sz="1300" b="0" baseline="30000">
                 <a:solidFill>
                   <a:srgbClr val="475569"/>
                 </a:solidFill>
@@ -11186,7 +11574,7 @@
               <a:t>&gt;</a:t>
             </a:r>
             <a:r>
-              <a:rPr sz="1400" b="0">
+              <a:rPr sz="1300" b="0">
                 <a:solidFill>
                   <a:srgbClr val="475569"/>
                 </a:solidFill>
@@ -11195,7 +11583,7 @@
               <a:t> 10</a:t>
             </a:r>
             <a:r>
-              <a:rPr sz="1400" b="0" baseline="30000">
+              <a:rPr sz="1300" b="0" baseline="30000">
                 <a:solidFill>
                   <a:srgbClr val="475569"/>
                 </a:solidFill>
@@ -11204,7 +11592,7 @@
               <a:t>4</a:t>
             </a:r>
             <a:r>
-              <a:rPr sz="1400" b="0">
+              <a:rPr sz="1300" b="0">
                 <a:solidFill>
                   <a:srgbClr val="475569"/>
                 </a:solidFill>
@@ -11214,9 +11602,13 @@
             </a:r>
           </a:p>
           <a:p>
-            <a:pPr algn="l"/>
-            <a:r>
-              <a:rPr sz="1400" b="0">
+            <a:pPr algn="l">
+              <a:spcAft>
+                <a:spcPts val="200"/>
+              </a:spcAft>
+            </a:pPr>
+            <a:r>
+              <a:rPr sz="1300" b="0">
                 <a:solidFill>
                   <a:srgbClr val="475569"/>
                 </a:solidFill>
@@ -11226,9 +11618,13 @@
             </a:r>
           </a:p>
           <a:p>
-            <a:pPr algn="l"/>
-            <a:r>
-              <a:rPr sz="1400" b="0">
+            <a:pPr algn="l">
+              <a:spcAft>
+                <a:spcPts val="200"/>
+              </a:spcAft>
+            </a:pPr>
+            <a:r>
+              <a:rPr sz="1300" b="0">
                 <a:solidFill>
                   <a:srgbClr val="475569"/>
                 </a:solidFill>
@@ -11237,7 +11633,7 @@
               <a:t>•  Perovskite: PCE </a:t>
             </a:r>
             <a:r>
-              <a:rPr sz="1400" b="0" baseline="30000">
+              <a:rPr sz="1300" b="0" baseline="30000">
                 <a:solidFill>
                   <a:srgbClr val="475569"/>
                 </a:solidFill>
@@ -11246,7 +11642,7 @@
               <a:t>&gt;</a:t>
             </a:r>
             <a:r>
-              <a:rPr sz="1400" b="0">
+              <a:rPr sz="1300" b="0">
                 <a:solidFill>
                   <a:srgbClr val="475569"/>
                 </a:solidFill>
@@ -11255,7 +11651,7 @@
               <a:t> 26 %, T</a:t>
             </a:r>
             <a:r>
-              <a:rPr sz="1400" b="0" baseline="-25000">
+              <a:rPr sz="1300" b="0" baseline="-25000">
                 <a:solidFill>
                   <a:srgbClr val="475569"/>
                 </a:solidFill>
@@ -11264,7 +11660,7 @@
               <a:t>80</a:t>
             </a:r>
             <a:r>
-              <a:rPr sz="1400" b="0">
+              <a:rPr sz="1300" b="0">
                 <a:solidFill>
                   <a:srgbClr val="475569"/>
                 </a:solidFill>
@@ -11274,9 +11670,13 @@
             </a:r>
           </a:p>
           <a:p>
-            <a:pPr algn="l"/>
-            <a:r>
-              <a:rPr sz="1400" b="0">
+            <a:pPr algn="l">
+              <a:spcAft>
+                <a:spcPts val="200"/>
+              </a:spcAft>
+            </a:pPr>
+            <a:r>
+              <a:rPr sz="1300" b="0">
                 <a:solidFill>
                   <a:srgbClr val="475569"/>
                 </a:solidFill>
@@ -11285,7 +11685,7 @@
               <a:t>•  Detailed-balance limit at E</a:t>
             </a:r>
             <a:r>
-              <a:rPr sz="1400" b="0" baseline="-25000">
+              <a:rPr sz="1300" b="0" baseline="-25000">
                 <a:solidFill>
                   <a:srgbClr val="475569"/>
                 </a:solidFill>
@@ -11294,7 +11694,7 @@
               <a:t>g</a:t>
             </a:r>
             <a:r>
-              <a:rPr sz="1400" b="0">
+              <a:rPr sz="1300" b="0">
                 <a:solidFill>
                   <a:srgbClr val="475569"/>
                 </a:solidFill>
@@ -11304,9 +11704,13 @@
             </a:r>
           </a:p>
           <a:p>
-            <a:pPr algn="l"/>
-            <a:r>
-              <a:rPr sz="1400" b="0">
+            <a:pPr algn="l">
+              <a:spcAft>
+                <a:spcPts val="200"/>
+              </a:spcAft>
+            </a:pPr>
+            <a:r>
+              <a:rPr sz="1300" b="0">
                 <a:solidFill>
                   <a:srgbClr val="475569"/>
                 </a:solidFill>
@@ -11315,7 +11719,7 @@
               <a:t>•  Target region: PCE </a:t>
             </a:r>
             <a:r>
-              <a:rPr sz="1400" b="0" baseline="30000">
+              <a:rPr sz="1300" b="0" baseline="30000">
                 <a:solidFill>
                   <a:srgbClr val="475569"/>
                 </a:solidFill>
@@ -11324,7 +11728,7 @@
               <a:t>&gt;</a:t>
             </a:r>
             <a:r>
-              <a:rPr sz="1400" b="0">
+              <a:rPr sz="1300" b="0">
                 <a:solidFill>
                   <a:srgbClr val="475569"/>
                 </a:solidFill>
@@ -11333,7 +11737,7 @@
               <a:t> 25 % combined with T</a:t>
             </a:r>
             <a:r>
-              <a:rPr sz="1400" b="0" baseline="-25000">
+              <a:rPr sz="1300" b="0" baseline="-25000">
                 <a:solidFill>
                   <a:srgbClr val="475569"/>
                 </a:solidFill>
@@ -11342,7 +11746,7 @@
               <a:t>80</a:t>
             </a:r>
             <a:r>
-              <a:rPr sz="1400" b="0">
+              <a:rPr sz="1300" b="0">
                 <a:solidFill>
                   <a:srgbClr val="475569"/>
                 </a:solidFill>
@@ -11351,7 +11755,7 @@
               <a:t> </a:t>
             </a:r>
             <a:r>
-              <a:rPr sz="1400" b="0" baseline="30000">
+              <a:rPr sz="1300" b="0" baseline="30000">
                 <a:solidFill>
                   <a:srgbClr val="475569"/>
                 </a:solidFill>
@@ -11360,7 +11764,7 @@
               <a:t>&gt;</a:t>
             </a:r>
             <a:r>
-              <a:rPr sz="1400" b="0">
+              <a:rPr sz="1300" b="0">
                 <a:solidFill>
                   <a:srgbClr val="475569"/>
                 </a:solidFill>
@@ -11369,7 +11773,7 @@
               <a:t> 10</a:t>
             </a:r>
             <a:r>
-              <a:rPr sz="1400" b="0" baseline="30000">
+              <a:rPr sz="1300" b="0" baseline="30000">
                 <a:solidFill>
                   <a:srgbClr val="475569"/>
                 </a:solidFill>
@@ -11378,7 +11782,7 @@
               <a:t>5</a:t>
             </a:r>
             <a:r>
-              <a:rPr sz="1400" b="0">
+              <a:rPr sz="1300" b="0">
                 <a:solidFill>
                   <a:srgbClr val="475569"/>
                 </a:solidFill>
@@ -11388,9 +11792,13 @@
             </a:r>
           </a:p>
           <a:p>
-            <a:pPr algn="l"/>
-            <a:r>
-              <a:rPr sz="1400" b="0">
+            <a:pPr algn="l">
+              <a:spcAft>
+                <a:spcPts val="200"/>
+              </a:spcAft>
+            </a:pPr>
+            <a:r>
+              <a:rPr sz="1300" b="0">
                 <a:solidFill>
                   <a:srgbClr val="475569"/>
                 </a:solidFill>
@@ -11409,7 +11817,7 @@
         </p:nvSpPr>
         <p:spPr>
           <a:xfrm>
-            <a:off x="6858000" y="4617720"/>
+            <a:off x="6858000" y="4663440"/>
             <a:ext cx="1828800" cy="274320"/>
           </a:xfrm>
           <a:prstGeom prst="rect">
@@ -11532,8 +11940,8 @@
         </p:nvSpPr>
         <p:spPr>
           <a:xfrm>
-            <a:off x="457200" y="731520"/>
-            <a:ext cx="8229600" cy="548640"/>
+            <a:off x="457200" y="640080"/>
+            <a:ext cx="8229600" cy="640080"/>
           </a:xfrm>
           <a:prstGeom prst="rect">
             <a:avLst/>
@@ -11548,7 +11956,7 @@
           <a:p>
             <a:pPr algn="l"/>
             <a:r>
-              <a:rPr sz="2800" b="1">
+              <a:rPr sz="2200" b="1">
                 <a:solidFill>
                   <a:srgbClr val="1C2533"/>
                 </a:solidFill>
@@ -11567,8 +11975,8 @@
         </p:nvSpPr>
         <p:spPr>
           <a:xfrm>
-            <a:off x="457200" y="1280160"/>
-            <a:ext cx="8229600" cy="365760"/>
+            <a:off x="457200" y="1325880"/>
+            <a:ext cx="8229600" cy="411480"/>
           </a:xfrm>
           <a:prstGeom prst="rect">
             <a:avLst/>
@@ -11583,7 +11991,7 @@
           <a:p>
             <a:pPr algn="l"/>
             <a:r>
-              <a:rPr sz="1600" b="0">
+              <a:rPr sz="1500" b="0">
                 <a:solidFill>
                   <a:srgbClr val="475569"/>
                 </a:solidFill>
@@ -11603,22 +12011,26 @@
         <p:spPr>
           <a:xfrm>
             <a:off x="457200" y="1828800"/>
-            <a:ext cx="8229600" cy="2926080"/>
-          </a:xfrm>
-          <a:prstGeom prst="rect">
-            <a:avLst/>
-          </a:prstGeom>
-          <a:noFill/>
-        </p:spPr>
-        <p:txBody>
-          <a:bodyPr wrap="square">
-            <a:spAutoFit/>
-          </a:bodyPr>
-          <a:lstStyle/>
-          <a:p>
-            <a:pPr algn="l"/>
-            <a:r>
-              <a:rPr sz="1400" b="0">
+            <a:ext cx="8229600" cy="2743200"/>
+          </a:xfrm>
+          <a:prstGeom prst="rect">
+            <a:avLst/>
+          </a:prstGeom>
+          <a:noFill/>
+        </p:spPr>
+        <p:txBody>
+          <a:bodyPr wrap="square">
+            <a:spAutoFit/>
+          </a:bodyPr>
+          <a:lstStyle/>
+          <a:p>
+            <a:pPr algn="l">
+              <a:spcAft>
+                <a:spcPts val="200"/>
+              </a:spcAft>
+            </a:pPr>
+            <a:r>
+              <a:rPr sz="1300" b="0">
                 <a:solidFill>
                   <a:srgbClr val="475569"/>
                 </a:solidFill>
@@ -11627,7 +12039,7 @@
               <a:t>•  Continuity for ion-vacancy density P: ∂P/∂t = ∇·(D</a:t>
             </a:r>
             <a:r>
-              <a:rPr sz="1400" b="0" baseline="-25000">
+              <a:rPr sz="1300" b="0" baseline="-25000">
                 <a:solidFill>
                   <a:srgbClr val="475569"/>
                 </a:solidFill>
@@ -11636,7 +12048,7 @@
               <a:t>ion</a:t>
             </a:r>
             <a:r>
-              <a:rPr sz="1400" b="0">
+              <a:rPr sz="1300" b="0">
                 <a:solidFill>
                   <a:srgbClr val="475569"/>
                 </a:solidFill>
@@ -11645,7 +12057,7 @@
               <a:t> ∇P + μ</a:t>
             </a:r>
             <a:r>
-              <a:rPr sz="1400" b="0" baseline="-25000">
+              <a:rPr sz="1300" b="0" baseline="-25000">
                 <a:solidFill>
                   <a:srgbClr val="475569"/>
                 </a:solidFill>
@@ -11654,7 +12066,7 @@
               <a:t>ion</a:t>
             </a:r>
             <a:r>
-              <a:rPr sz="1400" b="0">
+              <a:rPr sz="1300" b="0">
                 <a:solidFill>
                   <a:srgbClr val="475569"/>
                 </a:solidFill>
@@ -11663,7 +12075,7 @@
               <a:t> P (1 − P / P</a:t>
             </a:r>
             <a:r>
-              <a:rPr sz="1400" b="0" baseline="-25000">
+              <a:rPr sz="1300" b="0" baseline="-25000">
                 <a:solidFill>
                   <a:srgbClr val="475569"/>
                 </a:solidFill>
@@ -11672,7 +12084,7 @@
               <a:t>lim</a:t>
             </a:r>
             <a:r>
-              <a:rPr sz="1400" b="0">
+              <a:rPr sz="1300" b="0">
                 <a:solidFill>
                   <a:srgbClr val="475569"/>
                 </a:solidFill>
@@ -11682,9 +12094,13 @@
             </a:r>
           </a:p>
           <a:p>
-            <a:pPr algn="l"/>
-            <a:r>
-              <a:rPr sz="1400" b="0">
+            <a:pPr algn="l">
+              <a:spcAft>
+                <a:spcPts val="200"/>
+              </a:spcAft>
+            </a:pPr>
+            <a:r>
+              <a:rPr sz="1300" b="0">
                 <a:solidFill>
                   <a:srgbClr val="475569"/>
                 </a:solidFill>
@@ -11693,7 +12109,7 @@
               <a:t>•  The steric factor (1 − P / P</a:t>
             </a:r>
             <a:r>
-              <a:rPr sz="1400" b="0" baseline="-25000">
+              <a:rPr sz="1300" b="0" baseline="-25000">
                 <a:solidFill>
                   <a:srgbClr val="475569"/>
                 </a:solidFill>
@@ -11702,7 +12118,7 @@
               <a:t>lim</a:t>
             </a:r>
             <a:r>
-              <a:rPr sz="1400" b="0">
+              <a:rPr sz="1300" b="0">
                 <a:solidFill>
                   <a:srgbClr val="475569"/>
                 </a:solidFill>
@@ -11712,9 +12128,13 @@
             </a:r>
           </a:p>
           <a:p>
-            <a:pPr algn="l"/>
-            <a:r>
-              <a:rPr sz="1400" b="0">
+            <a:pPr algn="l">
+              <a:spcAft>
+                <a:spcPts val="200"/>
+              </a:spcAft>
+            </a:pPr>
+            <a:r>
+              <a:rPr sz="1300" b="0">
                 <a:solidFill>
                   <a:srgbClr val="475569"/>
                 </a:solidFill>
@@ -11723,7 +12143,7 @@
               <a:t>•  Estimated P</a:t>
             </a:r>
             <a:r>
-              <a:rPr sz="1400" b="0" baseline="-25000">
+              <a:rPr sz="1300" b="0" baseline="-25000">
                 <a:solidFill>
                   <a:srgbClr val="475569"/>
                 </a:solidFill>
@@ -11732,7 +12152,7 @@
               <a:t>lim</a:t>
             </a:r>
             <a:r>
-              <a:rPr sz="1400" b="0">
+              <a:rPr sz="1300" b="0">
                 <a:solidFill>
                   <a:srgbClr val="475569"/>
                 </a:solidFill>
@@ -11741,7 +12161,7 @@
               <a:t> is approximately 1 – 5 % of the cation-site density in MAPbI</a:t>
             </a:r>
             <a:r>
-              <a:rPr sz="1400" b="0" baseline="-25000">
+              <a:rPr sz="1300" b="0" baseline="-25000">
                 <a:solidFill>
                   <a:srgbClr val="475569"/>
                 </a:solidFill>
@@ -11751,9 +12171,13 @@
             </a:r>
           </a:p>
           <a:p>
-            <a:pPr algn="l"/>
-            <a:r>
-              <a:rPr sz="1400" b="0">
+            <a:pPr algn="l">
+              <a:spcAft>
+                <a:spcPts val="200"/>
+              </a:spcAft>
+            </a:pPr>
+            <a:r>
+              <a:rPr sz="1300" b="0">
                 <a:solidFill>
                   <a:srgbClr val="475569"/>
                 </a:solidFill>
@@ -11763,9 +12187,13 @@
             </a:r>
           </a:p>
           <a:p>
-            <a:pPr algn="l"/>
-            <a:r>
-              <a:rPr sz="1400" b="0">
+            <a:pPr algn="l">
+              <a:spcAft>
+                <a:spcPts val="200"/>
+              </a:spcAft>
+            </a:pPr>
+            <a:r>
+              <a:rPr sz="1300" b="0">
                 <a:solidFill>
                   <a:srgbClr val="475569"/>
                 </a:solidFill>
@@ -11774,7 +12202,7 @@
               <a:t>•  Couples into the Poisson equation via the source term ρ</a:t>
             </a:r>
             <a:r>
-              <a:rPr sz="1400" b="0" baseline="-25000">
+              <a:rPr sz="1300" b="0" baseline="-25000">
                 <a:solidFill>
                   <a:srgbClr val="475569"/>
                 </a:solidFill>
@@ -11783,7 +12211,7 @@
               <a:t>ion</a:t>
             </a:r>
             <a:r>
-              <a:rPr sz="1400" b="0">
+              <a:rPr sz="1300" b="0">
                 <a:solidFill>
                   <a:srgbClr val="475569"/>
                 </a:solidFill>
@@ -11792,7 +12220,7 @@
               <a:t> = q (P − P</a:t>
             </a:r>
             <a:r>
-              <a:rPr sz="1400" b="0" baseline="-25000">
+              <a:rPr sz="1300" b="0" baseline="-25000">
                 <a:solidFill>
                   <a:srgbClr val="475569"/>
                 </a:solidFill>
@@ -11801,7 +12229,7 @@
               <a:t>eq</a:t>
             </a:r>
             <a:r>
-              <a:rPr sz="1400" b="0">
+              <a:rPr sz="1300" b="0">
                 <a:solidFill>
                   <a:srgbClr val="475569"/>
                 </a:solidFill>
@@ -11811,9 +12239,13 @@
             </a:r>
           </a:p>
           <a:p>
-            <a:pPr algn="l"/>
-            <a:r>
-              <a:rPr sz="1400" b="0">
+            <a:pPr algn="l">
+              <a:spcAft>
+                <a:spcPts val="200"/>
+              </a:spcAft>
+            </a:pPr>
+            <a:r>
+              <a:rPr sz="1300" b="0">
                 <a:solidFill>
                   <a:srgbClr val="475569"/>
                 </a:solidFill>
@@ -11832,7 +12264,7 @@
         </p:nvSpPr>
         <p:spPr>
           <a:xfrm>
-            <a:off x="6858000" y="4617720"/>
+            <a:off x="6858000" y="4663440"/>
             <a:ext cx="1828800" cy="274320"/>
           </a:xfrm>
           <a:prstGeom prst="rect">
@@ -11955,8 +12387,8 @@
         </p:nvSpPr>
         <p:spPr>
           <a:xfrm>
-            <a:off x="457200" y="731520"/>
-            <a:ext cx="8229600" cy="548640"/>
+            <a:off x="457200" y="640080"/>
+            <a:ext cx="8229600" cy="640080"/>
           </a:xfrm>
           <a:prstGeom prst="rect">
             <a:avLst/>
@@ -11971,7 +12403,7 @@
           <a:p>
             <a:pPr algn="l"/>
             <a:r>
-              <a:rPr sz="2800" b="1">
+              <a:rPr sz="2200" b="1">
                 <a:solidFill>
                   <a:srgbClr val="1C2533"/>
                 </a:solidFill>
@@ -11990,8 +12422,8 @@
         </p:nvSpPr>
         <p:spPr>
           <a:xfrm>
-            <a:off x="457200" y="1280160"/>
-            <a:ext cx="8229600" cy="365760"/>
+            <a:off x="457200" y="1325880"/>
+            <a:ext cx="8229600" cy="411480"/>
           </a:xfrm>
           <a:prstGeom prst="rect">
             <a:avLst/>
@@ -12006,7 +12438,7 @@
           <a:p>
             <a:pPr algn="l"/>
             <a:r>
-              <a:rPr sz="1600" b="0">
+              <a:rPr sz="1500" b="0">
                 <a:solidFill>
                   <a:srgbClr val="475569"/>
                 </a:solidFill>
@@ -12026,22 +12458,26 @@
         <p:spPr>
           <a:xfrm>
             <a:off x="457200" y="1828800"/>
-            <a:ext cx="8229600" cy="2926080"/>
-          </a:xfrm>
-          <a:prstGeom prst="rect">
-            <a:avLst/>
-          </a:prstGeom>
-          <a:noFill/>
-        </p:spPr>
-        <p:txBody>
-          <a:bodyPr wrap="square">
-            <a:spAutoFit/>
-          </a:bodyPr>
-          <a:lstStyle/>
-          <a:p>
-            <a:pPr algn="l"/>
-            <a:r>
-              <a:rPr sz="1400" b="0">
+            <a:ext cx="8229600" cy="2743200"/>
+          </a:xfrm>
+          <a:prstGeom prst="rect">
+            <a:avLst/>
+          </a:prstGeom>
+          <a:noFill/>
+        </p:spPr>
+        <p:txBody>
+          <a:bodyPr wrap="square">
+            <a:spAutoFit/>
+          </a:bodyPr>
+          <a:lstStyle/>
+          <a:p>
+            <a:pPr algn="l">
+              <a:spcAft>
+                <a:spcPts val="200"/>
+              </a:spcAft>
+            </a:pPr>
+            <a:r>
+              <a:rPr sz="1300" b="0">
                 <a:solidFill>
                   <a:srgbClr val="475569"/>
                 </a:solidFill>
@@ -12050,7 +12486,7 @@
               <a:t>•  Left contact: J</a:t>
             </a:r>
             <a:r>
-              <a:rPr sz="1400" b="0" baseline="-25000">
+              <a:rPr sz="1300" b="0" baseline="-25000">
                 <a:solidFill>
                   <a:srgbClr val="475569"/>
                 </a:solidFill>
@@ -12059,7 +12495,7 @@
               <a:t>n</a:t>
             </a:r>
             <a:r>
-              <a:rPr sz="1400" b="0">
+              <a:rPr sz="1300" b="0">
                 <a:solidFill>
                   <a:srgbClr val="475569"/>
                 </a:solidFill>
@@ -12068,7 +12504,7 @@
               <a:t> = −q S</a:t>
             </a:r>
             <a:r>
-              <a:rPr sz="1400" b="0" baseline="-25000">
+              <a:rPr sz="1300" b="0" baseline="-25000">
                 <a:solidFill>
                   <a:srgbClr val="475569"/>
                 </a:solidFill>
@@ -12077,7 +12513,7 @@
               <a:t>n,L</a:t>
             </a:r>
             <a:r>
-              <a:rPr sz="1400" b="0">
+              <a:rPr sz="1300" b="0">
                 <a:solidFill>
                   <a:srgbClr val="475569"/>
                 </a:solidFill>
@@ -12086,7 +12522,7 @@
               <a:t> (n − n</a:t>
             </a:r>
             <a:r>
-              <a:rPr sz="1400" b="0" baseline="-25000">
+              <a:rPr sz="1300" b="0" baseline="-25000">
                 <a:solidFill>
                   <a:srgbClr val="475569"/>
                 </a:solidFill>
@@ -12095,7 +12531,7 @@
               <a:t>eq</a:t>
             </a:r>
             <a:r>
-              <a:rPr sz="1400" b="0">
+              <a:rPr sz="1300" b="0">
                 <a:solidFill>
                   <a:srgbClr val="475569"/>
                 </a:solidFill>
@@ -12104,7 +12540,7 @@
               <a:t>) · J</a:t>
             </a:r>
             <a:r>
-              <a:rPr sz="1400" b="0" baseline="-25000">
+              <a:rPr sz="1300" b="0" baseline="-25000">
                 <a:solidFill>
                   <a:srgbClr val="475569"/>
                 </a:solidFill>
@@ -12113,7 +12549,7 @@
               <a:t>p</a:t>
             </a:r>
             <a:r>
-              <a:rPr sz="1400" b="0">
+              <a:rPr sz="1300" b="0">
                 <a:solidFill>
                   <a:srgbClr val="475569"/>
                 </a:solidFill>
@@ -12122,7 +12558,7 @@
               <a:t> = +q S</a:t>
             </a:r>
             <a:r>
-              <a:rPr sz="1400" b="0" baseline="-25000">
+              <a:rPr sz="1300" b="0" baseline="-25000">
                 <a:solidFill>
                   <a:srgbClr val="475569"/>
                 </a:solidFill>
@@ -12131,7 +12567,7 @@
               <a:t>p,L</a:t>
             </a:r>
             <a:r>
-              <a:rPr sz="1400" b="0">
+              <a:rPr sz="1300" b="0">
                 <a:solidFill>
                   <a:srgbClr val="475569"/>
                 </a:solidFill>
@@ -12140,7 +12576,7 @@
               <a:t> (p − p</a:t>
             </a:r>
             <a:r>
-              <a:rPr sz="1400" b="0" baseline="-25000">
+              <a:rPr sz="1300" b="0" baseline="-25000">
                 <a:solidFill>
                   <a:srgbClr val="475569"/>
                 </a:solidFill>
@@ -12149,7 +12585,7 @@
               <a:t>eq</a:t>
             </a:r>
             <a:r>
-              <a:rPr sz="1400" b="0">
+              <a:rPr sz="1300" b="0">
                 <a:solidFill>
                   <a:srgbClr val="475569"/>
                 </a:solidFill>
@@ -12159,9 +12595,13 @@
             </a:r>
           </a:p>
           <a:p>
-            <a:pPr algn="l"/>
-            <a:r>
-              <a:rPr sz="1400" b="0">
+            <a:pPr algn="l">
+              <a:spcAft>
+                <a:spcPts val="200"/>
+              </a:spcAft>
+            </a:pPr>
+            <a:r>
+              <a:rPr sz="1300" b="0">
                 <a:solidFill>
                   <a:srgbClr val="475569"/>
                 </a:solidFill>
@@ -12170,7 +12610,7 @@
               <a:t>•  Right contact: J</a:t>
             </a:r>
             <a:r>
-              <a:rPr sz="1400" b="0" baseline="-25000">
+              <a:rPr sz="1300" b="0" baseline="-25000">
                 <a:solidFill>
                   <a:srgbClr val="475569"/>
                 </a:solidFill>
@@ -12179,7 +12619,7 @@
               <a:t>n</a:t>
             </a:r>
             <a:r>
-              <a:rPr sz="1400" b="0">
+              <a:rPr sz="1300" b="0">
                 <a:solidFill>
                   <a:srgbClr val="475569"/>
                 </a:solidFill>
@@ -12188,7 +12628,7 @@
               <a:t> = +q S</a:t>
             </a:r>
             <a:r>
-              <a:rPr sz="1400" b="0" baseline="-25000">
+              <a:rPr sz="1300" b="0" baseline="-25000">
                 <a:solidFill>
                   <a:srgbClr val="475569"/>
                 </a:solidFill>
@@ -12197,7 +12637,7 @@
               <a:t>n,R</a:t>
             </a:r>
             <a:r>
-              <a:rPr sz="1400" b="0">
+              <a:rPr sz="1300" b="0">
                 <a:solidFill>
                   <a:srgbClr val="475569"/>
                 </a:solidFill>
@@ -12206,7 +12646,7 @@
               <a:t> (n − n</a:t>
             </a:r>
             <a:r>
-              <a:rPr sz="1400" b="0" baseline="-25000">
+              <a:rPr sz="1300" b="0" baseline="-25000">
                 <a:solidFill>
                   <a:srgbClr val="475569"/>
                 </a:solidFill>
@@ -12215,7 +12655,7 @@
               <a:t>eq</a:t>
             </a:r>
             <a:r>
-              <a:rPr sz="1400" b="0">
+              <a:rPr sz="1300" b="0">
                 <a:solidFill>
                   <a:srgbClr val="475569"/>
                 </a:solidFill>
@@ -12224,7 +12664,7 @@
               <a:t>) · J</a:t>
             </a:r>
             <a:r>
-              <a:rPr sz="1400" b="0" baseline="-25000">
+              <a:rPr sz="1300" b="0" baseline="-25000">
                 <a:solidFill>
                   <a:srgbClr val="475569"/>
                 </a:solidFill>
@@ -12233,7 +12673,7 @@
               <a:t>p</a:t>
             </a:r>
             <a:r>
-              <a:rPr sz="1400" b="0">
+              <a:rPr sz="1300" b="0">
                 <a:solidFill>
                   <a:srgbClr val="475569"/>
                 </a:solidFill>
@@ -12242,7 +12682,7 @@
               <a:t> = −q S</a:t>
             </a:r>
             <a:r>
-              <a:rPr sz="1400" b="0" baseline="-25000">
+              <a:rPr sz="1300" b="0" baseline="-25000">
                 <a:solidFill>
                   <a:srgbClr val="475569"/>
                 </a:solidFill>
@@ -12251,7 +12691,7 @@
               <a:t>p,R</a:t>
             </a:r>
             <a:r>
-              <a:rPr sz="1400" b="0">
+              <a:rPr sz="1300" b="0">
                 <a:solidFill>
                   <a:srgbClr val="475569"/>
                 </a:solidFill>
@@ -12260,7 +12700,7 @@
               <a:t> (p − p</a:t>
             </a:r>
             <a:r>
-              <a:rPr sz="1400" b="0" baseline="-25000">
+              <a:rPr sz="1300" b="0" baseline="-25000">
                 <a:solidFill>
                   <a:srgbClr val="475569"/>
                 </a:solidFill>
@@ -12269,7 +12709,7 @@
               <a:t>eq</a:t>
             </a:r>
             <a:r>
-              <a:rPr sz="1400" b="0">
+              <a:rPr sz="1300" b="0">
                 <a:solidFill>
                   <a:srgbClr val="475569"/>
                 </a:solidFill>
@@ -12279,9 +12719,13 @@
             </a:r>
           </a:p>
           <a:p>
-            <a:pPr algn="l"/>
-            <a:r>
-              <a:rPr sz="1400" b="0">
+            <a:pPr algn="l">
+              <a:spcAft>
+                <a:spcPts val="200"/>
+              </a:spcAft>
+            </a:pPr>
+            <a:r>
+              <a:rPr sz="1300" b="0">
                 <a:solidFill>
                   <a:srgbClr val="475569"/>
                 </a:solidFill>
@@ -12290,7 +12734,7 @@
               <a:t>•  Contact selectivity: S</a:t>
             </a:r>
             <a:r>
-              <a:rPr sz="1400" b="0" baseline="-25000">
+              <a:rPr sz="1300" b="0" baseline="-25000">
                 <a:solidFill>
                   <a:srgbClr val="475569"/>
                 </a:solidFill>
@@ -12299,7 +12743,7 @@
               <a:t>n,L</a:t>
             </a:r>
             <a:r>
-              <a:rPr sz="1400" b="0">
+              <a:rPr sz="1300" b="0">
                 <a:solidFill>
                   <a:srgbClr val="475569"/>
                 </a:solidFill>
@@ -12308,7 +12752,7 @@
               <a:t> </a:t>
             </a:r>
             <a:r>
-              <a:rPr sz="1400" b="0" baseline="30000">
+              <a:rPr sz="1300" b="0" baseline="30000">
                 <a:solidFill>
                   <a:srgbClr val="475569"/>
                 </a:solidFill>
@@ -12317,7 +12761,7 @@
               <a:t>≪</a:t>
             </a:r>
             <a:r>
-              <a:rPr sz="1400" b="0">
+              <a:rPr sz="1300" b="0">
                 <a:solidFill>
                   <a:srgbClr val="475569"/>
                 </a:solidFill>
@@ -12326,7 +12770,7 @@
               <a:t> S</a:t>
             </a:r>
             <a:r>
-              <a:rPr sz="1400" b="0" baseline="-25000">
+              <a:rPr sz="1300" b="0" baseline="-25000">
                 <a:solidFill>
                   <a:srgbClr val="475569"/>
                 </a:solidFill>
@@ -12335,7 +12779,7 @@
               <a:t>p,L</a:t>
             </a:r>
             <a:r>
-              <a:rPr sz="1400" b="0">
+              <a:rPr sz="1300" b="0">
                 <a:solidFill>
                   <a:srgbClr val="475569"/>
                 </a:solidFill>
@@ -12345,9 +12789,13 @@
             </a:r>
           </a:p>
           <a:p>
-            <a:pPr algn="l"/>
-            <a:r>
-              <a:rPr sz="1400" b="0">
+            <a:pPr algn="l">
+              <a:spcAft>
+                <a:spcPts val="200"/>
+              </a:spcAft>
+            </a:pPr>
+            <a:r>
+              <a:rPr sz="1300" b="0">
                 <a:solidFill>
                   <a:srgbClr val="475569"/>
                 </a:solidFill>
@@ -12357,9 +12805,13 @@
             </a:r>
           </a:p>
           <a:p>
-            <a:pPr algn="l"/>
-            <a:r>
-              <a:rPr sz="1400" b="0">
+            <a:pPr algn="l">
+              <a:spcAft>
+                <a:spcPts val="200"/>
+              </a:spcAft>
+            </a:pPr>
+            <a:r>
+              <a:rPr sz="1300" b="0">
                 <a:solidFill>
                   <a:srgbClr val="475569"/>
                 </a:solidFill>
@@ -12369,9 +12821,13 @@
             </a:r>
           </a:p>
           <a:p>
-            <a:pPr algn="l"/>
-            <a:r>
-              <a:rPr sz="1400" b="0">
+            <a:pPr algn="l">
+              <a:spcAft>
+                <a:spcPts val="200"/>
+              </a:spcAft>
+            </a:pPr>
+            <a:r>
+              <a:rPr sz="1300" b="0">
                 <a:solidFill>
                   <a:srgbClr val="475569"/>
                 </a:solidFill>
@@ -12390,7 +12846,7 @@
         </p:nvSpPr>
         <p:spPr>
           <a:xfrm>
-            <a:off x="6858000" y="4617720"/>
+            <a:off x="6858000" y="4663440"/>
             <a:ext cx="1828800" cy="274320"/>
           </a:xfrm>
           <a:prstGeom prst="rect">
@@ -12513,8 +12969,8 @@
         </p:nvSpPr>
         <p:spPr>
           <a:xfrm>
-            <a:off x="457200" y="731520"/>
-            <a:ext cx="8229600" cy="548640"/>
+            <a:off x="457200" y="640080"/>
+            <a:ext cx="8229600" cy="640080"/>
           </a:xfrm>
           <a:prstGeom prst="rect">
             <a:avLst/>
@@ -12529,7 +12985,7 @@
           <a:p>
             <a:pPr algn="l"/>
             <a:r>
-              <a:rPr sz="2800" b="1">
+              <a:rPr sz="2200" b="1">
                 <a:solidFill>
                   <a:srgbClr val="1C2533"/>
                 </a:solidFill>
@@ -12548,8 +13004,8 @@
         </p:nvSpPr>
         <p:spPr>
           <a:xfrm>
-            <a:off x="457200" y="1280160"/>
-            <a:ext cx="8229600" cy="365760"/>
+            <a:off x="457200" y="1325880"/>
+            <a:ext cx="8229600" cy="411480"/>
           </a:xfrm>
           <a:prstGeom prst="rect">
             <a:avLst/>
@@ -12564,7 +13020,7 @@
           <a:p>
             <a:pPr algn="l"/>
             <a:r>
-              <a:rPr sz="1600" b="0">
+              <a:rPr sz="1500" b="0">
                 <a:solidFill>
                   <a:srgbClr val="475569"/>
                 </a:solidFill>
@@ -12591,8 +13047,8 @@
         </p:blipFill>
         <p:spPr>
           <a:xfrm>
-            <a:off x="457200" y="1984785"/>
-            <a:ext cx="4937760" cy="2614108"/>
+            <a:off x="1981200" y="1828800"/>
+            <a:ext cx="5181599" cy="2743200"/>
           </a:xfrm>
           <a:prstGeom prst="rect">
             <a:avLst/>
@@ -12607,7 +13063,7 @@
         </p:nvSpPr>
         <p:spPr>
           <a:xfrm>
-            <a:off x="6858000" y="4617720"/>
+            <a:off x="6858000" y="4663440"/>
             <a:ext cx="1828800" cy="274320"/>
           </a:xfrm>
           <a:prstGeom prst="rect">
@@ -12730,8 +13186,8 @@
         </p:nvSpPr>
         <p:spPr>
           <a:xfrm>
-            <a:off x="457200" y="731520"/>
-            <a:ext cx="8229600" cy="548640"/>
+            <a:off x="457200" y="640080"/>
+            <a:ext cx="8229600" cy="640080"/>
           </a:xfrm>
           <a:prstGeom prst="rect">
             <a:avLst/>
@@ -12746,7 +13202,7 @@
           <a:p>
             <a:pPr algn="l"/>
             <a:r>
-              <a:rPr sz="2800" b="1">
+              <a:rPr sz="2200" b="1">
                 <a:solidFill>
                   <a:srgbClr val="1C2533"/>
                 </a:solidFill>
@@ -12765,8 +13221,8 @@
         </p:nvSpPr>
         <p:spPr>
           <a:xfrm>
-            <a:off x="457200" y="1280160"/>
-            <a:ext cx="8229600" cy="365760"/>
+            <a:off x="457200" y="1325880"/>
+            <a:ext cx="8229600" cy="411480"/>
           </a:xfrm>
           <a:prstGeom prst="rect">
             <a:avLst/>
@@ -12781,7 +13237,7 @@
           <a:p>
             <a:pPr algn="l"/>
             <a:r>
-              <a:rPr sz="1600" b="0">
+              <a:rPr sz="1500" b="0">
                 <a:solidFill>
                   <a:srgbClr val="475569"/>
                 </a:solidFill>
@@ -12790,7 +13246,7 @@
               <a:t>Identical MAPbI</a:t>
             </a:r>
             <a:r>
-              <a:rPr sz="1600" b="0" baseline="-25000">
+              <a:rPr sz="1500" b="0" baseline="-25000">
                 <a:solidFill>
                   <a:srgbClr val="475569"/>
                 </a:solidFill>
@@ -12799,7 +13255,7 @@
               <a:t>3</a:t>
             </a:r>
             <a:r>
-              <a:rPr sz="1600" b="0">
+              <a:rPr sz="1500" b="0">
                 <a:solidFill>
                   <a:srgbClr val="475569"/>
                 </a:solidFill>
@@ -12808,7 +13264,7 @@
               <a:t> stack: a 50 mV V</a:t>
             </a:r>
             <a:r>
-              <a:rPr sz="1600" b="0" baseline="-25000">
+              <a:rPr sz="1500" b="0" baseline="-25000">
                 <a:solidFill>
                   <a:srgbClr val="475569"/>
                 </a:solidFill>
@@ -12817,7 +13273,7 @@
               <a:t>oc</a:t>
             </a:r>
             <a:r>
-              <a:rPr sz="1600" b="0">
+              <a:rPr sz="1500" b="0">
                 <a:solidFill>
                   <a:srgbClr val="475569"/>
                 </a:solidFill>
@@ -12844,8 +13300,8 @@
         </p:blipFill>
         <p:spPr>
           <a:xfrm>
-            <a:off x="457200" y="1909267"/>
-            <a:ext cx="4937760" cy="2765145"/>
+            <a:off x="476794" y="1828800"/>
+            <a:ext cx="4898571" cy="2743200"/>
           </a:xfrm>
           <a:prstGeom prst="rect">
             <a:avLst/>
@@ -12861,22 +13317,26 @@
         <p:spPr>
           <a:xfrm>
             <a:off x="5669280" y="1828800"/>
-            <a:ext cx="3017520" cy="2926080"/>
-          </a:xfrm>
-          <a:prstGeom prst="rect">
-            <a:avLst/>
-          </a:prstGeom>
-          <a:noFill/>
-        </p:spPr>
-        <p:txBody>
-          <a:bodyPr wrap="square">
-            <a:spAutoFit/>
-          </a:bodyPr>
-          <a:lstStyle/>
-          <a:p>
-            <a:pPr algn="l"/>
-            <a:r>
-              <a:rPr sz="1400" b="0">
+            <a:ext cx="3017520" cy="2743200"/>
+          </a:xfrm>
+          <a:prstGeom prst="rect">
+            <a:avLst/>
+          </a:prstGeom>
+          <a:noFill/>
+        </p:spPr>
+        <p:txBody>
+          <a:bodyPr wrap="square">
+            <a:spAutoFit/>
+          </a:bodyPr>
+          <a:lstStyle/>
+          <a:p>
+            <a:pPr algn="l">
+              <a:spcAft>
+                <a:spcPts val="200"/>
+              </a:spcAft>
+            </a:pPr>
+            <a:r>
+              <a:rPr sz="1300" b="0">
                 <a:solidFill>
                   <a:srgbClr val="475569"/>
                 </a:solidFill>
@@ -12886,9 +13346,13 @@
             </a:r>
           </a:p>
           <a:p>
-            <a:pPr algn="l"/>
-            <a:r>
-              <a:rPr sz="1400" b="0">
+            <a:pPr algn="l">
+              <a:spcAft>
+                <a:spcPts val="200"/>
+              </a:spcAft>
+            </a:pPr>
+            <a:r>
+              <a:rPr sz="1300" b="0">
                 <a:solidFill>
                   <a:srgbClr val="475569"/>
                 </a:solidFill>
@@ -12897,7 +13361,7 @@
               <a:t>•  1D V</a:t>
             </a:r>
             <a:r>
-              <a:rPr sz="1400" b="0" baseline="-25000">
+              <a:rPr sz="1300" b="0" baseline="-25000">
                 <a:solidFill>
                   <a:srgbClr val="475569"/>
                 </a:solidFill>
@@ -12906,7 +13370,7 @@
               <a:t>oc</a:t>
             </a:r>
             <a:r>
-              <a:rPr sz="1400" b="0">
+              <a:rPr sz="1300" b="0">
                 <a:solidFill>
                   <a:srgbClr val="475569"/>
                 </a:solidFill>
@@ -12915,7 +13379,7 @@
               <a:t> = 0.910 V is reduced to 2D V</a:t>
             </a:r>
             <a:r>
-              <a:rPr sz="1400" b="0" baseline="-25000">
+              <a:rPr sz="1300" b="0" baseline="-25000">
                 <a:solidFill>
                   <a:srgbClr val="475569"/>
                 </a:solidFill>
@@ -12924,7 +13388,7 @@
               <a:t>oc</a:t>
             </a:r>
             <a:r>
-              <a:rPr sz="1400" b="0">
+              <a:rPr sz="1300" b="0">
                 <a:solidFill>
                   <a:srgbClr val="475569"/>
                 </a:solidFill>
@@ -12934,9 +13398,13 @@
             </a:r>
           </a:p>
           <a:p>
-            <a:pPr algn="l"/>
-            <a:r>
-              <a:rPr sz="1400" b="0">
+            <a:pPr algn="l">
+              <a:spcAft>
+                <a:spcPts val="200"/>
+              </a:spcAft>
+            </a:pPr>
+            <a:r>
+              <a:rPr sz="1300" b="0">
                 <a:solidFill>
                   <a:srgbClr val="475569"/>
                 </a:solidFill>
@@ -12946,9 +13414,13 @@
             </a:r>
           </a:p>
           <a:p>
-            <a:pPr algn="l"/>
-            <a:r>
-              <a:rPr sz="1400" b="0">
+            <a:pPr algn="l">
+              <a:spcAft>
+                <a:spcPts val="200"/>
+              </a:spcAft>
+            </a:pPr>
+            <a:r>
+              <a:rPr sz="1300" b="0">
                 <a:solidFill>
                   <a:srgbClr val="475569"/>
                 </a:solidFill>
@@ -12958,9 +13430,13 @@
             </a:r>
           </a:p>
           <a:p>
-            <a:pPr algn="l"/>
-            <a:r>
-              <a:rPr sz="1400" b="0">
+            <a:pPr algn="l">
+              <a:spcAft>
+                <a:spcPts val="200"/>
+              </a:spcAft>
+            </a:pPr>
+            <a:r>
+              <a:rPr sz="1300" b="0">
                 <a:solidFill>
                   <a:srgbClr val="475569"/>
                 </a:solidFill>
@@ -12970,9 +13446,13 @@
             </a:r>
           </a:p>
           <a:p>
-            <a:pPr algn="l"/>
-            <a:r>
-              <a:rPr sz="1400" b="0">
+            <a:pPr algn="l">
+              <a:spcAft>
+                <a:spcPts val="200"/>
+              </a:spcAft>
+            </a:pPr>
+            <a:r>
+              <a:rPr sz="1300" b="0">
                 <a:solidFill>
                   <a:srgbClr val="475569"/>
                 </a:solidFill>
@@ -12991,7 +13471,7 @@
         </p:nvSpPr>
         <p:spPr>
           <a:xfrm>
-            <a:off x="6858000" y="4617720"/>
+            <a:off x="6858000" y="4663440"/>
             <a:ext cx="1828800" cy="274320"/>
           </a:xfrm>
           <a:prstGeom prst="rect">
@@ -13245,8 +13725,8 @@
         </p:nvSpPr>
         <p:spPr>
           <a:xfrm>
-            <a:off x="457200" y="731520"/>
-            <a:ext cx="8229600" cy="548640"/>
+            <a:off x="457200" y="640080"/>
+            <a:ext cx="8229600" cy="640080"/>
           </a:xfrm>
           <a:prstGeom prst="rect">
             <a:avLst/>
@@ -13261,7 +13741,7 @@
           <a:p>
             <a:pPr algn="l"/>
             <a:r>
-              <a:rPr sz="2800" b="1">
+              <a:rPr sz="2200" b="1">
                 <a:solidFill>
                   <a:srgbClr val="1C2533"/>
                 </a:solidFill>
@@ -13280,8 +13760,8 @@
         </p:nvSpPr>
         <p:spPr>
           <a:xfrm>
-            <a:off x="457200" y="1280160"/>
-            <a:ext cx="8229600" cy="365760"/>
+            <a:off x="457200" y="1325880"/>
+            <a:ext cx="8229600" cy="411480"/>
           </a:xfrm>
           <a:prstGeom prst="rect">
             <a:avLst/>
@@ -13296,7 +13776,7 @@
           <a:p>
             <a:pPr algn="l"/>
             <a:r>
-              <a:rPr sz="1600" b="0">
+              <a:rPr sz="1500" b="0">
                 <a:solidFill>
                   <a:srgbClr val="475569"/>
                 </a:solidFill>
@@ -13305,7 +13785,7 @@
               <a:t>DFT parameters </a:t>
             </a:r>
             <a:r>
-              <a:rPr sz="1600" b="0" baseline="30000">
+              <a:rPr sz="1500" b="0" baseline="30000">
                 <a:solidFill>
                   <a:srgbClr val="475569"/>
                 </a:solidFill>
@@ -13314,7 +13794,7 @@
               <a:t>→</a:t>
             </a:r>
             <a:r>
-              <a:rPr sz="1600" b="0">
+              <a:rPr sz="1500" b="0">
                 <a:solidFill>
                   <a:srgbClr val="475569"/>
                 </a:solidFill>
@@ -13323,7 +13803,7 @@
               <a:t> device simulation </a:t>
             </a:r>
             <a:r>
-              <a:rPr sz="1600" b="0" baseline="30000">
+              <a:rPr sz="1500" b="0" baseline="30000">
                 <a:solidFill>
                   <a:srgbClr val="475569"/>
                 </a:solidFill>
@@ -13332,7 +13812,7 @@
               <a:t>→</a:t>
             </a:r>
             <a:r>
-              <a:rPr sz="1600" b="0">
+              <a:rPr sz="1500" b="0">
                 <a:solidFill>
                   <a:srgbClr val="475569"/>
                 </a:solidFill>
@@ -13359,8 +13839,8 @@
         </p:blipFill>
         <p:spPr>
           <a:xfrm>
-            <a:off x="457200" y="1909267"/>
-            <a:ext cx="4937760" cy="2765145"/>
+            <a:off x="476794" y="1828800"/>
+            <a:ext cx="4898571" cy="2743200"/>
           </a:xfrm>
           <a:prstGeom prst="rect">
             <a:avLst/>
@@ -13376,22 +13856,26 @@
         <p:spPr>
           <a:xfrm>
             <a:off x="5669280" y="1828800"/>
-            <a:ext cx="3017520" cy="2926080"/>
-          </a:xfrm>
-          <a:prstGeom prst="rect">
-            <a:avLst/>
-          </a:prstGeom>
-          <a:noFill/>
-        </p:spPr>
-        <p:txBody>
-          <a:bodyPr wrap="square">
-            <a:spAutoFit/>
-          </a:bodyPr>
-          <a:lstStyle/>
-          <a:p>
-            <a:pPr algn="l"/>
-            <a:r>
-              <a:rPr sz="1400" b="0">
+            <a:ext cx="3017520" cy="2743200"/>
+          </a:xfrm>
+          <a:prstGeom prst="rect">
+            <a:avLst/>
+          </a:prstGeom>
+          <a:noFill/>
+        </p:spPr>
+        <p:txBody>
+          <a:bodyPr wrap="square">
+            <a:spAutoFit/>
+          </a:bodyPr>
+          <a:lstStyle/>
+          <a:p>
+            <a:pPr algn="l">
+              <a:spcAft>
+                <a:spcPts val="200"/>
+              </a:spcAft>
+            </a:pPr>
+            <a:r>
+              <a:rPr sz="1300" b="0">
                 <a:solidFill>
                   <a:srgbClr val="475569"/>
                 </a:solidFill>
@@ -13400,7 +13884,7 @@
               <a:t>•  Closes the workflow from a &gt; 10</a:t>
             </a:r>
             <a:r>
-              <a:rPr sz="1400" b="0" baseline="30000">
+              <a:rPr sz="1300" b="0" baseline="30000">
                 <a:solidFill>
                   <a:srgbClr val="475569"/>
                 </a:solidFill>
@@ -13409,7 +13893,7 @@
               <a:t>5</a:t>
             </a:r>
             <a:r>
-              <a:rPr sz="1400" b="0">
+              <a:rPr sz="1300" b="0">
                 <a:solidFill>
                   <a:srgbClr val="475569"/>
                 </a:solidFill>
@@ -13419,9 +13903,13 @@
             </a:r>
           </a:p>
           <a:p>
-            <a:pPr algn="l"/>
-            <a:r>
-              <a:rPr sz="1400" b="0">
+            <a:pPr algn="l">
+              <a:spcAft>
+                <a:spcPts val="200"/>
+              </a:spcAft>
+            </a:pPr>
+            <a:r>
+              <a:rPr sz="1300" b="0">
                 <a:solidFill>
                   <a:srgbClr val="475569"/>
                 </a:solidFill>
@@ -13430,7 +13918,7 @@
               <a:t>•  Current curve uses a placeholder candidate (MAPbI</a:t>
             </a:r>
             <a:r>
-              <a:rPr sz="1400" b="0" baseline="-25000">
+              <a:rPr sz="1300" b="0" baseline="-25000">
                 <a:solidFill>
                   <a:srgbClr val="475569"/>
                 </a:solidFill>
@@ -13439,7 +13927,7 @@
               <a:t>3</a:t>
             </a:r>
             <a:r>
-              <a:rPr sz="1400" b="0">
+              <a:rPr sz="1300" b="0">
                 <a:solidFill>
                   <a:srgbClr val="475569"/>
                 </a:solidFill>
@@ -13448,7 +13936,7 @@
               <a:t> baseline with V</a:t>
             </a:r>
             <a:r>
-              <a:rPr sz="1400" b="0" baseline="-25000">
+              <a:rPr sz="1300" b="0" baseline="-25000">
                 <a:solidFill>
                   <a:srgbClr val="475569"/>
                 </a:solidFill>
@@ -13457,7 +13945,7 @@
               <a:t>oc</a:t>
             </a:r>
             <a:r>
-              <a:rPr sz="1400" b="0">
+              <a:rPr sz="1300" b="0">
                 <a:solidFill>
                   <a:srgbClr val="475569"/>
                 </a:solidFill>
@@ -13467,9 +13955,13 @@
             </a:r>
           </a:p>
           <a:p>
-            <a:pPr algn="l"/>
-            <a:r>
-              <a:rPr sz="1400" b="0">
+            <a:pPr algn="l">
+              <a:spcAft>
+                <a:spcPts val="200"/>
+              </a:spcAft>
+            </a:pPr>
+            <a:r>
+              <a:rPr sz="1300" b="0">
                 <a:solidFill>
                   <a:srgbClr val="475569"/>
                 </a:solidFill>
@@ -13478,7 +13970,7 @@
               <a:t>•  The Se</a:t>
             </a:r>
             <a:r>
-              <a:rPr sz="1400" b="0" baseline="-25000">
+              <a:rPr sz="1300" b="0" baseline="-25000">
                 <a:solidFill>
                   <a:srgbClr val="475569"/>
                 </a:solidFill>
@@ -13487,7 +13979,7 @@
               <a:t>16</a:t>
             </a:r>
             <a:r>
-              <a:rPr sz="1400" b="0">
+              <a:rPr sz="1300" b="0">
                 <a:solidFill>
                   <a:srgbClr val="475569"/>
                 </a:solidFill>
@@ -13496,7 +13988,7 @@
               <a:t>Sn</a:t>
             </a:r>
             <a:r>
-              <a:rPr sz="1400" b="0" baseline="-25000">
+              <a:rPr sz="1300" b="0" baseline="-25000">
                 <a:solidFill>
                   <a:srgbClr val="475569"/>
                 </a:solidFill>
@@ -13505,7 +13997,7 @@
               <a:t>8</a:t>
             </a:r>
             <a:r>
-              <a:rPr sz="1400" b="0">
+              <a:rPr sz="1300" b="0">
                 <a:solidFill>
                   <a:srgbClr val="475569"/>
                 </a:solidFill>
@@ -13514,7 +14006,7 @@
               <a:t>Zr</a:t>
             </a:r>
             <a:r>
-              <a:rPr sz="1400" b="0" baseline="-25000">
+              <a:rPr sz="1300" b="0" baseline="-25000">
                 <a:solidFill>
                   <a:srgbClr val="475569"/>
                 </a:solidFill>
@@ -13523,7 +14015,7 @@
               <a:t>4</a:t>
             </a:r>
             <a:r>
-              <a:rPr sz="1400" b="0">
+              <a:rPr sz="1300" b="0">
                 <a:solidFill>
                   <a:srgbClr val="475569"/>
                 </a:solidFill>
@@ -13533,9 +14025,13 @@
             </a:r>
           </a:p>
           <a:p>
-            <a:pPr algn="l"/>
-            <a:r>
-              <a:rPr sz="1400" b="0">
+            <a:pPr algn="l">
+              <a:spcAft>
+                <a:spcPts val="200"/>
+              </a:spcAft>
+            </a:pPr>
+            <a:r>
+              <a:rPr sz="1300" b="0">
                 <a:solidFill>
                   <a:srgbClr val="475569"/>
                 </a:solidFill>
@@ -13545,9 +14041,13 @@
             </a:r>
           </a:p>
           <a:p>
-            <a:pPr algn="l"/>
-            <a:r>
-              <a:rPr sz="1400" b="0">
+            <a:pPr algn="l">
+              <a:spcAft>
+                <a:spcPts val="200"/>
+              </a:spcAft>
+            </a:pPr>
+            <a:r>
+              <a:rPr sz="1300" b="0">
                 <a:solidFill>
                   <a:srgbClr val="475569"/>
                 </a:solidFill>
@@ -13566,7 +14066,7 @@
         </p:nvSpPr>
         <p:spPr>
           <a:xfrm>
-            <a:off x="6858000" y="4617720"/>
+            <a:off x="6858000" y="4663440"/>
             <a:ext cx="1828800" cy="274320"/>
           </a:xfrm>
           <a:prstGeom prst="rect">
@@ -13689,8 +14189,8 @@
         </p:nvSpPr>
         <p:spPr>
           <a:xfrm>
-            <a:off x="457200" y="731520"/>
-            <a:ext cx="8229600" cy="548640"/>
+            <a:off x="457200" y="640080"/>
+            <a:ext cx="8229600" cy="640080"/>
           </a:xfrm>
           <a:prstGeom prst="rect">
             <a:avLst/>
@@ -13705,7 +14205,7 @@
           <a:p>
             <a:pPr algn="l"/>
             <a:r>
-              <a:rPr sz="2800" b="1">
+              <a:rPr sz="2200" b="1">
                 <a:solidFill>
                   <a:srgbClr val="1C2533"/>
                 </a:solidFill>
@@ -13724,8 +14224,8 @@
         </p:nvSpPr>
         <p:spPr>
           <a:xfrm>
-            <a:off x="457200" y="1280160"/>
-            <a:ext cx="8229600" cy="365760"/>
+            <a:off x="457200" y="1325880"/>
+            <a:ext cx="8229600" cy="411480"/>
           </a:xfrm>
           <a:prstGeom prst="rect">
             <a:avLst/>
@@ -13740,7 +14240,7 @@
           <a:p>
             <a:pPr algn="l"/>
             <a:r>
-              <a:rPr sz="1600" b="0">
+              <a:rPr sz="1500" b="0">
                 <a:solidFill>
                   <a:srgbClr val="475569"/>
                 </a:solidFill>
@@ -13760,22 +14260,26 @@
         <p:spPr>
           <a:xfrm>
             <a:off x="457200" y="1828800"/>
-            <a:ext cx="8229600" cy="2926080"/>
-          </a:xfrm>
-          <a:prstGeom prst="rect">
-            <a:avLst/>
-          </a:prstGeom>
-          <a:noFill/>
-        </p:spPr>
-        <p:txBody>
-          <a:bodyPr wrap="square">
-            <a:spAutoFit/>
-          </a:bodyPr>
-          <a:lstStyle/>
-          <a:p>
-            <a:pPr algn="l"/>
-            <a:r>
-              <a:rPr sz="1400" b="0">
+            <a:ext cx="8229600" cy="2743200"/>
+          </a:xfrm>
+          <a:prstGeom prst="rect">
+            <a:avLst/>
+          </a:prstGeom>
+          <a:noFill/>
+        </p:spPr>
+        <p:txBody>
+          <a:bodyPr wrap="square">
+            <a:spAutoFit/>
+          </a:bodyPr>
+          <a:lstStyle/>
+          <a:p>
+            <a:pPr algn="l">
+              <a:spcAft>
+                <a:spcPts val="200"/>
+              </a:spcAft>
+            </a:pPr>
+            <a:r>
+              <a:rPr sz="1300" b="0">
                 <a:solidFill>
                   <a:srgbClr val="475569"/>
                 </a:solidFill>
@@ -13785,9 +14289,13 @@
             </a:r>
           </a:p>
           <a:p>
-            <a:pPr algn="l"/>
-            <a:r>
-              <a:rPr sz="1400" b="0">
+            <a:pPr algn="l">
+              <a:spcAft>
+                <a:spcPts val="200"/>
+              </a:spcAft>
+            </a:pPr>
+            <a:r>
+              <a:rPr sz="1300" b="0">
                 <a:solidFill>
                   <a:srgbClr val="475569"/>
                 </a:solidFill>
@@ -13797,9 +14305,13 @@
             </a:r>
           </a:p>
           <a:p>
-            <a:pPr algn="l"/>
-            <a:r>
-              <a:rPr sz="1400" b="0">
+            <a:pPr algn="l">
+              <a:spcAft>
+                <a:spcPts val="200"/>
+              </a:spcAft>
+            </a:pPr>
+            <a:r>
+              <a:rPr sz="1300" b="0">
                 <a:solidFill>
                   <a:srgbClr val="475569"/>
                 </a:solidFill>
@@ -13808,7 +14320,7 @@
               <a:t>•  Targeted DFT batch on Se-rich AB</a:t>
             </a:r>
             <a:r>
-              <a:rPr sz="1400" b="0" baseline="-25000">
+              <a:rPr sz="1300" b="0" baseline="-25000">
                 <a:solidFill>
                   <a:srgbClr val="475569"/>
                 </a:solidFill>
@@ -13817,7 +14329,7 @@
               <a:t>2</a:t>
             </a:r>
             <a:r>
-              <a:rPr sz="1400" b="0">
+              <a:rPr sz="1300" b="0">
                 <a:solidFill>
                   <a:srgbClr val="475569"/>
                 </a:solidFill>
@@ -13826,7 +14338,7 @@
               <a:t>C</a:t>
             </a:r>
             <a:r>
-              <a:rPr sz="1400" b="0" baseline="-25000">
+              <a:rPr sz="1300" b="0" baseline="-25000">
                 <a:solidFill>
                   <a:srgbClr val="475569"/>
                 </a:solidFill>
@@ -13835,7 +14347,7 @@
               <a:t>4</a:t>
             </a:r>
             <a:r>
-              <a:rPr sz="1400" b="0">
+              <a:rPr sz="1300" b="0">
                 <a:solidFill>
                   <a:srgbClr val="475569"/>
                 </a:solidFill>
@@ -13844,7 +14356,7 @@
               <a:t> and ABC</a:t>
             </a:r>
             <a:r>
-              <a:rPr sz="1400" b="0" baseline="-25000">
+              <a:rPr sz="1300" b="0" baseline="-25000">
                 <a:solidFill>
                   <a:srgbClr val="475569"/>
                 </a:solidFill>
@@ -13853,7 +14365,7 @@
               <a:t>3</a:t>
             </a:r>
             <a:r>
-              <a:rPr sz="1400" b="0">
+              <a:rPr sz="1300" b="0">
                 <a:solidFill>
                   <a:srgbClr val="475569"/>
                 </a:solidFill>
@@ -13863,9 +14375,13 @@
             </a:r>
           </a:p>
           <a:p>
-            <a:pPr algn="l"/>
-            <a:r>
-              <a:rPr sz="1400" b="0">
+            <a:pPr algn="l">
+              <a:spcAft>
+                <a:spcPts val="200"/>
+              </a:spcAft>
+            </a:pPr>
+            <a:r>
+              <a:rPr sz="1300" b="0">
                 <a:solidFill>
                   <a:srgbClr val="475569"/>
                 </a:solidFill>
@@ -13875,9 +14391,13 @@
             </a:r>
           </a:p>
           <a:p>
-            <a:pPr algn="l"/>
-            <a:r>
-              <a:rPr sz="1400" b="0">
+            <a:pPr algn="l">
+              <a:spcAft>
+                <a:spcPts val="200"/>
+              </a:spcAft>
+            </a:pPr>
+            <a:r>
+              <a:rPr sz="1300" b="0">
                 <a:solidFill>
                   <a:srgbClr val="475569"/>
                 </a:solidFill>
@@ -13896,7 +14416,7 @@
         </p:nvSpPr>
         <p:spPr>
           <a:xfrm>
-            <a:off x="6858000" y="4617720"/>
+            <a:off x="6858000" y="4663440"/>
             <a:ext cx="1828800" cy="274320"/>
           </a:xfrm>
           <a:prstGeom prst="rect">
@@ -14019,8 +14539,8 @@
         </p:nvSpPr>
         <p:spPr>
           <a:xfrm>
-            <a:off x="457200" y="731520"/>
-            <a:ext cx="8229600" cy="548640"/>
+            <a:off x="457200" y="640080"/>
+            <a:ext cx="8229600" cy="640080"/>
           </a:xfrm>
           <a:prstGeom prst="rect">
             <a:avLst/>
@@ -14035,7 +14555,7 @@
           <a:p>
             <a:pPr algn="l"/>
             <a:r>
-              <a:rPr sz="2800" b="1">
+              <a:rPr sz="2200" b="1">
                 <a:solidFill>
                   <a:srgbClr val="1C2533"/>
                 </a:solidFill>
@@ -14054,8 +14574,8 @@
         </p:nvSpPr>
         <p:spPr>
           <a:xfrm>
-            <a:off x="457200" y="1280160"/>
-            <a:ext cx="8229600" cy="365760"/>
+            <a:off x="457200" y="1325880"/>
+            <a:ext cx="8229600" cy="411480"/>
           </a:xfrm>
           <a:prstGeom prst="rect">
             <a:avLst/>
@@ -14070,7 +14590,7 @@
           <a:p>
             <a:pPr algn="l"/>
             <a:r>
-              <a:rPr sz="1600" b="0">
+              <a:rPr sz="1500" b="0">
                 <a:solidFill>
                   <a:srgbClr val="475569"/>
                 </a:solidFill>
@@ -14090,22 +14610,26 @@
         <p:spPr>
           <a:xfrm>
             <a:off x="457200" y="1828800"/>
-            <a:ext cx="8229600" cy="2926080"/>
-          </a:xfrm>
-          <a:prstGeom prst="rect">
-            <a:avLst/>
-          </a:prstGeom>
-          <a:noFill/>
-        </p:spPr>
-        <p:txBody>
-          <a:bodyPr wrap="square">
-            <a:spAutoFit/>
-          </a:bodyPr>
-          <a:lstStyle/>
-          <a:p>
-            <a:pPr algn="l"/>
-            <a:r>
-              <a:rPr sz="1400" b="0">
+            <a:ext cx="8229600" cy="2743200"/>
+          </a:xfrm>
+          <a:prstGeom prst="rect">
+            <a:avLst/>
+          </a:prstGeom>
+          <a:noFill/>
+        </p:spPr>
+        <p:txBody>
+          <a:bodyPr wrap="square">
+            <a:spAutoFit/>
+          </a:bodyPr>
+          <a:lstStyle/>
+          <a:p>
+            <a:pPr algn="l">
+              <a:spcAft>
+                <a:spcPts val="200"/>
+              </a:spcAft>
+            </a:pPr>
+            <a:r>
+              <a:rPr sz="1300" b="0">
                 <a:solidFill>
                   <a:srgbClr val="475569"/>
                 </a:solidFill>
@@ -14114,7 +14638,7 @@
               <a:t>•  Small-sample ML on 473 DFT-labelled materials improves the GPR / GB / ExtraTrees baseline by +50 % in R</a:t>
             </a:r>
             <a:r>
-              <a:rPr sz="1400" b="0" baseline="30000">
+              <a:rPr sz="1300" b="0" baseline="30000">
                 <a:solidFill>
                   <a:srgbClr val="475569"/>
                 </a:solidFill>
@@ -14124,9 +14648,13 @@
             </a:r>
           </a:p>
           <a:p>
-            <a:pPr algn="l"/>
-            <a:r>
-              <a:rPr sz="1400" b="0">
+            <a:pPr algn="l">
+              <a:spcAft>
+                <a:spcPts val="200"/>
+              </a:spcAft>
+            </a:pPr>
+            <a:r>
+              <a:rPr sz="1300" b="0">
                 <a:solidFill>
                   <a:srgbClr val="475569"/>
                 </a:solidFill>
@@ -14135,7 +14663,7 @@
               <a:t>•  Fourteen-candidate chalcogenide shortlist; Se</a:t>
             </a:r>
             <a:r>
-              <a:rPr sz="1400" b="0" baseline="-25000">
+              <a:rPr sz="1300" b="0" baseline="-25000">
                 <a:solidFill>
                   <a:srgbClr val="475569"/>
                 </a:solidFill>
@@ -14144,7 +14672,7 @@
               <a:t>16</a:t>
             </a:r>
             <a:r>
-              <a:rPr sz="1400" b="0">
+              <a:rPr sz="1300" b="0">
                 <a:solidFill>
                   <a:srgbClr val="475569"/>
                 </a:solidFill>
@@ -14153,7 +14681,7 @@
               <a:t>Sn</a:t>
             </a:r>
             <a:r>
-              <a:rPr sz="1400" b="0" baseline="-25000">
+              <a:rPr sz="1300" b="0" baseline="-25000">
                 <a:solidFill>
                   <a:srgbClr val="475569"/>
                 </a:solidFill>
@@ -14162,7 +14690,7 @@
               <a:t>8</a:t>
             </a:r>
             <a:r>
-              <a:rPr sz="1400" b="0">
+              <a:rPr sz="1300" b="0">
                 <a:solidFill>
                   <a:srgbClr val="475569"/>
                 </a:solidFill>
@@ -14171,7 +14699,7 @@
               <a:t>Zr</a:t>
             </a:r>
             <a:r>
-              <a:rPr sz="1400" b="0" baseline="-25000">
+              <a:rPr sz="1300" b="0" baseline="-25000">
                 <a:solidFill>
                   <a:srgbClr val="475569"/>
                 </a:solidFill>
@@ -14180,7 +14708,7 @@
               <a:t>4</a:t>
             </a:r>
             <a:r>
-              <a:rPr sz="1400" b="0">
+              <a:rPr sz="1300" b="0">
                 <a:solidFill>
                   <a:srgbClr val="475569"/>
                 </a:solidFill>
@@ -14190,9 +14718,13 @@
             </a:r>
           </a:p>
           <a:p>
-            <a:pPr algn="l"/>
-            <a:r>
-              <a:rPr sz="1400" b="0">
+            <a:pPr algn="l">
+              <a:spcAft>
+                <a:spcPts val="200"/>
+              </a:spcAft>
+            </a:pPr>
+            <a:r>
+              <a:rPr sz="1300" b="0">
                 <a:solidFill>
                   <a:srgbClr val="475569"/>
                 </a:solidFill>
@@ -14202,9 +14734,13 @@
             </a:r>
           </a:p>
           <a:p>
-            <a:pPr algn="l"/>
-            <a:r>
-              <a:rPr sz="1400" b="0">
+            <a:pPr algn="l">
+              <a:spcAft>
+                <a:spcPts val="200"/>
+              </a:spcAft>
+            </a:pPr>
+            <a:r>
+              <a:rPr sz="1300" b="0">
                 <a:solidFill>
                   <a:srgbClr val="475569"/>
                 </a:solidFill>
@@ -14214,9 +14750,13 @@
             </a:r>
           </a:p>
           <a:p>
-            <a:pPr algn="l"/>
-            <a:r>
-              <a:rPr sz="1400" b="0">
+            <a:pPr algn="l">
+              <a:spcAft>
+                <a:spcPts val="200"/>
+              </a:spcAft>
+            </a:pPr>
+            <a:r>
+              <a:rPr sz="1300" b="0">
                 <a:solidFill>
                   <a:srgbClr val="475569"/>
                 </a:solidFill>
@@ -14235,7 +14775,7 @@
         </p:nvSpPr>
         <p:spPr>
           <a:xfrm>
-            <a:off x="6858000" y="4617720"/>
+            <a:off x="6858000" y="4663440"/>
             <a:ext cx="1828800" cy="274320"/>
           </a:xfrm>
           <a:prstGeom prst="rect">
@@ -14358,8 +14898,8 @@
         </p:nvSpPr>
         <p:spPr>
           <a:xfrm>
-            <a:off x="457200" y="731520"/>
-            <a:ext cx="8229600" cy="548640"/>
+            <a:off x="457200" y="640080"/>
+            <a:ext cx="8229600" cy="640080"/>
           </a:xfrm>
           <a:prstGeom prst="rect">
             <a:avLst/>
@@ -14374,7 +14914,7 @@
           <a:p>
             <a:pPr algn="l"/>
             <a:r>
-              <a:rPr sz="2800" b="1">
+              <a:rPr sz="2200" b="1">
                 <a:solidFill>
                   <a:srgbClr val="1C2533"/>
                 </a:solidFill>
@@ -14393,8 +14933,8 @@
         </p:nvSpPr>
         <p:spPr>
           <a:xfrm>
-            <a:off x="457200" y="1280160"/>
-            <a:ext cx="8229600" cy="365760"/>
+            <a:off x="457200" y="1325880"/>
+            <a:ext cx="8229600" cy="411480"/>
           </a:xfrm>
           <a:prstGeom prst="rect">
             <a:avLst/>
@@ -14409,7 +14949,7 @@
           <a:p>
             <a:pPr algn="l"/>
             <a:r>
-              <a:rPr sz="1600" b="0">
+              <a:rPr sz="1500" b="0">
                 <a:solidFill>
                   <a:srgbClr val="475569"/>
                 </a:solidFill>
@@ -14429,22 +14969,26 @@
         <p:spPr>
           <a:xfrm>
             <a:off x="457200" y="1828800"/>
-            <a:ext cx="8229600" cy="2926080"/>
-          </a:xfrm>
-          <a:prstGeom prst="rect">
-            <a:avLst/>
-          </a:prstGeom>
-          <a:noFill/>
-        </p:spPr>
-        <p:txBody>
-          <a:bodyPr wrap="square">
-            <a:spAutoFit/>
-          </a:bodyPr>
-          <a:lstStyle/>
-          <a:p>
-            <a:pPr algn="l"/>
-            <a:r>
-              <a:rPr sz="1400" b="0">
+            <a:ext cx="8229600" cy="2743200"/>
+          </a:xfrm>
+          <a:prstGeom prst="rect">
+            <a:avLst/>
+          </a:prstGeom>
+          <a:noFill/>
+        </p:spPr>
+        <p:txBody>
+          <a:bodyPr wrap="square">
+            <a:spAutoFit/>
+          </a:bodyPr>
+          <a:lstStyle/>
+          <a:p>
+            <a:pPr algn="l">
+              <a:spcAft>
+                <a:spcPts val="200"/>
+              </a:spcAft>
+            </a:pPr>
+            <a:r>
+              <a:rPr sz="1300" b="0">
                 <a:solidFill>
                   <a:srgbClr val="475569"/>
                 </a:solidFill>
@@ -14453,7 +14997,7 @@
               <a:t>•  Yan C. et al., Nat. Energy 3, 764 (2018) · ACS Energy Lett. 2, 930 (2017) — kesterite Cu</a:t>
             </a:r>
             <a:r>
-              <a:rPr sz="1400" b="0" baseline="-25000">
+              <a:rPr sz="1300" b="0" baseline="-25000">
                 <a:solidFill>
                   <a:srgbClr val="475569"/>
                 </a:solidFill>
@@ -14462,7 +15006,7 @@
               <a:t>2</a:t>
             </a:r>
             <a:r>
-              <a:rPr sz="1400" b="0">
+              <a:rPr sz="1300" b="0">
                 <a:solidFill>
                   <a:srgbClr val="475569"/>
                 </a:solidFill>
@@ -14471,7 +15015,7 @@
               <a:t>ZnSnS</a:t>
             </a:r>
             <a:r>
-              <a:rPr sz="1400" b="0" baseline="-25000">
+              <a:rPr sz="1300" b="0" baseline="-25000">
                 <a:solidFill>
                   <a:srgbClr val="475569"/>
                 </a:solidFill>
@@ -14481,9 +15025,13 @@
             </a:r>
           </a:p>
           <a:p>
-            <a:pPr algn="l"/>
-            <a:r>
-              <a:rPr sz="1400" b="0">
+            <a:pPr algn="l">
+              <a:spcAft>
+                <a:spcPts val="200"/>
+              </a:spcAft>
+            </a:pPr>
+            <a:r>
+              <a:rPr sz="1300" b="0">
                 <a:solidFill>
                   <a:srgbClr val="475569"/>
                 </a:solidFill>
@@ -14493,9 +15041,13 @@
             </a:r>
           </a:p>
           <a:p>
-            <a:pPr algn="l"/>
-            <a:r>
-              <a:rPr sz="1400" b="0">
+            <a:pPr algn="l">
+              <a:spcAft>
+                <a:spcPts val="200"/>
+              </a:spcAft>
+            </a:pPr>
+            <a:r>
+              <a:rPr sz="1300" b="0">
                 <a:solidFill>
                   <a:srgbClr val="475569"/>
                 </a:solidFill>
@@ -14505,9 +15057,13 @@
             </a:r>
           </a:p>
           <a:p>
-            <a:pPr algn="l"/>
-            <a:r>
-              <a:rPr sz="1400" b="0">
+            <a:pPr algn="l">
+              <a:spcAft>
+                <a:spcPts val="200"/>
+              </a:spcAft>
+            </a:pPr>
+            <a:r>
+              <a:rPr sz="1300" b="0">
                 <a:solidFill>
                   <a:srgbClr val="475569"/>
                 </a:solidFill>
@@ -14517,9 +15073,13 @@
             </a:r>
           </a:p>
           <a:p>
-            <a:pPr algn="l"/>
-            <a:r>
-              <a:rPr sz="1400" b="0">
+            <a:pPr algn="l">
+              <a:spcAft>
+                <a:spcPts val="200"/>
+              </a:spcAft>
+            </a:pPr>
+            <a:r>
+              <a:rPr sz="1300" b="0">
                 <a:solidFill>
                   <a:srgbClr val="475569"/>
                 </a:solidFill>
@@ -14529,9 +15089,13 @@
             </a:r>
           </a:p>
           <a:p>
-            <a:pPr algn="l"/>
-            <a:r>
-              <a:rPr sz="1400" b="0">
+            <a:pPr algn="l">
+              <a:spcAft>
+                <a:spcPts val="200"/>
+              </a:spcAft>
+            </a:pPr>
+            <a:r>
+              <a:rPr sz="1300" b="0">
                 <a:solidFill>
                   <a:srgbClr val="475569"/>
                 </a:solidFill>
@@ -14541,9 +15105,13 @@
             </a:r>
           </a:p>
           <a:p>
-            <a:pPr algn="l"/>
-            <a:r>
-              <a:rPr sz="1400" b="0">
+            <a:pPr algn="l">
+              <a:spcAft>
+                <a:spcPts val="200"/>
+              </a:spcAft>
+            </a:pPr>
+            <a:r>
+              <a:rPr sz="1300" b="0">
                 <a:solidFill>
                   <a:srgbClr val="475569"/>
                 </a:solidFill>
@@ -14553,9 +15121,13 @@
             </a:r>
           </a:p>
           <a:p>
-            <a:pPr algn="l"/>
-            <a:r>
-              <a:rPr sz="1400" b="0">
+            <a:pPr algn="l">
+              <a:spcAft>
+                <a:spcPts val="200"/>
+              </a:spcAft>
+            </a:pPr>
+            <a:r>
+              <a:rPr sz="1300" b="0">
                 <a:solidFill>
                   <a:srgbClr val="475569"/>
                 </a:solidFill>
@@ -14565,9 +15137,13 @@
             </a:r>
           </a:p>
           <a:p>
-            <a:pPr algn="l"/>
-            <a:r>
-              <a:rPr sz="1400" b="0">
+            <a:pPr algn="l">
+              <a:spcAft>
+                <a:spcPts val="200"/>
+              </a:spcAft>
+            </a:pPr>
+            <a:r>
+              <a:rPr sz="1300" b="0">
                 <a:solidFill>
                   <a:srgbClr val="475569"/>
                 </a:solidFill>
@@ -14577,9 +15153,13 @@
             </a:r>
           </a:p>
           <a:p>
-            <a:pPr algn="l"/>
-            <a:r>
-              <a:rPr sz="1400" b="0">
+            <a:pPr algn="l">
+              <a:spcAft>
+                <a:spcPts val="200"/>
+              </a:spcAft>
+            </a:pPr>
+            <a:r>
+              <a:rPr sz="1300" b="0">
                 <a:solidFill>
                   <a:srgbClr val="475569"/>
                 </a:solidFill>
@@ -14589,9 +15169,13 @@
             </a:r>
           </a:p>
           <a:p>
-            <a:pPr algn="l"/>
-            <a:r>
-              <a:rPr sz="1400" b="0">
+            <a:pPr algn="l">
+              <a:spcAft>
+                <a:spcPts val="200"/>
+              </a:spcAft>
+            </a:pPr>
+            <a:r>
+              <a:rPr sz="1300" b="0">
                 <a:solidFill>
                   <a:srgbClr val="475569"/>
                 </a:solidFill>
@@ -14601,9 +15185,13 @@
             </a:r>
           </a:p>
           <a:p>
-            <a:pPr algn="l"/>
-            <a:r>
-              <a:rPr sz="1400" b="0">
+            <a:pPr algn="l">
+              <a:spcAft>
+                <a:spcPts val="200"/>
+              </a:spcAft>
+            </a:pPr>
+            <a:r>
+              <a:rPr sz="1300" b="0">
                 <a:solidFill>
                   <a:srgbClr val="475569"/>
                 </a:solidFill>
@@ -14613,9 +15201,13 @@
             </a:r>
           </a:p>
           <a:p>
-            <a:pPr algn="l"/>
-            <a:r>
-              <a:rPr sz="1400" b="0">
+            <a:pPr algn="l">
+              <a:spcAft>
+                <a:spcPts val="200"/>
+              </a:spcAft>
+            </a:pPr>
+            <a:r>
+              <a:rPr sz="1300" b="0">
                 <a:solidFill>
                   <a:srgbClr val="475569"/>
                 </a:solidFill>
@@ -14625,9 +15217,13 @@
             </a:r>
           </a:p>
           <a:p>
-            <a:pPr algn="l"/>
-            <a:r>
-              <a:rPr sz="1400" b="0">
+            <a:pPr algn="l">
+              <a:spcAft>
+                <a:spcPts val="200"/>
+              </a:spcAft>
+            </a:pPr>
+            <a:r>
+              <a:rPr sz="1300" b="0">
                 <a:solidFill>
                   <a:srgbClr val="475569"/>
                 </a:solidFill>
@@ -14646,7 +15242,7 @@
         </p:nvSpPr>
         <p:spPr>
           <a:xfrm>
-            <a:off x="6858000" y="4617720"/>
+            <a:off x="6858000" y="4663440"/>
             <a:ext cx="1828800" cy="274320"/>
           </a:xfrm>
           <a:prstGeom prst="rect">
@@ -14769,8 +15365,8 @@
         </p:nvSpPr>
         <p:spPr>
           <a:xfrm>
-            <a:off x="457200" y="731520"/>
-            <a:ext cx="8229600" cy="548640"/>
+            <a:off x="457200" y="640080"/>
+            <a:ext cx="8229600" cy="640080"/>
           </a:xfrm>
           <a:prstGeom prst="rect">
             <a:avLst/>
@@ -14785,7 +15381,7 @@
           <a:p>
             <a:pPr algn="l"/>
             <a:r>
-              <a:rPr sz="2800" b="1">
+              <a:rPr sz="2200" b="1">
                 <a:solidFill>
                   <a:srgbClr val="1C2533"/>
                 </a:solidFill>
@@ -14794,7 +15390,7 @@
               <a:t>CIGS — Cu(In,Ga)Se</a:t>
             </a:r>
             <a:r>
-              <a:rPr sz="2800" b="1" baseline="-25000">
+              <a:rPr sz="2200" b="1" baseline="-25000">
                 <a:solidFill>
                   <a:srgbClr val="1C2533"/>
                 </a:solidFill>
@@ -14803,7 +15399,7 @@
               <a:t>2</a:t>
             </a:r>
             <a:r>
-              <a:rPr sz="2800" b="1">
+              <a:rPr sz="2200" b="1">
                 <a:solidFill>
                   <a:srgbClr val="1C2533"/>
                 </a:solidFill>
@@ -14822,8 +15418,8 @@
         </p:nvSpPr>
         <p:spPr>
           <a:xfrm>
-            <a:off x="457200" y="1280160"/>
-            <a:ext cx="8229600" cy="365760"/>
+            <a:off x="457200" y="1325880"/>
+            <a:ext cx="8229600" cy="411480"/>
           </a:xfrm>
           <a:prstGeom prst="rect">
             <a:avLst/>
@@ -14838,7 +15434,7 @@
           <a:p>
             <a:pPr algn="l"/>
             <a:r>
-              <a:rPr sz="1600" b="0">
+              <a:rPr sz="1500" b="0">
                 <a:solidFill>
                   <a:srgbClr val="475569"/>
                 </a:solidFill>
@@ -14865,7 +15461,7 @@
         </p:blipFill>
         <p:spPr>
           <a:xfrm>
-            <a:off x="457200" y="2281843"/>
+            <a:off x="457200" y="2190403"/>
             <a:ext cx="4937760" cy="2019992"/>
           </a:xfrm>
           <a:prstGeom prst="rect">
@@ -14882,22 +15478,26 @@
         <p:spPr>
           <a:xfrm>
             <a:off x="5669280" y="1828800"/>
-            <a:ext cx="3017520" cy="2926080"/>
-          </a:xfrm>
-          <a:prstGeom prst="rect">
-            <a:avLst/>
-          </a:prstGeom>
-          <a:noFill/>
-        </p:spPr>
-        <p:txBody>
-          <a:bodyPr wrap="square">
-            <a:spAutoFit/>
-          </a:bodyPr>
-          <a:lstStyle/>
-          <a:p>
-            <a:pPr algn="l"/>
-            <a:r>
-              <a:rPr sz="1400" b="0">
+            <a:ext cx="3017520" cy="2743200"/>
+          </a:xfrm>
+          <a:prstGeom prst="rect">
+            <a:avLst/>
+          </a:prstGeom>
+          <a:noFill/>
+        </p:spPr>
+        <p:txBody>
+          <a:bodyPr wrap="square">
+            <a:spAutoFit/>
+          </a:bodyPr>
+          <a:lstStyle/>
+          <a:p>
+            <a:pPr algn="l">
+              <a:spcAft>
+                <a:spcPts val="200"/>
+              </a:spcAft>
+            </a:pPr>
+            <a:r>
+              <a:rPr sz="1300" b="0">
                 <a:solidFill>
                   <a:srgbClr val="475569"/>
                 </a:solidFill>
@@ -14906,7 +15506,7 @@
               <a:t>•  Stoichiometry Cu(In,Ga)Se</a:t>
             </a:r>
             <a:r>
-              <a:rPr sz="1400" b="0" baseline="-25000">
+              <a:rPr sz="1300" b="0" baseline="-25000">
                 <a:solidFill>
                   <a:srgbClr val="475569"/>
                 </a:solidFill>
@@ -14915,7 +15515,7 @@
               <a:t>2</a:t>
             </a:r>
             <a:r>
-              <a:rPr sz="1400" b="0">
+              <a:rPr sz="1300" b="0">
                 <a:solidFill>
                   <a:srgbClr val="475569"/>
                 </a:solidFill>
@@ -14925,9 +15525,13 @@
             </a:r>
           </a:p>
           <a:p>
-            <a:pPr algn="l"/>
-            <a:r>
-              <a:rPr sz="1400" b="0">
+            <a:pPr algn="l">
+              <a:spcAft>
+                <a:spcPts val="200"/>
+              </a:spcAft>
+            </a:pPr>
+            <a:r>
+              <a:rPr sz="1300" b="0">
                 <a:solidFill>
                   <a:srgbClr val="475569"/>
                 </a:solidFill>
@@ -14937,9 +15541,13 @@
             </a:r>
           </a:p>
           <a:p>
-            <a:pPr algn="l"/>
-            <a:r>
-              <a:rPr sz="1400" b="0">
+            <a:pPr algn="l">
+              <a:spcAft>
+                <a:spcPts val="200"/>
+              </a:spcAft>
+            </a:pPr>
+            <a:r>
+              <a:rPr sz="1300" b="0">
                 <a:solidFill>
                   <a:srgbClr val="475569"/>
                 </a:solidFill>
@@ -14948,7 +15556,7 @@
               <a:t>•  Direct band gap tunable approximately linearly from 1.04 eV (CuInSe</a:t>
             </a:r>
             <a:r>
-              <a:rPr sz="1400" b="0" baseline="-25000">
+              <a:rPr sz="1300" b="0" baseline="-25000">
                 <a:solidFill>
                   <a:srgbClr val="475569"/>
                 </a:solidFill>
@@ -14957,7 +15565,7 @@
               <a:t>2</a:t>
             </a:r>
             <a:r>
-              <a:rPr sz="1400" b="0">
+              <a:rPr sz="1300" b="0">
                 <a:solidFill>
                   <a:srgbClr val="475569"/>
                 </a:solidFill>
@@ -14966,7 +15574,7 @@
               <a:t>) to 1.68 eV (CuGaSe</a:t>
             </a:r>
             <a:r>
-              <a:rPr sz="1400" b="0" baseline="-25000">
+              <a:rPr sz="1300" b="0" baseline="-25000">
                 <a:solidFill>
                   <a:srgbClr val="475569"/>
                 </a:solidFill>
@@ -14975,7 +15583,7 @@
               <a:t>2</a:t>
             </a:r>
             <a:r>
-              <a:rPr sz="1400" b="0">
+              <a:rPr sz="1300" b="0">
                 <a:solidFill>
                   <a:srgbClr val="475569"/>
                 </a:solidFill>
@@ -14985,9 +15593,13 @@
             </a:r>
           </a:p>
           <a:p>
-            <a:pPr algn="l"/>
-            <a:r>
-              <a:rPr sz="1400" b="0">
+            <a:pPr algn="l">
+              <a:spcAft>
+                <a:spcPts val="200"/>
+              </a:spcAft>
+            </a:pPr>
+            <a:r>
+              <a:rPr sz="1300" b="0">
                 <a:solidFill>
                   <a:srgbClr val="475569"/>
                 </a:solidFill>
@@ -14997,9 +15609,13 @@
             </a:r>
           </a:p>
           <a:p>
-            <a:pPr algn="l"/>
-            <a:r>
-              <a:rPr sz="1400" b="0">
+            <a:pPr algn="l">
+              <a:spcAft>
+                <a:spcPts val="200"/>
+              </a:spcAft>
+            </a:pPr>
+            <a:r>
+              <a:rPr sz="1300" b="0">
                 <a:solidFill>
                   <a:srgbClr val="475569"/>
                 </a:solidFill>
@@ -15008,7 +15624,7 @@
               <a:t>•  Champion lab cell PCE 23.4 % (Solar Frontier 2019); module reliability T</a:t>
             </a:r>
             <a:r>
-              <a:rPr sz="1400" b="0" baseline="-25000">
+              <a:rPr sz="1300" b="0" baseline="-25000">
                 <a:solidFill>
                   <a:srgbClr val="475569"/>
                 </a:solidFill>
@@ -15017,7 +15633,7 @@
               <a:t>80</a:t>
             </a:r>
             <a:r>
-              <a:rPr sz="1400" b="0">
+              <a:rPr sz="1300" b="0">
                 <a:solidFill>
                   <a:srgbClr val="475569"/>
                 </a:solidFill>
@@ -15026,7 +15642,7 @@
               <a:t> </a:t>
             </a:r>
             <a:r>
-              <a:rPr sz="1400" b="0" baseline="30000">
+              <a:rPr sz="1300" b="0" baseline="30000">
                 <a:solidFill>
                   <a:srgbClr val="475569"/>
                 </a:solidFill>
@@ -15035,7 +15651,7 @@
               <a:t>&gt;</a:t>
             </a:r>
             <a:r>
-              <a:rPr sz="1400" b="0">
+              <a:rPr sz="1300" b="0">
                 <a:solidFill>
                   <a:srgbClr val="475569"/>
                 </a:solidFill>
@@ -15045,9 +15661,13 @@
             </a:r>
           </a:p>
           <a:p>
-            <a:pPr algn="l"/>
-            <a:r>
-              <a:rPr sz="1400" b="0">
+            <a:pPr algn="l">
+              <a:spcAft>
+                <a:spcPts val="200"/>
+              </a:spcAft>
+            </a:pPr>
+            <a:r>
+              <a:rPr sz="1300" b="0">
                 <a:solidFill>
                   <a:srgbClr val="475569"/>
                 </a:solidFill>
@@ -15056,7 +15676,7 @@
               <a:t>•  In-free sister chalcogenide kesterite Cu</a:t>
             </a:r>
             <a:r>
-              <a:rPr sz="1400" b="0" baseline="-25000">
+              <a:rPr sz="1300" b="0" baseline="-25000">
                 <a:solidFill>
                   <a:srgbClr val="475569"/>
                 </a:solidFill>
@@ -15065,7 +15685,7 @@
               <a:t>2</a:t>
             </a:r>
             <a:r>
-              <a:rPr sz="1400" b="0">
+              <a:rPr sz="1300" b="0">
                 <a:solidFill>
                   <a:srgbClr val="475569"/>
                 </a:solidFill>
@@ -15074,7 +15694,7 @@
               <a:t>ZnSn(S,Se)</a:t>
             </a:r>
             <a:r>
-              <a:rPr sz="1400" b="0" baseline="-25000">
+              <a:rPr sz="1300" b="0" baseline="-25000">
                 <a:solidFill>
                   <a:srgbClr val="475569"/>
                 </a:solidFill>
@@ -15083,7 +15703,7 @@
               <a:t>4</a:t>
             </a:r>
             <a:r>
-              <a:rPr sz="1400" b="0">
+              <a:rPr sz="1300" b="0">
                 <a:solidFill>
                   <a:srgbClr val="475569"/>
                 </a:solidFill>
@@ -15102,7 +15722,7 @@
         </p:nvSpPr>
         <p:spPr>
           <a:xfrm>
-            <a:off x="6858000" y="4617720"/>
+            <a:off x="6858000" y="4663440"/>
             <a:ext cx="1828800" cy="274320"/>
           </a:xfrm>
           <a:prstGeom prst="rect">
@@ -15225,8 +15845,8 @@
         </p:nvSpPr>
         <p:spPr>
           <a:xfrm>
-            <a:off x="457200" y="731520"/>
-            <a:ext cx="8229600" cy="548640"/>
+            <a:off x="457200" y="640080"/>
+            <a:ext cx="8229600" cy="640080"/>
           </a:xfrm>
           <a:prstGeom prst="rect">
             <a:avLst/>
@@ -15241,7 +15861,7 @@
           <a:p>
             <a:pPr algn="l"/>
             <a:r>
-              <a:rPr sz="2800" b="1">
+              <a:rPr sz="2200" b="1">
                 <a:solidFill>
                   <a:srgbClr val="1C2533"/>
                 </a:solidFill>
@@ -15250,7 +15870,7 @@
               <a:t>Perovskite — ABX</a:t>
             </a:r>
             <a:r>
-              <a:rPr sz="2800" b="1" baseline="-25000">
+              <a:rPr sz="2200" b="1" baseline="-25000">
                 <a:solidFill>
                   <a:srgbClr val="1C2533"/>
                 </a:solidFill>
@@ -15259,7 +15879,7 @@
               <a:t>3</a:t>
             </a:r>
             <a:r>
-              <a:rPr sz="2800" b="1">
+              <a:rPr sz="2200" b="1">
                 <a:solidFill>
                   <a:srgbClr val="1C2533"/>
                 </a:solidFill>
@@ -15278,8 +15898,8 @@
         </p:nvSpPr>
         <p:spPr>
           <a:xfrm>
-            <a:off x="457200" y="1280160"/>
-            <a:ext cx="8229600" cy="365760"/>
+            <a:off x="457200" y="1325880"/>
+            <a:ext cx="8229600" cy="411480"/>
           </a:xfrm>
           <a:prstGeom prst="rect">
             <a:avLst/>
@@ -15294,7 +15914,7 @@
           <a:p>
             <a:pPr algn="l"/>
             <a:r>
-              <a:rPr sz="1600" b="0">
+              <a:rPr sz="1500" b="0">
                 <a:solidFill>
                   <a:srgbClr val="475569"/>
                 </a:solidFill>
@@ -15303,7 +15923,7 @@
               <a:t>Pm-3̄m cubic parent · corner-sharing BX</a:t>
             </a:r>
             <a:r>
-              <a:rPr sz="1600" b="0" baseline="-25000">
+              <a:rPr sz="1500" b="0" baseline="-25000">
                 <a:solidFill>
                   <a:srgbClr val="475569"/>
                 </a:solidFill>
@@ -15312,7 +15932,7 @@
               <a:t>6</a:t>
             </a:r>
             <a:r>
-              <a:rPr sz="1600" b="0">
+              <a:rPr sz="1500" b="0">
                 <a:solidFill>
                   <a:srgbClr val="475569"/>
                 </a:solidFill>
@@ -15339,7 +15959,7 @@
         </p:blipFill>
         <p:spPr>
           <a:xfrm>
-            <a:off x="457200" y="2281843"/>
+            <a:off x="457200" y="2190403"/>
             <a:ext cx="4937760" cy="2019992"/>
           </a:xfrm>
           <a:prstGeom prst="rect">
@@ -15356,22 +15976,26 @@
         <p:spPr>
           <a:xfrm>
             <a:off x="5669280" y="1828800"/>
-            <a:ext cx="3017520" cy="2926080"/>
-          </a:xfrm>
-          <a:prstGeom prst="rect">
-            <a:avLst/>
-          </a:prstGeom>
-          <a:noFill/>
-        </p:spPr>
-        <p:txBody>
-          <a:bodyPr wrap="square">
-            <a:spAutoFit/>
-          </a:bodyPr>
-          <a:lstStyle/>
-          <a:p>
-            <a:pPr algn="l"/>
-            <a:r>
-              <a:rPr sz="1400" b="0">
+            <a:ext cx="3017520" cy="2743200"/>
+          </a:xfrm>
+          <a:prstGeom prst="rect">
+            <a:avLst/>
+          </a:prstGeom>
+          <a:noFill/>
+        </p:spPr>
+        <p:txBody>
+          <a:bodyPr wrap="square">
+            <a:spAutoFit/>
+          </a:bodyPr>
+          <a:lstStyle/>
+          <a:p>
+            <a:pPr algn="l">
+              <a:spcAft>
+                <a:spcPts val="200"/>
+              </a:spcAft>
+            </a:pPr>
+            <a:r>
+              <a:rPr sz="1300" b="0">
                 <a:solidFill>
                   <a:srgbClr val="475569"/>
                 </a:solidFill>
@@ -15380,7 +16004,7 @@
               <a:t>•  General formula ABX</a:t>
             </a:r>
             <a:r>
-              <a:rPr sz="1400" b="0" baseline="-25000">
+              <a:rPr sz="1300" b="0" baseline="-25000">
                 <a:solidFill>
                   <a:srgbClr val="475569"/>
                 </a:solidFill>
@@ -15389,7 +16013,7 @@
               <a:t>3</a:t>
             </a:r>
             <a:r>
-              <a:rPr sz="1400" b="0">
+              <a:rPr sz="1300" b="0">
                 <a:solidFill>
                   <a:srgbClr val="475569"/>
                 </a:solidFill>
@@ -15398,7 +16022,7 @@
               <a:t>: A = Cs</a:t>
             </a:r>
             <a:r>
-              <a:rPr sz="1400" b="0" baseline="30000">
+              <a:rPr sz="1300" b="0" baseline="30000">
                 <a:solidFill>
                   <a:srgbClr val="475569"/>
                 </a:solidFill>
@@ -15407,7 +16031,7 @@
               <a:t>+</a:t>
             </a:r>
             <a:r>
-              <a:rPr sz="1400" b="0">
+              <a:rPr sz="1300" b="0">
                 <a:solidFill>
                   <a:srgbClr val="475569"/>
                 </a:solidFill>
@@ -15416,7 +16040,7 @@
               <a:t> / MA</a:t>
             </a:r>
             <a:r>
-              <a:rPr sz="1400" b="0" baseline="30000">
+              <a:rPr sz="1300" b="0" baseline="30000">
                 <a:solidFill>
                   <a:srgbClr val="475569"/>
                 </a:solidFill>
@@ -15425,7 +16049,7 @@
               <a:t>+</a:t>
             </a:r>
             <a:r>
-              <a:rPr sz="1400" b="0">
+              <a:rPr sz="1300" b="0">
                 <a:solidFill>
                   <a:srgbClr val="475569"/>
                 </a:solidFill>
@@ -15434,7 +16058,7 @@
               <a:t> (CH</a:t>
             </a:r>
             <a:r>
-              <a:rPr sz="1400" b="0" baseline="-25000">
+              <a:rPr sz="1300" b="0" baseline="-25000">
                 <a:solidFill>
                   <a:srgbClr val="475569"/>
                 </a:solidFill>
@@ -15443,7 +16067,7 @@
               <a:t>3</a:t>
             </a:r>
             <a:r>
-              <a:rPr sz="1400" b="0">
+              <a:rPr sz="1300" b="0">
                 <a:solidFill>
                   <a:srgbClr val="475569"/>
                 </a:solidFill>
@@ -15452,7 +16076,7 @@
               <a:t>NH</a:t>
             </a:r>
             <a:r>
-              <a:rPr sz="1400" b="0" baseline="-25000">
+              <a:rPr sz="1300" b="0" baseline="-25000">
                 <a:solidFill>
                   <a:srgbClr val="475569"/>
                 </a:solidFill>
@@ -15461,7 +16085,7 @@
               <a:t>3</a:t>
             </a:r>
             <a:r>
-              <a:rPr sz="1400" b="0" baseline="30000">
+              <a:rPr sz="1300" b="0" baseline="30000">
                 <a:solidFill>
                   <a:srgbClr val="475569"/>
                 </a:solidFill>
@@ -15470,7 +16094,7 @@
               <a:t>+</a:t>
             </a:r>
             <a:r>
-              <a:rPr sz="1400" b="0">
+              <a:rPr sz="1300" b="0">
                 <a:solidFill>
                   <a:srgbClr val="475569"/>
                 </a:solidFill>
@@ -15479,7 +16103,7 @@
               <a:t>) / FA</a:t>
             </a:r>
             <a:r>
-              <a:rPr sz="1400" b="0" baseline="30000">
+              <a:rPr sz="1300" b="0" baseline="30000">
                 <a:solidFill>
                   <a:srgbClr val="475569"/>
                 </a:solidFill>
@@ -15488,7 +16112,7 @@
               <a:t>+</a:t>
             </a:r>
             <a:r>
-              <a:rPr sz="1400" b="0">
+              <a:rPr sz="1300" b="0">
                 <a:solidFill>
                   <a:srgbClr val="475569"/>
                 </a:solidFill>
@@ -15497,7 +16121,7 @@
               <a:t> · B = Pb</a:t>
             </a:r>
             <a:r>
-              <a:rPr sz="1400" b="0" baseline="30000">
+              <a:rPr sz="1300" b="0" baseline="30000">
                 <a:solidFill>
                   <a:srgbClr val="475569"/>
                 </a:solidFill>
@@ -15506,7 +16130,7 @@
               <a:t>2+</a:t>
             </a:r>
             <a:r>
-              <a:rPr sz="1400" b="0">
+              <a:rPr sz="1300" b="0">
                 <a:solidFill>
                   <a:srgbClr val="475569"/>
                 </a:solidFill>
@@ -15515,7 +16139,7 @@
               <a:t> / Sn</a:t>
             </a:r>
             <a:r>
-              <a:rPr sz="1400" b="0" baseline="30000">
+              <a:rPr sz="1300" b="0" baseline="30000">
                 <a:solidFill>
                   <a:srgbClr val="475569"/>
                 </a:solidFill>
@@ -15524,7 +16148,7 @@
               <a:t>2+</a:t>
             </a:r>
             <a:r>
-              <a:rPr sz="1400" b="0">
+              <a:rPr sz="1300" b="0">
                 <a:solidFill>
                   <a:srgbClr val="475569"/>
                 </a:solidFill>
@@ -15534,9 +16158,13 @@
             </a:r>
           </a:p>
           <a:p>
-            <a:pPr algn="l"/>
-            <a:r>
-              <a:rPr sz="1400" b="0">
+            <a:pPr algn="l">
+              <a:spcAft>
+                <a:spcPts val="200"/>
+              </a:spcAft>
+            </a:pPr>
+            <a:r>
+              <a:rPr sz="1300" b="0">
                 <a:solidFill>
                   <a:srgbClr val="475569"/>
                 </a:solidFill>
@@ -15545,7 +16173,7 @@
               <a:t>•  BX</a:t>
             </a:r>
             <a:r>
-              <a:rPr sz="1400" b="0" baseline="-25000">
+              <a:rPr sz="1300" b="0" baseline="-25000">
                 <a:solidFill>
                   <a:srgbClr val="475569"/>
                 </a:solidFill>
@@ -15554,7 +16182,7 @@
               <a:t>6</a:t>
             </a:r>
             <a:r>
-              <a:rPr sz="1400" b="0">
+              <a:rPr sz="1300" b="0">
                 <a:solidFill>
                   <a:srgbClr val="475569"/>
                 </a:solidFill>
@@ -15564,9 +16192,13 @@
             </a:r>
           </a:p>
           <a:p>
-            <a:pPr algn="l"/>
-            <a:r>
-              <a:rPr sz="1400" b="0">
+            <a:pPr algn="l">
+              <a:spcAft>
+                <a:spcPts val="200"/>
+              </a:spcAft>
+            </a:pPr>
+            <a:r>
+              <a:rPr sz="1300" b="0">
                 <a:solidFill>
                   <a:srgbClr val="475569"/>
                 </a:solidFill>
@@ -15575,7 +16207,7 @@
               <a:t>•  Stability set by Goldschmidt tolerance factor t = (r</a:t>
             </a:r>
             <a:r>
-              <a:rPr sz="1400" b="0" baseline="-25000">
+              <a:rPr sz="1300" b="0" baseline="-25000">
                 <a:solidFill>
                   <a:srgbClr val="475569"/>
                 </a:solidFill>
@@ -15584,7 +16216,7 @@
               <a:t>A</a:t>
             </a:r>
             <a:r>
-              <a:rPr sz="1400" b="0">
+              <a:rPr sz="1300" b="0">
                 <a:solidFill>
                   <a:srgbClr val="475569"/>
                 </a:solidFill>
@@ -15593,7 +16225,7 @@
               <a:t> + r</a:t>
             </a:r>
             <a:r>
-              <a:rPr sz="1400" b="0" baseline="-25000">
+              <a:rPr sz="1300" b="0" baseline="-25000">
                 <a:solidFill>
                   <a:srgbClr val="475569"/>
                 </a:solidFill>
@@ -15602,7 +16234,7 @@
               <a:t>X</a:t>
             </a:r>
             <a:r>
-              <a:rPr sz="1400" b="0">
+              <a:rPr sz="1300" b="0">
                 <a:solidFill>
                   <a:srgbClr val="475569"/>
                 </a:solidFill>
@@ -15611,7 +16243,7 @@
               <a:t>) / (√2 (r</a:t>
             </a:r>
             <a:r>
-              <a:rPr sz="1400" b="0" baseline="-25000">
+              <a:rPr sz="1300" b="0" baseline="-25000">
                 <a:solidFill>
                   <a:srgbClr val="475569"/>
                 </a:solidFill>
@@ -15620,7 +16252,7 @@
               <a:t>B</a:t>
             </a:r>
             <a:r>
-              <a:rPr sz="1400" b="0">
+              <a:rPr sz="1300" b="0">
                 <a:solidFill>
                   <a:srgbClr val="475569"/>
                 </a:solidFill>
@@ -15629,7 +16261,7 @@
               <a:t> + r</a:t>
             </a:r>
             <a:r>
-              <a:rPr sz="1400" b="0" baseline="-25000">
+              <a:rPr sz="1300" b="0" baseline="-25000">
                 <a:solidFill>
                   <a:srgbClr val="475569"/>
                 </a:solidFill>
@@ -15638,7 +16270,7 @@
               <a:t>X</a:t>
             </a:r>
             <a:r>
-              <a:rPr sz="1400" b="0">
+              <a:rPr sz="1300" b="0">
                 <a:solidFill>
                   <a:srgbClr val="475569"/>
                 </a:solidFill>
@@ -15648,9 +16280,13 @@
             </a:r>
           </a:p>
           <a:p>
-            <a:pPr algn="l"/>
-            <a:r>
-              <a:rPr sz="1400" b="0">
+            <a:pPr algn="l">
+              <a:spcAft>
+                <a:spcPts val="200"/>
+              </a:spcAft>
+            </a:pPr>
+            <a:r>
+              <a:rPr sz="1300" b="0">
                 <a:solidFill>
                   <a:srgbClr val="475569"/>
                 </a:solidFill>
@@ -15659,7 +16295,7 @@
               <a:t>•  Direct band gap, strong absorption (α ≈ 10</a:t>
             </a:r>
             <a:r>
-              <a:rPr sz="1400" b="0" baseline="30000">
+              <a:rPr sz="1300" b="0" baseline="30000">
                 <a:solidFill>
                   <a:srgbClr val="475569"/>
                 </a:solidFill>
@@ -15668,7 +16304,7 @@
               <a:t>5</a:t>
             </a:r>
             <a:r>
-              <a:rPr sz="1400" b="0">
+              <a:rPr sz="1300" b="0">
                 <a:solidFill>
                   <a:srgbClr val="475569"/>
                 </a:solidFill>
@@ -15677,7 +16313,7 @@
               <a:t> cm</a:t>
             </a:r>
             <a:r>
-              <a:rPr sz="1400" b="0" baseline="30000">
+              <a:rPr sz="1300" b="0" baseline="30000">
                 <a:solidFill>
                   <a:srgbClr val="475569"/>
                 </a:solidFill>
@@ -15686,7 +16322,7 @@
               <a:t>−1</a:t>
             </a:r>
             <a:r>
-              <a:rPr sz="1400" b="0">
+              <a:rPr sz="1300" b="0">
                 <a:solidFill>
                   <a:srgbClr val="475569"/>
                 </a:solidFill>
@@ -15696,9 +16332,13 @@
             </a:r>
           </a:p>
           <a:p>
-            <a:pPr algn="l"/>
-            <a:r>
-              <a:rPr sz="1400" b="0">
+            <a:pPr algn="l">
+              <a:spcAft>
+                <a:spcPts val="200"/>
+              </a:spcAft>
+            </a:pPr>
+            <a:r>
+              <a:rPr sz="1300" b="0">
                 <a:solidFill>
                   <a:srgbClr val="475569"/>
                 </a:solidFill>
@@ -15708,9 +16348,13 @@
             </a:r>
           </a:p>
           <a:p>
-            <a:pPr algn="l"/>
-            <a:r>
-              <a:rPr sz="1400" b="0">
+            <a:pPr algn="l">
+              <a:spcAft>
+                <a:spcPts val="200"/>
+              </a:spcAft>
+            </a:pPr>
+            <a:r>
+              <a:rPr sz="1300" b="0">
                 <a:solidFill>
                   <a:srgbClr val="475569"/>
                 </a:solidFill>
@@ -15729,7 +16373,7 @@
         </p:nvSpPr>
         <p:spPr>
           <a:xfrm>
-            <a:off x="6858000" y="4617720"/>
+            <a:off x="6858000" y="4663440"/>
             <a:ext cx="1828800" cy="274320"/>
           </a:xfrm>
           <a:prstGeom prst="rect">
@@ -15852,8 +16496,8 @@
         </p:nvSpPr>
         <p:spPr>
           <a:xfrm>
-            <a:off x="457200" y="731520"/>
-            <a:ext cx="8229600" cy="548640"/>
+            <a:off x="457200" y="640080"/>
+            <a:ext cx="8229600" cy="640080"/>
           </a:xfrm>
           <a:prstGeom prst="rect">
             <a:avLst/>
@@ -15868,7 +16512,7 @@
           <a:p>
             <a:pPr algn="l"/>
             <a:r>
-              <a:rPr sz="2800" b="1">
+              <a:rPr sz="2200" b="1">
                 <a:solidFill>
                   <a:srgbClr val="1C2533"/>
                 </a:solidFill>
@@ -15887,8 +16531,8 @@
         </p:nvSpPr>
         <p:spPr>
           <a:xfrm>
-            <a:off x="457200" y="1280160"/>
-            <a:ext cx="8229600" cy="365760"/>
+            <a:off x="457200" y="1325880"/>
+            <a:ext cx="8229600" cy="411480"/>
           </a:xfrm>
           <a:prstGeom prst="rect">
             <a:avLst/>
@@ -15903,7 +16547,7 @@
           <a:p>
             <a:pPr algn="l"/>
             <a:r>
-              <a:rPr sz="1600" b="0">
+              <a:rPr sz="1500" b="0">
                 <a:solidFill>
                   <a:srgbClr val="475569"/>
                 </a:solidFill>
@@ -15923,22 +16567,26 @@
         <p:spPr>
           <a:xfrm>
             <a:off x="457200" y="1828800"/>
-            <a:ext cx="8229600" cy="2926080"/>
-          </a:xfrm>
-          <a:prstGeom prst="rect">
-            <a:avLst/>
-          </a:prstGeom>
-          <a:noFill/>
-        </p:spPr>
-        <p:txBody>
-          <a:bodyPr wrap="square">
-            <a:spAutoFit/>
-          </a:bodyPr>
-          <a:lstStyle/>
-          <a:p>
-            <a:pPr algn="l"/>
-            <a:r>
-              <a:rPr sz="1400" b="0">
+            <a:ext cx="8229600" cy="2743200"/>
+          </a:xfrm>
+          <a:prstGeom prst="rect">
+            <a:avLst/>
+          </a:prstGeom>
+          <a:noFill/>
+        </p:spPr>
+        <p:txBody>
+          <a:bodyPr wrap="square">
+            <a:spAutoFit/>
+          </a:bodyPr>
+          <a:lstStyle/>
+          <a:p>
+            <a:pPr algn="l">
+              <a:spcAft>
+                <a:spcPts val="200"/>
+              </a:spcAft>
+            </a:pPr>
+            <a:r>
+              <a:rPr sz="1300" b="0">
                 <a:solidFill>
                   <a:srgbClr val="475569"/>
                 </a:solidFill>
@@ -15948,9 +16596,13 @@
             </a:r>
           </a:p>
           <a:p>
-            <a:pPr algn="l"/>
-            <a:r>
-              <a:rPr sz="1400" b="0">
+            <a:pPr algn="l">
+              <a:spcAft>
+                <a:spcPts val="200"/>
+              </a:spcAft>
+            </a:pPr>
+            <a:r>
+              <a:rPr sz="1300" b="0">
                 <a:solidFill>
                   <a:srgbClr val="475569"/>
                 </a:solidFill>
@@ -15960,9 +16612,13 @@
             </a:r>
           </a:p>
           <a:p>
-            <a:pPr algn="l"/>
-            <a:r>
-              <a:rPr sz="1400" b="0">
+            <a:pPr algn="l">
+              <a:spcAft>
+                <a:spcPts val="200"/>
+              </a:spcAft>
+            </a:pPr>
+            <a:r>
+              <a:rPr sz="1300" b="0">
                 <a:solidFill>
                   <a:srgbClr val="475569"/>
                 </a:solidFill>
@@ -15971,7 +16627,7 @@
               <a:t>•  Stability gap remains </a:t>
             </a:r>
             <a:r>
-              <a:rPr sz="1400" b="0" baseline="30000">
+              <a:rPr sz="1300" b="0" baseline="30000">
                 <a:solidFill>
                   <a:srgbClr val="475569"/>
                 </a:solidFill>
@@ -15980,7 +16636,7 @@
               <a:t>&gt;</a:t>
             </a:r>
             <a:r>
-              <a:rPr sz="1400" b="0">
+              <a:rPr sz="1300" b="0">
                 <a:solidFill>
                   <a:srgbClr val="475569"/>
                 </a:solidFill>
@@ -15990,9 +16646,13 @@
             </a:r>
           </a:p>
           <a:p>
-            <a:pPr algn="l"/>
-            <a:r>
-              <a:rPr sz="1400" b="0">
+            <a:pPr algn="l">
+              <a:spcAft>
+                <a:spcPts val="200"/>
+              </a:spcAft>
+            </a:pPr>
+            <a:r>
+              <a:rPr sz="1300" b="0">
                 <a:solidFill>
                   <a:srgbClr val="475569"/>
                 </a:solidFill>
@@ -16002,9 +16662,13 @@
             </a:r>
           </a:p>
           <a:p>
-            <a:pPr algn="l"/>
-            <a:r>
-              <a:rPr sz="1400" b="0">
+            <a:pPr algn="l">
+              <a:spcAft>
+                <a:spcPts val="200"/>
+              </a:spcAft>
+            </a:pPr>
+            <a:r>
+              <a:rPr sz="1300" b="0">
                 <a:solidFill>
                   <a:srgbClr val="475569"/>
                 </a:solidFill>
@@ -16014,9 +16678,13 @@
             </a:r>
           </a:p>
           <a:p>
-            <a:pPr algn="l"/>
-            <a:r>
-              <a:rPr sz="1400" b="0">
+            <a:pPr algn="l">
+              <a:spcAft>
+                <a:spcPts val="200"/>
+              </a:spcAft>
+            </a:pPr>
+            <a:r>
+              <a:rPr sz="1300" b="0">
                 <a:solidFill>
                   <a:srgbClr val="475569"/>
                 </a:solidFill>
@@ -16035,7 +16703,7 @@
         </p:nvSpPr>
         <p:spPr>
           <a:xfrm>
-            <a:off x="6858000" y="4617720"/>
+            <a:off x="6858000" y="4663440"/>
             <a:ext cx="1828800" cy="274320"/>
           </a:xfrm>
           <a:prstGeom prst="rect">
@@ -16158,8 +16826,8 @@
         </p:nvSpPr>
         <p:spPr>
           <a:xfrm>
-            <a:off x="457200" y="731520"/>
-            <a:ext cx="8229600" cy="548640"/>
+            <a:off x="457200" y="640080"/>
+            <a:ext cx="8229600" cy="640080"/>
           </a:xfrm>
           <a:prstGeom prst="rect">
             <a:avLst/>
@@ -16174,7 +16842,7 @@
           <a:p>
             <a:pPr algn="l"/>
             <a:r>
-              <a:rPr sz="2800" b="1">
+              <a:rPr sz="2200" b="1">
                 <a:solidFill>
                   <a:srgbClr val="1C2533"/>
                 </a:solidFill>
@@ -16193,8 +16861,8 @@
         </p:nvSpPr>
         <p:spPr>
           <a:xfrm>
-            <a:off x="457200" y="1280160"/>
-            <a:ext cx="8229600" cy="365760"/>
+            <a:off x="457200" y="1325880"/>
+            <a:ext cx="8229600" cy="411480"/>
           </a:xfrm>
           <a:prstGeom prst="rect">
             <a:avLst/>
@@ -16209,7 +16877,7 @@
           <a:p>
             <a:pPr algn="l"/>
             <a:r>
-              <a:rPr sz="1600" b="0">
+              <a:rPr sz="1500" b="0">
                 <a:solidFill>
                   <a:srgbClr val="475569"/>
                 </a:solidFill>
@@ -16236,8 +16904,8 @@
         </p:blipFill>
         <p:spPr>
           <a:xfrm>
-            <a:off x="457200" y="1903094"/>
-            <a:ext cx="4937760" cy="2777490"/>
+            <a:off x="487680" y="1828800"/>
+            <a:ext cx="4876800" cy="2743200"/>
           </a:xfrm>
           <a:prstGeom prst="rect">
             <a:avLst/>
@@ -16253,22 +16921,26 @@
         <p:spPr>
           <a:xfrm>
             <a:off x="5669280" y="1828800"/>
-            <a:ext cx="3017520" cy="2926080"/>
-          </a:xfrm>
-          <a:prstGeom prst="rect">
-            <a:avLst/>
-          </a:prstGeom>
-          <a:noFill/>
-        </p:spPr>
-        <p:txBody>
-          <a:bodyPr wrap="square">
-            <a:spAutoFit/>
-          </a:bodyPr>
-          <a:lstStyle/>
-          <a:p>
-            <a:pPr algn="l"/>
-            <a:r>
-              <a:rPr sz="1400" b="0">
+            <a:ext cx="3017520" cy="2743200"/>
+          </a:xfrm>
+          <a:prstGeom prst="rect">
+            <a:avLst/>
+          </a:prstGeom>
+          <a:noFill/>
+        </p:spPr>
+        <p:txBody>
+          <a:bodyPr wrap="square">
+            <a:spAutoFit/>
+          </a:bodyPr>
+          <a:lstStyle/>
+          <a:p>
+            <a:pPr algn="l">
+              <a:spcAft>
+                <a:spcPts val="200"/>
+              </a:spcAft>
+            </a:pPr>
+            <a:r>
+              <a:rPr sz="1300" b="0">
                 <a:solidFill>
                   <a:srgbClr val="475569"/>
                 </a:solidFill>
@@ -16278,9 +16950,13 @@
             </a:r>
           </a:p>
           <a:p>
-            <a:pPr algn="l"/>
-            <a:r>
-              <a:rPr sz="1400" b="0">
+            <a:pPr algn="l">
+              <a:spcAft>
+                <a:spcPts val="200"/>
+              </a:spcAft>
+            </a:pPr>
+            <a:r>
+              <a:rPr sz="1300" b="0">
                 <a:solidFill>
                   <a:srgbClr val="475569"/>
                 </a:solidFill>
@@ -16290,9 +16966,13 @@
             </a:r>
           </a:p>
           <a:p>
-            <a:pPr algn="l"/>
-            <a:r>
-              <a:rPr sz="1400" b="0">
+            <a:pPr algn="l">
+              <a:spcAft>
+                <a:spcPts val="200"/>
+              </a:spcAft>
+            </a:pPr>
+            <a:r>
+              <a:rPr sz="1300" b="0">
                 <a:solidFill>
                   <a:srgbClr val="475569"/>
                 </a:solidFill>
@@ -16302,9 +16982,13 @@
             </a:r>
           </a:p>
           <a:p>
-            <a:pPr algn="l"/>
-            <a:r>
-              <a:rPr sz="1400" b="0">
+            <a:pPr algn="l">
+              <a:spcAft>
+                <a:spcPts val="200"/>
+              </a:spcAft>
+            </a:pPr>
+            <a:r>
+              <a:rPr sz="1300" b="0">
                 <a:solidFill>
                   <a:srgbClr val="475569"/>
                 </a:solidFill>
@@ -16314,9 +16998,13 @@
             </a:r>
           </a:p>
           <a:p>
-            <a:pPr algn="l"/>
-            <a:r>
-              <a:rPr sz="1400" b="0">
+            <a:pPr algn="l">
+              <a:spcAft>
+                <a:spcPts val="200"/>
+              </a:spcAft>
+            </a:pPr>
+            <a:r>
+              <a:rPr sz="1300" b="0">
                 <a:solidFill>
                   <a:srgbClr val="475569"/>
                 </a:solidFill>
@@ -16326,9 +17014,13 @@
             </a:r>
           </a:p>
           <a:p>
-            <a:pPr algn="l"/>
-            <a:r>
-              <a:rPr sz="1400" b="0">
+            <a:pPr algn="l">
+              <a:spcAft>
+                <a:spcPts val="200"/>
+              </a:spcAft>
+            </a:pPr>
+            <a:r>
+              <a:rPr sz="1300" b="0">
                 <a:solidFill>
                   <a:srgbClr val="475569"/>
                 </a:solidFill>
@@ -16347,7 +17039,7 @@
         </p:nvSpPr>
         <p:spPr>
           <a:xfrm>
-            <a:off x="6858000" y="4617720"/>
+            <a:off x="6858000" y="4663440"/>
             <a:ext cx="1828800" cy="274320"/>
           </a:xfrm>
           <a:prstGeom prst="rect">
@@ -16601,8 +17293,8 @@
         </p:nvSpPr>
         <p:spPr>
           <a:xfrm>
-            <a:off x="457200" y="731520"/>
-            <a:ext cx="8229600" cy="548640"/>
+            <a:off x="457200" y="640080"/>
+            <a:ext cx="8229600" cy="640080"/>
           </a:xfrm>
           <a:prstGeom prst="rect">
             <a:avLst/>
@@ -16617,7 +17309,7 @@
           <a:p>
             <a:pPr algn="l"/>
             <a:r>
-              <a:rPr sz="2800" b="1">
+              <a:rPr sz="2200" b="1">
                 <a:solidFill>
                   <a:srgbClr val="1C2533"/>
                 </a:solidFill>
@@ -16636,8 +17328,8 @@
         </p:nvSpPr>
         <p:spPr>
           <a:xfrm>
-            <a:off x="457200" y="1280160"/>
-            <a:ext cx="8229600" cy="365760"/>
+            <a:off x="457200" y="1325880"/>
+            <a:ext cx="8229600" cy="411480"/>
           </a:xfrm>
           <a:prstGeom prst="rect">
             <a:avLst/>
@@ -16652,7 +17344,7 @@
           <a:p>
             <a:pPr algn="l"/>
             <a:r>
-              <a:rPr sz="1600" b="0">
+              <a:rPr sz="1500" b="0">
                 <a:solidFill>
                   <a:srgbClr val="475569"/>
                 </a:solidFill>
@@ -16661,7 +17353,7 @@
               <a:t>AB</a:t>
             </a:r>
             <a:r>
-              <a:rPr sz="1600" b="0" baseline="-25000">
+              <a:rPr sz="1500" b="0" baseline="-25000">
                 <a:solidFill>
                   <a:srgbClr val="475569"/>
                 </a:solidFill>
@@ -16670,7 +17362,7 @@
               <a:t>2</a:t>
             </a:r>
             <a:r>
-              <a:rPr sz="1600" b="0">
+              <a:rPr sz="1500" b="0">
                 <a:solidFill>
                   <a:srgbClr val="475569"/>
                 </a:solidFill>
@@ -16679,7 +17371,7 @@
               <a:t>C</a:t>
             </a:r>
             <a:r>
-              <a:rPr sz="1600" b="0" baseline="-25000">
+              <a:rPr sz="1500" b="0" baseline="-25000">
                 <a:solidFill>
                   <a:srgbClr val="475569"/>
                 </a:solidFill>
@@ -16688,7 +17380,7 @@
               <a:t>4</a:t>
             </a:r>
             <a:r>
-              <a:rPr sz="1600" b="0">
+              <a:rPr sz="1500" b="0">
                 <a:solidFill>
                   <a:srgbClr val="475569"/>
                 </a:solidFill>
@@ -16697,7 +17389,7 @@
               <a:t> and ABC</a:t>
             </a:r>
             <a:r>
-              <a:rPr sz="1600" b="0" baseline="-25000">
+              <a:rPr sz="1500" b="0" baseline="-25000">
                 <a:solidFill>
                   <a:srgbClr val="475569"/>
                 </a:solidFill>
@@ -16706,7 +17398,7 @@
               <a:t>3</a:t>
             </a:r>
             <a:r>
-              <a:rPr sz="1600" b="0">
+              <a:rPr sz="1500" b="0">
                 <a:solidFill>
                   <a:srgbClr val="475569"/>
                 </a:solidFill>
@@ -16726,22 +17418,26 @@
         <p:spPr>
           <a:xfrm>
             <a:off x="457200" y="1828800"/>
-            <a:ext cx="8229600" cy="2926080"/>
-          </a:xfrm>
-          <a:prstGeom prst="rect">
-            <a:avLst/>
-          </a:prstGeom>
-          <a:noFill/>
-        </p:spPr>
-        <p:txBody>
-          <a:bodyPr wrap="square">
-            <a:spAutoFit/>
-          </a:bodyPr>
-          <a:lstStyle/>
-          <a:p>
-            <a:pPr algn="l"/>
-            <a:r>
-              <a:rPr sz="1400" b="0">
+            <a:ext cx="8229600" cy="2743200"/>
+          </a:xfrm>
+          <a:prstGeom prst="rect">
+            <a:avLst/>
+          </a:prstGeom>
+          <a:noFill/>
+        </p:spPr>
+        <p:txBody>
+          <a:bodyPr wrap="square">
+            <a:spAutoFit/>
+          </a:bodyPr>
+          <a:lstStyle/>
+          <a:p>
+            <a:pPr algn="l">
+              <a:spcAft>
+                <a:spcPts val="200"/>
+              </a:spcAft>
+            </a:pPr>
+            <a:r>
+              <a:rPr sz="1300" b="0">
                 <a:solidFill>
                   <a:srgbClr val="475569"/>
                 </a:solidFill>
@@ -16751,9 +17447,13 @@
             </a:r>
           </a:p>
           <a:p>
-            <a:pPr algn="l"/>
-            <a:r>
-              <a:rPr sz="1400" b="0">
+            <a:pPr algn="l">
+              <a:spcAft>
+                <a:spcPts val="200"/>
+              </a:spcAft>
+            </a:pPr>
+            <a:r>
+              <a:rPr sz="1300" b="0">
                 <a:solidFill>
                   <a:srgbClr val="475569"/>
                 </a:solidFill>
@@ -16762,7 +17462,7 @@
               <a:t>•  Active cation: Sb, Sn, Bi (6s</a:t>
             </a:r>
             <a:r>
-              <a:rPr sz="1400" b="0" baseline="30000">
+              <a:rPr sz="1300" b="0" baseline="30000">
                 <a:solidFill>
                   <a:srgbClr val="475569"/>
                 </a:solidFill>
@@ -16771,7 +17471,7 @@
               <a:t>2</a:t>
             </a:r>
             <a:r>
-              <a:rPr sz="1400" b="0">
+              <a:rPr sz="1300" b="0">
                 <a:solidFill>
                   <a:srgbClr val="475569"/>
                 </a:solidFill>
@@ -16780,7 +17480,7 @@
               <a:t> / 5s</a:t>
             </a:r>
             <a:r>
-              <a:rPr sz="1400" b="0" baseline="30000">
+              <a:rPr sz="1300" b="0" baseline="30000">
                 <a:solidFill>
                   <a:srgbClr val="475569"/>
                 </a:solidFill>
@@ -16789,7 +17489,7 @@
               <a:t>2</a:t>
             </a:r>
             <a:r>
-              <a:rPr sz="1400" b="0">
+              <a:rPr sz="1300" b="0">
                 <a:solidFill>
                   <a:srgbClr val="475569"/>
                 </a:solidFill>
@@ -16799,9 +17499,13 @@
             </a:r>
           </a:p>
           <a:p>
-            <a:pPr algn="l"/>
-            <a:r>
-              <a:rPr sz="1400" b="0">
+            <a:pPr algn="l">
+              <a:spcAft>
+                <a:spcPts val="200"/>
+              </a:spcAft>
+            </a:pPr>
+            <a:r>
+              <a:rPr sz="1300" b="0">
                 <a:solidFill>
                   <a:srgbClr val="475569"/>
                 </a:solidFill>
@@ -16811,9 +17515,13 @@
             </a:r>
           </a:p>
           <a:p>
-            <a:pPr algn="l"/>
-            <a:r>
-              <a:rPr sz="1400" b="0">
+            <a:pPr algn="l">
+              <a:spcAft>
+                <a:spcPts val="200"/>
+              </a:spcAft>
+            </a:pPr>
+            <a:r>
+              <a:rPr sz="1300" b="0">
                 <a:solidFill>
                   <a:srgbClr val="475569"/>
                 </a:solidFill>
@@ -16822,7 +17530,7 @@
               <a:t>•  Stoichiometry preference: AB</a:t>
             </a:r>
             <a:r>
-              <a:rPr sz="1400" b="0" baseline="-25000">
+              <a:rPr sz="1300" b="0" baseline="-25000">
                 <a:solidFill>
                   <a:srgbClr val="475569"/>
                 </a:solidFill>
@@ -16831,7 +17539,7 @@
               <a:t>2</a:t>
             </a:r>
             <a:r>
-              <a:rPr sz="1400" b="0">
+              <a:rPr sz="1300" b="0">
                 <a:solidFill>
                   <a:srgbClr val="475569"/>
                 </a:solidFill>
@@ -16840,7 +17548,7 @@
               <a:t>C</a:t>
             </a:r>
             <a:r>
-              <a:rPr sz="1400" b="0" baseline="-25000">
+              <a:rPr sz="1300" b="0" baseline="-25000">
                 <a:solidFill>
                   <a:srgbClr val="475569"/>
                 </a:solidFill>
@@ -16849,7 +17557,7 @@
               <a:t>4</a:t>
             </a:r>
             <a:r>
-              <a:rPr sz="1400" b="0">
+              <a:rPr sz="1300" b="0">
                 <a:solidFill>
                   <a:srgbClr val="475569"/>
                 </a:solidFill>
@@ -16858,7 +17566,7 @@
               <a:t> </a:t>
             </a:r>
             <a:r>
-              <a:rPr sz="1400" b="0" baseline="30000">
+              <a:rPr sz="1300" b="0" baseline="30000">
                 <a:solidFill>
                   <a:srgbClr val="475569"/>
                 </a:solidFill>
@@ -16867,7 +17575,7 @@
               <a:t>≫</a:t>
             </a:r>
             <a:r>
-              <a:rPr sz="1400" b="0">
+              <a:rPr sz="1300" b="0">
                 <a:solidFill>
                   <a:srgbClr val="475569"/>
                 </a:solidFill>
@@ -16876,7 +17584,7 @@
               <a:t> ABC</a:t>
             </a:r>
             <a:r>
-              <a:rPr sz="1400" b="0" baseline="-25000">
+              <a:rPr sz="1300" b="0" baseline="-25000">
                 <a:solidFill>
                   <a:srgbClr val="475569"/>
                 </a:solidFill>
@@ -16885,7 +17593,7 @@
               <a:t>3</a:t>
             </a:r>
             <a:r>
-              <a:rPr sz="1400" b="0">
+              <a:rPr sz="1300" b="0">
                 <a:solidFill>
                   <a:srgbClr val="475569"/>
                 </a:solidFill>
@@ -16894,7 +17602,7 @@
               <a:t> ≈ ABC</a:t>
             </a:r>
             <a:r>
-              <a:rPr sz="1400" b="0" baseline="-25000">
+              <a:rPr sz="1300" b="0" baseline="-25000">
                 <a:solidFill>
                   <a:srgbClr val="475569"/>
                 </a:solidFill>
@@ -16903,7 +17611,7 @@
               <a:t>2</a:t>
             </a:r>
             <a:r>
-              <a:rPr sz="1400" b="0">
+              <a:rPr sz="1300" b="0">
                 <a:solidFill>
                   <a:srgbClr val="475569"/>
                 </a:solidFill>
@@ -16913,9 +17621,13 @@
             </a:r>
           </a:p>
           <a:p>
-            <a:pPr algn="l"/>
-            <a:r>
-              <a:rPr sz="1400" b="0">
+            <a:pPr algn="l">
+              <a:spcAft>
+                <a:spcPts val="200"/>
+              </a:spcAft>
+            </a:pPr>
+            <a:r>
+              <a:rPr sz="1300" b="0">
                 <a:solidFill>
                   <a:srgbClr val="475569"/>
                 </a:solidFill>
@@ -16925,9 +17637,13 @@
             </a:r>
           </a:p>
           <a:p>
-            <a:pPr algn="l"/>
-            <a:r>
-              <a:rPr sz="1400" b="0">
+            <a:pPr algn="l">
+              <a:spcAft>
+                <a:spcPts val="200"/>
+              </a:spcAft>
+            </a:pPr>
+            <a:r>
+              <a:rPr sz="1300" b="0">
                 <a:solidFill>
                   <a:srgbClr val="475569"/>
                 </a:solidFill>
@@ -16936,7 +17652,7 @@
               <a:t>•  Constrains the &gt; 10</a:t>
             </a:r>
             <a:r>
-              <a:rPr sz="1400" b="0" baseline="30000">
+              <a:rPr sz="1300" b="0" baseline="30000">
                 <a:solidFill>
                   <a:srgbClr val="475569"/>
                 </a:solidFill>
@@ -16945,7 +17661,7 @@
               <a:t>5</a:t>
             </a:r>
             <a:r>
-              <a:rPr sz="1400" b="0">
+              <a:rPr sz="1300" b="0">
                 <a:solidFill>
                   <a:srgbClr val="475569"/>
                 </a:solidFill>
@@ -16964,7 +17680,7 @@
         </p:nvSpPr>
         <p:spPr>
           <a:xfrm>
-            <a:off x="6858000" y="4617720"/>
+            <a:off x="6858000" y="4663440"/>
             <a:ext cx="1828800" cy="274320"/>
           </a:xfrm>
           <a:prstGeom prst="rect">

--- a/presentations/jmi-2026/output/jmi-2026.pptx
+++ b/presentations/jmi-2026/output/jmi-2026.pptx
@@ -13243,7 +13243,7 @@
                 </a:solidFill>
                 <a:latin typeface="Arial"/>
               </a:rPr>
-              <a:t>Identical MAPbI</a:t>
+              <a:t>Reference MAPbI</a:t>
             </a:r>
             <a:r>
               <a:rPr sz="1500" b="0" baseline="-25000">
@@ -13261,7 +13261,7 @@
                 </a:solidFill>
                 <a:latin typeface="Arial"/>
               </a:rPr>
-              <a:t> stack: a 50 mV V</a:t>
+              <a:t> stack — 50 mV V</a:t>
             </a:r>
             <a:r>
               <a:rPr sz="1500" b="0" baseline="-25000">
@@ -13279,7 +13279,7 @@
                 </a:solidFill>
                 <a:latin typeface="Arial"/>
               </a:rPr>
-              <a:t> reduction in 2D attributable to grain-boundary recombination</a:t>
+              <a:t> reduction in 2D from grain-boundary recombination</a:t>
             </a:r>
           </a:p>
         </p:txBody>
@@ -13300,8 +13300,8 @@
         </p:blipFill>
         <p:spPr>
           <a:xfrm>
-            <a:off x="476794" y="1828800"/>
-            <a:ext cx="4898571" cy="2743200"/>
+            <a:off x="457200" y="2257736"/>
+            <a:ext cx="4937760" cy="1885326"/>
           </a:xfrm>
           <a:prstGeom prst="rect">
             <a:avLst/>
@@ -13342,7 +13342,43 @@
                 </a:solidFill>
                 <a:latin typeface="Arial"/>
               </a:rPr>
-              <a:t>•  Identical layer stack and material parameters in both solvers</a:t>
+              <a:t>•  Stack: spiro HTL 200 nm / MAPbI</a:t>
+            </a:r>
+            <a:r>
+              <a:rPr sz="1300" b="0" baseline="-25000">
+                <a:solidFill>
+                  <a:srgbClr val="475569"/>
+                </a:solidFill>
+                <a:latin typeface="Arial"/>
+              </a:rPr>
+              <a:t>3</a:t>
+            </a:r>
+            <a:r>
+              <a:rPr sz="1300" b="0">
+                <a:solidFill>
+                  <a:srgbClr val="475569"/>
+                </a:solidFill>
+                <a:latin typeface="Arial"/>
+              </a:rPr>
+              <a:t> 400 nm / TiO</a:t>
+            </a:r>
+            <a:r>
+              <a:rPr sz="1300" b="0" baseline="-25000">
+                <a:solidFill>
+                  <a:srgbClr val="475569"/>
+                </a:solidFill>
+                <a:latin typeface="Arial"/>
+              </a:rPr>
+              <a:t>2</a:t>
+            </a:r>
+            <a:r>
+              <a:rPr sz="1300" b="0">
+                <a:solidFill>
+                  <a:srgbClr val="475569"/>
+                </a:solidFill>
+                <a:latin typeface="Arial"/>
+              </a:rPr>
+              <a:t> ETL 100 nm with selective Robin contacts</a:t>
             </a:r>
           </a:p>
           <a:p>
@@ -13358,43 +13394,7 @@
                 </a:solidFill>
                 <a:latin typeface="Arial"/>
               </a:rPr>
-              <a:t>•  1D V</a:t>
-            </a:r>
-            <a:r>
-              <a:rPr sz="1300" b="0" baseline="-25000">
-                <a:solidFill>
-                  <a:srgbClr val="475569"/>
-                </a:solidFill>
-                <a:latin typeface="Arial"/>
-              </a:rPr>
-              <a:t>oc</a:t>
-            </a:r>
-            <a:r>
-              <a:rPr sz="1300" b="0">
-                <a:solidFill>
-                  <a:srgbClr val="475569"/>
-                </a:solidFill>
-                <a:latin typeface="Arial"/>
-              </a:rPr>
-              <a:t> = 0.910 V is reduced to 2D V</a:t>
-            </a:r>
-            <a:r>
-              <a:rPr sz="1300" b="0" baseline="-25000">
-                <a:solidFill>
-                  <a:srgbClr val="475569"/>
-                </a:solidFill>
-                <a:latin typeface="Arial"/>
-              </a:rPr>
-              <a:t>oc</a:t>
-            </a:r>
-            <a:r>
-              <a:rPr sz="1300" b="0">
-                <a:solidFill>
-                  <a:srgbClr val="475569"/>
-                </a:solidFill>
-                <a:latin typeface="Arial"/>
-              </a:rPr>
-              <a:t> = 0.860 V</a:t>
+              <a:t>•  2D variant: a single vertical grain boundary at the lateral midplane of the absorber</a:t>
             </a:r>
           </a:p>
           <a:p>
@@ -13410,7 +13410,61 @@
                 </a:solidFill>
                 <a:latin typeface="Arial"/>
               </a:rPr>
-              <a:t>•  The 50 mV reduction reflects the grain-boundary recombination channel resolved only in 2D</a:t>
+              <a:t>•  1D V</a:t>
+            </a:r>
+            <a:r>
+              <a:rPr sz="1300" b="0" baseline="-25000">
+                <a:solidFill>
+                  <a:srgbClr val="475569"/>
+                </a:solidFill>
+                <a:latin typeface="Arial"/>
+              </a:rPr>
+              <a:t>oc</a:t>
+            </a:r>
+            <a:r>
+              <a:rPr sz="1300" b="0">
+                <a:solidFill>
+                  <a:srgbClr val="475569"/>
+                </a:solidFill>
+                <a:latin typeface="Arial"/>
+              </a:rPr>
+              <a:t> = 0.910 V is reduced to 2D V</a:t>
+            </a:r>
+            <a:r>
+              <a:rPr sz="1300" b="0" baseline="-25000">
+                <a:solidFill>
+                  <a:srgbClr val="475569"/>
+                </a:solidFill>
+                <a:latin typeface="Arial"/>
+              </a:rPr>
+              <a:t>oc</a:t>
+            </a:r>
+            <a:r>
+              <a:rPr sz="1300" b="0">
+                <a:solidFill>
+                  <a:srgbClr val="475569"/>
+                </a:solidFill>
+                <a:latin typeface="Arial"/>
+              </a:rPr>
+              <a:t> = 0.860 V (ΔV</a:t>
+            </a:r>
+            <a:r>
+              <a:rPr sz="1300" b="0" baseline="-25000">
+                <a:solidFill>
+                  <a:srgbClr val="475569"/>
+                </a:solidFill>
+                <a:latin typeface="Arial"/>
+              </a:rPr>
+              <a:t>oc</a:t>
+            </a:r>
+            <a:r>
+              <a:rPr sz="1300" b="0">
+                <a:solidFill>
+                  <a:srgbClr val="475569"/>
+                </a:solidFill>
+                <a:latin typeface="Arial"/>
+              </a:rPr>
+              <a:t> = −50 mV)</a:t>
             </a:r>
           </a:p>
           <a:p>
@@ -13426,7 +13480,7 @@
                 </a:solidFill>
                 <a:latin typeface="Arial"/>
               </a:rPr>
-              <a:t>•  1D models would misestimate device performance by omitting this loss channel</a:t>
+              <a:t>•  The reduction is the grain-boundary recombination channel resolved only by the 2D solver</a:t>
             </a:r>
           </a:p>
           <a:p>
@@ -13442,7 +13496,7 @@
                 </a:solidFill>
                 <a:latin typeface="Arial"/>
               </a:rPr>
-              <a:t>•  2D simulation is therefore a prerequisite for quantitatively predicting candidate-material performance</a:t>
+              <a:t>•  1D models would misestimate device performance by omitting this loss channel</a:t>
             </a:r>
           </a:p>
           <a:p>
@@ -13839,8 +13893,8 @@
         </p:blipFill>
         <p:spPr>
           <a:xfrm>
-            <a:off x="476794" y="1828800"/>
-            <a:ext cx="4898571" cy="2743200"/>
+            <a:off x="457200" y="2257736"/>
+            <a:ext cx="4937760" cy="1885326"/>
           </a:xfrm>
           <a:prstGeom prst="rect">
             <a:avLst/>
@@ -13881,7 +13935,7 @@
                 </a:solidFill>
                 <a:latin typeface="Arial"/>
               </a:rPr>
-              <a:t>•  Closes the workflow from a &gt; 10</a:t>
+              <a:t>•  Closes the workflow from &gt; 10</a:t>
             </a:r>
             <a:r>
               <a:rPr sz="1300" b="0" baseline="30000">
@@ -13899,7 +13953,7 @@
                 </a:solidFill>
                 <a:latin typeface="Arial"/>
               </a:rPr>
-              <a:t> candidate database scan to a predicted device-level J–V</a:t>
+              <a:t> database scan to predicted device-level J–V</a:t>
             </a:r>
           </a:p>
           <a:p>
@@ -13915,7 +13969,7 @@
                 </a:solidFill>
                 <a:latin typeface="Arial"/>
               </a:rPr>
-              <a:t>•  Current curve uses a placeholder candidate (MAPbI</a:t>
+              <a:t>•  Stack: same spiro HTL / MAPbI</a:t>
             </a:r>
             <a:r>
               <a:rPr sz="1300" b="0" baseline="-25000">
@@ -13933,7 +13987,7 @@
                 </a:solidFill>
                 <a:latin typeface="Arial"/>
               </a:rPr>
-              <a:t> baseline with V</a:t>
+              <a:t> / TiO</a:t>
             </a:r>
             <a:r>
               <a:rPr sz="1300" b="0" baseline="-25000">
@@ -13942,16 +13996,16 @@
                 </a:solidFill>
                 <a:latin typeface="Arial"/>
               </a:rPr>
-              <a:t>oc</a:t>
-            </a:r>
-            <a:r>
-              <a:rPr sz="1300" b="0">
-                <a:solidFill>
-                  <a:srgbClr val="475569"/>
-                </a:solidFill>
-                <a:latin typeface="Arial"/>
-              </a:rPr>
-              <a:t> shifted by +30 mV)</a:t>
+              <a:t>2</a:t>
+            </a:r>
+            <a:r>
+              <a:rPr sz="1300" b="0">
+                <a:solidFill>
+                  <a:srgbClr val="475569"/>
+                </a:solidFill>
+                <a:latin typeface="Arial"/>
+              </a:rPr>
+              <a:t> ETL reference as the 1D-vs-2D run</a:t>
             </a:r>
           </a:p>
           <a:p>
@@ -13967,7 +14021,7 @@
                 </a:solidFill>
                 <a:latin typeface="Arial"/>
               </a:rPr>
-              <a:t>•  The Se</a:t>
+              <a:t>•  Placeholder candidate: MAPbI</a:t>
             </a:r>
             <a:r>
               <a:rPr sz="1300" b="0" baseline="-25000">
@@ -13976,16 +14030,16 @@
                 </a:solidFill>
                 <a:latin typeface="Arial"/>
               </a:rPr>
-              <a:t>16</a:t>
-            </a:r>
-            <a:r>
-              <a:rPr sz="1300" b="0">
-                <a:solidFill>
-                  <a:srgbClr val="475569"/>
-                </a:solidFill>
-                <a:latin typeface="Arial"/>
-              </a:rPr>
-              <a:t>Sn</a:t>
+              <a:t>3</a:t>
+            </a:r>
+            <a:r>
+              <a:rPr sz="1300" b="0">
+                <a:solidFill>
+                  <a:srgbClr val="475569"/>
+                </a:solidFill>
+                <a:latin typeface="Arial"/>
+              </a:rPr>
+              <a:t> baseline with V</a:t>
             </a:r>
             <a:r>
               <a:rPr sz="1300" b="0" baseline="-25000">
@@ -13994,34 +14048,16 @@
                 </a:solidFill>
                 <a:latin typeface="Arial"/>
               </a:rPr>
-              <a:t>8</a:t>
-            </a:r>
-            <a:r>
-              <a:rPr sz="1300" b="0">
-                <a:solidFill>
-                  <a:srgbClr val="475569"/>
-                </a:solidFill>
-                <a:latin typeface="Arial"/>
-              </a:rPr>
-              <a:t>Zr</a:t>
-            </a:r>
-            <a:r>
-              <a:rPr sz="1300" b="0" baseline="-25000">
-                <a:solidFill>
-                  <a:srgbClr val="475569"/>
-                </a:solidFill>
-                <a:latin typeface="Arial"/>
-              </a:rPr>
-              <a:t>4</a:t>
-            </a:r>
-            <a:r>
-              <a:rPr sz="1300" b="0">
-                <a:solidFill>
-                  <a:srgbClr val="475569"/>
-                </a:solidFill>
-                <a:latin typeface="Arial"/>
-              </a:rPr>
-              <a:t> J–V will replace the placeholder once n, k data and DFT-derived parameters are integrated into the 2D solver</a:t>
+              <a:t>oc</a:t>
+            </a:r>
+            <a:r>
+              <a:rPr sz="1300" b="0">
+                <a:solidFill>
+                  <a:srgbClr val="475569"/>
+                </a:solidFill>
+                <a:latin typeface="Arial"/>
+              </a:rPr>
+              <a:t> shifted by +30 mV (~candidate-gap surrogate)</a:t>
             </a:r>
           </a:p>
           <a:p>
@@ -14037,7 +14073,77 @@
                 </a:solidFill>
                 <a:latin typeface="Arial"/>
               </a:rPr>
-              <a:t>•  Predicted device-level PCE is the figure of merit relevant for synthesis decisions</a:t>
+              <a:t>•  Real Se</a:t>
+            </a:r>
+            <a:r>
+              <a:rPr sz="1300" b="0" baseline="-25000">
+                <a:solidFill>
+                  <a:srgbClr val="475569"/>
+                </a:solidFill>
+                <a:latin typeface="Arial"/>
+              </a:rPr>
+              <a:t>16</a:t>
+            </a:r>
+            <a:r>
+              <a:rPr sz="1300" b="0">
+                <a:solidFill>
+                  <a:srgbClr val="475569"/>
+                </a:solidFill>
+                <a:latin typeface="Arial"/>
+              </a:rPr>
+              <a:t>Sn</a:t>
+            </a:r>
+            <a:r>
+              <a:rPr sz="1300" b="0" baseline="-25000">
+                <a:solidFill>
+                  <a:srgbClr val="475569"/>
+                </a:solidFill>
+                <a:latin typeface="Arial"/>
+              </a:rPr>
+              <a:t>8</a:t>
+            </a:r>
+            <a:r>
+              <a:rPr sz="1300" b="0">
+                <a:solidFill>
+                  <a:srgbClr val="475569"/>
+                </a:solidFill>
+                <a:latin typeface="Arial"/>
+              </a:rPr>
+              <a:t>Zr</a:t>
+            </a:r>
+            <a:r>
+              <a:rPr sz="1300" b="0" baseline="-25000">
+                <a:solidFill>
+                  <a:srgbClr val="475569"/>
+                </a:solidFill>
+                <a:latin typeface="Arial"/>
+              </a:rPr>
+              <a:t>4</a:t>
+            </a:r>
+            <a:r>
+              <a:rPr sz="1300" b="0">
+                <a:solidFill>
+                  <a:srgbClr val="475569"/>
+                </a:solidFill>
+                <a:latin typeface="Arial"/>
+              </a:rPr>
+              <a:t> J–V replaces the placeholder once n, k data and DFT parameters are wired into the 2D solver</a:t>
+            </a:r>
+          </a:p>
+          <a:p>
+            <a:pPr algn="l">
+              <a:spcAft>
+                <a:spcPts val="200"/>
+              </a:spcAft>
+            </a:pPr>
+            <a:r>
+              <a:rPr sz="1300" b="0">
+                <a:solidFill>
+                  <a:srgbClr val="475569"/>
+                </a:solidFill>
+                <a:latin typeface="Arial"/>
+              </a:rPr>
+              <a:t>•  Predicted device PCE is the figure of merit relevant for synthesis decisions</a:t>
             </a:r>
           </a:p>
           <a:p>
